--- a/docs/presentation/SENTRY_SWM2_QA.pptx
+++ b/docs/presentation/SENTRY_SWM2_QA.pptx
@@ -2,21 +2,21 @@
 <file path=ppt/presentation.xml><?xml version="1.0" encoding="utf-8"?>
 <p:presentation xmlns:p="http://schemas.openxmlformats.org/presentationml/2006/main">
   <p:sldMasterIdLst>
-    <p:sldMasterId xmlns:r="http://schemas.openxmlformats.org/officeDocument/2006/relationships" id="2147483648" r:id="Rad759673e5794162"/>
+    <p:sldMasterId xmlns:r="http://schemas.openxmlformats.org/officeDocument/2006/relationships" id="2147483648" r:id="R4f78361e16be495e"/>
   </p:sldMasterIdLst>
   <p:notesMasterIdLst>
-    <p:notesMasterId xmlns:r="http://schemas.openxmlformats.org/officeDocument/2006/relationships" r:id="Ra2558ef0ec7c4fdb"/>
+    <p:notesMasterId xmlns:r="http://schemas.openxmlformats.org/officeDocument/2006/relationships" r:id="R032fea57ab7c4626"/>
   </p:notesMasterIdLst>
   <p:sldIdLst>
-    <p:sldId xmlns:r="http://schemas.openxmlformats.org/officeDocument/2006/relationships" id="256" r:id="Refa86f899e99474d"/>
-    <p:sldId xmlns:r="http://schemas.openxmlformats.org/officeDocument/2006/relationships" id="257" r:id="R726374c3090141f9"/>
-    <p:sldId xmlns:r="http://schemas.openxmlformats.org/officeDocument/2006/relationships" id="258" r:id="R30c21b5f7ff84176"/>
-    <p:sldId xmlns:r="http://schemas.openxmlformats.org/officeDocument/2006/relationships" id="259" r:id="Re56a1158c7ea48dd"/>
-    <p:sldId xmlns:r="http://schemas.openxmlformats.org/officeDocument/2006/relationships" id="260" r:id="R5e2928bb2a1b43f1"/>
-    <p:sldId xmlns:r="http://schemas.openxmlformats.org/officeDocument/2006/relationships" id="261" r:id="R17fa88ae1c2541e0"/>
-    <p:sldId xmlns:r="http://schemas.openxmlformats.org/officeDocument/2006/relationships" id="262" r:id="Rb24bb21004f44282"/>
-    <p:sldId xmlns:r="http://schemas.openxmlformats.org/officeDocument/2006/relationships" id="263" r:id="R848ce12d45224655"/>
-    <p:sldId xmlns:r="http://schemas.openxmlformats.org/officeDocument/2006/relationships" id="264" r:id="Re72a07ec58154054"/>
+    <p:sldId xmlns:r="http://schemas.openxmlformats.org/officeDocument/2006/relationships" id="256" r:id="R8b1e3d91ddd24315"/>
+    <p:sldId xmlns:r="http://schemas.openxmlformats.org/officeDocument/2006/relationships" id="257" r:id="R169136cf44284e12"/>
+    <p:sldId xmlns:r="http://schemas.openxmlformats.org/officeDocument/2006/relationships" id="258" r:id="R0c393d83537a49c8"/>
+    <p:sldId xmlns:r="http://schemas.openxmlformats.org/officeDocument/2006/relationships" id="259" r:id="R032a7b5017ab4ee3"/>
+    <p:sldId xmlns:r="http://schemas.openxmlformats.org/officeDocument/2006/relationships" id="260" r:id="R47caadf81727403a"/>
+    <p:sldId xmlns:r="http://schemas.openxmlformats.org/officeDocument/2006/relationships" id="261" r:id="R94bbdae9bfa947d0"/>
+    <p:sldId xmlns:r="http://schemas.openxmlformats.org/officeDocument/2006/relationships" id="262" r:id="Rdf628b55ec8547f5"/>
+    <p:sldId xmlns:r="http://schemas.openxmlformats.org/officeDocument/2006/relationships" id="263" r:id="R5c23f66bbf5846dc"/>
+    <p:sldId xmlns:r="http://schemas.openxmlformats.org/officeDocument/2006/relationships" id="264" r:id="R4668269245474def"/>
   </p:sldIdLst>
   <p:sldSz cx="12192000" cy="6858000"/>
   <p:notesSz cx="6858000" cy="9144000"/>
@@ -525,6 +525,81 @@
           <a:lstStyle xmlns:a="http://schemas.openxmlformats.org/drawingml/2006/main"/>
           <a:p xmlns:a="http://schemas.openxmlformats.org/drawingml/2006/main">
             <a:r>
+              <a:t>https://github.com/rpozniak/sentry-swm2-qa/blob/main/reference/PRD.md</a:t>
+            </a:r>
+          </a:p>
+          <a:p xmlns:a="http://schemas.openxmlformats.org/drawingml/2006/main">
+            <a:r>
+              <a:t>Фото ESP32-S3 надане користувачем.</a:t>
+            </a:r>
+          </a:p>
+        </p:txBody>
+      </p:sp>
+      <p:sp>
+        <p:nvSpPr>
+          <p:cNvPr id="4" name="Slide Number Placeholder 3"/>
+          <p:cNvSpPr>
+            <a:spLocks xmlns:a="http://schemas.openxmlformats.org/drawingml/2006/main" noGrp="1"/>
+          </p:cNvSpPr>
+          <p:nvPr>
+            <p:ph type="sldNum" idx="5"/>
+          </p:nvPr>
+        </p:nvSpPr>
+        <p:spPr/>
+        <p:txBody>
+          <a:bodyPr xmlns:a="http://schemas.openxmlformats.org/drawingml/2006/main"/>
+          <a:lstStyle xmlns:a="http://schemas.openxmlformats.org/drawingml/2006/main"/>
+          <a:p xmlns:a="http://schemas.openxmlformats.org/drawingml/2006/main"/>
+        </p:txBody>
+      </p:sp>
+    </p:spTree>
+  </p:cSld>
+  <p:clrMapOvr>
+    <a:masterClrMapping xmlns:a="http://schemas.openxmlformats.org/drawingml/2006/main"/>
+  </p:clrMapOvr>
+</p:notes>
+</file>
+
+<file path=ppt/notesSlides/notesSlide3.xml><?xml version="1.0" encoding="utf-8"?>
+<p:notes xmlns:p="http://schemas.openxmlformats.org/presentationml/2006/main">
+  <p:cSld>
+    <p:spTree>
+      <p:nvGrpSpPr>
+        <p:cNvPr id="1" name=""/>
+        <p:cNvGrpSpPr/>
+        <p:nvPr/>
+      </p:nvGrpSpPr>
+      <p:grpSpPr>
+        <a:xfrm xmlns:a="http://schemas.openxmlformats.org/drawingml/2006/main"/>
+      </p:grpSpPr>
+      <p:sp>
+        <p:nvSpPr>
+          <p:cNvPr id="2" name="Slide Image Placeholder 1"/>
+          <p:cNvSpPr>
+            <a:spLocks xmlns:a="http://schemas.openxmlformats.org/drawingml/2006/main" noGrp="1"/>
+          </p:cNvSpPr>
+          <p:nvPr>
+            <p:ph type="sldImg" idx="0"/>
+          </p:nvPr>
+        </p:nvSpPr>
+        <p:spPr/>
+      </p:sp>
+      <p:sp>
+        <p:nvSpPr>
+          <p:cNvPr id="3" name="Notes Placeholder 2"/>
+          <p:cNvSpPr>
+            <a:spLocks xmlns:a="http://schemas.openxmlformats.org/drawingml/2006/main" noGrp="1"/>
+          </p:cNvSpPr>
+          <p:nvPr>
+            <p:ph type="body" idx="1"/>
+          </p:nvPr>
+        </p:nvSpPr>
+        <p:spPr/>
+        <p:txBody>
+          <a:bodyPr xmlns:a="http://schemas.openxmlformats.org/drawingml/2006/main"/>
+          <a:lstStyle xmlns:a="http://schemas.openxmlformats.org/drawingml/2006/main"/>
+          <a:p xmlns:a="http://schemas.openxmlformats.org/drawingml/2006/main">
+            <a:r>
               <a:t>https://github.com/rpozniak/sentry-swm2-qa/blob/main/docs/TEST_PLAN.md</a:t>
             </a:r>
           </a:p>
@@ -565,7 +640,7 @@
 </p:notes>
 </file>
 
-<file path=ppt/notesSlides/notesSlide3.xml><?xml version="1.0" encoding="utf-8"?>
+<file path=ppt/notesSlides/notesSlide4.xml><?xml version="1.0" encoding="utf-8"?>
 <p:notes xmlns:p="http://schemas.openxmlformats.org/presentationml/2006/main">
   <p:cSld>
     <p:spTree>
@@ -645,7 +720,7 @@
 </p:notes>
 </file>
 
-<file path=ppt/notesSlides/notesSlide4.xml><?xml version="1.0" encoding="utf-8"?>
+<file path=ppt/notesSlides/notesSlide5.xml><?xml version="1.0" encoding="utf-8"?>
 <p:notes xmlns:p="http://schemas.openxmlformats.org/presentationml/2006/main">
   <p:cSld>
     <p:spTree>
@@ -720,7 +795,7 @@
 </p:notes>
 </file>
 
-<file path=ppt/notesSlides/notesSlide5.xml><?xml version="1.0" encoding="utf-8"?>
+<file path=ppt/notesSlides/notesSlide6.xml><?xml version="1.0" encoding="utf-8"?>
 <p:notes xmlns:p="http://schemas.openxmlformats.org/presentationml/2006/main">
   <p:cSld>
     <p:spTree>
@@ -795,7 +870,7 @@
 </p:notes>
 </file>
 
-<file path=ppt/notesSlides/notesSlide6.xml><?xml version="1.0" encoding="utf-8"?>
+<file path=ppt/notesSlides/notesSlide7.xml><?xml version="1.0" encoding="utf-8"?>
 <p:notes xmlns:p="http://schemas.openxmlformats.org/presentationml/2006/main">
   <p:cSld>
     <p:spTree>
@@ -866,91 +941,6 @@
           <a:p xmlns:a="http://schemas.openxmlformats.org/drawingml/2006/main">
             <a:r>
               <a:t>https://github.com/rpozniak/sentry-swm2-qa/blob/main/bugs/BUG-AL-01.md</a:t>
-            </a:r>
-          </a:p>
-        </p:txBody>
-      </p:sp>
-      <p:sp>
-        <p:nvSpPr>
-          <p:cNvPr id="4" name="Slide Number Placeholder 3"/>
-          <p:cNvSpPr>
-            <a:spLocks xmlns:a="http://schemas.openxmlformats.org/drawingml/2006/main" noGrp="1"/>
-          </p:cNvSpPr>
-          <p:nvPr>
-            <p:ph type="sldNum" idx="5"/>
-          </p:nvPr>
-        </p:nvSpPr>
-        <p:spPr/>
-        <p:txBody>
-          <a:bodyPr xmlns:a="http://schemas.openxmlformats.org/drawingml/2006/main"/>
-          <a:lstStyle xmlns:a="http://schemas.openxmlformats.org/drawingml/2006/main"/>
-          <a:p xmlns:a="http://schemas.openxmlformats.org/drawingml/2006/main"/>
-        </p:txBody>
-      </p:sp>
-    </p:spTree>
-  </p:cSld>
-  <p:clrMapOvr>
-    <a:masterClrMapping xmlns:a="http://schemas.openxmlformats.org/drawingml/2006/main"/>
-  </p:clrMapOvr>
-</p:notes>
-</file>
-
-<file path=ppt/notesSlides/notesSlide7.xml><?xml version="1.0" encoding="utf-8"?>
-<p:notes xmlns:p="http://schemas.openxmlformats.org/presentationml/2006/main">
-  <p:cSld>
-    <p:spTree>
-      <p:nvGrpSpPr>
-        <p:cNvPr id="1" name=""/>
-        <p:cNvGrpSpPr/>
-        <p:nvPr/>
-      </p:nvGrpSpPr>
-      <p:grpSpPr>
-        <a:xfrm xmlns:a="http://schemas.openxmlformats.org/drawingml/2006/main"/>
-      </p:grpSpPr>
-      <p:sp>
-        <p:nvSpPr>
-          <p:cNvPr id="2" name="Slide Image Placeholder 1"/>
-          <p:cNvSpPr>
-            <a:spLocks xmlns:a="http://schemas.openxmlformats.org/drawingml/2006/main" noGrp="1"/>
-          </p:cNvSpPr>
-          <p:nvPr>
-            <p:ph type="sldImg" idx="0"/>
-          </p:nvPr>
-        </p:nvSpPr>
-        <p:spPr/>
-      </p:sp>
-      <p:sp>
-        <p:nvSpPr>
-          <p:cNvPr id="3" name="Notes Placeholder 2"/>
-          <p:cNvSpPr>
-            <a:spLocks xmlns:a="http://schemas.openxmlformats.org/drawingml/2006/main" noGrp="1"/>
-          </p:cNvSpPr>
-          <p:nvPr>
-            <p:ph type="body" idx="1"/>
-          </p:nvPr>
-        </p:nvSpPr>
-        <p:spPr/>
-        <p:txBody>
-          <a:bodyPr xmlns:a="http://schemas.openxmlformats.org/drawingml/2006/main"/>
-          <a:lstStyle xmlns:a="http://schemas.openxmlformats.org/drawingml/2006/main"/>
-          <a:p xmlns:a="http://schemas.openxmlformats.org/drawingml/2006/main">
-            <a:r>
-              <a:t>https://github.com/rpozniak/sentry-swm2-qa/blob/main/bugs/BUG-AL-01.md</a:t>
-            </a:r>
-          </a:p>
-          <a:p xmlns:a="http://schemas.openxmlformats.org/drawingml/2006/main">
-            <a:r>
-              <a:t>https://github.com/rpozniak/sentry-swm2-qa/blob/main/logs/beta-recheck-01/TC-AL-03_base.log</a:t>
-            </a:r>
-          </a:p>
-          <a:p xmlns:a="http://schemas.openxmlformats.org/drawingml/2006/main">
-            <a:r>
-              <a:t>https://github.com/rpozniak/sentry-swm2-qa/blob/main/logs/beta-recheck-01/TC-AL-04_base.log</a:t>
-            </a:r>
-          </a:p>
-          <a:p xmlns:a="http://schemas.openxmlformats.org/drawingml/2006/main">
-            <a:r>
-              <a:t>https://github.com/rpozniak/sentry-swm2-qa/blob/main/reference/PRD.md</a:t>
             </a:r>
           </a:p>
         </p:txBody>
@@ -1103,11 +1093,6 @@
               <a:t>https://github.com/rpozniak/sentry-swm2-qa/blob/main/docs/TRACEABILITY.md</a:t>
             </a:r>
           </a:p>
-          <a:p xmlns:a="http://schemas.openxmlformats.org/drawingml/2006/main">
-            <a:r>
-              <a:t>https://github.com/rpozniak/sentry-swm2-qa/blob/main/docs/MANUAL_RUN.md</a:t>
-            </a:r>
-          </a:p>
         </p:txBody>
       </p:sp>
       <p:sp>
@@ -3548,12 +3533,12 @@
   </p:cSld>
   <p:clrMap bg1="lt1" tx1="dk1" bg2="lt2" tx2="dk2" accent1="accent1" accent2="accent2" accent3="accent3" accent4="accent4" accent5="accent5" accent6="accent6" hlink="hlink" folHlink="folHlink"/>
   <p:sldLayoutIdLst>
-    <p:sldLayoutId xmlns:r="http://schemas.openxmlformats.org/officeDocument/2006/relationships" id="2147483649" r:id="R46d3d02ef02c4f93"/>
-    <p:sldLayoutId xmlns:r="http://schemas.openxmlformats.org/officeDocument/2006/relationships" id="2147483650" r:id="Rd1feb265d64d426c"/>
-    <p:sldLayoutId xmlns:r="http://schemas.openxmlformats.org/officeDocument/2006/relationships" id="2147483651" r:id="R311254bf565441b7"/>
-    <p:sldLayoutId xmlns:r="http://schemas.openxmlformats.org/officeDocument/2006/relationships" id="2147483652" r:id="R76ddeddc4f4540da"/>
-    <p:sldLayoutId xmlns:r="http://schemas.openxmlformats.org/officeDocument/2006/relationships" id="2147483653" r:id="Rce2cea8342c9430c"/>
-    <p:sldLayoutId xmlns:r="http://schemas.openxmlformats.org/officeDocument/2006/relationships" id="2147483654" r:id="R1e0383397e57496c"/>
+    <p:sldLayoutId xmlns:r="http://schemas.openxmlformats.org/officeDocument/2006/relationships" id="2147483649" r:id="R24f360ae879d4c43"/>
+    <p:sldLayoutId xmlns:r="http://schemas.openxmlformats.org/officeDocument/2006/relationships" id="2147483650" r:id="R06a99e552d994c7f"/>
+    <p:sldLayoutId xmlns:r="http://schemas.openxmlformats.org/officeDocument/2006/relationships" id="2147483651" r:id="R30d280750cf9405d"/>
+    <p:sldLayoutId xmlns:r="http://schemas.openxmlformats.org/officeDocument/2006/relationships" id="2147483652" r:id="Rcfdd64de82b74e17"/>
+    <p:sldLayoutId xmlns:r="http://schemas.openxmlformats.org/officeDocument/2006/relationships" id="2147483653" r:id="R01b1f19d3cc446ea"/>
+    <p:sldLayoutId xmlns:r="http://schemas.openxmlformats.org/officeDocument/2006/relationships" id="2147483654" r:id="Rcfa0b0f77c994328"/>
   </p:sldLayoutIdLst>
   <p:txStyles>
     <p:titleStyle>
@@ -4115,7 +4100,7 @@
         </p:nvSpPr>
         <p:spPr>
           <a:xfrm xmlns:a="http://schemas.openxmlformats.org/drawingml/2006/main">
-            <a:off x="609600" y="1638300"/>
+            <a:off x="609600" y="2095500"/>
             <a:ext cx="10972800" cy="1047750"/>
           </a:xfrm>
           <a:prstGeom xmlns:a="http://schemas.openxmlformats.org/drawingml/2006/main" prst="rect">
@@ -4260,162 +4245,6 @@
           <p:cNvPr id="3" name="">
             <a:extLst xmlns:a="http://schemas.openxmlformats.org/drawingml/2006/main">
               <a:ext uri="{FF2B5EF4-FFF2-40B4-BE49-F238E27FC236}">
-                <a16:creationId xmlns:a16="http://schemas.microsoft.com/office/drawing/2014/main" id="{4858A4B1-C6BD-47C5-A37D-50D18D1DC9C2}"/>
-              </a:ext>
-            </a:extLst>
-          </p:cNvPr>
-          <p:cNvSpPr>
-            <a:spLocks xmlns:a="http://schemas.openxmlformats.org/drawingml/2006/main" noGrp="1"/>
-          </p:cNvSpPr>
-          <p:nvPr/>
-        </p:nvSpPr>
-        <p:spPr>
-          <a:xfrm xmlns:a="http://schemas.openxmlformats.org/drawingml/2006/main">
-            <a:off x="609600" y="2838450"/>
-            <a:ext cx="10972800" cy="704850"/>
-          </a:xfrm>
-          <a:prstGeom xmlns:a="http://schemas.openxmlformats.org/drawingml/2006/main" prst="rect">
-            <a:avLst/>
-          </a:prstGeom>
-          <a:noFill xmlns:a="http://schemas.openxmlformats.org/drawingml/2006/main"/>
-          <a:ln xmlns:a="http://schemas.openxmlformats.org/drawingml/2006/main" w="0">
-            <a:noFill/>
-          </a:ln>
-        </p:spPr>
-        <p:txBody>
-          <a:bodyPr xmlns:a="http://schemas.openxmlformats.org/drawingml/2006/main"/>
-          <a:lstStyle xmlns:a="http://schemas.openxmlformats.org/drawingml/2006/main">
-            <a:defPPr>
-              <a:defRPr sz="3450" b="0">
-                <a:solidFill>
-                  <a:srgbClr val="FFFFFF"/>
-                </a:solidFill>
-                <a:latin typeface="Arial"/>
-                <a:ea typeface="Arial"/>
-                <a:cs typeface="Arial"/>
-              </a:defRPr>
-            </a:defPPr>
-            <a:lvl1pPr>
-              <a:defRPr sz="3450" b="0">
-                <a:solidFill>
-                  <a:srgbClr val="FFFFFF"/>
-                </a:solidFill>
-                <a:latin typeface="Arial"/>
-                <a:ea typeface="Arial"/>
-                <a:cs typeface="Arial"/>
-              </a:defRPr>
-            </a:lvl1pPr>
-            <a:lvl2pPr>
-              <a:defRPr sz="3450" b="0">
-                <a:solidFill>
-                  <a:srgbClr val="FFFFFF"/>
-                </a:solidFill>
-                <a:latin typeface="Arial"/>
-                <a:ea typeface="Arial"/>
-                <a:cs typeface="Arial"/>
-              </a:defRPr>
-            </a:lvl2pPr>
-            <a:lvl3pPr>
-              <a:defRPr sz="3450" b="0">
-                <a:solidFill>
-                  <a:srgbClr val="FFFFFF"/>
-                </a:solidFill>
-                <a:latin typeface="Arial"/>
-                <a:ea typeface="Arial"/>
-                <a:cs typeface="Arial"/>
-              </a:defRPr>
-            </a:lvl3pPr>
-            <a:lvl4pPr>
-              <a:defRPr sz="3450" b="0">
-                <a:solidFill>
-                  <a:srgbClr val="FFFFFF"/>
-                </a:solidFill>
-                <a:latin typeface="Arial"/>
-                <a:ea typeface="Arial"/>
-                <a:cs typeface="Arial"/>
-              </a:defRPr>
-            </a:lvl4pPr>
-            <a:lvl5pPr>
-              <a:defRPr sz="3450" b="0">
-                <a:solidFill>
-                  <a:srgbClr val="FFFFFF"/>
-                </a:solidFill>
-                <a:latin typeface="Arial"/>
-                <a:ea typeface="Arial"/>
-                <a:cs typeface="Arial"/>
-              </a:defRPr>
-            </a:lvl5pPr>
-            <a:lvl6pPr>
-              <a:defRPr sz="3450" b="0">
-                <a:solidFill>
-                  <a:srgbClr val="FFFFFF"/>
-                </a:solidFill>
-                <a:latin typeface="Arial"/>
-                <a:ea typeface="Arial"/>
-                <a:cs typeface="Arial"/>
-              </a:defRPr>
-            </a:lvl6pPr>
-            <a:lvl7pPr>
-              <a:defRPr sz="3450" b="0">
-                <a:solidFill>
-                  <a:srgbClr val="FFFFFF"/>
-                </a:solidFill>
-                <a:latin typeface="Arial"/>
-                <a:ea typeface="Arial"/>
-                <a:cs typeface="Arial"/>
-              </a:defRPr>
-            </a:lvl7pPr>
-            <a:lvl8pPr>
-              <a:defRPr sz="3450" b="0">
-                <a:solidFill>
-                  <a:srgbClr val="FFFFFF"/>
-                </a:solidFill>
-                <a:latin typeface="Arial"/>
-                <a:ea typeface="Arial"/>
-                <a:cs typeface="Arial"/>
-              </a:defRPr>
-            </a:lvl8pPr>
-            <a:lvl9pPr>
-              <a:defRPr sz="3450" b="0">
-                <a:solidFill>
-                  <a:srgbClr val="FFFFFF"/>
-                </a:solidFill>
-                <a:latin typeface="Arial"/>
-                <a:ea typeface="Arial"/>
-                <a:cs typeface="Arial"/>
-              </a:defRPr>
-            </a:lvl9pPr>
-          </a:lstStyle>
-          <a:p xmlns:a="http://schemas.openxmlformats.org/drawingml/2006/main">
-            <a:pPr>
-              <a:defRPr sz="3450" b="0">
-                <a:solidFill>
-                  <a:srgbClr val="FFFFFF"/>
-                </a:solidFill>
-                <a:latin typeface="Arial"/>
-                <a:ea typeface="Arial"/>
-                <a:cs typeface="Arial"/>
-              </a:defRPr>
-            </a:pPr>
-            <a:r>
-              <a:rPr sz="3450" b="0">
-                <a:solidFill>
-                  <a:srgbClr val="FFFFFF"/>
-                </a:solidFill>
-                <a:latin typeface="Arial"/>
-                <a:ea typeface="Arial"/>
-                <a:cs typeface="Arial"/>
-              </a:rPr>
-              <a:t>Приймальні випробування</a:t>
-            </a:r>
-          </a:p>
-        </p:txBody>
-      </p:sp>
-      <p:sp>
-        <p:nvSpPr>
-          <p:cNvPr id="4" name="">
-            <a:extLst xmlns:a="http://schemas.openxmlformats.org/drawingml/2006/main">
-              <a:ext uri="{FF2B5EF4-FFF2-40B4-BE49-F238E27FC236}">
                 <a16:creationId xmlns:a16="http://schemas.microsoft.com/office/drawing/2014/main" id="{65C77AAD-E7E6-489A-AD84-F64EE79491FB}"/>
               </a:ext>
             </a:extLst>
@@ -4427,7 +4256,7 @@
         </p:nvSpPr>
         <p:spPr>
           <a:xfrm xmlns:a="http://schemas.openxmlformats.org/drawingml/2006/main">
-            <a:off x="609600" y="3905250"/>
+            <a:off x="609600" y="3486150"/>
             <a:ext cx="10972800" cy="590550"/>
           </a:xfrm>
           <a:prstGeom xmlns:a="http://schemas.openxmlformats.org/drawingml/2006/main" prst="rect">
@@ -4569,7 +4398,7 @@
       </p:sp>
       <p:sp>
         <p:nvSpPr>
-          <p:cNvPr id="5" name="">
+          <p:cNvPr id="4" name="">
             <a:extLst xmlns:a="http://schemas.openxmlformats.org/drawingml/2006/main">
               <a:ext uri="{FF2B5EF4-FFF2-40B4-BE49-F238E27FC236}">
                 <a16:creationId xmlns:a16="http://schemas.microsoft.com/office/drawing/2014/main" id="{05EF16DE-5D2D-4F48-A076-C3E1FD2CFCDB}"/>
@@ -4734,6 +4563,1224 @@
 </file>
 
 <file path=ppt/slides/slide2.xml><?xml version="1.0" encoding="utf-8"?>
+<p:sld xmlns:p="http://schemas.openxmlformats.org/presentationml/2006/main">
+  <p:cSld>
+    <p:bg>
+      <p:bgPr>
+        <a:solidFill xmlns:a="http://schemas.openxmlformats.org/drawingml/2006/main">
+          <a:srgbClr val="FFFFFF"/>
+        </a:solidFill>
+      </p:bgPr>
+    </p:bg>
+    <p:spTree>
+      <p:nvGrpSpPr>
+        <p:cNvPr id="1" name=""/>
+        <p:cNvGrpSpPr/>
+        <p:nvPr/>
+      </p:nvGrpSpPr>
+      <p:grpSpPr>
+        <a:xfrm xmlns:a="http://schemas.openxmlformats.org/drawingml/2006/main"/>
+      </p:grpSpPr>
+      <p:sp>
+        <p:nvSpPr>
+          <p:cNvPr id="2" name="">
+            <a:extLst xmlns:a="http://schemas.openxmlformats.org/drawingml/2006/main">
+              <a:ext uri="{FF2B5EF4-FFF2-40B4-BE49-F238E27FC236}">
+                <a16:creationId xmlns:a16="http://schemas.microsoft.com/office/drawing/2014/main" id="{0E0F867E-6F43-4F5B-A2A0-B8E79F8CD01B}"/>
+              </a:ext>
+            </a:extLst>
+          </p:cNvPr>
+          <p:cNvSpPr>
+            <a:spLocks xmlns:a="http://schemas.openxmlformats.org/drawingml/2006/main" noGrp="1"/>
+          </p:cNvSpPr>
+          <p:nvPr/>
+        </p:nvSpPr>
+        <p:spPr>
+          <a:xfrm xmlns:a="http://schemas.openxmlformats.org/drawingml/2006/main">
+            <a:off x="609600" y="381000"/>
+            <a:ext cx="10972800" cy="895350"/>
+          </a:xfrm>
+          <a:prstGeom xmlns:a="http://schemas.openxmlformats.org/drawingml/2006/main" prst="rect">
+            <a:avLst/>
+          </a:prstGeom>
+          <a:noFill xmlns:a="http://schemas.openxmlformats.org/drawingml/2006/main"/>
+          <a:ln xmlns:a="http://schemas.openxmlformats.org/drawingml/2006/main" w="0">
+            <a:noFill/>
+          </a:ln>
+        </p:spPr>
+        <p:txBody>
+          <a:bodyPr xmlns:a="http://schemas.openxmlformats.org/drawingml/2006/main"/>
+          <a:lstStyle xmlns:a="http://schemas.openxmlformats.org/drawingml/2006/main">
+            <a:defPPr>
+              <a:defRPr sz="3300" b="1">
+                <a:solidFill>
+                  <a:srgbClr val="182D45"/>
+                </a:solidFill>
+                <a:latin typeface="Arial"/>
+                <a:ea typeface="Arial"/>
+                <a:cs typeface="Arial"/>
+              </a:defRPr>
+            </a:defPPr>
+            <a:lvl1pPr>
+              <a:defRPr sz="3300" b="1">
+                <a:solidFill>
+                  <a:srgbClr val="182D45"/>
+                </a:solidFill>
+                <a:latin typeface="Arial"/>
+                <a:ea typeface="Arial"/>
+                <a:cs typeface="Arial"/>
+              </a:defRPr>
+            </a:lvl1pPr>
+            <a:lvl2pPr>
+              <a:defRPr sz="3300" b="1">
+                <a:solidFill>
+                  <a:srgbClr val="182D45"/>
+                </a:solidFill>
+                <a:latin typeface="Arial"/>
+                <a:ea typeface="Arial"/>
+                <a:cs typeface="Arial"/>
+              </a:defRPr>
+            </a:lvl2pPr>
+            <a:lvl3pPr>
+              <a:defRPr sz="3300" b="1">
+                <a:solidFill>
+                  <a:srgbClr val="182D45"/>
+                </a:solidFill>
+                <a:latin typeface="Arial"/>
+                <a:ea typeface="Arial"/>
+                <a:cs typeface="Arial"/>
+              </a:defRPr>
+            </a:lvl3pPr>
+            <a:lvl4pPr>
+              <a:defRPr sz="3300" b="1">
+                <a:solidFill>
+                  <a:srgbClr val="182D45"/>
+                </a:solidFill>
+                <a:latin typeface="Arial"/>
+                <a:ea typeface="Arial"/>
+                <a:cs typeface="Arial"/>
+              </a:defRPr>
+            </a:lvl4pPr>
+            <a:lvl5pPr>
+              <a:defRPr sz="3300" b="1">
+                <a:solidFill>
+                  <a:srgbClr val="182D45"/>
+                </a:solidFill>
+                <a:latin typeface="Arial"/>
+                <a:ea typeface="Arial"/>
+                <a:cs typeface="Arial"/>
+              </a:defRPr>
+            </a:lvl5pPr>
+            <a:lvl6pPr>
+              <a:defRPr sz="3300" b="1">
+                <a:solidFill>
+                  <a:srgbClr val="182D45"/>
+                </a:solidFill>
+                <a:latin typeface="Arial"/>
+                <a:ea typeface="Arial"/>
+                <a:cs typeface="Arial"/>
+              </a:defRPr>
+            </a:lvl6pPr>
+            <a:lvl7pPr>
+              <a:defRPr sz="3300" b="1">
+                <a:solidFill>
+                  <a:srgbClr val="182D45"/>
+                </a:solidFill>
+                <a:latin typeface="Arial"/>
+                <a:ea typeface="Arial"/>
+                <a:cs typeface="Arial"/>
+              </a:defRPr>
+            </a:lvl7pPr>
+            <a:lvl8pPr>
+              <a:defRPr sz="3300" b="1">
+                <a:solidFill>
+                  <a:srgbClr val="182D45"/>
+                </a:solidFill>
+                <a:latin typeface="Arial"/>
+                <a:ea typeface="Arial"/>
+                <a:cs typeface="Arial"/>
+              </a:defRPr>
+            </a:lvl8pPr>
+            <a:lvl9pPr>
+              <a:defRPr sz="3300" b="1">
+                <a:solidFill>
+                  <a:srgbClr val="182D45"/>
+                </a:solidFill>
+                <a:latin typeface="Arial"/>
+                <a:ea typeface="Arial"/>
+                <a:cs typeface="Arial"/>
+              </a:defRPr>
+            </a:lvl9pPr>
+          </a:lstStyle>
+          <a:p xmlns:a="http://schemas.openxmlformats.org/drawingml/2006/main">
+            <a:pPr>
+              <a:defRPr sz="3300" b="1">
+                <a:solidFill>
+                  <a:srgbClr val="182D45"/>
+                </a:solidFill>
+                <a:latin typeface="Arial"/>
+                <a:ea typeface="Arial"/>
+                <a:cs typeface="Arial"/>
+              </a:defRPr>
+            </a:pPr>
+            <a:r>
+              <a:rPr sz="3300" b="1">
+                <a:solidFill>
+                  <a:srgbClr val="182D45"/>
+                </a:solidFill>
+                <a:latin typeface="Arial"/>
+                <a:ea typeface="Arial"/>
+                <a:cs typeface="Arial"/>
+              </a:rPr>
+              <a:t>Об’єкт тестування</a:t>
+            </a:r>
+          </a:p>
+        </p:txBody>
+      </p:sp>
+      <p:sp>
+        <p:nvSpPr>
+          <p:cNvPr id="3" name="">
+            <a:extLst xmlns:a="http://schemas.openxmlformats.org/drawingml/2006/main">
+              <a:ext uri="{FF2B5EF4-FFF2-40B4-BE49-F238E27FC236}">
+                <a16:creationId xmlns:a16="http://schemas.microsoft.com/office/drawing/2014/main" id="{7FC92043-31C5-4579-90CC-0E593B304029}"/>
+              </a:ext>
+            </a:extLst>
+          </p:cNvPr>
+          <p:cNvSpPr>
+            <a:spLocks xmlns:a="http://schemas.openxmlformats.org/drawingml/2006/main" noGrp="1"/>
+          </p:cNvSpPr>
+          <p:nvPr/>
+        </p:nvSpPr>
+        <p:spPr>
+          <a:xfrm xmlns:a="http://schemas.openxmlformats.org/drawingml/2006/main">
+            <a:off x="609600" y="1552575"/>
+            <a:ext cx="7048500" cy="666750"/>
+          </a:xfrm>
+          <a:prstGeom xmlns:a="http://schemas.openxmlformats.org/drawingml/2006/main" prst="rect">
+            <a:avLst/>
+          </a:prstGeom>
+          <a:noFill xmlns:a="http://schemas.openxmlformats.org/drawingml/2006/main"/>
+          <a:ln xmlns:a="http://schemas.openxmlformats.org/drawingml/2006/main" w="0">
+            <a:noFill/>
+          </a:ln>
+        </p:spPr>
+        <p:txBody>
+          <a:bodyPr xmlns:a="http://schemas.openxmlformats.org/drawingml/2006/main"/>
+          <a:lstStyle xmlns:a="http://schemas.openxmlformats.org/drawingml/2006/main">
+            <a:defPPr>
+              <a:defRPr sz="3000" b="1">
+                <a:solidFill>
+                  <a:srgbClr val="087F8C"/>
+                </a:solidFill>
+                <a:latin typeface="Arial"/>
+                <a:ea typeface="Arial"/>
+                <a:cs typeface="Arial"/>
+              </a:defRPr>
+            </a:defPPr>
+            <a:lvl1pPr>
+              <a:defRPr sz="3000" b="1">
+                <a:solidFill>
+                  <a:srgbClr val="087F8C"/>
+                </a:solidFill>
+                <a:latin typeface="Arial"/>
+                <a:ea typeface="Arial"/>
+                <a:cs typeface="Arial"/>
+              </a:defRPr>
+            </a:lvl1pPr>
+            <a:lvl2pPr>
+              <a:defRPr sz="3000" b="1">
+                <a:solidFill>
+                  <a:srgbClr val="087F8C"/>
+                </a:solidFill>
+                <a:latin typeface="Arial"/>
+                <a:ea typeface="Arial"/>
+                <a:cs typeface="Arial"/>
+              </a:defRPr>
+            </a:lvl2pPr>
+            <a:lvl3pPr>
+              <a:defRPr sz="3000" b="1">
+                <a:solidFill>
+                  <a:srgbClr val="087F8C"/>
+                </a:solidFill>
+                <a:latin typeface="Arial"/>
+                <a:ea typeface="Arial"/>
+                <a:cs typeface="Arial"/>
+              </a:defRPr>
+            </a:lvl3pPr>
+            <a:lvl4pPr>
+              <a:defRPr sz="3000" b="1">
+                <a:solidFill>
+                  <a:srgbClr val="087F8C"/>
+                </a:solidFill>
+                <a:latin typeface="Arial"/>
+                <a:ea typeface="Arial"/>
+                <a:cs typeface="Arial"/>
+              </a:defRPr>
+            </a:lvl4pPr>
+            <a:lvl5pPr>
+              <a:defRPr sz="3000" b="1">
+                <a:solidFill>
+                  <a:srgbClr val="087F8C"/>
+                </a:solidFill>
+                <a:latin typeface="Arial"/>
+                <a:ea typeface="Arial"/>
+                <a:cs typeface="Arial"/>
+              </a:defRPr>
+            </a:lvl5pPr>
+            <a:lvl6pPr>
+              <a:defRPr sz="3000" b="1">
+                <a:solidFill>
+                  <a:srgbClr val="087F8C"/>
+                </a:solidFill>
+                <a:latin typeface="Arial"/>
+                <a:ea typeface="Arial"/>
+                <a:cs typeface="Arial"/>
+              </a:defRPr>
+            </a:lvl6pPr>
+            <a:lvl7pPr>
+              <a:defRPr sz="3000" b="1">
+                <a:solidFill>
+                  <a:srgbClr val="087F8C"/>
+                </a:solidFill>
+                <a:latin typeface="Arial"/>
+                <a:ea typeface="Arial"/>
+                <a:cs typeface="Arial"/>
+              </a:defRPr>
+            </a:lvl7pPr>
+            <a:lvl8pPr>
+              <a:defRPr sz="3000" b="1">
+                <a:solidFill>
+                  <a:srgbClr val="087F8C"/>
+                </a:solidFill>
+                <a:latin typeface="Arial"/>
+                <a:ea typeface="Arial"/>
+                <a:cs typeface="Arial"/>
+              </a:defRPr>
+            </a:lvl8pPr>
+            <a:lvl9pPr>
+              <a:defRPr sz="3000" b="1">
+                <a:solidFill>
+                  <a:srgbClr val="087F8C"/>
+                </a:solidFill>
+                <a:latin typeface="Arial"/>
+                <a:ea typeface="Arial"/>
+                <a:cs typeface="Arial"/>
+              </a:defRPr>
+            </a:lvl9pPr>
+          </a:lstStyle>
+          <a:p xmlns:a="http://schemas.openxmlformats.org/drawingml/2006/main">
+            <a:pPr>
+              <a:defRPr sz="3000" b="1">
+                <a:solidFill>
+                  <a:srgbClr val="087F8C"/>
+                </a:solidFill>
+                <a:latin typeface="Arial"/>
+                <a:ea typeface="Arial"/>
+                <a:cs typeface="Arial"/>
+              </a:defRPr>
+            </a:pPr>
+            <a:r>
+              <a:rPr sz="3000" b="1">
+                <a:solidFill>
+                  <a:srgbClr val="087F8C"/>
+                </a:solidFill>
+                <a:latin typeface="Arial"/>
+                <a:ea typeface="Arial"/>
+                <a:cs typeface="Arial"/>
+              </a:rPr>
+              <a:t>ESP32-S3 N16R8</a:t>
+            </a:r>
+          </a:p>
+        </p:txBody>
+      </p:sp>
+      <p:sp>
+        <p:nvSpPr>
+          <p:cNvPr id="4" name="">
+            <a:extLst xmlns:a="http://schemas.openxmlformats.org/drawingml/2006/main">
+              <a:ext uri="{FF2B5EF4-FFF2-40B4-BE49-F238E27FC236}">
+                <a16:creationId xmlns:a16="http://schemas.microsoft.com/office/drawing/2014/main" id="{BB482D59-1B7D-43CB-8860-4D2ECF0D5BF1}"/>
+              </a:ext>
+            </a:extLst>
+          </p:cNvPr>
+          <p:cNvSpPr>
+            <a:spLocks xmlns:a="http://schemas.openxmlformats.org/drawingml/2006/main" noGrp="1"/>
+          </p:cNvSpPr>
+          <p:nvPr/>
+        </p:nvSpPr>
+        <p:spPr>
+          <a:xfrm xmlns:a="http://schemas.openxmlformats.org/drawingml/2006/main">
+            <a:off x="609600" y="2400300"/>
+            <a:ext cx="7048500" cy="561975"/>
+          </a:xfrm>
+          <a:prstGeom xmlns:a="http://schemas.openxmlformats.org/drawingml/2006/main" prst="rect">
+            <a:avLst/>
+          </a:prstGeom>
+          <a:noFill xmlns:a="http://schemas.openxmlformats.org/drawingml/2006/main"/>
+          <a:ln xmlns:a="http://schemas.openxmlformats.org/drawingml/2006/main" w="0">
+            <a:noFill/>
+          </a:ln>
+        </p:spPr>
+        <p:txBody>
+          <a:bodyPr xmlns:a="http://schemas.openxmlformats.org/drawingml/2006/main"/>
+          <a:lstStyle xmlns:a="http://schemas.openxmlformats.org/drawingml/2006/main">
+            <a:defPPr>
+              <a:defRPr sz="2400" b="1">
+                <a:solidFill>
+                  <a:srgbClr val="182D45"/>
+                </a:solidFill>
+                <a:latin typeface="Arial"/>
+                <a:ea typeface="Arial"/>
+                <a:cs typeface="Arial"/>
+              </a:defRPr>
+            </a:defPPr>
+            <a:lvl1pPr>
+              <a:defRPr sz="2400" b="1">
+                <a:solidFill>
+                  <a:srgbClr val="182D45"/>
+                </a:solidFill>
+                <a:latin typeface="Arial"/>
+                <a:ea typeface="Arial"/>
+                <a:cs typeface="Arial"/>
+              </a:defRPr>
+            </a:lvl1pPr>
+            <a:lvl2pPr>
+              <a:defRPr sz="2400" b="1">
+                <a:solidFill>
+                  <a:srgbClr val="182D45"/>
+                </a:solidFill>
+                <a:latin typeface="Arial"/>
+                <a:ea typeface="Arial"/>
+                <a:cs typeface="Arial"/>
+              </a:defRPr>
+            </a:lvl2pPr>
+            <a:lvl3pPr>
+              <a:defRPr sz="2400" b="1">
+                <a:solidFill>
+                  <a:srgbClr val="182D45"/>
+                </a:solidFill>
+                <a:latin typeface="Arial"/>
+                <a:ea typeface="Arial"/>
+                <a:cs typeface="Arial"/>
+              </a:defRPr>
+            </a:lvl3pPr>
+            <a:lvl4pPr>
+              <a:defRPr sz="2400" b="1">
+                <a:solidFill>
+                  <a:srgbClr val="182D45"/>
+                </a:solidFill>
+                <a:latin typeface="Arial"/>
+                <a:ea typeface="Arial"/>
+                <a:cs typeface="Arial"/>
+              </a:defRPr>
+            </a:lvl4pPr>
+            <a:lvl5pPr>
+              <a:defRPr sz="2400" b="1">
+                <a:solidFill>
+                  <a:srgbClr val="182D45"/>
+                </a:solidFill>
+                <a:latin typeface="Arial"/>
+                <a:ea typeface="Arial"/>
+                <a:cs typeface="Arial"/>
+              </a:defRPr>
+            </a:lvl5pPr>
+            <a:lvl6pPr>
+              <a:defRPr sz="2400" b="1">
+                <a:solidFill>
+                  <a:srgbClr val="182D45"/>
+                </a:solidFill>
+                <a:latin typeface="Arial"/>
+                <a:ea typeface="Arial"/>
+                <a:cs typeface="Arial"/>
+              </a:defRPr>
+            </a:lvl6pPr>
+            <a:lvl7pPr>
+              <a:defRPr sz="2400" b="1">
+                <a:solidFill>
+                  <a:srgbClr val="182D45"/>
+                </a:solidFill>
+                <a:latin typeface="Arial"/>
+                <a:ea typeface="Arial"/>
+                <a:cs typeface="Arial"/>
+              </a:defRPr>
+            </a:lvl7pPr>
+            <a:lvl8pPr>
+              <a:defRPr sz="2400" b="1">
+                <a:solidFill>
+                  <a:srgbClr val="182D45"/>
+                </a:solidFill>
+                <a:latin typeface="Arial"/>
+                <a:ea typeface="Arial"/>
+                <a:cs typeface="Arial"/>
+              </a:defRPr>
+            </a:lvl8pPr>
+            <a:lvl9pPr>
+              <a:defRPr sz="2400" b="1">
+                <a:solidFill>
+                  <a:srgbClr val="182D45"/>
+                </a:solidFill>
+                <a:latin typeface="Arial"/>
+                <a:ea typeface="Arial"/>
+                <a:cs typeface="Arial"/>
+              </a:defRPr>
+            </a:lvl9pPr>
+          </a:lstStyle>
+          <a:p xmlns:a="http://schemas.openxmlformats.org/drawingml/2006/main">
+            <a:pPr>
+              <a:defRPr sz="2400" b="1">
+                <a:solidFill>
+                  <a:srgbClr val="182D45"/>
+                </a:solidFill>
+                <a:latin typeface="Arial"/>
+                <a:ea typeface="Arial"/>
+                <a:cs typeface="Arial"/>
+              </a:defRPr>
+            </a:pPr>
+            <a:r>
+              <a:rPr sz="2400" b="1">
+                <a:solidFill>
+                  <a:srgbClr val="182D45"/>
+                </a:solidFill>
+                <a:latin typeface="Arial"/>
+                <a:ea typeface="Arial"/>
+                <a:cs typeface="Arial"/>
+              </a:rPr>
+              <a:t>Прошивка SENTRY SWM-2</a:t>
+            </a:r>
+          </a:p>
+        </p:txBody>
+      </p:sp>
+      <p:sp>
+        <p:nvSpPr>
+          <p:cNvPr id="5" name="">
+            <a:extLst xmlns:a="http://schemas.openxmlformats.org/drawingml/2006/main">
+              <a:ext uri="{FF2B5EF4-FFF2-40B4-BE49-F238E27FC236}">
+                <a16:creationId xmlns:a16="http://schemas.microsoft.com/office/drawing/2014/main" id="{6133CC64-5115-4246-A1DF-9BB8C582613C}"/>
+              </a:ext>
+            </a:extLst>
+          </p:cNvPr>
+          <p:cNvSpPr>
+            <a:spLocks xmlns:a="http://schemas.openxmlformats.org/drawingml/2006/main" noGrp="1"/>
+          </p:cNvSpPr>
+          <p:nvPr/>
+        </p:nvSpPr>
+        <p:spPr>
+          <a:xfrm xmlns:a="http://schemas.openxmlformats.org/drawingml/2006/main">
+            <a:off x="609600" y="3162300"/>
+            <a:ext cx="7048500" cy="1352550"/>
+          </a:xfrm>
+          <a:prstGeom xmlns:a="http://schemas.openxmlformats.org/drawingml/2006/main" prst="rect">
+            <a:avLst/>
+          </a:prstGeom>
+          <a:noFill xmlns:a="http://schemas.openxmlformats.org/drawingml/2006/main"/>
+          <a:ln xmlns:a="http://schemas.openxmlformats.org/drawingml/2006/main" w="0">
+            <a:noFill/>
+          </a:ln>
+        </p:spPr>
+        <p:txBody>
+          <a:bodyPr xmlns:a="http://schemas.openxmlformats.org/drawingml/2006/main"/>
+          <a:lstStyle xmlns:a="http://schemas.openxmlformats.org/drawingml/2006/main">
+            <a:defPPr>
+              <a:defRPr sz="2100" b="0">
+                <a:solidFill>
+                  <a:srgbClr val="182D45"/>
+                </a:solidFill>
+                <a:latin typeface="Arial"/>
+                <a:ea typeface="Arial"/>
+                <a:cs typeface="Arial"/>
+              </a:defRPr>
+            </a:defPPr>
+            <a:lvl1pPr>
+              <a:defRPr sz="2100" b="0">
+                <a:solidFill>
+                  <a:srgbClr val="182D45"/>
+                </a:solidFill>
+                <a:latin typeface="Arial"/>
+                <a:ea typeface="Arial"/>
+                <a:cs typeface="Arial"/>
+              </a:defRPr>
+            </a:lvl1pPr>
+            <a:lvl2pPr>
+              <a:defRPr sz="2100" b="0">
+                <a:solidFill>
+                  <a:srgbClr val="182D45"/>
+                </a:solidFill>
+                <a:latin typeface="Arial"/>
+                <a:ea typeface="Arial"/>
+                <a:cs typeface="Arial"/>
+              </a:defRPr>
+            </a:lvl2pPr>
+            <a:lvl3pPr>
+              <a:defRPr sz="2100" b="0">
+                <a:solidFill>
+                  <a:srgbClr val="182D45"/>
+                </a:solidFill>
+                <a:latin typeface="Arial"/>
+                <a:ea typeface="Arial"/>
+                <a:cs typeface="Arial"/>
+              </a:defRPr>
+            </a:lvl3pPr>
+            <a:lvl4pPr>
+              <a:defRPr sz="2100" b="0">
+                <a:solidFill>
+                  <a:srgbClr val="182D45"/>
+                </a:solidFill>
+                <a:latin typeface="Arial"/>
+                <a:ea typeface="Arial"/>
+                <a:cs typeface="Arial"/>
+              </a:defRPr>
+            </a:lvl4pPr>
+            <a:lvl5pPr>
+              <a:defRPr sz="2100" b="0">
+                <a:solidFill>
+                  <a:srgbClr val="182D45"/>
+                </a:solidFill>
+                <a:latin typeface="Arial"/>
+                <a:ea typeface="Arial"/>
+                <a:cs typeface="Arial"/>
+              </a:defRPr>
+            </a:lvl5pPr>
+            <a:lvl6pPr>
+              <a:defRPr sz="2100" b="0">
+                <a:solidFill>
+                  <a:srgbClr val="182D45"/>
+                </a:solidFill>
+                <a:latin typeface="Arial"/>
+                <a:ea typeface="Arial"/>
+                <a:cs typeface="Arial"/>
+              </a:defRPr>
+            </a:lvl6pPr>
+            <a:lvl7pPr>
+              <a:defRPr sz="2100" b="0">
+                <a:solidFill>
+                  <a:srgbClr val="182D45"/>
+                </a:solidFill>
+                <a:latin typeface="Arial"/>
+                <a:ea typeface="Arial"/>
+                <a:cs typeface="Arial"/>
+              </a:defRPr>
+            </a:lvl7pPr>
+            <a:lvl8pPr>
+              <a:defRPr sz="2100" b="0">
+                <a:solidFill>
+                  <a:srgbClr val="182D45"/>
+                </a:solidFill>
+                <a:latin typeface="Arial"/>
+                <a:ea typeface="Arial"/>
+                <a:cs typeface="Arial"/>
+              </a:defRPr>
+            </a:lvl8pPr>
+            <a:lvl9pPr>
+              <a:defRPr sz="2100" b="0">
+                <a:solidFill>
+                  <a:srgbClr val="182D45"/>
+                </a:solidFill>
+                <a:latin typeface="Arial"/>
+                <a:ea typeface="Arial"/>
+                <a:cs typeface="Arial"/>
+              </a:defRPr>
+            </a:lvl9pPr>
+          </a:lstStyle>
+          <a:p xmlns:a="http://schemas.openxmlformats.org/drawingml/2006/main">
+            <a:pPr>
+              <a:defRPr sz="2100" b="0">
+                <a:solidFill>
+                  <a:srgbClr val="182D45"/>
+                </a:solidFill>
+                <a:latin typeface="Arial"/>
+                <a:ea typeface="Arial"/>
+                <a:cs typeface="Arial"/>
+              </a:defRPr>
+            </a:pPr>
+            <a:r>
+              <a:rPr sz="2100" b="0">
+                <a:solidFill>
+                  <a:srgbClr val="182D45"/>
+                </a:solidFill>
+                <a:latin typeface="Arial"/>
+                <a:ea typeface="Arial"/>
+                <a:cs typeface="Arial"/>
+              </a:rPr>
+              <a:t>Навчальна модель гідроакустичної вахти:</a:t>
+            </a:r>
+          </a:p>
+          <a:p xmlns:a="http://schemas.openxmlformats.org/drawingml/2006/main">
+            <a:pPr>
+              <a:defRPr sz="2100" b="0">
+                <a:solidFill>
+                  <a:srgbClr val="182D45"/>
+                </a:solidFill>
+                <a:latin typeface="Arial"/>
+                <a:ea typeface="Arial"/>
+                <a:cs typeface="Arial"/>
+              </a:defRPr>
+            </a:pPr>
+            <a:r>
+              <a:rPr sz="2100" b="0">
+                <a:solidFill>
+                  <a:srgbClr val="182D45"/>
+                </a:solidFill>
+                <a:latin typeface="Arial"/>
+                <a:ea typeface="Arial"/>
+                <a:cs typeface="Arial"/>
+              </a:rPr>
+              <a:t>сонар, реле, RGB-лампа, телеметрія</a:t>
+            </a:r>
+          </a:p>
+          <a:p xmlns:a="http://schemas.openxmlformats.org/drawingml/2006/main">
+            <a:pPr>
+              <a:defRPr sz="2100" b="0">
+                <a:solidFill>
+                  <a:srgbClr val="182D45"/>
+                </a:solidFill>
+                <a:latin typeface="Arial"/>
+                <a:ea typeface="Arial"/>
+                <a:cs typeface="Arial"/>
+              </a:defRPr>
+            </a:pPr>
+            <a:r>
+              <a:rPr sz="2100" b="0">
+                <a:solidFill>
+                  <a:srgbClr val="182D45"/>
+                </a:solidFill>
+                <a:latin typeface="Arial"/>
+                <a:ea typeface="Arial"/>
+                <a:cs typeface="Arial"/>
+              </a:rPr>
+              <a:t>та сповіщення.</a:t>
+            </a:r>
+          </a:p>
+        </p:txBody>
+      </p:sp>
+      <p:sp>
+        <p:nvSpPr>
+          <p:cNvPr id="6" name="">
+            <a:extLst xmlns:a="http://schemas.openxmlformats.org/drawingml/2006/main">
+              <a:ext uri="{FF2B5EF4-FFF2-40B4-BE49-F238E27FC236}">
+                <a16:creationId xmlns:a16="http://schemas.microsoft.com/office/drawing/2014/main" id="{0C4CF2D0-8D88-4F28-958B-2E8414154B08}"/>
+              </a:ext>
+            </a:extLst>
+          </p:cNvPr>
+          <p:cNvSpPr>
+            <a:spLocks xmlns:a="http://schemas.openxmlformats.org/drawingml/2006/main" noGrp="1"/>
+          </p:cNvSpPr>
+          <p:nvPr/>
+        </p:nvSpPr>
+        <p:spPr>
+          <a:xfrm xmlns:a="http://schemas.openxmlformats.org/drawingml/2006/main">
+            <a:off x="609600" y="4743450"/>
+            <a:ext cx="7048500" cy="542925"/>
+          </a:xfrm>
+          <a:prstGeom xmlns:a="http://schemas.openxmlformats.org/drawingml/2006/main" prst="rect">
+            <a:avLst/>
+          </a:prstGeom>
+          <a:noFill xmlns:a="http://schemas.openxmlformats.org/drawingml/2006/main"/>
+          <a:ln xmlns:a="http://schemas.openxmlformats.org/drawingml/2006/main" w="0">
+            <a:noFill/>
+          </a:ln>
+        </p:spPr>
+        <p:txBody>
+          <a:bodyPr xmlns:a="http://schemas.openxmlformats.org/drawingml/2006/main"/>
+          <a:lstStyle xmlns:a="http://schemas.openxmlformats.org/drawingml/2006/main">
+            <a:defPPr>
+              <a:defRPr sz="2325" b="1">
+                <a:solidFill>
+                  <a:srgbClr val="182D45"/>
+                </a:solidFill>
+                <a:latin typeface="Arial"/>
+                <a:ea typeface="Arial"/>
+                <a:cs typeface="Arial"/>
+              </a:defRPr>
+            </a:defPPr>
+            <a:lvl1pPr>
+              <a:defRPr sz="2325" b="1">
+                <a:solidFill>
+                  <a:srgbClr val="182D45"/>
+                </a:solidFill>
+                <a:latin typeface="Arial"/>
+                <a:ea typeface="Arial"/>
+                <a:cs typeface="Arial"/>
+              </a:defRPr>
+            </a:lvl1pPr>
+            <a:lvl2pPr>
+              <a:defRPr sz="2325" b="1">
+                <a:solidFill>
+                  <a:srgbClr val="182D45"/>
+                </a:solidFill>
+                <a:latin typeface="Arial"/>
+                <a:ea typeface="Arial"/>
+                <a:cs typeface="Arial"/>
+              </a:defRPr>
+            </a:lvl2pPr>
+            <a:lvl3pPr>
+              <a:defRPr sz="2325" b="1">
+                <a:solidFill>
+                  <a:srgbClr val="182D45"/>
+                </a:solidFill>
+                <a:latin typeface="Arial"/>
+                <a:ea typeface="Arial"/>
+                <a:cs typeface="Arial"/>
+              </a:defRPr>
+            </a:lvl3pPr>
+            <a:lvl4pPr>
+              <a:defRPr sz="2325" b="1">
+                <a:solidFill>
+                  <a:srgbClr val="182D45"/>
+                </a:solidFill>
+                <a:latin typeface="Arial"/>
+                <a:ea typeface="Arial"/>
+                <a:cs typeface="Arial"/>
+              </a:defRPr>
+            </a:lvl4pPr>
+            <a:lvl5pPr>
+              <a:defRPr sz="2325" b="1">
+                <a:solidFill>
+                  <a:srgbClr val="182D45"/>
+                </a:solidFill>
+                <a:latin typeface="Arial"/>
+                <a:ea typeface="Arial"/>
+                <a:cs typeface="Arial"/>
+              </a:defRPr>
+            </a:lvl5pPr>
+            <a:lvl6pPr>
+              <a:defRPr sz="2325" b="1">
+                <a:solidFill>
+                  <a:srgbClr val="182D45"/>
+                </a:solidFill>
+                <a:latin typeface="Arial"/>
+                <a:ea typeface="Arial"/>
+                <a:cs typeface="Arial"/>
+              </a:defRPr>
+            </a:lvl6pPr>
+            <a:lvl7pPr>
+              <a:defRPr sz="2325" b="1">
+                <a:solidFill>
+                  <a:srgbClr val="182D45"/>
+                </a:solidFill>
+                <a:latin typeface="Arial"/>
+                <a:ea typeface="Arial"/>
+                <a:cs typeface="Arial"/>
+              </a:defRPr>
+            </a:lvl7pPr>
+            <a:lvl8pPr>
+              <a:defRPr sz="2325" b="1">
+                <a:solidFill>
+                  <a:srgbClr val="182D45"/>
+                </a:solidFill>
+                <a:latin typeface="Arial"/>
+                <a:ea typeface="Arial"/>
+                <a:cs typeface="Arial"/>
+              </a:defRPr>
+            </a:lvl8pPr>
+            <a:lvl9pPr>
+              <a:defRPr sz="2325" b="1">
+                <a:solidFill>
+                  <a:srgbClr val="182D45"/>
+                </a:solidFill>
+                <a:latin typeface="Arial"/>
+                <a:ea typeface="Arial"/>
+                <a:cs typeface="Arial"/>
+              </a:defRPr>
+            </a:lvl9pPr>
+          </a:lstStyle>
+          <a:p xmlns:a="http://schemas.openxmlformats.org/drawingml/2006/main">
+            <a:pPr>
+              <a:defRPr sz="2325" b="1">
+                <a:solidFill>
+                  <a:srgbClr val="182D45"/>
+                </a:solidFill>
+                <a:latin typeface="Arial"/>
+                <a:ea typeface="Arial"/>
+                <a:cs typeface="Arial"/>
+              </a:defRPr>
+            </a:pPr>
+            <a:r>
+              <a:rPr sz="2325" b="1">
+                <a:solidFill>
+                  <a:srgbClr val="182D45"/>
+                </a:solidFill>
+                <a:latin typeface="Arial"/>
+                <a:ea typeface="Arial"/>
+                <a:cs typeface="Arial"/>
+              </a:rPr>
+              <a:t>2.1.0 stable та 2.3.0 beta</a:t>
+            </a:r>
+          </a:p>
+        </p:txBody>
+      </p:sp>
+      <p:sp>
+        <p:nvSpPr>
+          <p:cNvPr id="7" name="">
+            <a:extLst xmlns:a="http://schemas.openxmlformats.org/drawingml/2006/main">
+              <a:ext uri="{FF2B5EF4-FFF2-40B4-BE49-F238E27FC236}">
+                <a16:creationId xmlns:a16="http://schemas.microsoft.com/office/drawing/2014/main" id="{F2692D35-5D9B-4870-8B2D-8C993DBB242F}"/>
+              </a:ext>
+            </a:extLst>
+          </p:cNvPr>
+          <p:cNvSpPr>
+            <a:spLocks xmlns:a="http://schemas.openxmlformats.org/drawingml/2006/main" noGrp="1"/>
+          </p:cNvSpPr>
+          <p:nvPr/>
+        </p:nvSpPr>
+        <p:spPr>
+          <a:xfrm xmlns:a="http://schemas.openxmlformats.org/drawingml/2006/main">
+            <a:off x="609600" y="5476875"/>
+            <a:ext cx="7048500" cy="828675"/>
+          </a:xfrm>
+          <a:prstGeom xmlns:a="http://schemas.openxmlformats.org/drawingml/2006/main" prst="rect">
+            <a:avLst/>
+          </a:prstGeom>
+          <a:noFill xmlns:a="http://schemas.openxmlformats.org/drawingml/2006/main"/>
+          <a:ln xmlns:a="http://schemas.openxmlformats.org/drawingml/2006/main" w="0">
+            <a:noFill/>
+          </a:ln>
+        </p:spPr>
+        <p:txBody>
+          <a:bodyPr xmlns:a="http://schemas.openxmlformats.org/drawingml/2006/main"/>
+          <a:lstStyle xmlns:a="http://schemas.openxmlformats.org/drawingml/2006/main">
+            <a:defPPr>
+              <a:defRPr sz="2025" b="0">
+                <a:solidFill>
+                  <a:srgbClr val="566A80"/>
+                </a:solidFill>
+                <a:latin typeface="Arial"/>
+                <a:ea typeface="Arial"/>
+                <a:cs typeface="Arial"/>
+              </a:defRPr>
+            </a:defPPr>
+            <a:lvl1pPr>
+              <a:defRPr sz="2025" b="0">
+                <a:solidFill>
+                  <a:srgbClr val="566A80"/>
+                </a:solidFill>
+                <a:latin typeface="Arial"/>
+                <a:ea typeface="Arial"/>
+                <a:cs typeface="Arial"/>
+              </a:defRPr>
+            </a:lvl1pPr>
+            <a:lvl2pPr>
+              <a:defRPr sz="2025" b="0">
+                <a:solidFill>
+                  <a:srgbClr val="566A80"/>
+                </a:solidFill>
+                <a:latin typeface="Arial"/>
+                <a:ea typeface="Arial"/>
+                <a:cs typeface="Arial"/>
+              </a:defRPr>
+            </a:lvl2pPr>
+            <a:lvl3pPr>
+              <a:defRPr sz="2025" b="0">
+                <a:solidFill>
+                  <a:srgbClr val="566A80"/>
+                </a:solidFill>
+                <a:latin typeface="Arial"/>
+                <a:ea typeface="Arial"/>
+                <a:cs typeface="Arial"/>
+              </a:defRPr>
+            </a:lvl3pPr>
+            <a:lvl4pPr>
+              <a:defRPr sz="2025" b="0">
+                <a:solidFill>
+                  <a:srgbClr val="566A80"/>
+                </a:solidFill>
+                <a:latin typeface="Arial"/>
+                <a:ea typeface="Arial"/>
+                <a:cs typeface="Arial"/>
+              </a:defRPr>
+            </a:lvl4pPr>
+            <a:lvl5pPr>
+              <a:defRPr sz="2025" b="0">
+                <a:solidFill>
+                  <a:srgbClr val="566A80"/>
+                </a:solidFill>
+                <a:latin typeface="Arial"/>
+                <a:ea typeface="Arial"/>
+                <a:cs typeface="Arial"/>
+              </a:defRPr>
+            </a:lvl5pPr>
+            <a:lvl6pPr>
+              <a:defRPr sz="2025" b="0">
+                <a:solidFill>
+                  <a:srgbClr val="566A80"/>
+                </a:solidFill>
+                <a:latin typeface="Arial"/>
+                <a:ea typeface="Arial"/>
+                <a:cs typeface="Arial"/>
+              </a:defRPr>
+            </a:lvl6pPr>
+            <a:lvl7pPr>
+              <a:defRPr sz="2025" b="0">
+                <a:solidFill>
+                  <a:srgbClr val="566A80"/>
+                </a:solidFill>
+                <a:latin typeface="Arial"/>
+                <a:ea typeface="Arial"/>
+                <a:cs typeface="Arial"/>
+              </a:defRPr>
+            </a:lvl7pPr>
+            <a:lvl8pPr>
+              <a:defRPr sz="2025" b="0">
+                <a:solidFill>
+                  <a:srgbClr val="566A80"/>
+                </a:solidFill>
+                <a:latin typeface="Arial"/>
+                <a:ea typeface="Arial"/>
+                <a:cs typeface="Arial"/>
+              </a:defRPr>
+            </a:lvl8pPr>
+            <a:lvl9pPr>
+              <a:defRPr sz="2025" b="0">
+                <a:solidFill>
+                  <a:srgbClr val="566A80"/>
+                </a:solidFill>
+                <a:latin typeface="Arial"/>
+                <a:ea typeface="Arial"/>
+                <a:cs typeface="Arial"/>
+              </a:defRPr>
+            </a:lvl9pPr>
+          </a:lstStyle>
+          <a:p xmlns:a="http://schemas.openxmlformats.org/drawingml/2006/main">
+            <a:pPr>
+              <a:defRPr sz="2025" b="0">
+                <a:solidFill>
+                  <a:srgbClr val="566A80"/>
+                </a:solidFill>
+                <a:latin typeface="Arial"/>
+                <a:ea typeface="Arial"/>
+                <a:cs typeface="Arial"/>
+              </a:defRPr>
+            </a:pPr>
+            <a:r>
+              <a:rPr sz="2025" b="0">
+                <a:solidFill>
+                  <a:srgbClr val="566A80"/>
+                </a:solidFill>
+                <a:latin typeface="Arial"/>
+                <a:ea typeface="Arial"/>
+                <a:cs typeface="Arial"/>
+              </a:rPr>
+              <a:t>Очікувана поведінка — PRD.md</a:t>
+            </a:r>
+          </a:p>
+          <a:p xmlns:a="http://schemas.openxmlformats.org/drawingml/2006/main">
+            <a:pPr>
+              <a:defRPr sz="2025" b="0">
+                <a:solidFill>
+                  <a:srgbClr val="566A80"/>
+                </a:solidFill>
+                <a:latin typeface="Arial"/>
+                <a:ea typeface="Arial"/>
+                <a:cs typeface="Arial"/>
+              </a:defRPr>
+            </a:pPr>
+            <a:r>
+              <a:rPr sz="2025" b="0">
+                <a:solidFill>
+                  <a:srgbClr val="566A80"/>
+                </a:solidFill>
+                <a:latin typeface="Arial"/>
+                <a:ea typeface="Arial"/>
+                <a:cs typeface="Arial"/>
+              </a:rPr>
+              <a:t>Керування через UART 115200 8N1</a:t>
+            </a:r>
+          </a:p>
+        </p:txBody>
+      </p:sp>
+      <p:pic>
+        <p:nvPicPr>
+          <p:cNvPr id="8" name="">
+            <a:extLst xmlns:a="http://schemas.openxmlformats.org/drawingml/2006/main">
+              <a:ext uri="{FF2B5EF4-FFF2-40B4-BE49-F238E27FC236}">
+                <a16:creationId xmlns:a16="http://schemas.microsoft.com/office/drawing/2014/main" id="{435BC005-BBFC-4845-8E96-946E809BE84A}"/>
+              </a:ext>
+            </a:extLst>
+          </p:cNvPr>
+          <p:cNvPicPr>
+            <a:picLocks xmlns:a="http://schemas.openxmlformats.org/drawingml/2006/main" noChangeAspect="1"/>
+          </p:cNvPicPr>
+          <p:nvPr/>
+        </p:nvPicPr>
+        <p:blipFill>
+          <a:blip xmlns:r="http://schemas.openxmlformats.org/officeDocument/2006/relationships" xmlns:a="http://schemas.openxmlformats.org/drawingml/2006/main" r:embed="R3ba8d3705248470f"/>
+          <a:stretch xmlns:a="http://schemas.openxmlformats.org/drawingml/2006/main"/>
+        </p:blipFill>
+        <p:spPr>
+          <a:xfrm xmlns:a="http://schemas.openxmlformats.org/drawingml/2006/main">
+            <a:off x="8143875" y="1558925"/>
+            <a:ext cx="3333750" cy="4445000"/>
+          </a:xfrm>
+          <a:prstGeom xmlns:a="http://schemas.openxmlformats.org/drawingml/2006/main" prst="rect">
+            <a:avLst/>
+          </a:prstGeom>
+        </p:spPr>
+      </p:pic>
+      <p:sp>
+        <p:nvSpPr>
+          <p:cNvPr id="9" name="">
+            <a:extLst xmlns:a="http://schemas.openxmlformats.org/drawingml/2006/main">
+              <a:ext uri="{FF2B5EF4-FFF2-40B4-BE49-F238E27FC236}">
+                <a16:creationId xmlns:a16="http://schemas.microsoft.com/office/drawing/2014/main" id="{BFD0DAD6-9826-4B1C-B16A-668285B8D544}"/>
+              </a:ext>
+            </a:extLst>
+          </p:cNvPr>
+          <p:cNvSpPr>
+            <a:spLocks xmlns:a="http://schemas.openxmlformats.org/drawingml/2006/main" noGrp="1"/>
+          </p:cNvSpPr>
+          <p:nvPr/>
+        </p:nvSpPr>
+        <p:spPr>
+          <a:xfrm xmlns:a="http://schemas.openxmlformats.org/drawingml/2006/main">
+            <a:off x="11220450" y="6438900"/>
+            <a:ext cx="457200" cy="247650"/>
+          </a:xfrm>
+          <a:prstGeom xmlns:a="http://schemas.openxmlformats.org/drawingml/2006/main" prst="rect">
+            <a:avLst/>
+          </a:prstGeom>
+          <a:noFill xmlns:a="http://schemas.openxmlformats.org/drawingml/2006/main"/>
+          <a:ln xmlns:a="http://schemas.openxmlformats.org/drawingml/2006/main" w="0">
+            <a:noFill/>
+          </a:ln>
+        </p:spPr>
+        <p:txBody>
+          <a:bodyPr xmlns:a="http://schemas.openxmlformats.org/drawingml/2006/main"/>
+          <a:lstStyle xmlns:a="http://schemas.openxmlformats.org/drawingml/2006/main">
+            <a:defPPr>
+              <a:defRPr sz="1350" b="0">
+                <a:solidFill>
+                  <a:srgbClr val="566A80"/>
+                </a:solidFill>
+                <a:latin typeface="Arial"/>
+                <a:ea typeface="Arial"/>
+                <a:cs typeface="Arial"/>
+              </a:defRPr>
+            </a:defPPr>
+            <a:lvl1pPr>
+              <a:defRPr sz="1350" b="0">
+                <a:solidFill>
+                  <a:srgbClr val="566A80"/>
+                </a:solidFill>
+                <a:latin typeface="Arial"/>
+                <a:ea typeface="Arial"/>
+                <a:cs typeface="Arial"/>
+              </a:defRPr>
+            </a:lvl1pPr>
+            <a:lvl2pPr>
+              <a:defRPr sz="1350" b="0">
+                <a:solidFill>
+                  <a:srgbClr val="566A80"/>
+                </a:solidFill>
+                <a:latin typeface="Arial"/>
+                <a:ea typeface="Arial"/>
+                <a:cs typeface="Arial"/>
+              </a:defRPr>
+            </a:lvl2pPr>
+            <a:lvl3pPr>
+              <a:defRPr sz="1350" b="0">
+                <a:solidFill>
+                  <a:srgbClr val="566A80"/>
+                </a:solidFill>
+                <a:latin typeface="Arial"/>
+                <a:ea typeface="Arial"/>
+                <a:cs typeface="Arial"/>
+              </a:defRPr>
+            </a:lvl3pPr>
+            <a:lvl4pPr>
+              <a:defRPr sz="1350" b="0">
+                <a:solidFill>
+                  <a:srgbClr val="566A80"/>
+                </a:solidFill>
+                <a:latin typeface="Arial"/>
+                <a:ea typeface="Arial"/>
+                <a:cs typeface="Arial"/>
+              </a:defRPr>
+            </a:lvl4pPr>
+            <a:lvl5pPr>
+              <a:defRPr sz="1350" b="0">
+                <a:solidFill>
+                  <a:srgbClr val="566A80"/>
+                </a:solidFill>
+                <a:latin typeface="Arial"/>
+                <a:ea typeface="Arial"/>
+                <a:cs typeface="Arial"/>
+              </a:defRPr>
+            </a:lvl5pPr>
+            <a:lvl6pPr>
+              <a:defRPr sz="1350" b="0">
+                <a:solidFill>
+                  <a:srgbClr val="566A80"/>
+                </a:solidFill>
+                <a:latin typeface="Arial"/>
+                <a:ea typeface="Arial"/>
+                <a:cs typeface="Arial"/>
+              </a:defRPr>
+            </a:lvl6pPr>
+            <a:lvl7pPr>
+              <a:defRPr sz="1350" b="0">
+                <a:solidFill>
+                  <a:srgbClr val="566A80"/>
+                </a:solidFill>
+                <a:latin typeface="Arial"/>
+                <a:ea typeface="Arial"/>
+                <a:cs typeface="Arial"/>
+              </a:defRPr>
+            </a:lvl7pPr>
+            <a:lvl8pPr>
+              <a:defRPr sz="1350" b="0">
+                <a:solidFill>
+                  <a:srgbClr val="566A80"/>
+                </a:solidFill>
+                <a:latin typeface="Arial"/>
+                <a:ea typeface="Arial"/>
+                <a:cs typeface="Arial"/>
+              </a:defRPr>
+            </a:lvl8pPr>
+            <a:lvl9pPr>
+              <a:defRPr sz="1350" b="0">
+                <a:solidFill>
+                  <a:srgbClr val="566A80"/>
+                </a:solidFill>
+                <a:latin typeface="Arial"/>
+                <a:ea typeface="Arial"/>
+                <a:cs typeface="Arial"/>
+              </a:defRPr>
+            </a:lvl9pPr>
+          </a:lstStyle>
+          <a:p xmlns:a="http://schemas.openxmlformats.org/drawingml/2006/main">
+            <a:pPr>
+              <a:defRPr sz="1350" b="0">
+                <a:solidFill>
+                  <a:srgbClr val="566A80"/>
+                </a:solidFill>
+                <a:latin typeface="Arial"/>
+                <a:ea typeface="Arial"/>
+                <a:cs typeface="Arial"/>
+              </a:defRPr>
+            </a:pPr>
+            <a:r>
+              <a:rPr sz="1350" b="0">
+                <a:solidFill>
+                  <a:srgbClr val="566A80"/>
+                </a:solidFill>
+                <a:latin typeface="Arial"/>
+                <a:ea typeface="Arial"/>
+                <a:cs typeface="Arial"/>
+              </a:rPr>
+              <a:t>02</a:t>
+            </a:r>
+          </a:p>
+        </p:txBody>
+      </p:sp>
+    </p:spTree>
+    <p:extLst>
+      <p:ext uri="{BB962C8B-B14F-4D97-AF65-F5344CB8AC3E}">
+        <p14:creationId xmlns:p14="http://schemas.microsoft.com/office/powerpoint/2010/main" val="1174451075"/>
+      </p:ext>
+    </p:extLst>
+  </p:cSld>
+</p:sld>
+</file>
+
+<file path=ppt/slides/slide3.xml><?xml version="1.0" encoding="utf-8"?>
 <p:sld xmlns:p="http://schemas.openxmlformats.org/presentationml/2006/main">
   <p:cSld>
     <p:bg>
@@ -4903,7 +5950,7 @@
                 <a:ea typeface="Arial"/>
                 <a:cs typeface="Arial"/>
               </a:rPr>
-              <a:t>П’ять обраних фіч</a:t>
+              <a:t>Функції під тестуванням</a:t>
             </a:r>
           </a:p>
         </p:txBody>
@@ -5059,7 +6106,7 @@
                 <a:ea typeface="Arial"/>
                 <a:cs typeface="Arial"/>
               </a:rPr>
-              <a:t>02</a:t>
+              <a:t>03</a:t>
             </a:r>
           </a:p>
         </p:txBody>
@@ -5194,7 +6241,7 @@
                           <a:ea typeface="Arial"/>
                           <a:cs typeface="Arial"/>
                         </a:rPr>
-                        <a:t>Кейсів / Auto</a:t>
+                        <a:t>Auto-кейси</a:t>
                       </a:r>
                     </a:p>
                   </a:txBody>
@@ -5316,7 +6363,7 @@
                           <a:ea typeface="Arial"/>
                           <a:cs typeface="Arial"/>
                         </a:rPr>
-                        <a:t>10 / 8</a:t>
+                        <a:t>8</a:t>
                       </a:r>
                     </a:p>
                   </a:txBody>
@@ -5432,7 +6479,7 @@
                           <a:ea typeface="Arial"/>
                           <a:cs typeface="Arial"/>
                         </a:rPr>
-                        <a:t>9 / 7</a:t>
+                        <a:t>7</a:t>
                       </a:r>
                     </a:p>
                   </a:txBody>
@@ -5548,7 +6595,7 @@
                           <a:ea typeface="Arial"/>
                           <a:cs typeface="Arial"/>
                         </a:rPr>
-                        <a:t>5 / 5</a:t>
+                        <a:t>5</a:t>
                       </a:r>
                     </a:p>
                   </a:txBody>
@@ -5664,7 +6711,7 @@
                           <a:ea typeface="Arial"/>
                           <a:cs typeface="Arial"/>
                         </a:rPr>
-                        <a:t>6 / 6</a:t>
+                        <a:t>6</a:t>
                       </a:r>
                     </a:p>
                   </a:txBody>
@@ -5780,7 +6827,7 @@
                           <a:ea typeface="Arial"/>
                           <a:cs typeface="Arial"/>
                         </a:rPr>
-                        <a:t>6 / 6</a:t>
+                        <a:t>6</a:t>
                       </a:r>
                     </a:p>
                   </a:txBody>
@@ -5958,163 +7005,7 @@
                 <a:ea typeface="Arial"/>
                 <a:cs typeface="Arial"/>
               </a:rPr>
-              <a:t>36 кейсів: 32 Auto та 4 Manual</a:t>
-            </a:r>
-          </a:p>
-        </p:txBody>
-      </p:sp>
-      <p:sp>
-        <p:nvSpPr>
-          <p:cNvPr id="6" name="">
-            <a:extLst xmlns:a="http://schemas.openxmlformats.org/drawingml/2006/main">
-              <a:ext uri="{FF2B5EF4-FFF2-40B4-BE49-F238E27FC236}">
-                <a16:creationId xmlns:a16="http://schemas.microsoft.com/office/drawing/2014/main" id="{FFC8A8B3-D2B0-4A1B-AABB-86EAEB55E3FD}"/>
-              </a:ext>
-            </a:extLst>
-          </p:cNvPr>
-          <p:cNvSpPr>
-            <a:spLocks xmlns:a="http://schemas.openxmlformats.org/drawingml/2006/main" noGrp="1"/>
-          </p:cNvSpPr>
-          <p:nvPr/>
-        </p:nvSpPr>
-        <p:spPr>
-          <a:xfrm xmlns:a="http://schemas.openxmlformats.org/drawingml/2006/main">
-            <a:off x="609600" y="5924550"/>
-            <a:ext cx="10668000" cy="447675"/>
-          </a:xfrm>
-          <a:prstGeom xmlns:a="http://schemas.openxmlformats.org/drawingml/2006/main" prst="rect">
-            <a:avLst/>
-          </a:prstGeom>
-          <a:noFill xmlns:a="http://schemas.openxmlformats.org/drawingml/2006/main"/>
-          <a:ln xmlns:a="http://schemas.openxmlformats.org/drawingml/2006/main" w="0">
-            <a:noFill/>
-          </a:ln>
-        </p:spPr>
-        <p:txBody>
-          <a:bodyPr xmlns:a="http://schemas.openxmlformats.org/drawingml/2006/main"/>
-          <a:lstStyle xmlns:a="http://schemas.openxmlformats.org/drawingml/2006/main">
-            <a:defPPr>
-              <a:defRPr sz="1800" b="0">
-                <a:solidFill>
-                  <a:srgbClr val="566A80"/>
-                </a:solidFill>
-                <a:latin typeface="Arial"/>
-                <a:ea typeface="Arial"/>
-                <a:cs typeface="Arial"/>
-              </a:defRPr>
-            </a:defPPr>
-            <a:lvl1pPr>
-              <a:defRPr sz="1800" b="0">
-                <a:solidFill>
-                  <a:srgbClr val="566A80"/>
-                </a:solidFill>
-                <a:latin typeface="Arial"/>
-                <a:ea typeface="Arial"/>
-                <a:cs typeface="Arial"/>
-              </a:defRPr>
-            </a:lvl1pPr>
-            <a:lvl2pPr>
-              <a:defRPr sz="1800" b="0">
-                <a:solidFill>
-                  <a:srgbClr val="566A80"/>
-                </a:solidFill>
-                <a:latin typeface="Arial"/>
-                <a:ea typeface="Arial"/>
-                <a:cs typeface="Arial"/>
-              </a:defRPr>
-            </a:lvl2pPr>
-            <a:lvl3pPr>
-              <a:defRPr sz="1800" b="0">
-                <a:solidFill>
-                  <a:srgbClr val="566A80"/>
-                </a:solidFill>
-                <a:latin typeface="Arial"/>
-                <a:ea typeface="Arial"/>
-                <a:cs typeface="Arial"/>
-              </a:defRPr>
-            </a:lvl3pPr>
-            <a:lvl4pPr>
-              <a:defRPr sz="1800" b="0">
-                <a:solidFill>
-                  <a:srgbClr val="566A80"/>
-                </a:solidFill>
-                <a:latin typeface="Arial"/>
-                <a:ea typeface="Arial"/>
-                <a:cs typeface="Arial"/>
-              </a:defRPr>
-            </a:lvl4pPr>
-            <a:lvl5pPr>
-              <a:defRPr sz="1800" b="0">
-                <a:solidFill>
-                  <a:srgbClr val="566A80"/>
-                </a:solidFill>
-                <a:latin typeface="Arial"/>
-                <a:ea typeface="Arial"/>
-                <a:cs typeface="Arial"/>
-              </a:defRPr>
-            </a:lvl5pPr>
-            <a:lvl6pPr>
-              <a:defRPr sz="1800" b="0">
-                <a:solidFill>
-                  <a:srgbClr val="566A80"/>
-                </a:solidFill>
-                <a:latin typeface="Arial"/>
-                <a:ea typeface="Arial"/>
-                <a:cs typeface="Arial"/>
-              </a:defRPr>
-            </a:lvl6pPr>
-            <a:lvl7pPr>
-              <a:defRPr sz="1800" b="0">
-                <a:solidFill>
-                  <a:srgbClr val="566A80"/>
-                </a:solidFill>
-                <a:latin typeface="Arial"/>
-                <a:ea typeface="Arial"/>
-                <a:cs typeface="Arial"/>
-              </a:defRPr>
-            </a:lvl7pPr>
-            <a:lvl8pPr>
-              <a:defRPr sz="1800" b="0">
-                <a:solidFill>
-                  <a:srgbClr val="566A80"/>
-                </a:solidFill>
-                <a:latin typeface="Arial"/>
-                <a:ea typeface="Arial"/>
-                <a:cs typeface="Arial"/>
-              </a:defRPr>
-            </a:lvl8pPr>
-            <a:lvl9pPr>
-              <a:defRPr sz="1800" b="0">
-                <a:solidFill>
-                  <a:srgbClr val="566A80"/>
-                </a:solidFill>
-                <a:latin typeface="Arial"/>
-                <a:ea typeface="Arial"/>
-                <a:cs typeface="Arial"/>
-              </a:defRPr>
-            </a:lvl9pPr>
-          </a:lstStyle>
-          <a:p xmlns:a="http://schemas.openxmlformats.org/drawingml/2006/main">
-            <a:pPr>
-              <a:defRPr sz="1800" b="0">
-                <a:solidFill>
-                  <a:srgbClr val="566A80"/>
-                </a:solidFill>
-                <a:latin typeface="Arial"/>
-                <a:ea typeface="Arial"/>
-                <a:cs typeface="Arial"/>
-              </a:defRPr>
-            </a:pPr>
-            <a:r>
-              <a:rPr sz="1800" b="0">
-                <a:solidFill>
-                  <a:srgbClr val="566A80"/>
-                </a:solidFill>
-                <a:latin typeface="Arial"/>
-                <a:ea typeface="Arial"/>
-                <a:cs typeface="Arial"/>
-              </a:rPr>
-              <a:t>Обсяг технічної здачі за уточненням куратора; прогалини PRD наведені в матриці.</a:t>
+              <a:t>32 автоматизовані кейси</a:t>
             </a:r>
           </a:p>
         </p:txBody>
@@ -6129,7 +7020,7 @@
 </p:sld>
 </file>
 
-<file path=ppt/slides/slide3.xml><?xml version="1.0" encoding="utf-8"?>
+<file path=ppt/slides/slide4.xml><?xml version="1.0" encoding="utf-8"?>
 <p:sld xmlns:p="http://schemas.openxmlformats.org/presentationml/2006/main">
   <p:cSld>
     <p:bg>
@@ -6455,7 +7346,7 @@
                 <a:ea typeface="Arial"/>
                 <a:cs typeface="Arial"/>
               </a:rPr>
-              <a:t>03</a:t>
+              <a:t>04</a:t>
             </a:r>
           </a:p>
         </p:txBody>
@@ -7631,7 +8522,7 @@
 </p:sld>
 </file>
 
-<file path=ppt/slides/slide4.xml><?xml version="1.0" encoding="utf-8"?>
+<file path=ppt/slides/slide5.xml><?xml version="1.0" encoding="utf-8"?>
 <p:sld xmlns:p="http://schemas.openxmlformats.org/presentationml/2006/main">
   <p:cSld>
     <p:bg>
@@ -7957,7 +8848,7 @@
                 <a:ea typeface="Arial"/>
                 <a:cs typeface="Arial"/>
               </a:rPr>
-              <a:t>04</a:t>
+              <a:t>05</a:t>
             </a:r>
           </a:p>
         </p:txBody>
@@ -8818,7 +9709,7 @@
 </p:sld>
 </file>
 
-<file path=ppt/slides/slide5.xml><?xml version="1.0" encoding="utf-8"?>
+<file path=ppt/slides/slide6.xml><?xml version="1.0" encoding="utf-8"?>
 <p:sld xmlns:p="http://schemas.openxmlformats.org/presentationml/2006/main">
   <p:cSld>
     <p:bg>
@@ -9144,7 +10035,7 @@
                 <a:ea typeface="Arial"/>
                 <a:cs typeface="Arial"/>
               </a:rPr>
-              <a:t>05</a:t>
+              <a:t>06</a:t>
             </a:r>
           </a:p>
         </p:txBody>
@@ -10081,7 +10972,7 @@
                 <a:ea typeface="Arial"/>
                 <a:cs typeface="Arial"/>
               </a:rPr>
-              <a:t>N/A: функція не застосовується до конкретної версії.</a:t>
+              <a:t>N/A — сценарії, які не застосовуються до цієї версії.</a:t>
             </a:r>
           </a:p>
           <a:p xmlns:a="http://schemas.openxmlformats.org/drawingml/2006/main">
@@ -10105,162 +10996,6 @@
                 <a:cs typeface="Arial"/>
               </a:rPr>
               <a:t>Повторні відтворення не збільшують підсумок основних прогонів.</a:t>
-            </a:r>
-          </a:p>
-        </p:txBody>
-      </p:sp>
-      <p:sp>
-        <p:nvSpPr>
-          <p:cNvPr id="7" name="">
-            <a:extLst xmlns:a="http://schemas.openxmlformats.org/drawingml/2006/main">
-              <a:ext uri="{FF2B5EF4-FFF2-40B4-BE49-F238E27FC236}">
-                <a16:creationId xmlns:a16="http://schemas.microsoft.com/office/drawing/2014/main" id="{80D367B3-8D90-4056-A939-75A66D4F2965}"/>
-              </a:ext>
-            </a:extLst>
-          </p:cNvPr>
-          <p:cNvSpPr>
-            <a:spLocks xmlns:a="http://schemas.openxmlformats.org/drawingml/2006/main" noGrp="1"/>
-          </p:cNvSpPr>
-          <p:nvPr/>
-        </p:nvSpPr>
-        <p:spPr>
-          <a:xfrm xmlns:a="http://schemas.openxmlformats.org/drawingml/2006/main">
-            <a:off x="609600" y="5962650"/>
-            <a:ext cx="10477500" cy="419100"/>
-          </a:xfrm>
-          <a:prstGeom xmlns:a="http://schemas.openxmlformats.org/drawingml/2006/main" prst="rect">
-            <a:avLst/>
-          </a:prstGeom>
-          <a:noFill xmlns:a="http://schemas.openxmlformats.org/drawingml/2006/main"/>
-          <a:ln xmlns:a="http://schemas.openxmlformats.org/drawingml/2006/main" w="0">
-            <a:noFill/>
-          </a:ln>
-        </p:spPr>
-        <p:txBody>
-          <a:bodyPr xmlns:a="http://schemas.openxmlformats.org/drawingml/2006/main"/>
-          <a:lstStyle xmlns:a="http://schemas.openxmlformats.org/drawingml/2006/main">
-            <a:defPPr>
-              <a:defRPr sz="2025" b="1">
-                <a:solidFill>
-                  <a:srgbClr val="182D45"/>
-                </a:solidFill>
-                <a:latin typeface="Arial"/>
-                <a:ea typeface="Arial"/>
-                <a:cs typeface="Arial"/>
-              </a:defRPr>
-            </a:defPPr>
-            <a:lvl1pPr>
-              <a:defRPr sz="2025" b="1">
-                <a:solidFill>
-                  <a:srgbClr val="182D45"/>
-                </a:solidFill>
-                <a:latin typeface="Arial"/>
-                <a:ea typeface="Arial"/>
-                <a:cs typeface="Arial"/>
-              </a:defRPr>
-            </a:lvl1pPr>
-            <a:lvl2pPr>
-              <a:defRPr sz="2025" b="1">
-                <a:solidFill>
-                  <a:srgbClr val="182D45"/>
-                </a:solidFill>
-                <a:latin typeface="Arial"/>
-                <a:ea typeface="Arial"/>
-                <a:cs typeface="Arial"/>
-              </a:defRPr>
-            </a:lvl2pPr>
-            <a:lvl3pPr>
-              <a:defRPr sz="2025" b="1">
-                <a:solidFill>
-                  <a:srgbClr val="182D45"/>
-                </a:solidFill>
-                <a:latin typeface="Arial"/>
-                <a:ea typeface="Arial"/>
-                <a:cs typeface="Arial"/>
-              </a:defRPr>
-            </a:lvl3pPr>
-            <a:lvl4pPr>
-              <a:defRPr sz="2025" b="1">
-                <a:solidFill>
-                  <a:srgbClr val="182D45"/>
-                </a:solidFill>
-                <a:latin typeface="Arial"/>
-                <a:ea typeface="Arial"/>
-                <a:cs typeface="Arial"/>
-              </a:defRPr>
-            </a:lvl4pPr>
-            <a:lvl5pPr>
-              <a:defRPr sz="2025" b="1">
-                <a:solidFill>
-                  <a:srgbClr val="182D45"/>
-                </a:solidFill>
-                <a:latin typeface="Arial"/>
-                <a:ea typeface="Arial"/>
-                <a:cs typeface="Arial"/>
-              </a:defRPr>
-            </a:lvl5pPr>
-            <a:lvl6pPr>
-              <a:defRPr sz="2025" b="1">
-                <a:solidFill>
-                  <a:srgbClr val="182D45"/>
-                </a:solidFill>
-                <a:latin typeface="Arial"/>
-                <a:ea typeface="Arial"/>
-                <a:cs typeface="Arial"/>
-              </a:defRPr>
-            </a:lvl6pPr>
-            <a:lvl7pPr>
-              <a:defRPr sz="2025" b="1">
-                <a:solidFill>
-                  <a:srgbClr val="182D45"/>
-                </a:solidFill>
-                <a:latin typeface="Arial"/>
-                <a:ea typeface="Arial"/>
-                <a:cs typeface="Arial"/>
-              </a:defRPr>
-            </a:lvl7pPr>
-            <a:lvl8pPr>
-              <a:defRPr sz="2025" b="1">
-                <a:solidFill>
-                  <a:srgbClr val="182D45"/>
-                </a:solidFill>
-                <a:latin typeface="Arial"/>
-                <a:ea typeface="Arial"/>
-                <a:cs typeface="Arial"/>
-              </a:defRPr>
-            </a:lvl8pPr>
-            <a:lvl9pPr>
-              <a:defRPr sz="2025" b="1">
-                <a:solidFill>
-                  <a:srgbClr val="182D45"/>
-                </a:solidFill>
-                <a:latin typeface="Arial"/>
-                <a:ea typeface="Arial"/>
-                <a:cs typeface="Arial"/>
-              </a:defRPr>
-            </a:lvl9pPr>
-          </a:lstStyle>
-          <a:p xmlns:a="http://schemas.openxmlformats.org/drawingml/2006/main">
-            <a:pPr>
-              <a:defRPr sz="2025" b="1">
-                <a:solidFill>
-                  <a:srgbClr val="182D45"/>
-                </a:solidFill>
-                <a:latin typeface="Arial"/>
-                <a:ea typeface="Arial"/>
-                <a:cs typeface="Arial"/>
-              </a:defRPr>
-            </a:pPr>
-            <a:r>
-              <a:rPr sz="2025" b="1">
-                <a:solidFill>
-                  <a:srgbClr val="182D45"/>
-                </a:solidFill>
-                <a:latin typeface="Arial"/>
-                <a:ea typeface="Arial"/>
-                <a:cs typeface="Arial"/>
-              </a:rPr>
-              <a:t>4 ручні кейси на кожній версії: Not Run</a:t>
             </a:r>
           </a:p>
         </p:txBody>
@@ -10275,7 +11010,7 @@
 </p:sld>
 </file>
 
-<file path=ppt/slides/slide6.xml><?xml version="1.0" encoding="utf-8"?>
+<file path=ppt/slides/slide7.xml><?xml version="1.0" encoding="utf-8"?>
 <p:sld xmlns:p="http://schemas.openxmlformats.org/presentationml/2006/main">
   <p:cSld>
     <p:bg>
@@ -10601,7 +11336,7 @@
                 <a:ea typeface="Arial"/>
                 <a:cs typeface="Arial"/>
               </a:rPr>
-              <a:t>06</a:t>
+              <a:t>07</a:t>
             </a:r>
           </a:p>
         </p:txBody>
@@ -11884,1467 +12619,6 @@
     <p:extLst>
       <p:ext uri="{BB962C8B-B14F-4D97-AF65-F5344CB8AC3E}">
         <p14:creationId xmlns:p14="http://schemas.microsoft.com/office/powerpoint/2010/main" val="353253978"/>
-      </p:ext>
-    </p:extLst>
-  </p:cSld>
-</p:sld>
-</file>
-
-<file path=ppt/slides/slide7.xml><?xml version="1.0" encoding="utf-8"?>
-<p:sld xmlns:p="http://schemas.openxmlformats.org/presentationml/2006/main">
-  <p:cSld>
-    <p:bg>
-      <p:bgPr>
-        <a:solidFill xmlns:a="http://schemas.openxmlformats.org/drawingml/2006/main">
-          <a:srgbClr val="FFFFFF"/>
-        </a:solidFill>
-      </p:bgPr>
-    </p:bg>
-    <p:spTree>
-      <p:nvGrpSpPr>
-        <p:cNvPr id="1" name=""/>
-        <p:cNvGrpSpPr/>
-        <p:nvPr/>
-      </p:nvGrpSpPr>
-      <p:grpSpPr>
-        <a:xfrm xmlns:a="http://schemas.openxmlformats.org/drawingml/2006/main"/>
-      </p:grpSpPr>
-      <p:sp>
-        <p:nvSpPr>
-          <p:cNvPr id="2" name="">
-            <a:extLst xmlns:a="http://schemas.openxmlformats.org/drawingml/2006/main">
-              <a:ext uri="{FF2B5EF4-FFF2-40B4-BE49-F238E27FC236}">
-                <a16:creationId xmlns:a16="http://schemas.microsoft.com/office/drawing/2014/main" id="{F95E8A6C-90D8-4805-AF7F-70055D7C34D7}"/>
-              </a:ext>
-            </a:extLst>
-          </p:cNvPr>
-          <p:cNvSpPr>
-            <a:spLocks xmlns:a="http://schemas.openxmlformats.org/drawingml/2006/main" noGrp="1"/>
-          </p:cNvSpPr>
-          <p:nvPr/>
-        </p:nvSpPr>
-        <p:spPr>
-          <a:xfrm xmlns:a="http://schemas.openxmlformats.org/drawingml/2006/main">
-            <a:off x="609600" y="381000"/>
-            <a:ext cx="10972800" cy="895350"/>
-          </a:xfrm>
-          <a:prstGeom xmlns:a="http://schemas.openxmlformats.org/drawingml/2006/main" prst="rect">
-            <a:avLst/>
-          </a:prstGeom>
-          <a:noFill xmlns:a="http://schemas.openxmlformats.org/drawingml/2006/main"/>
-          <a:ln xmlns:a="http://schemas.openxmlformats.org/drawingml/2006/main" w="0">
-            <a:noFill/>
-          </a:ln>
-        </p:spPr>
-        <p:txBody>
-          <a:bodyPr xmlns:a="http://schemas.openxmlformats.org/drawingml/2006/main"/>
-          <a:lstStyle xmlns:a="http://schemas.openxmlformats.org/drawingml/2006/main">
-            <a:defPPr>
-              <a:defRPr sz="3300" b="1">
-                <a:solidFill>
-                  <a:srgbClr val="182D45"/>
-                </a:solidFill>
-                <a:latin typeface="Arial"/>
-                <a:ea typeface="Arial"/>
-                <a:cs typeface="Arial"/>
-              </a:defRPr>
-            </a:defPPr>
-            <a:lvl1pPr>
-              <a:defRPr sz="3300" b="1">
-                <a:solidFill>
-                  <a:srgbClr val="182D45"/>
-                </a:solidFill>
-                <a:latin typeface="Arial"/>
-                <a:ea typeface="Arial"/>
-                <a:cs typeface="Arial"/>
-              </a:defRPr>
-            </a:lvl1pPr>
-            <a:lvl2pPr>
-              <a:defRPr sz="3300" b="1">
-                <a:solidFill>
-                  <a:srgbClr val="182D45"/>
-                </a:solidFill>
-                <a:latin typeface="Arial"/>
-                <a:ea typeface="Arial"/>
-                <a:cs typeface="Arial"/>
-              </a:defRPr>
-            </a:lvl2pPr>
-            <a:lvl3pPr>
-              <a:defRPr sz="3300" b="1">
-                <a:solidFill>
-                  <a:srgbClr val="182D45"/>
-                </a:solidFill>
-                <a:latin typeface="Arial"/>
-                <a:ea typeface="Arial"/>
-                <a:cs typeface="Arial"/>
-              </a:defRPr>
-            </a:lvl3pPr>
-            <a:lvl4pPr>
-              <a:defRPr sz="3300" b="1">
-                <a:solidFill>
-                  <a:srgbClr val="182D45"/>
-                </a:solidFill>
-                <a:latin typeface="Arial"/>
-                <a:ea typeface="Arial"/>
-                <a:cs typeface="Arial"/>
-              </a:defRPr>
-            </a:lvl4pPr>
-            <a:lvl5pPr>
-              <a:defRPr sz="3300" b="1">
-                <a:solidFill>
-                  <a:srgbClr val="182D45"/>
-                </a:solidFill>
-                <a:latin typeface="Arial"/>
-                <a:ea typeface="Arial"/>
-                <a:cs typeface="Arial"/>
-              </a:defRPr>
-            </a:lvl5pPr>
-            <a:lvl6pPr>
-              <a:defRPr sz="3300" b="1">
-                <a:solidFill>
-                  <a:srgbClr val="182D45"/>
-                </a:solidFill>
-                <a:latin typeface="Arial"/>
-                <a:ea typeface="Arial"/>
-                <a:cs typeface="Arial"/>
-              </a:defRPr>
-            </a:lvl6pPr>
-            <a:lvl7pPr>
-              <a:defRPr sz="3300" b="1">
-                <a:solidFill>
-                  <a:srgbClr val="182D45"/>
-                </a:solidFill>
-                <a:latin typeface="Arial"/>
-                <a:ea typeface="Arial"/>
-                <a:cs typeface="Arial"/>
-              </a:defRPr>
-            </a:lvl7pPr>
-            <a:lvl8pPr>
-              <a:defRPr sz="3300" b="1">
-                <a:solidFill>
-                  <a:srgbClr val="182D45"/>
-                </a:solidFill>
-                <a:latin typeface="Arial"/>
-                <a:ea typeface="Arial"/>
-                <a:cs typeface="Arial"/>
-              </a:defRPr>
-            </a:lvl8pPr>
-            <a:lvl9pPr>
-              <a:defRPr sz="3300" b="1">
-                <a:solidFill>
-                  <a:srgbClr val="182D45"/>
-                </a:solidFill>
-                <a:latin typeface="Arial"/>
-                <a:ea typeface="Arial"/>
-                <a:cs typeface="Arial"/>
-              </a:defRPr>
-            </a:lvl9pPr>
-          </a:lstStyle>
-          <a:p xmlns:a="http://schemas.openxmlformats.org/drawingml/2006/main">
-            <a:pPr>
-              <a:defRPr sz="3300" b="1">
-                <a:solidFill>
-                  <a:srgbClr val="182D45"/>
-                </a:solidFill>
-                <a:latin typeface="Arial"/>
-                <a:ea typeface="Arial"/>
-                <a:cs typeface="Arial"/>
-              </a:defRPr>
-            </a:pPr>
-            <a:r>
-              <a:rPr sz="3300" b="1">
-                <a:solidFill>
-                  <a:srgbClr val="182D45"/>
-                </a:solidFill>
-                <a:latin typeface="Arial"/>
-                <a:ea typeface="Arial"/>
-                <a:cs typeface="Arial"/>
-              </a:rPr>
-              <a:t>Наявний alert ID повертає E851</a:t>
-            </a:r>
-          </a:p>
-        </p:txBody>
-      </p:sp>
-      <p:sp>
-        <p:nvSpPr>
-          <p:cNvPr id="3" name="">
-            <a:extLst xmlns:a="http://schemas.openxmlformats.org/drawingml/2006/main">
-              <a:ext uri="{FF2B5EF4-FFF2-40B4-BE49-F238E27FC236}">
-                <a16:creationId xmlns:a16="http://schemas.microsoft.com/office/drawing/2014/main" id="{F0E5F8BF-24E9-4179-866A-AFA4FA32FCDA}"/>
-              </a:ext>
-            </a:extLst>
-          </p:cNvPr>
-          <p:cNvSpPr>
-            <a:spLocks xmlns:a="http://schemas.openxmlformats.org/drawingml/2006/main" noGrp="1"/>
-          </p:cNvSpPr>
-          <p:nvPr/>
-        </p:nvSpPr>
-        <p:spPr>
-          <a:xfrm xmlns:a="http://schemas.openxmlformats.org/drawingml/2006/main">
-            <a:off x="11220450" y="6438900"/>
-            <a:ext cx="457200" cy="247650"/>
-          </a:xfrm>
-          <a:prstGeom xmlns:a="http://schemas.openxmlformats.org/drawingml/2006/main" prst="rect">
-            <a:avLst/>
-          </a:prstGeom>
-          <a:noFill xmlns:a="http://schemas.openxmlformats.org/drawingml/2006/main"/>
-          <a:ln xmlns:a="http://schemas.openxmlformats.org/drawingml/2006/main" w="0">
-            <a:noFill/>
-          </a:ln>
-        </p:spPr>
-        <p:txBody>
-          <a:bodyPr xmlns:a="http://schemas.openxmlformats.org/drawingml/2006/main"/>
-          <a:lstStyle xmlns:a="http://schemas.openxmlformats.org/drawingml/2006/main">
-            <a:defPPr>
-              <a:defRPr sz="1350" b="0">
-                <a:solidFill>
-                  <a:srgbClr val="566A80"/>
-                </a:solidFill>
-                <a:latin typeface="Arial"/>
-                <a:ea typeface="Arial"/>
-                <a:cs typeface="Arial"/>
-              </a:defRPr>
-            </a:defPPr>
-            <a:lvl1pPr>
-              <a:defRPr sz="1350" b="0">
-                <a:solidFill>
-                  <a:srgbClr val="566A80"/>
-                </a:solidFill>
-                <a:latin typeface="Arial"/>
-                <a:ea typeface="Arial"/>
-                <a:cs typeface="Arial"/>
-              </a:defRPr>
-            </a:lvl1pPr>
-            <a:lvl2pPr>
-              <a:defRPr sz="1350" b="0">
-                <a:solidFill>
-                  <a:srgbClr val="566A80"/>
-                </a:solidFill>
-                <a:latin typeface="Arial"/>
-                <a:ea typeface="Arial"/>
-                <a:cs typeface="Arial"/>
-              </a:defRPr>
-            </a:lvl2pPr>
-            <a:lvl3pPr>
-              <a:defRPr sz="1350" b="0">
-                <a:solidFill>
-                  <a:srgbClr val="566A80"/>
-                </a:solidFill>
-                <a:latin typeface="Arial"/>
-                <a:ea typeface="Arial"/>
-                <a:cs typeface="Arial"/>
-              </a:defRPr>
-            </a:lvl3pPr>
-            <a:lvl4pPr>
-              <a:defRPr sz="1350" b="0">
-                <a:solidFill>
-                  <a:srgbClr val="566A80"/>
-                </a:solidFill>
-                <a:latin typeface="Arial"/>
-                <a:ea typeface="Arial"/>
-                <a:cs typeface="Arial"/>
-              </a:defRPr>
-            </a:lvl4pPr>
-            <a:lvl5pPr>
-              <a:defRPr sz="1350" b="0">
-                <a:solidFill>
-                  <a:srgbClr val="566A80"/>
-                </a:solidFill>
-                <a:latin typeface="Arial"/>
-                <a:ea typeface="Arial"/>
-                <a:cs typeface="Arial"/>
-              </a:defRPr>
-            </a:lvl5pPr>
-            <a:lvl6pPr>
-              <a:defRPr sz="1350" b="0">
-                <a:solidFill>
-                  <a:srgbClr val="566A80"/>
-                </a:solidFill>
-                <a:latin typeface="Arial"/>
-                <a:ea typeface="Arial"/>
-                <a:cs typeface="Arial"/>
-              </a:defRPr>
-            </a:lvl6pPr>
-            <a:lvl7pPr>
-              <a:defRPr sz="1350" b="0">
-                <a:solidFill>
-                  <a:srgbClr val="566A80"/>
-                </a:solidFill>
-                <a:latin typeface="Arial"/>
-                <a:ea typeface="Arial"/>
-                <a:cs typeface="Arial"/>
-              </a:defRPr>
-            </a:lvl7pPr>
-            <a:lvl8pPr>
-              <a:defRPr sz="1350" b="0">
-                <a:solidFill>
-                  <a:srgbClr val="566A80"/>
-                </a:solidFill>
-                <a:latin typeface="Arial"/>
-                <a:ea typeface="Arial"/>
-                <a:cs typeface="Arial"/>
-              </a:defRPr>
-            </a:lvl8pPr>
-            <a:lvl9pPr>
-              <a:defRPr sz="1350" b="0">
-                <a:solidFill>
-                  <a:srgbClr val="566A80"/>
-                </a:solidFill>
-                <a:latin typeface="Arial"/>
-                <a:ea typeface="Arial"/>
-                <a:cs typeface="Arial"/>
-              </a:defRPr>
-            </a:lvl9pPr>
-          </a:lstStyle>
-          <a:p xmlns:a="http://schemas.openxmlformats.org/drawingml/2006/main">
-            <a:pPr>
-              <a:defRPr sz="1350" b="0">
-                <a:solidFill>
-                  <a:srgbClr val="566A80"/>
-                </a:solidFill>
-                <a:latin typeface="Arial"/>
-                <a:ea typeface="Arial"/>
-                <a:cs typeface="Arial"/>
-              </a:defRPr>
-            </a:pPr>
-            <a:r>
-              <a:rPr sz="1350" b="0">
-                <a:solidFill>
-                  <a:srgbClr val="566A80"/>
-                </a:solidFill>
-                <a:latin typeface="Arial"/>
-                <a:ea typeface="Arial"/>
-                <a:cs typeface="Arial"/>
-              </a:rPr>
-              <a:t>07</a:t>
-            </a:r>
-          </a:p>
-        </p:txBody>
-      </p:sp>
-      <p:sp>
-        <p:nvSpPr>
-          <p:cNvPr id="4" name="">
-            <a:extLst xmlns:a="http://schemas.openxmlformats.org/drawingml/2006/main">
-              <a:ext uri="{FF2B5EF4-FFF2-40B4-BE49-F238E27FC236}">
-                <a16:creationId xmlns:a16="http://schemas.microsoft.com/office/drawing/2014/main" id="{377BB893-3DE8-4320-8991-ADCEA3A680B7}"/>
-              </a:ext>
-            </a:extLst>
-          </p:cNvPr>
-          <p:cNvSpPr>
-            <a:spLocks xmlns:a="http://schemas.openxmlformats.org/drawingml/2006/main" noGrp="1"/>
-          </p:cNvSpPr>
-          <p:nvPr/>
-        </p:nvSpPr>
-        <p:spPr>
-          <a:xfrm xmlns:a="http://schemas.openxmlformats.org/drawingml/2006/main">
-            <a:off x="609600" y="1457325"/>
-            <a:ext cx="10972800" cy="628650"/>
-          </a:xfrm>
-          <a:prstGeom xmlns:a="http://schemas.openxmlformats.org/drawingml/2006/main" prst="rect">
-            <a:avLst/>
-          </a:prstGeom>
-          <a:noFill xmlns:a="http://schemas.openxmlformats.org/drawingml/2006/main"/>
-          <a:ln xmlns:a="http://schemas.openxmlformats.org/drawingml/2006/main" w="0">
-            <a:noFill/>
-          </a:ln>
-        </p:spPr>
-        <p:txBody>
-          <a:bodyPr xmlns:a="http://schemas.openxmlformats.org/drawingml/2006/main"/>
-          <a:lstStyle xmlns:a="http://schemas.openxmlformats.org/drawingml/2006/main">
-            <a:defPPr>
-              <a:defRPr sz="2250" b="1">
-                <a:solidFill>
-                  <a:srgbClr val="087F8C"/>
-                </a:solidFill>
-                <a:latin typeface="Arial"/>
-                <a:ea typeface="Arial"/>
-                <a:cs typeface="Arial"/>
-              </a:defRPr>
-            </a:defPPr>
-            <a:lvl1pPr>
-              <a:defRPr sz="2250" b="1">
-                <a:solidFill>
-                  <a:srgbClr val="087F8C"/>
-                </a:solidFill>
-                <a:latin typeface="Arial"/>
-                <a:ea typeface="Arial"/>
-                <a:cs typeface="Arial"/>
-              </a:defRPr>
-            </a:lvl1pPr>
-            <a:lvl2pPr>
-              <a:defRPr sz="2250" b="1">
-                <a:solidFill>
-                  <a:srgbClr val="087F8C"/>
-                </a:solidFill>
-                <a:latin typeface="Arial"/>
-                <a:ea typeface="Arial"/>
-                <a:cs typeface="Arial"/>
-              </a:defRPr>
-            </a:lvl2pPr>
-            <a:lvl3pPr>
-              <a:defRPr sz="2250" b="1">
-                <a:solidFill>
-                  <a:srgbClr val="087F8C"/>
-                </a:solidFill>
-                <a:latin typeface="Arial"/>
-                <a:ea typeface="Arial"/>
-                <a:cs typeface="Arial"/>
-              </a:defRPr>
-            </a:lvl3pPr>
-            <a:lvl4pPr>
-              <a:defRPr sz="2250" b="1">
-                <a:solidFill>
-                  <a:srgbClr val="087F8C"/>
-                </a:solidFill>
-                <a:latin typeface="Arial"/>
-                <a:ea typeface="Arial"/>
-                <a:cs typeface="Arial"/>
-              </a:defRPr>
-            </a:lvl4pPr>
-            <a:lvl5pPr>
-              <a:defRPr sz="2250" b="1">
-                <a:solidFill>
-                  <a:srgbClr val="087F8C"/>
-                </a:solidFill>
-                <a:latin typeface="Arial"/>
-                <a:ea typeface="Arial"/>
-                <a:cs typeface="Arial"/>
-              </a:defRPr>
-            </a:lvl5pPr>
-            <a:lvl6pPr>
-              <a:defRPr sz="2250" b="1">
-                <a:solidFill>
-                  <a:srgbClr val="087F8C"/>
-                </a:solidFill>
-                <a:latin typeface="Arial"/>
-                <a:ea typeface="Arial"/>
-                <a:cs typeface="Arial"/>
-              </a:defRPr>
-            </a:lvl6pPr>
-            <a:lvl7pPr>
-              <a:defRPr sz="2250" b="1">
-                <a:solidFill>
-                  <a:srgbClr val="087F8C"/>
-                </a:solidFill>
-                <a:latin typeface="Arial"/>
-                <a:ea typeface="Arial"/>
-                <a:cs typeface="Arial"/>
-              </a:defRPr>
-            </a:lvl7pPr>
-            <a:lvl8pPr>
-              <a:defRPr sz="2250" b="1">
-                <a:solidFill>
-                  <a:srgbClr val="087F8C"/>
-                </a:solidFill>
-                <a:latin typeface="Arial"/>
-                <a:ea typeface="Arial"/>
-                <a:cs typeface="Arial"/>
-              </a:defRPr>
-            </a:lvl8pPr>
-            <a:lvl9pPr>
-              <a:defRPr sz="2250" b="1">
-                <a:solidFill>
-                  <a:srgbClr val="087F8C"/>
-                </a:solidFill>
-                <a:latin typeface="Arial"/>
-                <a:ea typeface="Arial"/>
-                <a:cs typeface="Arial"/>
-              </a:defRPr>
-            </a:lvl9pPr>
-          </a:lstStyle>
-          <a:p xmlns:a="http://schemas.openxmlformats.org/drawingml/2006/main">
-            <a:pPr>
-              <a:defRPr sz="2250" b="1">
-                <a:solidFill>
-                  <a:srgbClr val="087F8C"/>
-                </a:solidFill>
-                <a:latin typeface="Arial"/>
-                <a:ea typeface="Arial"/>
-                <a:cs typeface="Arial"/>
-              </a:defRPr>
-            </a:pPr>
-            <a:r>
-              <a:rPr sz="2250" b="1">
-                <a:solidFill>
-                  <a:srgbClr val="087F8C"/>
-                </a:solidFill>
-                <a:latin typeface="Arial"/>
-                <a:ea typeface="Arial"/>
-                <a:cs typeface="Arial"/>
-              </a:rPr>
-              <a:t>AL-3: ack &lt;id&gt; має підтвердити саме вибраний запис</a:t>
-            </a:r>
-          </a:p>
-        </p:txBody>
-      </p:sp>
-      <p:sp>
-        <p:nvSpPr>
-          <p:cNvPr id="5" name="">
-            <a:extLst xmlns:a="http://schemas.openxmlformats.org/drawingml/2006/main">
-              <a:ext uri="{FF2B5EF4-FFF2-40B4-BE49-F238E27FC236}">
-                <a16:creationId xmlns:a16="http://schemas.microsoft.com/office/drawing/2014/main" id="{B1423082-4FC9-4D69-92CD-A70BA891F3B1}"/>
-              </a:ext>
-            </a:extLst>
-          </p:cNvPr>
-          <p:cNvSpPr>
-            <a:spLocks xmlns:a="http://schemas.openxmlformats.org/drawingml/2006/main" noGrp="1"/>
-          </p:cNvSpPr>
-          <p:nvPr/>
-        </p:nvSpPr>
-        <p:spPr>
-          <a:xfrm xmlns:a="http://schemas.openxmlformats.org/drawingml/2006/main">
-            <a:off x="609600" y="2486025"/>
-            <a:ext cx="5429250" cy="457200"/>
-          </a:xfrm>
-          <a:prstGeom xmlns:a="http://schemas.openxmlformats.org/drawingml/2006/main" prst="rect">
-            <a:avLst/>
-          </a:prstGeom>
-          <a:noFill xmlns:a="http://schemas.openxmlformats.org/drawingml/2006/main"/>
-          <a:ln xmlns:a="http://schemas.openxmlformats.org/drawingml/2006/main" w="0">
-            <a:noFill/>
-          </a:ln>
-        </p:spPr>
-        <p:txBody>
-          <a:bodyPr xmlns:a="http://schemas.openxmlformats.org/drawingml/2006/main"/>
-          <a:lstStyle xmlns:a="http://schemas.openxmlformats.org/drawingml/2006/main">
-            <a:defPPr>
-              <a:defRPr sz="2025" b="1">
-                <a:solidFill>
-                  <a:srgbClr val="182D45"/>
-                </a:solidFill>
-                <a:latin typeface="Arial"/>
-                <a:ea typeface="Arial"/>
-                <a:cs typeface="Arial"/>
-              </a:defRPr>
-            </a:defPPr>
-            <a:lvl1pPr>
-              <a:defRPr sz="2025" b="1">
-                <a:solidFill>
-                  <a:srgbClr val="182D45"/>
-                </a:solidFill>
-                <a:latin typeface="Arial"/>
-                <a:ea typeface="Arial"/>
-                <a:cs typeface="Arial"/>
-              </a:defRPr>
-            </a:lvl1pPr>
-            <a:lvl2pPr>
-              <a:defRPr sz="2025" b="1">
-                <a:solidFill>
-                  <a:srgbClr val="182D45"/>
-                </a:solidFill>
-                <a:latin typeface="Arial"/>
-                <a:ea typeface="Arial"/>
-                <a:cs typeface="Arial"/>
-              </a:defRPr>
-            </a:lvl2pPr>
-            <a:lvl3pPr>
-              <a:defRPr sz="2025" b="1">
-                <a:solidFill>
-                  <a:srgbClr val="182D45"/>
-                </a:solidFill>
-                <a:latin typeface="Arial"/>
-                <a:ea typeface="Arial"/>
-                <a:cs typeface="Arial"/>
-              </a:defRPr>
-            </a:lvl3pPr>
-            <a:lvl4pPr>
-              <a:defRPr sz="2025" b="1">
-                <a:solidFill>
-                  <a:srgbClr val="182D45"/>
-                </a:solidFill>
-                <a:latin typeface="Arial"/>
-                <a:ea typeface="Arial"/>
-                <a:cs typeface="Arial"/>
-              </a:defRPr>
-            </a:lvl4pPr>
-            <a:lvl5pPr>
-              <a:defRPr sz="2025" b="1">
-                <a:solidFill>
-                  <a:srgbClr val="182D45"/>
-                </a:solidFill>
-                <a:latin typeface="Arial"/>
-                <a:ea typeface="Arial"/>
-                <a:cs typeface="Arial"/>
-              </a:defRPr>
-            </a:lvl5pPr>
-            <a:lvl6pPr>
-              <a:defRPr sz="2025" b="1">
-                <a:solidFill>
-                  <a:srgbClr val="182D45"/>
-                </a:solidFill>
-                <a:latin typeface="Arial"/>
-                <a:ea typeface="Arial"/>
-                <a:cs typeface="Arial"/>
-              </a:defRPr>
-            </a:lvl6pPr>
-            <a:lvl7pPr>
-              <a:defRPr sz="2025" b="1">
-                <a:solidFill>
-                  <a:srgbClr val="182D45"/>
-                </a:solidFill>
-                <a:latin typeface="Arial"/>
-                <a:ea typeface="Arial"/>
-                <a:cs typeface="Arial"/>
-              </a:defRPr>
-            </a:lvl7pPr>
-            <a:lvl8pPr>
-              <a:defRPr sz="2025" b="1">
-                <a:solidFill>
-                  <a:srgbClr val="182D45"/>
-                </a:solidFill>
-                <a:latin typeface="Arial"/>
-                <a:ea typeface="Arial"/>
-                <a:cs typeface="Arial"/>
-              </a:defRPr>
-            </a:lvl8pPr>
-            <a:lvl9pPr>
-              <a:defRPr sz="2025" b="1">
-                <a:solidFill>
-                  <a:srgbClr val="182D45"/>
-                </a:solidFill>
-                <a:latin typeface="Arial"/>
-                <a:ea typeface="Arial"/>
-                <a:cs typeface="Arial"/>
-              </a:defRPr>
-            </a:lvl9pPr>
-          </a:lstStyle>
-          <a:p xmlns:a="http://schemas.openxmlformats.org/drawingml/2006/main">
-            <a:pPr>
-              <a:defRPr sz="2025" b="1">
-                <a:solidFill>
-                  <a:srgbClr val="182D45"/>
-                </a:solidFill>
-                <a:latin typeface="Arial"/>
-                <a:ea typeface="Arial"/>
-                <a:cs typeface="Arial"/>
-              </a:defRPr>
-            </a:pPr>
-            <a:r>
-              <a:rPr sz="2025" b="1">
-                <a:solidFill>
-                  <a:srgbClr val="182D45"/>
-                </a:solidFill>
-                <a:latin typeface="Arial"/>
-                <a:ea typeface="Arial"/>
-                <a:cs typeface="Arial"/>
-              </a:rPr>
-              <a:t>Фрагмент фактичного UART-логу</a:t>
-            </a:r>
-          </a:p>
-        </p:txBody>
-      </p:sp>
-      <p:sp>
-        <p:nvSpPr>
-          <p:cNvPr id="6" name="">
-            <a:extLst xmlns:a="http://schemas.openxmlformats.org/drawingml/2006/main">
-              <a:ext uri="{FF2B5EF4-FFF2-40B4-BE49-F238E27FC236}">
-                <a16:creationId xmlns:a16="http://schemas.microsoft.com/office/drawing/2014/main" id="{32DC2477-6945-4733-A62D-4D1FE9ED4682}"/>
-              </a:ext>
-            </a:extLst>
-          </p:cNvPr>
-          <p:cNvSpPr>
-            <a:spLocks xmlns:a="http://schemas.openxmlformats.org/drawingml/2006/main" noGrp="1"/>
-          </p:cNvSpPr>
-          <p:nvPr/>
-        </p:nvSpPr>
-        <p:spPr>
-          <a:xfrm xmlns:a="http://schemas.openxmlformats.org/drawingml/2006/main">
-            <a:off x="609600" y="3124200"/>
-            <a:ext cx="6191250" cy="2095500"/>
-          </a:xfrm>
-          <a:prstGeom xmlns:a="http://schemas.openxmlformats.org/drawingml/2006/main" prst="rect">
-            <a:avLst/>
-          </a:prstGeom>
-          <a:noFill xmlns:a="http://schemas.openxmlformats.org/drawingml/2006/main"/>
-          <a:ln xmlns:a="http://schemas.openxmlformats.org/drawingml/2006/main" w="0">
-            <a:noFill/>
-          </a:ln>
-        </p:spPr>
-        <p:txBody>
-          <a:bodyPr xmlns:a="http://schemas.openxmlformats.org/drawingml/2006/main"/>
-          <a:lstStyle xmlns:a="http://schemas.openxmlformats.org/drawingml/2006/main">
-            <a:defPPr>
-              <a:defRPr sz="1950" b="0">
-                <a:solidFill>
-                  <a:srgbClr val="182D45"/>
-                </a:solidFill>
-                <a:latin typeface="Arial"/>
-                <a:ea typeface="Arial"/>
-                <a:cs typeface="Arial"/>
-              </a:defRPr>
-            </a:defPPr>
-            <a:lvl1pPr>
-              <a:defRPr sz="1950" b="0">
-                <a:solidFill>
-                  <a:srgbClr val="182D45"/>
-                </a:solidFill>
-                <a:latin typeface="Arial"/>
-                <a:ea typeface="Arial"/>
-                <a:cs typeface="Arial"/>
-              </a:defRPr>
-            </a:lvl1pPr>
-            <a:lvl2pPr>
-              <a:defRPr sz="1950" b="0">
-                <a:solidFill>
-                  <a:srgbClr val="182D45"/>
-                </a:solidFill>
-                <a:latin typeface="Arial"/>
-                <a:ea typeface="Arial"/>
-                <a:cs typeface="Arial"/>
-              </a:defRPr>
-            </a:lvl2pPr>
-            <a:lvl3pPr>
-              <a:defRPr sz="1950" b="0">
-                <a:solidFill>
-                  <a:srgbClr val="182D45"/>
-                </a:solidFill>
-                <a:latin typeface="Arial"/>
-                <a:ea typeface="Arial"/>
-                <a:cs typeface="Arial"/>
-              </a:defRPr>
-            </a:lvl3pPr>
-            <a:lvl4pPr>
-              <a:defRPr sz="1950" b="0">
-                <a:solidFill>
-                  <a:srgbClr val="182D45"/>
-                </a:solidFill>
-                <a:latin typeface="Arial"/>
-                <a:ea typeface="Arial"/>
-                <a:cs typeface="Arial"/>
-              </a:defRPr>
-            </a:lvl4pPr>
-            <a:lvl5pPr>
-              <a:defRPr sz="1950" b="0">
-                <a:solidFill>
-                  <a:srgbClr val="182D45"/>
-                </a:solidFill>
-                <a:latin typeface="Arial"/>
-                <a:ea typeface="Arial"/>
-                <a:cs typeface="Arial"/>
-              </a:defRPr>
-            </a:lvl5pPr>
-            <a:lvl6pPr>
-              <a:defRPr sz="1950" b="0">
-                <a:solidFill>
-                  <a:srgbClr val="182D45"/>
-                </a:solidFill>
-                <a:latin typeface="Arial"/>
-                <a:ea typeface="Arial"/>
-                <a:cs typeface="Arial"/>
-              </a:defRPr>
-            </a:lvl6pPr>
-            <a:lvl7pPr>
-              <a:defRPr sz="1950" b="0">
-                <a:solidFill>
-                  <a:srgbClr val="182D45"/>
-                </a:solidFill>
-                <a:latin typeface="Arial"/>
-                <a:ea typeface="Arial"/>
-                <a:cs typeface="Arial"/>
-              </a:defRPr>
-            </a:lvl7pPr>
-            <a:lvl8pPr>
-              <a:defRPr sz="1950" b="0">
-                <a:solidFill>
-                  <a:srgbClr val="182D45"/>
-                </a:solidFill>
-                <a:latin typeface="Arial"/>
-                <a:ea typeface="Arial"/>
-                <a:cs typeface="Arial"/>
-              </a:defRPr>
-            </a:lvl8pPr>
-            <a:lvl9pPr>
-              <a:defRPr sz="1950" b="0">
-                <a:solidFill>
-                  <a:srgbClr val="182D45"/>
-                </a:solidFill>
-                <a:latin typeface="Arial"/>
-                <a:ea typeface="Arial"/>
-                <a:cs typeface="Arial"/>
-              </a:defRPr>
-            </a:lvl9pPr>
-          </a:lstStyle>
-          <a:p xmlns:a="http://schemas.openxmlformats.org/drawingml/2006/main">
-            <a:pPr>
-              <a:defRPr sz="1950" b="0">
-                <a:solidFill>
-                  <a:srgbClr val="182D45"/>
-                </a:solidFill>
-                <a:latin typeface="Arial"/>
-                <a:ea typeface="Arial"/>
-                <a:cs typeface="Arial"/>
-              </a:defRPr>
-            </a:pPr>
-            <a:r>
-              <a:rPr sz="1950" b="0">
-                <a:solidFill>
-                  <a:srgbClr val="182D45"/>
-                </a:solidFill>
-                <a:latin typeface="Arial"/>
-                <a:ea typeface="Arial"/>
-                <a:cs typeface="Arial"/>
-              </a:rPr>
-              <a:t>[CIC #1 INFO] test: test alert</a:t>
-            </a:r>
-          </a:p>
-          <a:p xmlns:a="http://schemas.openxmlformats.org/drawingml/2006/main">
-            <a:pPr>
-              <a:defRPr sz="1950" b="0">
-                <a:solidFill>
-                  <a:srgbClr val="182D45"/>
-                </a:solidFill>
-                <a:latin typeface="Arial"/>
-                <a:ea typeface="Arial"/>
-                <a:cs typeface="Arial"/>
-              </a:defRPr>
-            </a:pPr>
-            <a:r>
-              <a:rPr sz="1950" b="0">
-                <a:solidFill>
-                  <a:srgbClr val="182D45"/>
-                </a:solidFill>
-                <a:latin typeface="Arial"/>
-                <a:ea typeface="Arial"/>
-                <a:cs typeface="Arial"/>
-              </a:rPr>
-              <a:t>[CIC #2 INFO] test: test alert</a:t>
-            </a:r>
-          </a:p>
-          <a:p xmlns:a="http://schemas.openxmlformats.org/drawingml/2006/main">
-            <a:pPr>
-              <a:defRPr sz="1950" b="0">
-                <a:solidFill>
-                  <a:srgbClr val="182D45"/>
-                </a:solidFill>
-                <a:latin typeface="Arial"/>
-                <a:ea typeface="Arial"/>
-                <a:cs typeface="Arial"/>
-              </a:defRPr>
-            </a:pPr>
-            <a:r>
-              <a:rPr sz="1950" b="0">
-                <a:solidFill>
-                  <a:srgbClr val="182D45"/>
-                </a:solidFill>
-                <a:latin typeface="Arial"/>
-                <a:ea typeface="Arial"/>
-                <a:cs typeface="Arial"/>
-              </a:rPr>
-              <a:t>TX alert ack 1</a:t>
-            </a:r>
-          </a:p>
-          <a:p xmlns:a="http://schemas.openxmlformats.org/drawingml/2006/main">
-            <a:pPr>
-              <a:defRPr sz="1950" b="0">
-                <a:solidFill>
-                  <a:srgbClr val="182D45"/>
-                </a:solidFill>
-                <a:latin typeface="Arial"/>
-                <a:ea typeface="Arial"/>
-                <a:cs typeface="Arial"/>
-              </a:defRPr>
-            </a:pPr>
-            <a:r>
-              <a:rPr sz="1950" b="0">
-                <a:solidFill>
-                  <a:srgbClr val="182D45"/>
-                </a:solidFill>
-                <a:latin typeface="Arial"/>
-                <a:ea typeface="Arial"/>
-                <a:cs typeface="Arial"/>
-              </a:rPr>
-              <a:t>E851 no alert #1</a:t>
-            </a:r>
-          </a:p>
-          <a:p xmlns:a="http://schemas.openxmlformats.org/drawingml/2006/main">
-            <a:pPr>
-              <a:defRPr sz="1950" b="0">
-                <a:solidFill>
-                  <a:srgbClr val="182D45"/>
-                </a:solidFill>
-                <a:latin typeface="Arial"/>
-                <a:ea typeface="Arial"/>
-                <a:cs typeface="Arial"/>
-              </a:defRPr>
-            </a:pPr>
-            <a:r>
-              <a:rPr sz="1950" b="0">
-                <a:solidFill>
-                  <a:srgbClr val="182D45"/>
-                </a:solidFill>
-                <a:latin typeface="Arial"/>
-                <a:ea typeface="Arial"/>
-                <a:cs typeface="Arial"/>
-              </a:rPr>
-              <a:t>[CIC] 2 alerts, 2 unacknowledged:</a:t>
-            </a:r>
-          </a:p>
-        </p:txBody>
-      </p:sp>
-      <p:sp>
-        <p:nvSpPr>
-          <p:cNvPr id="7" name="">
-            <a:extLst xmlns:a="http://schemas.openxmlformats.org/drawingml/2006/main">
-              <a:ext uri="{FF2B5EF4-FFF2-40B4-BE49-F238E27FC236}">
-                <a16:creationId xmlns:a16="http://schemas.microsoft.com/office/drawing/2014/main" id="{26136EAA-4F1F-42AD-861E-F8A8D4714914}"/>
-              </a:ext>
-            </a:extLst>
-          </p:cNvPr>
-          <p:cNvSpPr>
-            <a:spLocks xmlns:a="http://schemas.openxmlformats.org/drawingml/2006/main" noGrp="1"/>
-          </p:cNvSpPr>
-          <p:nvPr/>
-        </p:nvSpPr>
-        <p:spPr>
-          <a:xfrm xmlns:a="http://schemas.openxmlformats.org/drawingml/2006/main">
-            <a:off x="7524750" y="2543175"/>
-            <a:ext cx="3943350" cy="962025"/>
-          </a:xfrm>
-          <a:prstGeom xmlns:a="http://schemas.openxmlformats.org/drawingml/2006/main" prst="rect">
-            <a:avLst/>
-          </a:prstGeom>
-          <a:noFill xmlns:a="http://schemas.openxmlformats.org/drawingml/2006/main"/>
-          <a:ln xmlns:a="http://schemas.openxmlformats.org/drawingml/2006/main" w="0">
-            <a:noFill/>
-          </a:ln>
-        </p:spPr>
-        <p:txBody>
-          <a:bodyPr xmlns:a="http://schemas.openxmlformats.org/drawingml/2006/main"/>
-          <a:lstStyle xmlns:a="http://schemas.openxmlformats.org/drawingml/2006/main">
-            <a:defPPr>
-              <a:defRPr sz="2100" b="1">
-                <a:solidFill>
-                  <a:srgbClr val="B42336"/>
-                </a:solidFill>
-                <a:latin typeface="Arial"/>
-                <a:ea typeface="Arial"/>
-                <a:cs typeface="Arial"/>
-              </a:defRPr>
-            </a:defPPr>
-            <a:lvl1pPr>
-              <a:defRPr sz="2100" b="1">
-                <a:solidFill>
-                  <a:srgbClr val="B42336"/>
-                </a:solidFill>
-                <a:latin typeface="Arial"/>
-                <a:ea typeface="Arial"/>
-                <a:cs typeface="Arial"/>
-              </a:defRPr>
-            </a:lvl1pPr>
-            <a:lvl2pPr>
-              <a:defRPr sz="2100" b="1">
-                <a:solidFill>
-                  <a:srgbClr val="B42336"/>
-                </a:solidFill>
-                <a:latin typeface="Arial"/>
-                <a:ea typeface="Arial"/>
-                <a:cs typeface="Arial"/>
-              </a:defRPr>
-            </a:lvl2pPr>
-            <a:lvl3pPr>
-              <a:defRPr sz="2100" b="1">
-                <a:solidFill>
-                  <a:srgbClr val="B42336"/>
-                </a:solidFill>
-                <a:latin typeface="Arial"/>
-                <a:ea typeface="Arial"/>
-                <a:cs typeface="Arial"/>
-              </a:defRPr>
-            </a:lvl3pPr>
-            <a:lvl4pPr>
-              <a:defRPr sz="2100" b="1">
-                <a:solidFill>
-                  <a:srgbClr val="B42336"/>
-                </a:solidFill>
-                <a:latin typeface="Arial"/>
-                <a:ea typeface="Arial"/>
-                <a:cs typeface="Arial"/>
-              </a:defRPr>
-            </a:lvl4pPr>
-            <a:lvl5pPr>
-              <a:defRPr sz="2100" b="1">
-                <a:solidFill>
-                  <a:srgbClr val="B42336"/>
-                </a:solidFill>
-                <a:latin typeface="Arial"/>
-                <a:ea typeface="Arial"/>
-                <a:cs typeface="Arial"/>
-              </a:defRPr>
-            </a:lvl5pPr>
-            <a:lvl6pPr>
-              <a:defRPr sz="2100" b="1">
-                <a:solidFill>
-                  <a:srgbClr val="B42336"/>
-                </a:solidFill>
-                <a:latin typeface="Arial"/>
-                <a:ea typeface="Arial"/>
-                <a:cs typeface="Arial"/>
-              </a:defRPr>
-            </a:lvl6pPr>
-            <a:lvl7pPr>
-              <a:defRPr sz="2100" b="1">
-                <a:solidFill>
-                  <a:srgbClr val="B42336"/>
-                </a:solidFill>
-                <a:latin typeface="Arial"/>
-                <a:ea typeface="Arial"/>
-                <a:cs typeface="Arial"/>
-              </a:defRPr>
-            </a:lvl7pPr>
-            <a:lvl8pPr>
-              <a:defRPr sz="2100" b="1">
-                <a:solidFill>
-                  <a:srgbClr val="B42336"/>
-                </a:solidFill>
-                <a:latin typeface="Arial"/>
-                <a:ea typeface="Arial"/>
-                <a:cs typeface="Arial"/>
-              </a:defRPr>
-            </a:lvl8pPr>
-            <a:lvl9pPr>
-              <a:defRPr sz="2100" b="1">
-                <a:solidFill>
-                  <a:srgbClr val="B42336"/>
-                </a:solidFill>
-                <a:latin typeface="Arial"/>
-                <a:ea typeface="Arial"/>
-                <a:cs typeface="Arial"/>
-              </a:defRPr>
-            </a:lvl9pPr>
-          </a:lstStyle>
-          <a:p xmlns:a="http://schemas.openxmlformats.org/drawingml/2006/main">
-            <a:pPr>
-              <a:defRPr sz="2100" b="1">
-                <a:solidFill>
-                  <a:srgbClr val="B42336"/>
-                </a:solidFill>
-                <a:latin typeface="Arial"/>
-                <a:ea typeface="Arial"/>
-                <a:cs typeface="Arial"/>
-              </a:defRPr>
-            </a:pPr>
-            <a:r>
-              <a:rPr sz="2100" b="1">
-                <a:solidFill>
-                  <a:srgbClr val="B42336"/>
-                </a:solidFill>
-                <a:latin typeface="Arial"/>
-                <a:ea typeface="Arial"/>
-                <a:cs typeface="Arial"/>
-              </a:rPr>
-              <a:t>Непідтверджений ID</a:t>
-            </a:r>
-          </a:p>
-          <a:p xmlns:a="http://schemas.openxmlformats.org/drawingml/2006/main">
-            <a:pPr>
-              <a:defRPr sz="2100" b="1">
-                <a:solidFill>
-                  <a:srgbClr val="B42336"/>
-                </a:solidFill>
-                <a:latin typeface="Arial"/>
-                <a:ea typeface="Arial"/>
-                <a:cs typeface="Arial"/>
-              </a:defRPr>
-            </a:pPr>
-            <a:r>
-              <a:rPr sz="2100" b="1">
-                <a:solidFill>
-                  <a:srgbClr val="B42336"/>
-                </a:solidFill>
-                <a:latin typeface="Arial"/>
-                <a:ea typeface="Arial"/>
-                <a:cs typeface="Arial"/>
-              </a:rPr>
-              <a:t>Відтворення: 3/3</a:t>
-            </a:r>
-          </a:p>
-        </p:txBody>
-      </p:sp>
-      <p:sp>
-        <p:nvSpPr>
-          <p:cNvPr id="8" name="">
-            <a:extLst xmlns:a="http://schemas.openxmlformats.org/drawingml/2006/main">
-              <a:ext uri="{FF2B5EF4-FFF2-40B4-BE49-F238E27FC236}">
-                <a16:creationId xmlns:a16="http://schemas.microsoft.com/office/drawing/2014/main" id="{8ABD4DDB-4F98-45ED-B1B7-43BCD5CBAB91}"/>
-              </a:ext>
-            </a:extLst>
-          </p:cNvPr>
-          <p:cNvSpPr>
-            <a:spLocks xmlns:a="http://schemas.openxmlformats.org/drawingml/2006/main" noGrp="1"/>
-          </p:cNvSpPr>
-          <p:nvPr/>
-        </p:nvSpPr>
-        <p:spPr>
-          <a:xfrm xmlns:a="http://schemas.openxmlformats.org/drawingml/2006/main">
-            <a:off x="7524750" y="3924300"/>
-            <a:ext cx="3943350" cy="1724025"/>
-          </a:xfrm>
-          <a:prstGeom xmlns:a="http://schemas.openxmlformats.org/drawingml/2006/main" prst="rect">
-            <a:avLst/>
-          </a:prstGeom>
-          <a:noFill xmlns:a="http://schemas.openxmlformats.org/drawingml/2006/main"/>
-          <a:ln xmlns:a="http://schemas.openxmlformats.org/drawingml/2006/main" w="0">
-            <a:noFill/>
-          </a:ln>
-        </p:spPr>
-        <p:txBody>
-          <a:bodyPr xmlns:a="http://schemas.openxmlformats.org/drawingml/2006/main"/>
-          <a:lstStyle xmlns:a="http://schemas.openxmlformats.org/drawingml/2006/main">
-            <a:defPPr>
-              <a:defRPr sz="1950" b="0">
-                <a:solidFill>
-                  <a:srgbClr val="182D45"/>
-                </a:solidFill>
-                <a:latin typeface="Arial"/>
-                <a:ea typeface="Arial"/>
-                <a:cs typeface="Arial"/>
-              </a:defRPr>
-            </a:defPPr>
-            <a:lvl1pPr>
-              <a:defRPr sz="1950" b="0">
-                <a:solidFill>
-                  <a:srgbClr val="182D45"/>
-                </a:solidFill>
-                <a:latin typeface="Arial"/>
-                <a:ea typeface="Arial"/>
-                <a:cs typeface="Arial"/>
-              </a:defRPr>
-            </a:lvl1pPr>
-            <a:lvl2pPr>
-              <a:defRPr sz="1950" b="0">
-                <a:solidFill>
-                  <a:srgbClr val="182D45"/>
-                </a:solidFill>
-                <a:latin typeface="Arial"/>
-                <a:ea typeface="Arial"/>
-                <a:cs typeface="Arial"/>
-              </a:defRPr>
-            </a:lvl2pPr>
-            <a:lvl3pPr>
-              <a:defRPr sz="1950" b="0">
-                <a:solidFill>
-                  <a:srgbClr val="182D45"/>
-                </a:solidFill>
-                <a:latin typeface="Arial"/>
-                <a:ea typeface="Arial"/>
-                <a:cs typeface="Arial"/>
-              </a:defRPr>
-            </a:lvl3pPr>
-            <a:lvl4pPr>
-              <a:defRPr sz="1950" b="0">
-                <a:solidFill>
-                  <a:srgbClr val="182D45"/>
-                </a:solidFill>
-                <a:latin typeface="Arial"/>
-                <a:ea typeface="Arial"/>
-                <a:cs typeface="Arial"/>
-              </a:defRPr>
-            </a:lvl4pPr>
-            <a:lvl5pPr>
-              <a:defRPr sz="1950" b="0">
-                <a:solidFill>
-                  <a:srgbClr val="182D45"/>
-                </a:solidFill>
-                <a:latin typeface="Arial"/>
-                <a:ea typeface="Arial"/>
-                <a:cs typeface="Arial"/>
-              </a:defRPr>
-            </a:lvl5pPr>
-            <a:lvl6pPr>
-              <a:defRPr sz="1950" b="0">
-                <a:solidFill>
-                  <a:srgbClr val="182D45"/>
-                </a:solidFill>
-                <a:latin typeface="Arial"/>
-                <a:ea typeface="Arial"/>
-                <a:cs typeface="Arial"/>
-              </a:defRPr>
-            </a:lvl6pPr>
-            <a:lvl7pPr>
-              <a:defRPr sz="1950" b="0">
-                <a:solidFill>
-                  <a:srgbClr val="182D45"/>
-                </a:solidFill>
-                <a:latin typeface="Arial"/>
-                <a:ea typeface="Arial"/>
-                <a:cs typeface="Arial"/>
-              </a:defRPr>
-            </a:lvl7pPr>
-            <a:lvl8pPr>
-              <a:defRPr sz="1950" b="0">
-                <a:solidFill>
-                  <a:srgbClr val="182D45"/>
-                </a:solidFill>
-                <a:latin typeface="Arial"/>
-                <a:ea typeface="Arial"/>
-                <a:cs typeface="Arial"/>
-              </a:defRPr>
-            </a:lvl8pPr>
-            <a:lvl9pPr>
-              <a:defRPr sz="1950" b="0">
-                <a:solidFill>
-                  <a:srgbClr val="182D45"/>
-                </a:solidFill>
-                <a:latin typeface="Arial"/>
-                <a:ea typeface="Arial"/>
-                <a:cs typeface="Arial"/>
-              </a:defRPr>
-            </a:lvl9pPr>
-          </a:lstStyle>
-          <a:p xmlns:a="http://schemas.openxmlformats.org/drawingml/2006/main">
-            <a:pPr>
-              <a:defRPr sz="1950" b="0">
-                <a:solidFill>
-                  <a:srgbClr val="182D45"/>
-                </a:solidFill>
-                <a:latin typeface="Arial"/>
-                <a:ea typeface="Arial"/>
-                <a:cs typeface="Arial"/>
-              </a:defRPr>
-            </a:pPr>
-            <a:r>
-              <a:rPr sz="1950" b="0">
-                <a:solidFill>
-                  <a:srgbClr val="182D45"/>
-                </a:solidFill>
-                <a:latin typeface="Arial"/>
-                <a:ea typeface="Arial"/>
-                <a:cs typeface="Arial"/>
-              </a:rPr>
-              <a:t>Після ack all</a:t>
-            </a:r>
-          </a:p>
-          <a:p xmlns:a="http://schemas.openxmlformats.org/drawingml/2006/main">
-            <a:pPr>
-              <a:defRPr sz="1950" b="0">
-                <a:solidFill>
-                  <a:srgbClr val="182D45"/>
-                </a:solidFill>
-                <a:latin typeface="Arial"/>
-                <a:ea typeface="Arial"/>
-                <a:cs typeface="Arial"/>
-              </a:defRPr>
-            </a:pPr>
-            <a:r>
-              <a:rPr sz="1950" b="0">
-                <a:solidFill>
-                  <a:srgbClr val="182D45"/>
-                </a:solidFill>
-                <a:latin typeface="Arial"/>
-                <a:ea typeface="Arial"/>
-                <a:cs typeface="Arial"/>
-              </a:rPr>
-              <a:t>Для вже підтвердженого ID:</a:t>
-            </a:r>
-          </a:p>
-          <a:p xmlns:a="http://schemas.openxmlformats.org/drawingml/2006/main">
-            <a:pPr>
-              <a:defRPr sz="1950" b="0">
-                <a:solidFill>
-                  <a:srgbClr val="182D45"/>
-                </a:solidFill>
-                <a:latin typeface="Arial"/>
-                <a:ea typeface="Arial"/>
-                <a:cs typeface="Arial"/>
-              </a:defRPr>
-            </a:pPr>
-            <a:r>
-              <a:rPr sz="1950" b="0">
-                <a:solidFill>
-                  <a:srgbClr val="182D45"/>
-                </a:solidFill>
-                <a:latin typeface="Arial"/>
-                <a:ea typeface="Arial"/>
-                <a:cs typeface="Arial"/>
-              </a:rPr>
-              <a:t>E851 замість W852</a:t>
-            </a:r>
-          </a:p>
-          <a:p xmlns:a="http://schemas.openxmlformats.org/drawingml/2006/main">
-            <a:pPr>
-              <a:defRPr sz="1950" b="0">
-                <a:solidFill>
-                  <a:srgbClr val="182D45"/>
-                </a:solidFill>
-                <a:latin typeface="Arial"/>
-                <a:ea typeface="Arial"/>
-                <a:cs typeface="Arial"/>
-              </a:defRPr>
-            </a:pPr>
-            <a:r>
-              <a:rPr sz="1950" b="0">
-                <a:solidFill>
-                  <a:srgbClr val="182D45"/>
-                </a:solidFill>
-                <a:latin typeface="Arial"/>
-                <a:ea typeface="Arial"/>
-                <a:cs typeface="Arial"/>
-              </a:rPr>
-              <a:t>Контроль: 2/2</a:t>
-            </a:r>
-          </a:p>
-        </p:txBody>
-      </p:sp>
-      <p:sp>
-        <p:nvSpPr>
-          <p:cNvPr id="9" name="">
-            <a:extLst xmlns:a="http://schemas.openxmlformats.org/drawingml/2006/main">
-              <a:ext uri="{FF2B5EF4-FFF2-40B4-BE49-F238E27FC236}">
-                <a16:creationId xmlns:a16="http://schemas.microsoft.com/office/drawing/2014/main" id="{C4557D11-4591-4FFC-AAEA-DFC4B4327203}"/>
-              </a:ext>
-            </a:extLst>
-          </p:cNvPr>
-          <p:cNvSpPr>
-            <a:spLocks xmlns:a="http://schemas.openxmlformats.org/drawingml/2006/main" noGrp="1"/>
-          </p:cNvSpPr>
-          <p:nvPr/>
-        </p:nvSpPr>
-        <p:spPr>
-          <a:xfrm xmlns:a="http://schemas.openxmlformats.org/drawingml/2006/main">
-            <a:off x="609600" y="5953125"/>
-            <a:ext cx="10668000" cy="419100"/>
-          </a:xfrm>
-          <a:prstGeom xmlns:a="http://schemas.openxmlformats.org/drawingml/2006/main" prst="rect">
-            <a:avLst/>
-          </a:prstGeom>
-          <a:noFill xmlns:a="http://schemas.openxmlformats.org/drawingml/2006/main"/>
-          <a:ln xmlns:a="http://schemas.openxmlformats.org/drawingml/2006/main" w="0">
-            <a:noFill/>
-          </a:ln>
-        </p:spPr>
-        <p:txBody>
-          <a:bodyPr xmlns:a="http://schemas.openxmlformats.org/drawingml/2006/main"/>
-          <a:lstStyle xmlns:a="http://schemas.openxmlformats.org/drawingml/2006/main">
-            <a:defPPr>
-              <a:defRPr sz="1800" b="0">
-                <a:solidFill>
-                  <a:srgbClr val="566A80"/>
-                </a:solidFill>
-                <a:latin typeface="Arial"/>
-                <a:ea typeface="Arial"/>
-                <a:cs typeface="Arial"/>
-              </a:defRPr>
-            </a:defPPr>
-            <a:lvl1pPr>
-              <a:defRPr sz="1800" b="0">
-                <a:solidFill>
-                  <a:srgbClr val="566A80"/>
-                </a:solidFill>
-                <a:latin typeface="Arial"/>
-                <a:ea typeface="Arial"/>
-                <a:cs typeface="Arial"/>
-              </a:defRPr>
-            </a:lvl1pPr>
-            <a:lvl2pPr>
-              <a:defRPr sz="1800" b="0">
-                <a:solidFill>
-                  <a:srgbClr val="566A80"/>
-                </a:solidFill>
-                <a:latin typeface="Arial"/>
-                <a:ea typeface="Arial"/>
-                <a:cs typeface="Arial"/>
-              </a:defRPr>
-            </a:lvl2pPr>
-            <a:lvl3pPr>
-              <a:defRPr sz="1800" b="0">
-                <a:solidFill>
-                  <a:srgbClr val="566A80"/>
-                </a:solidFill>
-                <a:latin typeface="Arial"/>
-                <a:ea typeface="Arial"/>
-                <a:cs typeface="Arial"/>
-              </a:defRPr>
-            </a:lvl3pPr>
-            <a:lvl4pPr>
-              <a:defRPr sz="1800" b="0">
-                <a:solidFill>
-                  <a:srgbClr val="566A80"/>
-                </a:solidFill>
-                <a:latin typeface="Arial"/>
-                <a:ea typeface="Arial"/>
-                <a:cs typeface="Arial"/>
-              </a:defRPr>
-            </a:lvl4pPr>
-            <a:lvl5pPr>
-              <a:defRPr sz="1800" b="0">
-                <a:solidFill>
-                  <a:srgbClr val="566A80"/>
-                </a:solidFill>
-                <a:latin typeface="Arial"/>
-                <a:ea typeface="Arial"/>
-                <a:cs typeface="Arial"/>
-              </a:defRPr>
-            </a:lvl5pPr>
-            <a:lvl6pPr>
-              <a:defRPr sz="1800" b="0">
-                <a:solidFill>
-                  <a:srgbClr val="566A80"/>
-                </a:solidFill>
-                <a:latin typeface="Arial"/>
-                <a:ea typeface="Arial"/>
-                <a:cs typeface="Arial"/>
-              </a:defRPr>
-            </a:lvl6pPr>
-            <a:lvl7pPr>
-              <a:defRPr sz="1800" b="0">
-                <a:solidFill>
-                  <a:srgbClr val="566A80"/>
-                </a:solidFill>
-                <a:latin typeface="Arial"/>
-                <a:ea typeface="Arial"/>
-                <a:cs typeface="Arial"/>
-              </a:defRPr>
-            </a:lvl7pPr>
-            <a:lvl8pPr>
-              <a:defRPr sz="1800" b="0">
-                <a:solidFill>
-                  <a:srgbClr val="566A80"/>
-                </a:solidFill>
-                <a:latin typeface="Arial"/>
-                <a:ea typeface="Arial"/>
-                <a:cs typeface="Arial"/>
-              </a:defRPr>
-            </a:lvl8pPr>
-            <a:lvl9pPr>
-              <a:defRPr sz="1800" b="0">
-                <a:solidFill>
-                  <a:srgbClr val="566A80"/>
-                </a:solidFill>
-                <a:latin typeface="Arial"/>
-                <a:ea typeface="Arial"/>
-                <a:cs typeface="Arial"/>
-              </a:defRPr>
-            </a:lvl9pPr>
-          </a:lstStyle>
-          <a:p xmlns:a="http://schemas.openxmlformats.org/drawingml/2006/main">
-            <a:pPr>
-              <a:defRPr sz="1800" b="0">
-                <a:solidFill>
-                  <a:srgbClr val="566A80"/>
-                </a:solidFill>
-                <a:latin typeface="Arial"/>
-                <a:ea typeface="Arial"/>
-                <a:cs typeface="Arial"/>
-              </a:defRPr>
-            </a:pPr>
-            <a:r>
-              <a:rPr sz="1800" b="0">
-                <a:solidFill>
-                  <a:srgbClr val="566A80"/>
-                </a:solidFill>
-                <a:latin typeface="Arial"/>
-                <a:ea typeface="Arial"/>
-                <a:cs typeface="Arial"/>
-              </a:rPr>
-              <a:t>2.1.0: N/A, Alert center з’явився у 2.3.0. Регресію не заявлено.</a:t>
-            </a:r>
-          </a:p>
-        </p:txBody>
-      </p:sp>
-    </p:spTree>
-    <p:extLst>
-      <p:ext uri="{BB962C8B-B14F-4D97-AF65-F5344CB8AC3E}">
-        <p14:creationId xmlns:p14="http://schemas.microsoft.com/office/powerpoint/2010/main" val="1067177644"/>
       </p:ext>
     </p:extLst>
   </p:cSld>
@@ -13697,7 +12971,7 @@
           <p:nvPr/>
         </p:nvPicPr>
         <p:blipFill>
-          <a:blip xmlns:r="http://schemas.openxmlformats.org/officeDocument/2006/relationships" xmlns:a="http://schemas.openxmlformats.org/drawingml/2006/main" r:embed="R937de78a41bd47a1"/>
+          <a:blip xmlns:r="http://schemas.openxmlformats.org/officeDocument/2006/relationships" xmlns:a="http://schemas.openxmlformats.org/drawingml/2006/main" r:embed="R3a686045c2414e95"/>
           <a:stretch xmlns:a="http://schemas.openxmlformats.org/drawingml/2006/main"/>
         </p:blipFill>
         <p:spPr>
@@ -15084,364 +14358,6 @@
           <p:cNvPr id="6" name="">
             <a:extLst xmlns:a="http://schemas.openxmlformats.org/drawingml/2006/main">
               <a:ext uri="{FF2B5EF4-FFF2-40B4-BE49-F238E27FC236}">
-                <a16:creationId xmlns:a16="http://schemas.microsoft.com/office/drawing/2014/main" id="{54F54D4B-903D-4532-A620-8565B9EEA3B0}"/>
-              </a:ext>
-            </a:extLst>
-          </p:cNvPr>
-          <p:cNvSpPr>
-            <a:spLocks xmlns:a="http://schemas.openxmlformats.org/drawingml/2006/main" noGrp="1"/>
-          </p:cNvSpPr>
-          <p:nvPr/>
-        </p:nvSpPr>
-        <p:spPr>
-          <a:xfrm xmlns:a="http://schemas.openxmlformats.org/drawingml/2006/main">
-            <a:off x="609600" y="4305300"/>
-            <a:ext cx="10972800" cy="504825"/>
-          </a:xfrm>
-          <a:prstGeom xmlns:a="http://schemas.openxmlformats.org/drawingml/2006/main" prst="rect">
-            <a:avLst/>
-          </a:prstGeom>
-          <a:noFill xmlns:a="http://schemas.openxmlformats.org/drawingml/2006/main"/>
-          <a:ln xmlns:a="http://schemas.openxmlformats.org/drawingml/2006/main" w="0">
-            <a:noFill/>
-          </a:ln>
-        </p:spPr>
-        <p:txBody>
-          <a:bodyPr xmlns:a="http://schemas.openxmlformats.org/drawingml/2006/main"/>
-          <a:lstStyle xmlns:a="http://schemas.openxmlformats.org/drawingml/2006/main">
-            <a:defPPr>
-              <a:defRPr sz="2250" b="1">
-                <a:solidFill>
-                  <a:srgbClr val="182D45"/>
-                </a:solidFill>
-                <a:latin typeface="Arial"/>
-                <a:ea typeface="Arial"/>
-                <a:cs typeface="Arial"/>
-              </a:defRPr>
-            </a:defPPr>
-            <a:lvl1pPr>
-              <a:defRPr sz="2250" b="1">
-                <a:solidFill>
-                  <a:srgbClr val="182D45"/>
-                </a:solidFill>
-                <a:latin typeface="Arial"/>
-                <a:ea typeface="Arial"/>
-                <a:cs typeface="Arial"/>
-              </a:defRPr>
-            </a:lvl1pPr>
-            <a:lvl2pPr>
-              <a:defRPr sz="2250" b="1">
-                <a:solidFill>
-                  <a:srgbClr val="182D45"/>
-                </a:solidFill>
-                <a:latin typeface="Arial"/>
-                <a:ea typeface="Arial"/>
-                <a:cs typeface="Arial"/>
-              </a:defRPr>
-            </a:lvl2pPr>
-            <a:lvl3pPr>
-              <a:defRPr sz="2250" b="1">
-                <a:solidFill>
-                  <a:srgbClr val="182D45"/>
-                </a:solidFill>
-                <a:latin typeface="Arial"/>
-                <a:ea typeface="Arial"/>
-                <a:cs typeface="Arial"/>
-              </a:defRPr>
-            </a:lvl3pPr>
-            <a:lvl4pPr>
-              <a:defRPr sz="2250" b="1">
-                <a:solidFill>
-                  <a:srgbClr val="182D45"/>
-                </a:solidFill>
-                <a:latin typeface="Arial"/>
-                <a:ea typeface="Arial"/>
-                <a:cs typeface="Arial"/>
-              </a:defRPr>
-            </a:lvl4pPr>
-            <a:lvl5pPr>
-              <a:defRPr sz="2250" b="1">
-                <a:solidFill>
-                  <a:srgbClr val="182D45"/>
-                </a:solidFill>
-                <a:latin typeface="Arial"/>
-                <a:ea typeface="Arial"/>
-                <a:cs typeface="Arial"/>
-              </a:defRPr>
-            </a:lvl5pPr>
-            <a:lvl6pPr>
-              <a:defRPr sz="2250" b="1">
-                <a:solidFill>
-                  <a:srgbClr val="182D45"/>
-                </a:solidFill>
-                <a:latin typeface="Arial"/>
-                <a:ea typeface="Arial"/>
-                <a:cs typeface="Arial"/>
-              </a:defRPr>
-            </a:lvl6pPr>
-            <a:lvl7pPr>
-              <a:defRPr sz="2250" b="1">
-                <a:solidFill>
-                  <a:srgbClr val="182D45"/>
-                </a:solidFill>
-                <a:latin typeface="Arial"/>
-                <a:ea typeface="Arial"/>
-                <a:cs typeface="Arial"/>
-              </a:defRPr>
-            </a:lvl7pPr>
-            <a:lvl8pPr>
-              <a:defRPr sz="2250" b="1">
-                <a:solidFill>
-                  <a:srgbClr val="182D45"/>
-                </a:solidFill>
-                <a:latin typeface="Arial"/>
-                <a:ea typeface="Arial"/>
-                <a:cs typeface="Arial"/>
-              </a:defRPr>
-            </a:lvl8pPr>
-            <a:lvl9pPr>
-              <a:defRPr sz="2250" b="1">
-                <a:solidFill>
-                  <a:srgbClr val="182D45"/>
-                </a:solidFill>
-                <a:latin typeface="Arial"/>
-                <a:ea typeface="Arial"/>
-                <a:cs typeface="Arial"/>
-              </a:defRPr>
-            </a:lvl9pPr>
-          </a:lstStyle>
-          <a:p xmlns:a="http://schemas.openxmlformats.org/drawingml/2006/main">
-            <a:pPr>
-              <a:defRPr sz="2250" b="1">
-                <a:solidFill>
-                  <a:srgbClr val="182D45"/>
-                </a:solidFill>
-                <a:latin typeface="Arial"/>
-                <a:ea typeface="Arial"/>
-                <a:cs typeface="Arial"/>
-              </a:defRPr>
-            </a:pPr>
-            <a:r>
-              <a:rPr sz="2250" b="1">
-                <a:solidFill>
-                  <a:srgbClr val="182D45"/>
-                </a:solidFill>
-                <a:latin typeface="Arial"/>
-                <a:ea typeface="Arial"/>
-                <a:cs typeface="Arial"/>
-              </a:rPr>
-              <a:t>Не виконано фізичні перевірки</a:t>
-            </a:r>
-          </a:p>
-        </p:txBody>
-      </p:sp>
-      <p:sp>
-        <p:nvSpPr>
-          <p:cNvPr id="7" name="">
-            <a:extLst xmlns:a="http://schemas.openxmlformats.org/drawingml/2006/main">
-              <a:ext uri="{FF2B5EF4-FFF2-40B4-BE49-F238E27FC236}">
-                <a16:creationId xmlns:a16="http://schemas.microsoft.com/office/drawing/2014/main" id="{97259A81-1587-41F3-A7A0-35E8590C7786}"/>
-              </a:ext>
-            </a:extLst>
-          </p:cNvPr>
-          <p:cNvSpPr>
-            <a:spLocks xmlns:a="http://schemas.openxmlformats.org/drawingml/2006/main" noGrp="1"/>
-          </p:cNvSpPr>
-          <p:nvPr/>
-        </p:nvSpPr>
-        <p:spPr>
-          <a:xfrm xmlns:a="http://schemas.openxmlformats.org/drawingml/2006/main">
-            <a:off x="609600" y="4924425"/>
-            <a:ext cx="10972800" cy="1095375"/>
-          </a:xfrm>
-          <a:prstGeom xmlns:a="http://schemas.openxmlformats.org/drawingml/2006/main" prst="rect">
-            <a:avLst/>
-          </a:prstGeom>
-          <a:noFill xmlns:a="http://schemas.openxmlformats.org/drawingml/2006/main"/>
-          <a:ln xmlns:a="http://schemas.openxmlformats.org/drawingml/2006/main" w="0">
-            <a:noFill/>
-          </a:ln>
-        </p:spPr>
-        <p:txBody>
-          <a:bodyPr xmlns:a="http://schemas.openxmlformats.org/drawingml/2006/main"/>
-          <a:lstStyle xmlns:a="http://schemas.openxmlformats.org/drawingml/2006/main">
-            <a:defPPr>
-              <a:defRPr sz="2100" b="0">
-                <a:solidFill>
-                  <a:srgbClr val="566A80"/>
-                </a:solidFill>
-                <a:latin typeface="Arial"/>
-                <a:ea typeface="Arial"/>
-                <a:cs typeface="Arial"/>
-              </a:defRPr>
-            </a:defPPr>
-            <a:lvl1pPr>
-              <a:defRPr sz="2100" b="0">
-                <a:solidFill>
-                  <a:srgbClr val="566A80"/>
-                </a:solidFill>
-                <a:latin typeface="Arial"/>
-                <a:ea typeface="Arial"/>
-                <a:cs typeface="Arial"/>
-              </a:defRPr>
-            </a:lvl1pPr>
-            <a:lvl2pPr>
-              <a:defRPr sz="2100" b="0">
-                <a:solidFill>
-                  <a:srgbClr val="566A80"/>
-                </a:solidFill>
-                <a:latin typeface="Arial"/>
-                <a:ea typeface="Arial"/>
-                <a:cs typeface="Arial"/>
-              </a:defRPr>
-            </a:lvl2pPr>
-            <a:lvl3pPr>
-              <a:defRPr sz="2100" b="0">
-                <a:solidFill>
-                  <a:srgbClr val="566A80"/>
-                </a:solidFill>
-                <a:latin typeface="Arial"/>
-                <a:ea typeface="Arial"/>
-                <a:cs typeface="Arial"/>
-              </a:defRPr>
-            </a:lvl3pPr>
-            <a:lvl4pPr>
-              <a:defRPr sz="2100" b="0">
-                <a:solidFill>
-                  <a:srgbClr val="566A80"/>
-                </a:solidFill>
-                <a:latin typeface="Arial"/>
-                <a:ea typeface="Arial"/>
-                <a:cs typeface="Arial"/>
-              </a:defRPr>
-            </a:lvl4pPr>
-            <a:lvl5pPr>
-              <a:defRPr sz="2100" b="0">
-                <a:solidFill>
-                  <a:srgbClr val="566A80"/>
-                </a:solidFill>
-                <a:latin typeface="Arial"/>
-                <a:ea typeface="Arial"/>
-                <a:cs typeface="Arial"/>
-              </a:defRPr>
-            </a:lvl5pPr>
-            <a:lvl6pPr>
-              <a:defRPr sz="2100" b="0">
-                <a:solidFill>
-                  <a:srgbClr val="566A80"/>
-                </a:solidFill>
-                <a:latin typeface="Arial"/>
-                <a:ea typeface="Arial"/>
-                <a:cs typeface="Arial"/>
-              </a:defRPr>
-            </a:lvl6pPr>
-            <a:lvl7pPr>
-              <a:defRPr sz="2100" b="0">
-                <a:solidFill>
-                  <a:srgbClr val="566A80"/>
-                </a:solidFill>
-                <a:latin typeface="Arial"/>
-                <a:ea typeface="Arial"/>
-                <a:cs typeface="Arial"/>
-              </a:defRPr>
-            </a:lvl7pPr>
-            <a:lvl8pPr>
-              <a:defRPr sz="2100" b="0">
-                <a:solidFill>
-                  <a:srgbClr val="566A80"/>
-                </a:solidFill>
-                <a:latin typeface="Arial"/>
-                <a:ea typeface="Arial"/>
-                <a:cs typeface="Arial"/>
-              </a:defRPr>
-            </a:lvl8pPr>
-            <a:lvl9pPr>
-              <a:defRPr sz="2100" b="0">
-                <a:solidFill>
-                  <a:srgbClr val="566A80"/>
-                </a:solidFill>
-                <a:latin typeface="Arial"/>
-                <a:ea typeface="Arial"/>
-                <a:cs typeface="Arial"/>
-              </a:defRPr>
-            </a:lvl9pPr>
-          </a:lstStyle>
-          <a:p xmlns:a="http://schemas.openxmlformats.org/drawingml/2006/main">
-            <a:pPr>
-              <a:defRPr sz="2100" b="0">
-                <a:solidFill>
-                  <a:srgbClr val="566A80"/>
-                </a:solidFill>
-                <a:latin typeface="Arial"/>
-                <a:ea typeface="Arial"/>
-                <a:cs typeface="Arial"/>
-              </a:defRPr>
-            </a:pPr>
-            <a:r>
-              <a:rPr sz="2100" b="0">
-                <a:solidFill>
-                  <a:srgbClr val="566A80"/>
-                </a:solidFill>
-                <a:latin typeface="Arial"/>
-                <a:ea typeface="Arial"/>
-                <a:cs typeface="Arial"/>
-              </a:rPr>
-              <a:t>Кольори RGB · Яскравість у режимах</a:t>
-            </a:r>
-          </a:p>
-          <a:p xmlns:a="http://schemas.openxmlformats.org/drawingml/2006/main">
-            <a:pPr>
-              <a:defRPr sz="2100" b="0">
-                <a:solidFill>
-                  <a:srgbClr val="566A80"/>
-                </a:solidFill>
-                <a:latin typeface="Arial"/>
-                <a:ea typeface="Arial"/>
-                <a:cs typeface="Arial"/>
-              </a:defRPr>
-            </a:pPr>
-            <a:r>
-              <a:rPr sz="2100" b="0">
-                <a:solidFill>
-                  <a:srgbClr val="566A80"/>
-                </a:solidFill>
-                <a:latin typeface="Arial"/>
-                <a:ea typeface="Arial"/>
-                <a:cs typeface="Arial"/>
-              </a:rPr>
-              <a:t>Зовнішній LED · Контакти реле</a:t>
-            </a:r>
-          </a:p>
-          <a:p xmlns:a="http://schemas.openxmlformats.org/drawingml/2006/main">
-            <a:pPr>
-              <a:defRPr sz="2100" b="0">
-                <a:solidFill>
-                  <a:srgbClr val="566A80"/>
-                </a:solidFill>
-                <a:latin typeface="Arial"/>
-                <a:ea typeface="Arial"/>
-                <a:cs typeface="Arial"/>
-              </a:defRPr>
-            </a:pPr>
-            <a:r>
-              <a:rPr sz="2100" b="0">
-                <a:solidFill>
-                  <a:srgbClr val="566A80"/>
-                </a:solidFill>
-                <a:latin typeface="Arial"/>
-                <a:ea typeface="Arial"/>
-                <a:cs typeface="Arial"/>
-              </a:rPr>
-              <a:t>Статус: Not Run на обох версіях</a:t>
-            </a:r>
-          </a:p>
-        </p:txBody>
-      </p:sp>
-      <p:sp>
-        <p:nvSpPr>
-          <p:cNvPr id="8" name="">
-            <a:extLst xmlns:a="http://schemas.openxmlformats.org/drawingml/2006/main">
-              <a:ext uri="{FF2B5EF4-FFF2-40B4-BE49-F238E27FC236}">
                 <a16:creationId xmlns:a16="http://schemas.microsoft.com/office/drawing/2014/main" id="{78841F51-0499-4005-BA9B-08C70FE1EB58}"/>
               </a:ext>
             </a:extLst>
@@ -15589,6 +14505,341 @@
                 <a:cs typeface="Arial"/>
               </a:rPr>
               <a:t>github.com/rpozniak/sentry-swm2-qa</a:t>
+            </a:r>
+          </a:p>
+        </p:txBody>
+      </p:sp>
+      <p:sp>
+        <p:nvSpPr>
+          <p:cNvPr id="7" name="">
+            <a:extLst xmlns:a="http://schemas.openxmlformats.org/drawingml/2006/main">
+              <a:ext uri="{FF2B5EF4-FFF2-40B4-BE49-F238E27FC236}">
+                <a16:creationId xmlns:a16="http://schemas.microsoft.com/office/drawing/2014/main" id="{0BB43CD1-3B85-4DFB-852F-F0657BCF70AA}"/>
+              </a:ext>
+            </a:extLst>
+          </p:cNvPr>
+          <p:cNvSpPr>
+            <a:spLocks xmlns:a="http://schemas.openxmlformats.org/drawingml/2006/main" noGrp="1"/>
+          </p:cNvSpPr>
+          <p:nvPr/>
+        </p:nvSpPr>
+        <p:spPr>
+          <a:xfrm xmlns:a="http://schemas.openxmlformats.org/drawingml/2006/main">
+            <a:off x="609600" y="4391025"/>
+            <a:ext cx="10972800" cy="561975"/>
+          </a:xfrm>
+          <a:prstGeom xmlns:a="http://schemas.openxmlformats.org/drawingml/2006/main" prst="rect">
+            <a:avLst/>
+          </a:prstGeom>
+          <a:noFill xmlns:a="http://schemas.openxmlformats.org/drawingml/2006/main"/>
+          <a:ln xmlns:a="http://schemas.openxmlformats.org/drawingml/2006/main" w="0">
+            <a:noFill/>
+          </a:ln>
+        </p:spPr>
+        <p:txBody>
+          <a:bodyPr xmlns:a="http://schemas.openxmlformats.org/drawingml/2006/main"/>
+          <a:lstStyle xmlns:a="http://schemas.openxmlformats.org/drawingml/2006/main">
+            <a:defPPr>
+              <a:defRPr sz="2250" b="1">
+                <a:solidFill>
+                  <a:srgbClr val="087F8C"/>
+                </a:solidFill>
+                <a:latin typeface="Arial"/>
+                <a:ea typeface="Arial"/>
+                <a:cs typeface="Arial"/>
+              </a:defRPr>
+            </a:defPPr>
+            <a:lvl1pPr>
+              <a:defRPr sz="2250" b="1">
+                <a:solidFill>
+                  <a:srgbClr val="087F8C"/>
+                </a:solidFill>
+                <a:latin typeface="Arial"/>
+                <a:ea typeface="Arial"/>
+                <a:cs typeface="Arial"/>
+              </a:defRPr>
+            </a:lvl1pPr>
+            <a:lvl2pPr>
+              <a:defRPr sz="2250" b="1">
+                <a:solidFill>
+                  <a:srgbClr val="087F8C"/>
+                </a:solidFill>
+                <a:latin typeface="Arial"/>
+                <a:ea typeface="Arial"/>
+                <a:cs typeface="Arial"/>
+              </a:defRPr>
+            </a:lvl2pPr>
+            <a:lvl3pPr>
+              <a:defRPr sz="2250" b="1">
+                <a:solidFill>
+                  <a:srgbClr val="087F8C"/>
+                </a:solidFill>
+                <a:latin typeface="Arial"/>
+                <a:ea typeface="Arial"/>
+                <a:cs typeface="Arial"/>
+              </a:defRPr>
+            </a:lvl3pPr>
+            <a:lvl4pPr>
+              <a:defRPr sz="2250" b="1">
+                <a:solidFill>
+                  <a:srgbClr val="087F8C"/>
+                </a:solidFill>
+                <a:latin typeface="Arial"/>
+                <a:ea typeface="Arial"/>
+                <a:cs typeface="Arial"/>
+              </a:defRPr>
+            </a:lvl4pPr>
+            <a:lvl5pPr>
+              <a:defRPr sz="2250" b="1">
+                <a:solidFill>
+                  <a:srgbClr val="087F8C"/>
+                </a:solidFill>
+                <a:latin typeface="Arial"/>
+                <a:ea typeface="Arial"/>
+                <a:cs typeface="Arial"/>
+              </a:defRPr>
+            </a:lvl5pPr>
+            <a:lvl6pPr>
+              <a:defRPr sz="2250" b="1">
+                <a:solidFill>
+                  <a:srgbClr val="087F8C"/>
+                </a:solidFill>
+                <a:latin typeface="Arial"/>
+                <a:ea typeface="Arial"/>
+                <a:cs typeface="Arial"/>
+              </a:defRPr>
+            </a:lvl6pPr>
+            <a:lvl7pPr>
+              <a:defRPr sz="2250" b="1">
+                <a:solidFill>
+                  <a:srgbClr val="087F8C"/>
+                </a:solidFill>
+                <a:latin typeface="Arial"/>
+                <a:ea typeface="Arial"/>
+                <a:cs typeface="Arial"/>
+              </a:defRPr>
+            </a:lvl7pPr>
+            <a:lvl8pPr>
+              <a:defRPr sz="2250" b="1">
+                <a:solidFill>
+                  <a:srgbClr val="087F8C"/>
+                </a:solidFill>
+                <a:latin typeface="Arial"/>
+                <a:ea typeface="Arial"/>
+                <a:cs typeface="Arial"/>
+              </a:defRPr>
+            </a:lvl8pPr>
+            <a:lvl9pPr>
+              <a:defRPr sz="2250" b="1">
+                <a:solidFill>
+                  <a:srgbClr val="087F8C"/>
+                </a:solidFill>
+                <a:latin typeface="Arial"/>
+                <a:ea typeface="Arial"/>
+                <a:cs typeface="Arial"/>
+              </a:defRPr>
+            </a:lvl9pPr>
+          </a:lstStyle>
+          <a:p xmlns:a="http://schemas.openxmlformats.org/drawingml/2006/main">
+            <a:pPr>
+              <a:defRPr sz="2250" b="1">
+                <a:solidFill>
+                  <a:srgbClr val="087F8C"/>
+                </a:solidFill>
+                <a:latin typeface="Arial"/>
+                <a:ea typeface="Arial"/>
+                <a:cs typeface="Arial"/>
+              </a:defRPr>
+            </a:pPr>
+            <a:r>
+              <a:rPr sz="2250" b="1">
+                <a:solidFill>
+                  <a:srgbClr val="087F8C"/>
+                </a:solidFill>
+                <a:latin typeface="Arial"/>
+                <a:ea typeface="Arial"/>
+                <a:cs typeface="Arial"/>
+              </a:rPr>
+              <a:t>Чотири дефекти 2.1.0 у beta не відтворились</a:t>
+            </a:r>
+          </a:p>
+        </p:txBody>
+      </p:sp>
+      <p:sp>
+        <p:nvSpPr>
+          <p:cNvPr id="8" name="">
+            <a:extLst xmlns:a="http://schemas.openxmlformats.org/drawingml/2006/main">
+              <a:ext uri="{FF2B5EF4-FFF2-40B4-BE49-F238E27FC236}">
+                <a16:creationId xmlns:a16="http://schemas.microsoft.com/office/drawing/2014/main" id="{4C85477C-DC3C-4C43-8502-8D56F6F208CB}"/>
+              </a:ext>
+            </a:extLst>
+          </p:cNvPr>
+          <p:cNvSpPr>
+            <a:spLocks xmlns:a="http://schemas.openxmlformats.org/drawingml/2006/main" noGrp="1"/>
+          </p:cNvSpPr>
+          <p:nvPr/>
+        </p:nvSpPr>
+        <p:spPr>
+          <a:xfrm xmlns:a="http://schemas.openxmlformats.org/drawingml/2006/main">
+            <a:off x="609600" y="5257800"/>
+            <a:ext cx="10972800" cy="895350"/>
+          </a:xfrm>
+          <a:prstGeom xmlns:a="http://schemas.openxmlformats.org/drawingml/2006/main" prst="rect">
+            <a:avLst/>
+          </a:prstGeom>
+          <a:noFill xmlns:a="http://schemas.openxmlformats.org/drawingml/2006/main"/>
+          <a:ln xmlns:a="http://schemas.openxmlformats.org/drawingml/2006/main" w="0">
+            <a:noFill/>
+          </a:ln>
+        </p:spPr>
+        <p:txBody>
+          <a:bodyPr xmlns:a="http://schemas.openxmlformats.org/drawingml/2006/main"/>
+          <a:lstStyle xmlns:a="http://schemas.openxmlformats.org/drawingml/2006/main">
+            <a:defPPr>
+              <a:defRPr sz="2100" b="0">
+                <a:solidFill>
+                  <a:srgbClr val="566A80"/>
+                </a:solidFill>
+                <a:latin typeface="Arial"/>
+                <a:ea typeface="Arial"/>
+                <a:cs typeface="Arial"/>
+              </a:defRPr>
+            </a:defPPr>
+            <a:lvl1pPr>
+              <a:defRPr sz="2100" b="0">
+                <a:solidFill>
+                  <a:srgbClr val="566A80"/>
+                </a:solidFill>
+                <a:latin typeface="Arial"/>
+                <a:ea typeface="Arial"/>
+                <a:cs typeface="Arial"/>
+              </a:defRPr>
+            </a:lvl1pPr>
+            <a:lvl2pPr>
+              <a:defRPr sz="2100" b="0">
+                <a:solidFill>
+                  <a:srgbClr val="566A80"/>
+                </a:solidFill>
+                <a:latin typeface="Arial"/>
+                <a:ea typeface="Arial"/>
+                <a:cs typeface="Arial"/>
+              </a:defRPr>
+            </a:lvl2pPr>
+            <a:lvl3pPr>
+              <a:defRPr sz="2100" b="0">
+                <a:solidFill>
+                  <a:srgbClr val="566A80"/>
+                </a:solidFill>
+                <a:latin typeface="Arial"/>
+                <a:ea typeface="Arial"/>
+                <a:cs typeface="Arial"/>
+              </a:defRPr>
+            </a:lvl3pPr>
+            <a:lvl4pPr>
+              <a:defRPr sz="2100" b="0">
+                <a:solidFill>
+                  <a:srgbClr val="566A80"/>
+                </a:solidFill>
+                <a:latin typeface="Arial"/>
+                <a:ea typeface="Arial"/>
+                <a:cs typeface="Arial"/>
+              </a:defRPr>
+            </a:lvl4pPr>
+            <a:lvl5pPr>
+              <a:defRPr sz="2100" b="0">
+                <a:solidFill>
+                  <a:srgbClr val="566A80"/>
+                </a:solidFill>
+                <a:latin typeface="Arial"/>
+                <a:ea typeface="Arial"/>
+                <a:cs typeface="Arial"/>
+              </a:defRPr>
+            </a:lvl5pPr>
+            <a:lvl6pPr>
+              <a:defRPr sz="2100" b="0">
+                <a:solidFill>
+                  <a:srgbClr val="566A80"/>
+                </a:solidFill>
+                <a:latin typeface="Arial"/>
+                <a:ea typeface="Arial"/>
+                <a:cs typeface="Arial"/>
+              </a:defRPr>
+            </a:lvl6pPr>
+            <a:lvl7pPr>
+              <a:defRPr sz="2100" b="0">
+                <a:solidFill>
+                  <a:srgbClr val="566A80"/>
+                </a:solidFill>
+                <a:latin typeface="Arial"/>
+                <a:ea typeface="Arial"/>
+                <a:cs typeface="Arial"/>
+              </a:defRPr>
+            </a:lvl7pPr>
+            <a:lvl8pPr>
+              <a:defRPr sz="2100" b="0">
+                <a:solidFill>
+                  <a:srgbClr val="566A80"/>
+                </a:solidFill>
+                <a:latin typeface="Arial"/>
+                <a:ea typeface="Arial"/>
+                <a:cs typeface="Arial"/>
+              </a:defRPr>
+            </a:lvl8pPr>
+            <a:lvl9pPr>
+              <a:defRPr sz="2100" b="0">
+                <a:solidFill>
+                  <a:srgbClr val="566A80"/>
+                </a:solidFill>
+                <a:latin typeface="Arial"/>
+                <a:ea typeface="Arial"/>
+                <a:cs typeface="Arial"/>
+              </a:defRPr>
+            </a:lvl9pPr>
+          </a:lstStyle>
+          <a:p xmlns:a="http://schemas.openxmlformats.org/drawingml/2006/main">
+            <a:pPr>
+              <a:defRPr sz="2100" b="0">
+                <a:solidFill>
+                  <a:srgbClr val="566A80"/>
+                </a:solidFill>
+                <a:latin typeface="Arial"/>
+                <a:ea typeface="Arial"/>
+                <a:cs typeface="Arial"/>
+              </a:defRPr>
+            </a:pPr>
+            <a:r>
+              <a:rPr sz="2100" b="0">
+                <a:solidFill>
+                  <a:srgbClr val="566A80"/>
+                </a:solidFill>
+                <a:latin typeface="Arial"/>
+                <a:ea typeface="Arial"/>
+                <a:cs typeface="Arial"/>
+              </a:rPr>
+              <a:t>Рекомендація: виправити pulse та ack за ID,</a:t>
+            </a:r>
+          </a:p>
+          <a:p xmlns:a="http://schemas.openxmlformats.org/drawingml/2006/main">
+            <a:pPr>
+              <a:defRPr sz="2100" b="0">
+                <a:solidFill>
+                  <a:srgbClr val="566A80"/>
+                </a:solidFill>
+                <a:latin typeface="Arial"/>
+                <a:ea typeface="Arial"/>
+                <a:cs typeface="Arial"/>
+              </a:defRPr>
+            </a:pPr>
+            <a:r>
+              <a:rPr sz="2100" b="0">
+                <a:solidFill>
+                  <a:srgbClr val="566A80"/>
+                </a:solidFill>
+                <a:latin typeface="Arial"/>
+                <a:ea typeface="Arial"/>
+                <a:cs typeface="Arial"/>
+              </a:rPr>
+              <a:t>після цього повторити відповідні перевірки й регресію.</a:t>
             </a:r>
           </a:p>
         </p:txBody>

--- a/docs/presentation/SENTRY_SWM2_QA.pptx
+++ b/docs/presentation/SENTRY_SWM2_QA.pptx
@@ -2,21 +2,21 @@
 <file path=ppt/presentation.xml><?xml version="1.0" encoding="utf-8"?>
 <p:presentation xmlns:p="http://schemas.openxmlformats.org/presentationml/2006/main">
   <p:sldMasterIdLst>
-    <p:sldMasterId xmlns:r="http://schemas.openxmlformats.org/officeDocument/2006/relationships" id="2147483648" r:id="R4f78361e16be495e"/>
+    <p:sldMasterId xmlns:r="http://schemas.openxmlformats.org/officeDocument/2006/relationships" id="2147483648" r:id="R175d7a4d567042dd"/>
   </p:sldMasterIdLst>
   <p:notesMasterIdLst>
-    <p:notesMasterId xmlns:r="http://schemas.openxmlformats.org/officeDocument/2006/relationships" r:id="R032fea57ab7c4626"/>
+    <p:notesMasterId xmlns:r="http://schemas.openxmlformats.org/officeDocument/2006/relationships" r:id="Ra20ea0f4e6de4122"/>
   </p:notesMasterIdLst>
   <p:sldIdLst>
-    <p:sldId xmlns:r="http://schemas.openxmlformats.org/officeDocument/2006/relationships" id="256" r:id="R8b1e3d91ddd24315"/>
-    <p:sldId xmlns:r="http://schemas.openxmlformats.org/officeDocument/2006/relationships" id="257" r:id="R169136cf44284e12"/>
-    <p:sldId xmlns:r="http://schemas.openxmlformats.org/officeDocument/2006/relationships" id="258" r:id="R0c393d83537a49c8"/>
-    <p:sldId xmlns:r="http://schemas.openxmlformats.org/officeDocument/2006/relationships" id="259" r:id="R032a7b5017ab4ee3"/>
-    <p:sldId xmlns:r="http://schemas.openxmlformats.org/officeDocument/2006/relationships" id="260" r:id="R47caadf81727403a"/>
-    <p:sldId xmlns:r="http://schemas.openxmlformats.org/officeDocument/2006/relationships" id="261" r:id="R94bbdae9bfa947d0"/>
-    <p:sldId xmlns:r="http://schemas.openxmlformats.org/officeDocument/2006/relationships" id="262" r:id="Rdf628b55ec8547f5"/>
-    <p:sldId xmlns:r="http://schemas.openxmlformats.org/officeDocument/2006/relationships" id="263" r:id="R5c23f66bbf5846dc"/>
-    <p:sldId xmlns:r="http://schemas.openxmlformats.org/officeDocument/2006/relationships" id="264" r:id="R4668269245474def"/>
+    <p:sldId xmlns:r="http://schemas.openxmlformats.org/officeDocument/2006/relationships" id="256" r:id="R3e67400028fe460b"/>
+    <p:sldId xmlns:r="http://schemas.openxmlformats.org/officeDocument/2006/relationships" id="257" r:id="Rffc2e9bc025049f8"/>
+    <p:sldId xmlns:r="http://schemas.openxmlformats.org/officeDocument/2006/relationships" id="258" r:id="Re956adbb559c47e8"/>
+    <p:sldId xmlns:r="http://schemas.openxmlformats.org/officeDocument/2006/relationships" id="259" r:id="R4fea5c342c484c67"/>
+    <p:sldId xmlns:r="http://schemas.openxmlformats.org/officeDocument/2006/relationships" id="260" r:id="R9cc14a470c784711"/>
+    <p:sldId xmlns:r="http://schemas.openxmlformats.org/officeDocument/2006/relationships" id="261" r:id="Re8c7515484764b4a"/>
+    <p:sldId xmlns:r="http://schemas.openxmlformats.org/officeDocument/2006/relationships" id="262" r:id="Rb01eaa1d787e4a98"/>
+    <p:sldId xmlns:r="http://schemas.openxmlformats.org/officeDocument/2006/relationships" id="263" r:id="R52e5646e3c1d463c"/>
+    <p:sldId xmlns:r="http://schemas.openxmlformats.org/officeDocument/2006/relationships" id="264" r:id="Rd68084c273194b35"/>
   </p:sldIdLst>
   <p:sldSz cx="12192000" cy="6858000"/>
   <p:notesSz cx="6858000" cy="9144000"/>
@@ -1015,7 +1015,12 @@
           </a:p>
           <a:p xmlns:a="http://schemas.openxmlformats.org/drawingml/2006/main">
             <a:r>
-              <a:t>https://github.com/rpozniak/sentry-swm2-qa/blob/main/docs/assets/HIL_STAND.png</a:t>
+              <a:t>https://github.com/rpozniak/sentry-swm2-qa/blob/main/reference/PRD.md</a:t>
+            </a:r>
+          </a:p>
+          <a:p xmlns:a="http://schemas.openxmlformats.org/drawingml/2006/main">
+            <a:r>
+              <a:t>MG90S є допоміжним макетом приводу клапана. PWM формує агент RP2040; очікування для SENTRY визначені в PRD.</a:t>
             </a:r>
           </a:p>
         </p:txBody>
@@ -3533,12 +3538,12 @@
   </p:cSld>
   <p:clrMap bg1="lt1" tx1="dk1" bg2="lt2" tx2="dk2" accent1="accent1" accent2="accent2" accent3="accent3" accent4="accent4" accent5="accent5" accent6="accent6" hlink="hlink" folHlink="folHlink"/>
   <p:sldLayoutIdLst>
-    <p:sldLayoutId xmlns:r="http://schemas.openxmlformats.org/officeDocument/2006/relationships" id="2147483649" r:id="R24f360ae879d4c43"/>
-    <p:sldLayoutId xmlns:r="http://schemas.openxmlformats.org/officeDocument/2006/relationships" id="2147483650" r:id="R06a99e552d994c7f"/>
-    <p:sldLayoutId xmlns:r="http://schemas.openxmlformats.org/officeDocument/2006/relationships" id="2147483651" r:id="R30d280750cf9405d"/>
-    <p:sldLayoutId xmlns:r="http://schemas.openxmlformats.org/officeDocument/2006/relationships" id="2147483652" r:id="Rcfdd64de82b74e17"/>
-    <p:sldLayoutId xmlns:r="http://schemas.openxmlformats.org/officeDocument/2006/relationships" id="2147483653" r:id="R01b1f19d3cc446ea"/>
-    <p:sldLayoutId xmlns:r="http://schemas.openxmlformats.org/officeDocument/2006/relationships" id="2147483654" r:id="Rcfa0b0f77c994328"/>
+    <p:sldLayoutId xmlns:r="http://schemas.openxmlformats.org/officeDocument/2006/relationships" id="2147483649" r:id="Rb23bf70817b14a1d"/>
+    <p:sldLayoutId xmlns:r="http://schemas.openxmlformats.org/officeDocument/2006/relationships" id="2147483650" r:id="R8c3621e80e7e4386"/>
+    <p:sldLayoutId xmlns:r="http://schemas.openxmlformats.org/officeDocument/2006/relationships" id="2147483651" r:id="R19d92a84c3c546c5"/>
+    <p:sldLayoutId xmlns:r="http://schemas.openxmlformats.org/officeDocument/2006/relationships" id="2147483652" r:id="R49f155930c994c11"/>
+    <p:sldLayoutId xmlns:r="http://schemas.openxmlformats.org/officeDocument/2006/relationships" id="2147483653" r:id="R57f4c1ce4aa64206"/>
+    <p:sldLayoutId xmlns:r="http://schemas.openxmlformats.org/officeDocument/2006/relationships" id="2147483654" r:id="R96a7d3756adb40e5"/>
   </p:sldLayoutIdLst>
   <p:txStyles>
     <p:titleStyle>
@@ -5601,7 +5606,7 @@
           <p:nvPr/>
         </p:nvPicPr>
         <p:blipFill>
-          <a:blip xmlns:r="http://schemas.openxmlformats.org/officeDocument/2006/relationships" xmlns:a="http://schemas.openxmlformats.org/drawingml/2006/main" r:embed="R3ba8d3705248470f"/>
+          <a:blip xmlns:r="http://schemas.openxmlformats.org/officeDocument/2006/relationships" xmlns:a="http://schemas.openxmlformats.org/drawingml/2006/main" r:embed="Rd639d99c9e3841fc"/>
           <a:stretch xmlns:a="http://schemas.openxmlformats.org/drawingml/2006/main"/>
         </p:blipFill>
         <p:spPr>
@@ -12971,7 +12976,7 @@
           <p:nvPr/>
         </p:nvPicPr>
         <p:blipFill>
-          <a:blip xmlns:r="http://schemas.openxmlformats.org/officeDocument/2006/relationships" xmlns:a="http://schemas.openxmlformats.org/drawingml/2006/main" r:embed="R3a686045c2414e95"/>
+          <a:blip xmlns:r="http://schemas.openxmlformats.org/officeDocument/2006/relationships" xmlns:a="http://schemas.openxmlformats.org/drawingml/2006/main" r:embed="R473c1dfaea1e42dc"/>
           <a:stretch xmlns:a="http://schemas.openxmlformats.org/drawingml/2006/main"/>
         </p:blipFill>
         <p:spPr>
@@ -13291,7 +13296,7 @@
                 <a:ea typeface="Arial"/>
                 <a:cs typeface="Arial"/>
               </a:rPr>
-              <a:t>RP2040 імітує кнопки</a:t>
+              <a:t>RP2040: кнопки</a:t>
             </a:r>
           </a:p>
           <a:p xmlns:a="http://schemas.openxmlformats.org/drawingml/2006/main">
@@ -13314,7 +13319,7 @@
                 <a:ea typeface="Arial"/>
                 <a:cs typeface="Arial"/>
               </a:rPr>
-              <a:t>та ECHO датчика</a:t>
+              <a:t>та ECHO сонара</a:t>
             </a:r>
           </a:p>
         </p:txBody>
@@ -13470,7 +13475,7 @@
                 <a:ea typeface="Arial"/>
                 <a:cs typeface="Arial"/>
               </a:rPr>
-              <a:t>Контакти, LED і кінцевики</a:t>
+              <a:t>Реле → макет клапана</a:t>
             </a:r>
           </a:p>
           <a:p xmlns:a="http://schemas.openxmlformats.org/drawingml/2006/main">
@@ -13493,7 +13498,7 @@
                 <a:ea typeface="Arial"/>
                 <a:cs typeface="Arial"/>
               </a:rPr>
-              <a:t>дають зворотний зв’язок</a:t>
+              <a:t>MG90S + кінцевики</a:t>
             </a:r>
           </a:p>
         </p:txBody>

--- a/docs/presentation/SENTRY_SWM2_QA.pptx
+++ b/docs/presentation/SENTRY_SWM2_QA.pptx
@@ -2,21 +2,22 @@
 <file path=ppt/presentation.xml><?xml version="1.0" encoding="utf-8"?>
 <p:presentation xmlns:p="http://schemas.openxmlformats.org/presentationml/2006/main">
   <p:sldMasterIdLst>
-    <p:sldMasterId xmlns:r="http://schemas.openxmlformats.org/officeDocument/2006/relationships" id="2147483648" r:id="R175d7a4d567042dd"/>
+    <p:sldMasterId xmlns:r="http://schemas.openxmlformats.org/officeDocument/2006/relationships" id="2147483648" r:id="Raee74c157d194f94"/>
   </p:sldMasterIdLst>
   <p:notesMasterIdLst>
-    <p:notesMasterId xmlns:r="http://schemas.openxmlformats.org/officeDocument/2006/relationships" r:id="Ra20ea0f4e6de4122"/>
+    <p:notesMasterId xmlns:r="http://schemas.openxmlformats.org/officeDocument/2006/relationships" r:id="R922357230b7f4cd1"/>
   </p:notesMasterIdLst>
   <p:sldIdLst>
-    <p:sldId xmlns:r="http://schemas.openxmlformats.org/officeDocument/2006/relationships" id="256" r:id="R3e67400028fe460b"/>
-    <p:sldId xmlns:r="http://schemas.openxmlformats.org/officeDocument/2006/relationships" id="257" r:id="Rffc2e9bc025049f8"/>
-    <p:sldId xmlns:r="http://schemas.openxmlformats.org/officeDocument/2006/relationships" id="258" r:id="Re956adbb559c47e8"/>
-    <p:sldId xmlns:r="http://schemas.openxmlformats.org/officeDocument/2006/relationships" id="259" r:id="R4fea5c342c484c67"/>
-    <p:sldId xmlns:r="http://schemas.openxmlformats.org/officeDocument/2006/relationships" id="260" r:id="R9cc14a470c784711"/>
-    <p:sldId xmlns:r="http://schemas.openxmlformats.org/officeDocument/2006/relationships" id="261" r:id="Re8c7515484764b4a"/>
-    <p:sldId xmlns:r="http://schemas.openxmlformats.org/officeDocument/2006/relationships" id="262" r:id="Rb01eaa1d787e4a98"/>
-    <p:sldId xmlns:r="http://schemas.openxmlformats.org/officeDocument/2006/relationships" id="263" r:id="R52e5646e3c1d463c"/>
-    <p:sldId xmlns:r="http://schemas.openxmlformats.org/officeDocument/2006/relationships" id="264" r:id="Rd68084c273194b35"/>
+    <p:sldId xmlns:r="http://schemas.openxmlformats.org/officeDocument/2006/relationships" id="256" r:id="R3927c892008c4936"/>
+    <p:sldId xmlns:r="http://schemas.openxmlformats.org/officeDocument/2006/relationships" id="257" r:id="Rd34a9ed1f8b64665"/>
+    <p:sldId xmlns:r="http://schemas.openxmlformats.org/officeDocument/2006/relationships" id="258" r:id="R6742a008b18d4231"/>
+    <p:sldId xmlns:r="http://schemas.openxmlformats.org/officeDocument/2006/relationships" id="259" r:id="R9445e41b77584a44"/>
+    <p:sldId xmlns:r="http://schemas.openxmlformats.org/officeDocument/2006/relationships" id="260" r:id="R0b28db2cf43049e3"/>
+    <p:sldId xmlns:r="http://schemas.openxmlformats.org/officeDocument/2006/relationships" id="261" r:id="R8fdf6988f7114dc7"/>
+    <p:sldId xmlns:r="http://schemas.openxmlformats.org/officeDocument/2006/relationships" id="262" r:id="Rb0b28ff8608549b3"/>
+    <p:sldId xmlns:r="http://schemas.openxmlformats.org/officeDocument/2006/relationships" id="263" r:id="Rea4c79b1e47a4eab"/>
+    <p:sldId xmlns:r="http://schemas.openxmlformats.org/officeDocument/2006/relationships" id="264" r:id="R2da40d0dd88f4aa8"/>
+    <p:sldId xmlns:r="http://schemas.openxmlformats.org/officeDocument/2006/relationships" id="265" r:id="R2f7e6def86864698"/>
   </p:sldIdLst>
   <p:sldSz cx="12192000" cy="6858000"/>
   <p:notesSz cx="6858000" cy="9144000"/>
@@ -485,6 +486,81 @@
 </p:notes>
 </file>
 
+<file path=ppt/notesSlides/notesSlide10.xml><?xml version="1.0" encoding="utf-8"?>
+<p:notes xmlns:p="http://schemas.openxmlformats.org/presentationml/2006/main">
+  <p:cSld>
+    <p:spTree>
+      <p:nvGrpSpPr>
+        <p:cNvPr id="1" name=""/>
+        <p:cNvGrpSpPr/>
+        <p:nvPr/>
+      </p:nvGrpSpPr>
+      <p:grpSpPr>
+        <a:xfrm xmlns:a="http://schemas.openxmlformats.org/drawingml/2006/main"/>
+      </p:grpSpPr>
+      <p:sp>
+        <p:nvSpPr>
+          <p:cNvPr id="2" name="Slide Image Placeholder 1"/>
+          <p:cNvSpPr>
+            <a:spLocks xmlns:a="http://schemas.openxmlformats.org/drawingml/2006/main" noGrp="1"/>
+          </p:cNvSpPr>
+          <p:nvPr>
+            <p:ph type="sldImg" idx="0"/>
+          </p:nvPr>
+        </p:nvSpPr>
+        <p:spPr/>
+      </p:sp>
+      <p:sp>
+        <p:nvSpPr>
+          <p:cNvPr id="3" name="Notes Placeholder 2"/>
+          <p:cNvSpPr>
+            <a:spLocks xmlns:a="http://schemas.openxmlformats.org/drawingml/2006/main" noGrp="1"/>
+          </p:cNvSpPr>
+          <p:nvPr>
+            <p:ph type="body" idx="1"/>
+          </p:nvPr>
+        </p:nvSpPr>
+        <p:spPr/>
+        <p:txBody>
+          <a:bodyPr xmlns:a="http://schemas.openxmlformats.org/drawingml/2006/main"/>
+          <a:lstStyle xmlns:a="http://schemas.openxmlformats.org/drawingml/2006/main"/>
+          <a:p xmlns:a="http://schemas.openxmlformats.org/drawingml/2006/main">
+            <a:r>
+              <a:t>https://github.com/rpozniak/sentry-swm2-qa/blob/main/REPORT.md</a:t>
+            </a:r>
+          </a:p>
+          <a:p xmlns:a="http://schemas.openxmlformats.org/drawingml/2006/main">
+            <a:r>
+              <a:t>https://github.com/rpozniak/sentry-swm2-qa/blob/main/docs/TRACEABILITY.md</a:t>
+            </a:r>
+          </a:p>
+        </p:txBody>
+      </p:sp>
+      <p:sp>
+        <p:nvSpPr>
+          <p:cNvPr id="4" name="Slide Number Placeholder 3"/>
+          <p:cNvSpPr>
+            <a:spLocks xmlns:a="http://schemas.openxmlformats.org/drawingml/2006/main" noGrp="1"/>
+          </p:cNvSpPr>
+          <p:nvPr>
+            <p:ph type="sldNum" idx="5"/>
+          </p:nvPr>
+        </p:nvSpPr>
+        <p:spPr/>
+        <p:txBody>
+          <a:bodyPr xmlns:a="http://schemas.openxmlformats.org/drawingml/2006/main"/>
+          <a:lstStyle xmlns:a="http://schemas.openxmlformats.org/drawingml/2006/main"/>
+          <a:p xmlns:a="http://schemas.openxmlformats.org/drawingml/2006/main"/>
+        </p:txBody>
+      </p:sp>
+    </p:spTree>
+  </p:cSld>
+  <p:clrMapOvr>
+    <a:masterClrMapping xmlns:a="http://schemas.openxmlformats.org/drawingml/2006/main"/>
+  </p:clrMapOvr>
+</p:notes>
+</file>
+
 <file path=ppt/notesSlides/notesSlide2.xml><?xml version="1.0" encoding="utf-8"?>
 <p:notes xmlns:p="http://schemas.openxmlformats.org/presentationml/2006/main">
   <p:cSld>
@@ -760,6 +836,76 @@
           <a:lstStyle xmlns:a="http://schemas.openxmlformats.org/drawingml/2006/main"/>
           <a:p xmlns:a="http://schemas.openxmlformats.org/drawingml/2006/main">
             <a:r>
+              <a:t>Фото надав автор проєкту 24.10.2026. Оригінал: docs/assets/REAL_STAND_2026-10-24.jpg. Опис: docs/REAL_STAND.md. Автор підтвердив реле 5 В, Raspberry Pi 5, ESP32-S3, кнопки, датчик відстані, LED із резистором 220 Ом і мультиметр у режимі прозвонювання. Підключення за описом користувача: живлення модуля від Pi, IN з GPIO8 ESP32. Автор повідомив про спрацювання реле під час підготовки. Фото не змінює результатів фізичних кейсів. Журнал: docs/MANUAL_RUN.md. Поточний ручний стенд відрізняється від проєкту подальшої HIL-автоматизації на окремому слайді.</a:t>
+            </a:r>
+          </a:p>
+        </p:txBody>
+      </p:sp>
+      <p:sp>
+        <p:nvSpPr>
+          <p:cNvPr id="4" name="Slide Number Placeholder 3"/>
+          <p:cNvSpPr>
+            <a:spLocks xmlns:a="http://schemas.openxmlformats.org/drawingml/2006/main" noGrp="1"/>
+          </p:cNvSpPr>
+          <p:nvPr>
+            <p:ph type="sldNum" idx="5"/>
+          </p:nvPr>
+        </p:nvSpPr>
+        <p:spPr/>
+        <p:txBody>
+          <a:bodyPr xmlns:a="http://schemas.openxmlformats.org/drawingml/2006/main"/>
+          <a:lstStyle xmlns:a="http://schemas.openxmlformats.org/drawingml/2006/main"/>
+          <a:p xmlns:a="http://schemas.openxmlformats.org/drawingml/2006/main"/>
+        </p:txBody>
+      </p:sp>
+    </p:spTree>
+  </p:cSld>
+  <p:clrMapOvr>
+    <a:masterClrMapping xmlns:a="http://schemas.openxmlformats.org/drawingml/2006/main"/>
+  </p:clrMapOvr>
+</p:notes>
+</file>
+
+<file path=ppt/notesSlides/notesSlide6.xml><?xml version="1.0" encoding="utf-8"?>
+<p:notes xmlns:p="http://schemas.openxmlformats.org/presentationml/2006/main">
+  <p:cSld>
+    <p:spTree>
+      <p:nvGrpSpPr>
+        <p:cNvPr id="1" name=""/>
+        <p:cNvGrpSpPr/>
+        <p:nvPr/>
+      </p:nvGrpSpPr>
+      <p:grpSpPr>
+        <a:xfrm xmlns:a="http://schemas.openxmlformats.org/drawingml/2006/main"/>
+      </p:grpSpPr>
+      <p:sp>
+        <p:nvSpPr>
+          <p:cNvPr id="2" name="Slide Image Placeholder 1"/>
+          <p:cNvSpPr>
+            <a:spLocks xmlns:a="http://schemas.openxmlformats.org/drawingml/2006/main" noGrp="1"/>
+          </p:cNvSpPr>
+          <p:nvPr>
+            <p:ph type="sldImg" idx="0"/>
+          </p:nvPr>
+        </p:nvSpPr>
+        <p:spPr/>
+      </p:sp>
+      <p:sp>
+        <p:nvSpPr>
+          <p:cNvPr id="3" name="Notes Placeholder 2"/>
+          <p:cNvSpPr>
+            <a:spLocks xmlns:a="http://schemas.openxmlformats.org/drawingml/2006/main" noGrp="1"/>
+          </p:cNvSpPr>
+          <p:nvPr>
+            <p:ph type="body" idx="1"/>
+          </p:nvPr>
+        </p:nvSpPr>
+        <p:spPr/>
+        <p:txBody>
+          <a:bodyPr xmlns:a="http://schemas.openxmlformats.org/drawingml/2006/main"/>
+          <a:lstStyle xmlns:a="http://schemas.openxmlformats.org/drawingml/2006/main"/>
+          <a:p xmlns:a="http://schemas.openxmlformats.org/drawingml/2006/main">
+            <a:r>
               <a:t>https://github.com/rpozniak/sentry-swm2-qa/blob/main/docs/TEST_CASES.md</a:t>
             </a:r>
           </a:p>
@@ -795,7 +941,7 @@
 </p:notes>
 </file>
 
-<file path=ppt/notesSlides/notesSlide6.xml><?xml version="1.0" encoding="utf-8"?>
+<file path=ppt/notesSlides/notesSlide7.xml><?xml version="1.0" encoding="utf-8"?>
 <p:notes xmlns:p="http://schemas.openxmlformats.org/presentationml/2006/main">
   <p:cSld>
     <p:spTree>
@@ -870,7 +1016,7 @@
 </p:notes>
 </file>
 
-<file path=ppt/notesSlides/notesSlide7.xml><?xml version="1.0" encoding="utf-8"?>
+<file path=ppt/notesSlides/notesSlide8.xml><?xml version="1.0" encoding="utf-8"?>
 <p:notes xmlns:p="http://schemas.openxmlformats.org/presentationml/2006/main">
   <p:cSld>
     <p:spTree>
@@ -970,7 +1116,7 @@
 </p:notes>
 </file>
 
-<file path=ppt/notesSlides/notesSlide8.xml><?xml version="1.0" encoding="utf-8"?>
+<file path=ppt/notesSlides/notesSlide9.xml><?xml version="1.0" encoding="utf-8"?>
 <p:notes xmlns:p="http://schemas.openxmlformats.org/presentationml/2006/main">
   <p:cSld>
     <p:spTree>
@@ -1050,81 +1196,6 @@
 </p:notes>
 </file>
 
-<file path=ppt/notesSlides/notesSlide9.xml><?xml version="1.0" encoding="utf-8"?>
-<p:notes xmlns:p="http://schemas.openxmlformats.org/presentationml/2006/main">
-  <p:cSld>
-    <p:spTree>
-      <p:nvGrpSpPr>
-        <p:cNvPr id="1" name=""/>
-        <p:cNvGrpSpPr/>
-        <p:nvPr/>
-      </p:nvGrpSpPr>
-      <p:grpSpPr>
-        <a:xfrm xmlns:a="http://schemas.openxmlformats.org/drawingml/2006/main"/>
-      </p:grpSpPr>
-      <p:sp>
-        <p:nvSpPr>
-          <p:cNvPr id="2" name="Slide Image Placeholder 1"/>
-          <p:cNvSpPr>
-            <a:spLocks xmlns:a="http://schemas.openxmlformats.org/drawingml/2006/main" noGrp="1"/>
-          </p:cNvSpPr>
-          <p:nvPr>
-            <p:ph type="sldImg" idx="0"/>
-          </p:nvPr>
-        </p:nvSpPr>
-        <p:spPr/>
-      </p:sp>
-      <p:sp>
-        <p:nvSpPr>
-          <p:cNvPr id="3" name="Notes Placeholder 2"/>
-          <p:cNvSpPr>
-            <a:spLocks xmlns:a="http://schemas.openxmlformats.org/drawingml/2006/main" noGrp="1"/>
-          </p:cNvSpPr>
-          <p:nvPr>
-            <p:ph type="body" idx="1"/>
-          </p:nvPr>
-        </p:nvSpPr>
-        <p:spPr/>
-        <p:txBody>
-          <a:bodyPr xmlns:a="http://schemas.openxmlformats.org/drawingml/2006/main"/>
-          <a:lstStyle xmlns:a="http://schemas.openxmlformats.org/drawingml/2006/main"/>
-          <a:p xmlns:a="http://schemas.openxmlformats.org/drawingml/2006/main">
-            <a:r>
-              <a:t>https://github.com/rpozniak/sentry-swm2-qa/blob/main/REPORT.md</a:t>
-            </a:r>
-          </a:p>
-          <a:p xmlns:a="http://schemas.openxmlformats.org/drawingml/2006/main">
-            <a:r>
-              <a:t>https://github.com/rpozniak/sentry-swm2-qa/blob/main/docs/TRACEABILITY.md</a:t>
-            </a:r>
-          </a:p>
-        </p:txBody>
-      </p:sp>
-      <p:sp>
-        <p:nvSpPr>
-          <p:cNvPr id="4" name="Slide Number Placeholder 3"/>
-          <p:cNvSpPr>
-            <a:spLocks xmlns:a="http://schemas.openxmlformats.org/drawingml/2006/main" noGrp="1"/>
-          </p:cNvSpPr>
-          <p:nvPr>
-            <p:ph type="sldNum" idx="5"/>
-          </p:nvPr>
-        </p:nvSpPr>
-        <p:spPr/>
-        <p:txBody>
-          <a:bodyPr xmlns:a="http://schemas.openxmlformats.org/drawingml/2006/main"/>
-          <a:lstStyle xmlns:a="http://schemas.openxmlformats.org/drawingml/2006/main"/>
-          <a:p xmlns:a="http://schemas.openxmlformats.org/drawingml/2006/main"/>
-        </p:txBody>
-      </p:sp>
-    </p:spTree>
-  </p:cSld>
-  <p:clrMapOvr>
-    <a:masterClrMapping xmlns:a="http://schemas.openxmlformats.org/drawingml/2006/main"/>
-  </p:clrMapOvr>
-</p:notes>
-</file>
-
 <file path=ppt/slideLayouts/slideLayout1.xml><?xml version="1.0" encoding="utf-8"?>
 <p:sldLayout xmlns:p="http://schemas.openxmlformats.org/presentationml/2006/main" type="title">
   <p:cSld name="Title Slide">
@@ -3538,12 +3609,12 @@
   </p:cSld>
   <p:clrMap bg1="lt1" tx1="dk1" bg2="lt2" tx2="dk2" accent1="accent1" accent2="accent2" accent3="accent3" accent4="accent4" accent5="accent5" accent6="accent6" hlink="hlink" folHlink="folHlink"/>
   <p:sldLayoutIdLst>
-    <p:sldLayoutId xmlns:r="http://schemas.openxmlformats.org/officeDocument/2006/relationships" id="2147483649" r:id="Rb23bf70817b14a1d"/>
-    <p:sldLayoutId xmlns:r="http://schemas.openxmlformats.org/officeDocument/2006/relationships" id="2147483650" r:id="R8c3621e80e7e4386"/>
-    <p:sldLayoutId xmlns:r="http://schemas.openxmlformats.org/officeDocument/2006/relationships" id="2147483651" r:id="R19d92a84c3c546c5"/>
-    <p:sldLayoutId xmlns:r="http://schemas.openxmlformats.org/officeDocument/2006/relationships" id="2147483652" r:id="R49f155930c994c11"/>
-    <p:sldLayoutId xmlns:r="http://schemas.openxmlformats.org/officeDocument/2006/relationships" id="2147483653" r:id="R57f4c1ce4aa64206"/>
-    <p:sldLayoutId xmlns:r="http://schemas.openxmlformats.org/officeDocument/2006/relationships" id="2147483654" r:id="R96a7d3756adb40e5"/>
+    <p:sldLayoutId xmlns:r="http://schemas.openxmlformats.org/officeDocument/2006/relationships" id="2147483649" r:id="Re89360c9c0d34a54"/>
+    <p:sldLayoutId xmlns:r="http://schemas.openxmlformats.org/officeDocument/2006/relationships" id="2147483650" r:id="R28abbaa3e83444dd"/>
+    <p:sldLayoutId xmlns:r="http://schemas.openxmlformats.org/officeDocument/2006/relationships" id="2147483651" r:id="Ra6e2a3a548f64d6d"/>
+    <p:sldLayoutId xmlns:r="http://schemas.openxmlformats.org/officeDocument/2006/relationships" id="2147483652" r:id="Rea3de692778648f8"/>
+    <p:sldLayoutId xmlns:r="http://schemas.openxmlformats.org/officeDocument/2006/relationships" id="2147483653" r:id="R2b8138ce5f944070"/>
+    <p:sldLayoutId xmlns:r="http://schemas.openxmlformats.org/officeDocument/2006/relationships" id="2147483654" r:id="R7aa6d1f762f34796"/>
   </p:sldLayoutIdLst>
   <p:txStyles>
     <p:titleStyle>
@@ -4130,6 +4201,7 @@
               </a:defRPr>
             </a:defPPr>
             <a:lvl1pPr>
+              <a:buNone/>
               <a:defRPr sz="6150" b="1">
                 <a:solidFill>
                   <a:srgbClr val="FFFFFF"/>
@@ -4140,6 +4212,7 @@
               </a:defRPr>
             </a:lvl1pPr>
             <a:lvl2pPr>
+              <a:buNone/>
               <a:defRPr sz="6150" b="1">
                 <a:solidFill>
                   <a:srgbClr val="FFFFFF"/>
@@ -4150,6 +4223,7 @@
               </a:defRPr>
             </a:lvl2pPr>
             <a:lvl3pPr>
+              <a:buNone/>
               <a:defRPr sz="6150" b="1">
                 <a:solidFill>
                   <a:srgbClr val="FFFFFF"/>
@@ -4160,6 +4234,7 @@
               </a:defRPr>
             </a:lvl3pPr>
             <a:lvl4pPr>
+              <a:buNone/>
               <a:defRPr sz="6150" b="1">
                 <a:solidFill>
                   <a:srgbClr val="FFFFFF"/>
@@ -4170,6 +4245,7 @@
               </a:defRPr>
             </a:lvl4pPr>
             <a:lvl5pPr>
+              <a:buNone/>
               <a:defRPr sz="6150" b="1">
                 <a:solidFill>
                   <a:srgbClr val="FFFFFF"/>
@@ -4180,6 +4256,7 @@
               </a:defRPr>
             </a:lvl5pPr>
             <a:lvl6pPr>
+              <a:buNone/>
               <a:defRPr sz="6150" b="1">
                 <a:solidFill>
                   <a:srgbClr val="FFFFFF"/>
@@ -4190,6 +4267,7 @@
               </a:defRPr>
             </a:lvl6pPr>
             <a:lvl7pPr>
+              <a:buNone/>
               <a:defRPr sz="6150" b="1">
                 <a:solidFill>
                   <a:srgbClr val="FFFFFF"/>
@@ -4200,6 +4278,7 @@
               </a:defRPr>
             </a:lvl7pPr>
             <a:lvl8pPr>
+              <a:buNone/>
               <a:defRPr sz="6150" b="1">
                 <a:solidFill>
                   <a:srgbClr val="FFFFFF"/>
@@ -4210,6 +4289,7 @@
               </a:defRPr>
             </a:lvl8pPr>
             <a:lvl9pPr>
+              <a:buNone/>
               <a:defRPr sz="6150" b="1">
                 <a:solidFill>
                   <a:srgbClr val="FFFFFF"/>
@@ -4222,6 +4302,7 @@
           </a:lstStyle>
           <a:p xmlns:a="http://schemas.openxmlformats.org/drawingml/2006/main">
             <a:pPr>
+              <a:buNone/>
               <a:defRPr sz="6150" b="1">
                 <a:solidFill>
                   <a:srgbClr val="FFFFFF"/>
@@ -4286,6 +4367,7 @@
               </a:defRPr>
             </a:defPPr>
             <a:lvl1pPr>
+              <a:buNone/>
               <a:defRPr sz="2550" b="0">
                 <a:solidFill>
                   <a:srgbClr val="6DE0D3"/>
@@ -4296,6 +4378,7 @@
               </a:defRPr>
             </a:lvl1pPr>
             <a:lvl2pPr>
+              <a:buNone/>
               <a:defRPr sz="2550" b="0">
                 <a:solidFill>
                   <a:srgbClr val="6DE0D3"/>
@@ -4306,6 +4389,7 @@
               </a:defRPr>
             </a:lvl2pPr>
             <a:lvl3pPr>
+              <a:buNone/>
               <a:defRPr sz="2550" b="0">
                 <a:solidFill>
                   <a:srgbClr val="6DE0D3"/>
@@ -4316,6 +4400,7 @@
               </a:defRPr>
             </a:lvl3pPr>
             <a:lvl4pPr>
+              <a:buNone/>
               <a:defRPr sz="2550" b="0">
                 <a:solidFill>
                   <a:srgbClr val="6DE0D3"/>
@@ -4326,6 +4411,7 @@
               </a:defRPr>
             </a:lvl4pPr>
             <a:lvl5pPr>
+              <a:buNone/>
               <a:defRPr sz="2550" b="0">
                 <a:solidFill>
                   <a:srgbClr val="6DE0D3"/>
@@ -4336,6 +4422,7 @@
               </a:defRPr>
             </a:lvl5pPr>
             <a:lvl6pPr>
+              <a:buNone/>
               <a:defRPr sz="2550" b="0">
                 <a:solidFill>
                   <a:srgbClr val="6DE0D3"/>
@@ -4346,6 +4433,7 @@
               </a:defRPr>
             </a:lvl6pPr>
             <a:lvl7pPr>
+              <a:buNone/>
               <a:defRPr sz="2550" b="0">
                 <a:solidFill>
                   <a:srgbClr val="6DE0D3"/>
@@ -4356,6 +4444,7 @@
               </a:defRPr>
             </a:lvl7pPr>
             <a:lvl8pPr>
+              <a:buNone/>
               <a:defRPr sz="2550" b="0">
                 <a:solidFill>
                   <a:srgbClr val="6DE0D3"/>
@@ -4366,6 +4455,7 @@
               </a:defRPr>
             </a:lvl8pPr>
             <a:lvl9pPr>
+              <a:buNone/>
               <a:defRPr sz="2550" b="0">
                 <a:solidFill>
                   <a:srgbClr val="6DE0D3"/>
@@ -4378,6 +4468,7 @@
           </a:lstStyle>
           <a:p xmlns:a="http://schemas.openxmlformats.org/drawingml/2006/main">
             <a:pPr>
+              <a:buNone/>
               <a:defRPr sz="2550" b="0">
                 <a:solidFill>
                   <a:srgbClr val="6DE0D3"/>
@@ -4442,6 +4533,7 @@
               </a:defRPr>
             </a:defPPr>
             <a:lvl1pPr>
+              <a:buNone/>
               <a:defRPr sz="1800" b="0">
                 <a:solidFill>
                   <a:srgbClr val="C6D4E1"/>
@@ -4452,6 +4544,7 @@
               </a:defRPr>
             </a:lvl1pPr>
             <a:lvl2pPr>
+              <a:buNone/>
               <a:defRPr sz="1800" b="0">
                 <a:solidFill>
                   <a:srgbClr val="C6D4E1"/>
@@ -4462,6 +4555,7 @@
               </a:defRPr>
             </a:lvl2pPr>
             <a:lvl3pPr>
+              <a:buNone/>
               <a:defRPr sz="1800" b="0">
                 <a:solidFill>
                   <a:srgbClr val="C6D4E1"/>
@@ -4472,6 +4566,7 @@
               </a:defRPr>
             </a:lvl3pPr>
             <a:lvl4pPr>
+              <a:buNone/>
               <a:defRPr sz="1800" b="0">
                 <a:solidFill>
                   <a:srgbClr val="C6D4E1"/>
@@ -4482,6 +4577,7 @@
               </a:defRPr>
             </a:lvl4pPr>
             <a:lvl5pPr>
+              <a:buNone/>
               <a:defRPr sz="1800" b="0">
                 <a:solidFill>
                   <a:srgbClr val="C6D4E1"/>
@@ -4492,6 +4588,7 @@
               </a:defRPr>
             </a:lvl5pPr>
             <a:lvl6pPr>
+              <a:buNone/>
               <a:defRPr sz="1800" b="0">
                 <a:solidFill>
                   <a:srgbClr val="C6D4E1"/>
@@ -4502,6 +4599,7 @@
               </a:defRPr>
             </a:lvl6pPr>
             <a:lvl7pPr>
+              <a:buNone/>
               <a:defRPr sz="1800" b="0">
                 <a:solidFill>
                   <a:srgbClr val="C6D4E1"/>
@@ -4512,6 +4610,7 @@
               </a:defRPr>
             </a:lvl7pPr>
             <a:lvl8pPr>
+              <a:buNone/>
               <a:defRPr sz="1800" b="0">
                 <a:solidFill>
                   <a:srgbClr val="C6D4E1"/>
@@ -4522,6 +4621,7 @@
               </a:defRPr>
             </a:lvl8pPr>
             <a:lvl9pPr>
+              <a:buNone/>
               <a:defRPr sz="1800" b="0">
                 <a:solidFill>
                   <a:srgbClr val="C6D4E1"/>
@@ -4534,6 +4634,7 @@
           </a:lstStyle>
           <a:p xmlns:a="http://schemas.openxmlformats.org/drawingml/2006/main">
             <a:pPr>
+              <a:buNone/>
               <a:defRPr sz="1800" b="0">
                 <a:solidFill>
                   <a:srgbClr val="C6D4E1"/>
@@ -4561,6 +4662,1245 @@
     <p:extLst>
       <p:ext uri="{BB962C8B-B14F-4D97-AF65-F5344CB8AC3E}">
         <p14:creationId xmlns:p14="http://schemas.microsoft.com/office/powerpoint/2010/main" val="1459372072"/>
+      </p:ext>
+    </p:extLst>
+  </p:cSld>
+</p:sld>
+</file>
+
+<file path=ppt/slides/slide10.xml><?xml version="1.0" encoding="utf-8"?>
+<p:sld xmlns:p="http://schemas.openxmlformats.org/presentationml/2006/main">
+  <p:cSld>
+    <p:bg>
+      <p:bgPr>
+        <a:solidFill xmlns:a="http://schemas.openxmlformats.org/drawingml/2006/main">
+          <a:srgbClr val="FFFFFF"/>
+        </a:solidFill>
+      </p:bgPr>
+    </p:bg>
+    <p:spTree>
+      <p:nvGrpSpPr>
+        <p:cNvPr id="1" name=""/>
+        <p:cNvGrpSpPr/>
+        <p:nvPr/>
+      </p:nvGrpSpPr>
+      <p:grpSpPr>
+        <a:xfrm xmlns:a="http://schemas.openxmlformats.org/drawingml/2006/main"/>
+      </p:grpSpPr>
+      <p:sp>
+        <p:nvSpPr>
+          <p:cNvPr id="2" name="">
+            <a:extLst xmlns:a="http://schemas.openxmlformats.org/drawingml/2006/main">
+              <a:ext uri="{FF2B5EF4-FFF2-40B4-BE49-F238E27FC236}">
+                <a16:creationId xmlns:a16="http://schemas.microsoft.com/office/drawing/2014/main" id="{6D821F03-8643-4692-89AE-A5E3A1CEDDEB}"/>
+              </a:ext>
+            </a:extLst>
+          </p:cNvPr>
+          <p:cNvSpPr>
+            <a:spLocks xmlns:a="http://schemas.openxmlformats.org/drawingml/2006/main" noGrp="1"/>
+          </p:cNvSpPr>
+          <p:nvPr/>
+        </p:nvSpPr>
+        <p:spPr>
+          <a:xfrm xmlns:a="http://schemas.openxmlformats.org/drawingml/2006/main">
+            <a:off x="609600" y="381000"/>
+            <a:ext cx="10972800" cy="895350"/>
+          </a:xfrm>
+          <a:prstGeom xmlns:a="http://schemas.openxmlformats.org/drawingml/2006/main" prst="rect">
+            <a:avLst/>
+          </a:prstGeom>
+          <a:noFill xmlns:a="http://schemas.openxmlformats.org/drawingml/2006/main"/>
+          <a:ln xmlns:a="http://schemas.openxmlformats.org/drawingml/2006/main" w="0">
+            <a:noFill/>
+          </a:ln>
+        </p:spPr>
+        <p:txBody>
+          <a:bodyPr xmlns:a="http://schemas.openxmlformats.org/drawingml/2006/main"/>
+          <a:lstStyle xmlns:a="http://schemas.openxmlformats.org/drawingml/2006/main">
+            <a:defPPr>
+              <a:defRPr sz="3300" b="1">
+                <a:solidFill>
+                  <a:srgbClr val="182D45"/>
+                </a:solidFill>
+                <a:latin typeface="Arial"/>
+                <a:ea typeface="Arial"/>
+                <a:cs typeface="Arial"/>
+              </a:defRPr>
+            </a:defPPr>
+            <a:lvl1pPr>
+              <a:buNone/>
+              <a:defRPr sz="3300" b="1">
+                <a:solidFill>
+                  <a:srgbClr val="182D45"/>
+                </a:solidFill>
+                <a:latin typeface="Arial"/>
+                <a:ea typeface="Arial"/>
+                <a:cs typeface="Arial"/>
+              </a:defRPr>
+            </a:lvl1pPr>
+            <a:lvl2pPr>
+              <a:buNone/>
+              <a:defRPr sz="3300" b="1">
+                <a:solidFill>
+                  <a:srgbClr val="182D45"/>
+                </a:solidFill>
+                <a:latin typeface="Arial"/>
+                <a:ea typeface="Arial"/>
+                <a:cs typeface="Arial"/>
+              </a:defRPr>
+            </a:lvl2pPr>
+            <a:lvl3pPr>
+              <a:buNone/>
+              <a:defRPr sz="3300" b="1">
+                <a:solidFill>
+                  <a:srgbClr val="182D45"/>
+                </a:solidFill>
+                <a:latin typeface="Arial"/>
+                <a:ea typeface="Arial"/>
+                <a:cs typeface="Arial"/>
+              </a:defRPr>
+            </a:lvl3pPr>
+            <a:lvl4pPr>
+              <a:buNone/>
+              <a:defRPr sz="3300" b="1">
+                <a:solidFill>
+                  <a:srgbClr val="182D45"/>
+                </a:solidFill>
+                <a:latin typeface="Arial"/>
+                <a:ea typeface="Arial"/>
+                <a:cs typeface="Arial"/>
+              </a:defRPr>
+            </a:lvl4pPr>
+            <a:lvl5pPr>
+              <a:buNone/>
+              <a:defRPr sz="3300" b="1">
+                <a:solidFill>
+                  <a:srgbClr val="182D45"/>
+                </a:solidFill>
+                <a:latin typeface="Arial"/>
+                <a:ea typeface="Arial"/>
+                <a:cs typeface="Arial"/>
+              </a:defRPr>
+            </a:lvl5pPr>
+            <a:lvl6pPr>
+              <a:buNone/>
+              <a:defRPr sz="3300" b="1">
+                <a:solidFill>
+                  <a:srgbClr val="182D45"/>
+                </a:solidFill>
+                <a:latin typeface="Arial"/>
+                <a:ea typeface="Arial"/>
+                <a:cs typeface="Arial"/>
+              </a:defRPr>
+            </a:lvl6pPr>
+            <a:lvl7pPr>
+              <a:buNone/>
+              <a:defRPr sz="3300" b="1">
+                <a:solidFill>
+                  <a:srgbClr val="182D45"/>
+                </a:solidFill>
+                <a:latin typeface="Arial"/>
+                <a:ea typeface="Arial"/>
+                <a:cs typeface="Arial"/>
+              </a:defRPr>
+            </a:lvl7pPr>
+            <a:lvl8pPr>
+              <a:buNone/>
+              <a:defRPr sz="3300" b="1">
+                <a:solidFill>
+                  <a:srgbClr val="182D45"/>
+                </a:solidFill>
+                <a:latin typeface="Arial"/>
+                <a:ea typeface="Arial"/>
+                <a:cs typeface="Arial"/>
+              </a:defRPr>
+            </a:lvl8pPr>
+            <a:lvl9pPr>
+              <a:buNone/>
+              <a:defRPr sz="3300" b="1">
+                <a:solidFill>
+                  <a:srgbClr val="182D45"/>
+                </a:solidFill>
+                <a:latin typeface="Arial"/>
+                <a:ea typeface="Arial"/>
+                <a:cs typeface="Arial"/>
+              </a:defRPr>
+            </a:lvl9pPr>
+          </a:lstStyle>
+          <a:p xmlns:a="http://schemas.openxmlformats.org/drawingml/2006/main">
+            <a:pPr>
+              <a:buNone/>
+              <a:defRPr sz="3300" b="1">
+                <a:solidFill>
+                  <a:srgbClr val="182D45"/>
+                </a:solidFill>
+                <a:latin typeface="Arial"/>
+                <a:ea typeface="Arial"/>
+                <a:cs typeface="Arial"/>
+              </a:defRPr>
+            </a:pPr>
+            <a:r>
+              <a:rPr sz="3300" b="1">
+                <a:solidFill>
+                  <a:srgbClr val="182D45"/>
+                </a:solidFill>
+                <a:latin typeface="Arial"/>
+                <a:ea typeface="Arial"/>
+                <a:cs typeface="Arial"/>
+              </a:rPr>
+              <a:t>Висновок щодо 2.3.0</a:t>
+            </a:r>
+          </a:p>
+        </p:txBody>
+      </p:sp>
+      <p:sp>
+        <p:nvSpPr>
+          <p:cNvPr id="3" name="">
+            <a:extLst xmlns:a="http://schemas.openxmlformats.org/drawingml/2006/main">
+              <a:ext uri="{FF2B5EF4-FFF2-40B4-BE49-F238E27FC236}">
+                <a16:creationId xmlns:a16="http://schemas.microsoft.com/office/drawing/2014/main" id="{4771CCDF-DAB4-409F-9ED5-13AF7C40C54A}"/>
+              </a:ext>
+            </a:extLst>
+          </p:cNvPr>
+          <p:cNvSpPr>
+            <a:spLocks xmlns:a="http://schemas.openxmlformats.org/drawingml/2006/main" noGrp="1"/>
+          </p:cNvSpPr>
+          <p:nvPr/>
+        </p:nvSpPr>
+        <p:spPr>
+          <a:xfrm xmlns:a="http://schemas.openxmlformats.org/drawingml/2006/main">
+            <a:off x="11220450" y="6438900"/>
+            <a:ext cx="457200" cy="247650"/>
+          </a:xfrm>
+          <a:prstGeom xmlns:a="http://schemas.openxmlformats.org/drawingml/2006/main" prst="rect">
+            <a:avLst/>
+          </a:prstGeom>
+          <a:noFill xmlns:a="http://schemas.openxmlformats.org/drawingml/2006/main"/>
+          <a:ln xmlns:a="http://schemas.openxmlformats.org/drawingml/2006/main" w="0">
+            <a:noFill/>
+          </a:ln>
+        </p:spPr>
+        <p:txBody>
+          <a:bodyPr xmlns:a="http://schemas.openxmlformats.org/drawingml/2006/main"/>
+          <a:lstStyle xmlns:a="http://schemas.openxmlformats.org/drawingml/2006/main">
+            <a:defPPr>
+              <a:defRPr sz="1350" b="0">
+                <a:solidFill>
+                  <a:srgbClr val="566A80"/>
+                </a:solidFill>
+                <a:latin typeface="Arial"/>
+                <a:ea typeface="Arial"/>
+                <a:cs typeface="Arial"/>
+              </a:defRPr>
+            </a:defPPr>
+            <a:lvl1pPr>
+              <a:buNone/>
+              <a:defRPr sz="1350" b="0">
+                <a:solidFill>
+                  <a:srgbClr val="566A80"/>
+                </a:solidFill>
+                <a:latin typeface="Arial"/>
+                <a:ea typeface="Arial"/>
+                <a:cs typeface="Arial"/>
+              </a:defRPr>
+            </a:lvl1pPr>
+            <a:lvl2pPr>
+              <a:buNone/>
+              <a:defRPr sz="1350" b="0">
+                <a:solidFill>
+                  <a:srgbClr val="566A80"/>
+                </a:solidFill>
+                <a:latin typeface="Arial"/>
+                <a:ea typeface="Arial"/>
+                <a:cs typeface="Arial"/>
+              </a:defRPr>
+            </a:lvl2pPr>
+            <a:lvl3pPr>
+              <a:buNone/>
+              <a:defRPr sz="1350" b="0">
+                <a:solidFill>
+                  <a:srgbClr val="566A80"/>
+                </a:solidFill>
+                <a:latin typeface="Arial"/>
+                <a:ea typeface="Arial"/>
+                <a:cs typeface="Arial"/>
+              </a:defRPr>
+            </a:lvl3pPr>
+            <a:lvl4pPr>
+              <a:buNone/>
+              <a:defRPr sz="1350" b="0">
+                <a:solidFill>
+                  <a:srgbClr val="566A80"/>
+                </a:solidFill>
+                <a:latin typeface="Arial"/>
+                <a:ea typeface="Arial"/>
+                <a:cs typeface="Arial"/>
+              </a:defRPr>
+            </a:lvl4pPr>
+            <a:lvl5pPr>
+              <a:buNone/>
+              <a:defRPr sz="1350" b="0">
+                <a:solidFill>
+                  <a:srgbClr val="566A80"/>
+                </a:solidFill>
+                <a:latin typeface="Arial"/>
+                <a:ea typeface="Arial"/>
+                <a:cs typeface="Arial"/>
+              </a:defRPr>
+            </a:lvl5pPr>
+            <a:lvl6pPr>
+              <a:buNone/>
+              <a:defRPr sz="1350" b="0">
+                <a:solidFill>
+                  <a:srgbClr val="566A80"/>
+                </a:solidFill>
+                <a:latin typeface="Arial"/>
+                <a:ea typeface="Arial"/>
+                <a:cs typeface="Arial"/>
+              </a:defRPr>
+            </a:lvl6pPr>
+            <a:lvl7pPr>
+              <a:buNone/>
+              <a:defRPr sz="1350" b="0">
+                <a:solidFill>
+                  <a:srgbClr val="566A80"/>
+                </a:solidFill>
+                <a:latin typeface="Arial"/>
+                <a:ea typeface="Arial"/>
+                <a:cs typeface="Arial"/>
+              </a:defRPr>
+            </a:lvl7pPr>
+            <a:lvl8pPr>
+              <a:buNone/>
+              <a:defRPr sz="1350" b="0">
+                <a:solidFill>
+                  <a:srgbClr val="566A80"/>
+                </a:solidFill>
+                <a:latin typeface="Arial"/>
+                <a:ea typeface="Arial"/>
+                <a:cs typeface="Arial"/>
+              </a:defRPr>
+            </a:lvl8pPr>
+            <a:lvl9pPr>
+              <a:buNone/>
+              <a:defRPr sz="1350" b="0">
+                <a:solidFill>
+                  <a:srgbClr val="566A80"/>
+                </a:solidFill>
+                <a:latin typeface="Arial"/>
+                <a:ea typeface="Arial"/>
+                <a:cs typeface="Arial"/>
+              </a:defRPr>
+            </a:lvl9pPr>
+          </a:lstStyle>
+          <a:p xmlns:a="http://schemas.openxmlformats.org/drawingml/2006/main">
+            <a:pPr>
+              <a:buNone/>
+              <a:defRPr sz="1350" b="0">
+                <a:solidFill>
+                  <a:srgbClr val="566A80"/>
+                </a:solidFill>
+                <a:latin typeface="Arial"/>
+                <a:ea typeface="Arial"/>
+                <a:cs typeface="Arial"/>
+              </a:defRPr>
+            </a:pPr>
+            <a:r>
+              <a:rPr sz="1350" b="0">
+                <a:solidFill>
+                  <a:srgbClr val="566A80"/>
+                </a:solidFill>
+                <a:latin typeface="Arial"/>
+                <a:ea typeface="Arial"/>
+                <a:cs typeface="Arial"/>
+              </a:rPr>
+              <a:t>10</a:t>
+            </a:r>
+          </a:p>
+        </p:txBody>
+      </p:sp>
+      <p:sp>
+        <p:nvSpPr>
+          <p:cNvPr id="4" name="">
+            <a:extLst xmlns:a="http://schemas.openxmlformats.org/drawingml/2006/main">
+              <a:ext uri="{FF2B5EF4-FFF2-40B4-BE49-F238E27FC236}">
+                <a16:creationId xmlns:a16="http://schemas.microsoft.com/office/drawing/2014/main" id="{14299937-A8B5-47EA-9E71-F2F3A9F6997F}"/>
+              </a:ext>
+            </a:extLst>
+          </p:cNvPr>
+          <p:cNvSpPr>
+            <a:spLocks xmlns:a="http://schemas.openxmlformats.org/drawingml/2006/main" noGrp="1"/>
+          </p:cNvSpPr>
+          <p:nvPr/>
+        </p:nvSpPr>
+        <p:spPr>
+          <a:xfrm xmlns:a="http://schemas.openxmlformats.org/drawingml/2006/main">
+            <a:off x="609600" y="1514475"/>
+            <a:ext cx="10972800" cy="933450"/>
+          </a:xfrm>
+          <a:prstGeom xmlns:a="http://schemas.openxmlformats.org/drawingml/2006/main" prst="rect">
+            <a:avLst/>
+          </a:prstGeom>
+          <a:noFill xmlns:a="http://schemas.openxmlformats.org/drawingml/2006/main"/>
+          <a:ln xmlns:a="http://schemas.openxmlformats.org/drawingml/2006/main" w="0">
+            <a:noFill/>
+          </a:ln>
+        </p:spPr>
+        <p:txBody>
+          <a:bodyPr xmlns:a="http://schemas.openxmlformats.org/drawingml/2006/main"/>
+          <a:lstStyle xmlns:a="http://schemas.openxmlformats.org/drawingml/2006/main">
+            <a:defPPr>
+              <a:defRPr sz="5700" b="1">
+                <a:solidFill>
+                  <a:srgbClr val="B42336"/>
+                </a:solidFill>
+                <a:latin typeface="Arial"/>
+                <a:ea typeface="Arial"/>
+                <a:cs typeface="Arial"/>
+              </a:defRPr>
+            </a:defPPr>
+            <a:lvl1pPr>
+              <a:buNone/>
+              <a:defRPr sz="5700" b="1">
+                <a:solidFill>
+                  <a:srgbClr val="B42336"/>
+                </a:solidFill>
+                <a:latin typeface="Arial"/>
+                <a:ea typeface="Arial"/>
+                <a:cs typeface="Arial"/>
+              </a:defRPr>
+            </a:lvl1pPr>
+            <a:lvl2pPr>
+              <a:buNone/>
+              <a:defRPr sz="5700" b="1">
+                <a:solidFill>
+                  <a:srgbClr val="B42336"/>
+                </a:solidFill>
+                <a:latin typeface="Arial"/>
+                <a:ea typeface="Arial"/>
+                <a:cs typeface="Arial"/>
+              </a:defRPr>
+            </a:lvl2pPr>
+            <a:lvl3pPr>
+              <a:buNone/>
+              <a:defRPr sz="5700" b="1">
+                <a:solidFill>
+                  <a:srgbClr val="B42336"/>
+                </a:solidFill>
+                <a:latin typeface="Arial"/>
+                <a:ea typeface="Arial"/>
+                <a:cs typeface="Arial"/>
+              </a:defRPr>
+            </a:lvl3pPr>
+            <a:lvl4pPr>
+              <a:buNone/>
+              <a:defRPr sz="5700" b="1">
+                <a:solidFill>
+                  <a:srgbClr val="B42336"/>
+                </a:solidFill>
+                <a:latin typeface="Arial"/>
+                <a:ea typeface="Arial"/>
+                <a:cs typeface="Arial"/>
+              </a:defRPr>
+            </a:lvl4pPr>
+            <a:lvl5pPr>
+              <a:buNone/>
+              <a:defRPr sz="5700" b="1">
+                <a:solidFill>
+                  <a:srgbClr val="B42336"/>
+                </a:solidFill>
+                <a:latin typeface="Arial"/>
+                <a:ea typeface="Arial"/>
+                <a:cs typeface="Arial"/>
+              </a:defRPr>
+            </a:lvl5pPr>
+            <a:lvl6pPr>
+              <a:buNone/>
+              <a:defRPr sz="5700" b="1">
+                <a:solidFill>
+                  <a:srgbClr val="B42336"/>
+                </a:solidFill>
+                <a:latin typeface="Arial"/>
+                <a:ea typeface="Arial"/>
+                <a:cs typeface="Arial"/>
+              </a:defRPr>
+            </a:lvl6pPr>
+            <a:lvl7pPr>
+              <a:buNone/>
+              <a:defRPr sz="5700" b="1">
+                <a:solidFill>
+                  <a:srgbClr val="B42336"/>
+                </a:solidFill>
+                <a:latin typeface="Arial"/>
+                <a:ea typeface="Arial"/>
+                <a:cs typeface="Arial"/>
+              </a:defRPr>
+            </a:lvl7pPr>
+            <a:lvl8pPr>
+              <a:buNone/>
+              <a:defRPr sz="5700" b="1">
+                <a:solidFill>
+                  <a:srgbClr val="B42336"/>
+                </a:solidFill>
+                <a:latin typeface="Arial"/>
+                <a:ea typeface="Arial"/>
+                <a:cs typeface="Arial"/>
+              </a:defRPr>
+            </a:lvl8pPr>
+            <a:lvl9pPr>
+              <a:buNone/>
+              <a:defRPr sz="5700" b="1">
+                <a:solidFill>
+                  <a:srgbClr val="B42336"/>
+                </a:solidFill>
+                <a:latin typeface="Arial"/>
+                <a:ea typeface="Arial"/>
+                <a:cs typeface="Arial"/>
+              </a:defRPr>
+            </a:lvl9pPr>
+          </a:lstStyle>
+          <a:p xmlns:a="http://schemas.openxmlformats.org/drawingml/2006/main">
+            <a:pPr>
+              <a:buNone/>
+              <a:defRPr sz="5700" b="1">
+                <a:solidFill>
+                  <a:srgbClr val="B42336"/>
+                </a:solidFill>
+                <a:latin typeface="Arial"/>
+                <a:ea typeface="Arial"/>
+                <a:cs typeface="Arial"/>
+              </a:defRPr>
+            </a:pPr>
+            <a:r>
+              <a:rPr sz="5700" b="1">
+                <a:solidFill>
+                  <a:srgbClr val="B42336"/>
+                </a:solidFill>
+                <a:latin typeface="Arial"/>
+                <a:ea typeface="Arial"/>
+                <a:cs typeface="Arial"/>
+              </a:rPr>
+              <a:t>NO-GO</a:t>
+            </a:r>
+          </a:p>
+        </p:txBody>
+      </p:sp>
+      <p:sp>
+        <p:nvSpPr>
+          <p:cNvPr id="5" name="">
+            <a:extLst xmlns:a="http://schemas.openxmlformats.org/drawingml/2006/main">
+              <a:ext uri="{FF2B5EF4-FFF2-40B4-BE49-F238E27FC236}">
+                <a16:creationId xmlns:a16="http://schemas.microsoft.com/office/drawing/2014/main" id="{D11F1C28-B87A-4CB8-9AD2-056E366641FA}"/>
+              </a:ext>
+            </a:extLst>
+          </p:cNvPr>
+          <p:cNvSpPr>
+            <a:spLocks xmlns:a="http://schemas.openxmlformats.org/drawingml/2006/main" noGrp="1"/>
+          </p:cNvSpPr>
+          <p:nvPr/>
+        </p:nvSpPr>
+        <p:spPr>
+          <a:xfrm xmlns:a="http://schemas.openxmlformats.org/drawingml/2006/main">
+            <a:off x="609600" y="2714625"/>
+            <a:ext cx="10972800" cy="1104900"/>
+          </a:xfrm>
+          <a:prstGeom xmlns:a="http://schemas.openxmlformats.org/drawingml/2006/main" prst="rect">
+            <a:avLst/>
+          </a:prstGeom>
+          <a:noFill xmlns:a="http://schemas.openxmlformats.org/drawingml/2006/main"/>
+          <a:ln xmlns:a="http://schemas.openxmlformats.org/drawingml/2006/main" w="0">
+            <a:noFill/>
+          </a:ln>
+        </p:spPr>
+        <p:txBody>
+          <a:bodyPr xmlns:a="http://schemas.openxmlformats.org/drawingml/2006/main"/>
+          <a:lstStyle xmlns:a="http://schemas.openxmlformats.org/drawingml/2006/main">
+            <a:defPPr>
+              <a:defRPr sz="2550" b="1">
+                <a:solidFill>
+                  <a:srgbClr val="182D45"/>
+                </a:solidFill>
+                <a:latin typeface="Arial"/>
+                <a:ea typeface="Arial"/>
+                <a:cs typeface="Arial"/>
+              </a:defRPr>
+            </a:defPPr>
+            <a:lvl1pPr>
+              <a:buNone/>
+              <a:defRPr sz="2550" b="1">
+                <a:solidFill>
+                  <a:srgbClr val="182D45"/>
+                </a:solidFill>
+                <a:latin typeface="Arial"/>
+                <a:ea typeface="Arial"/>
+                <a:cs typeface="Arial"/>
+              </a:defRPr>
+            </a:lvl1pPr>
+            <a:lvl2pPr>
+              <a:buNone/>
+              <a:defRPr sz="2550" b="1">
+                <a:solidFill>
+                  <a:srgbClr val="182D45"/>
+                </a:solidFill>
+                <a:latin typeface="Arial"/>
+                <a:ea typeface="Arial"/>
+                <a:cs typeface="Arial"/>
+              </a:defRPr>
+            </a:lvl2pPr>
+            <a:lvl3pPr>
+              <a:buNone/>
+              <a:defRPr sz="2550" b="1">
+                <a:solidFill>
+                  <a:srgbClr val="182D45"/>
+                </a:solidFill>
+                <a:latin typeface="Arial"/>
+                <a:ea typeface="Arial"/>
+                <a:cs typeface="Arial"/>
+              </a:defRPr>
+            </a:lvl3pPr>
+            <a:lvl4pPr>
+              <a:buNone/>
+              <a:defRPr sz="2550" b="1">
+                <a:solidFill>
+                  <a:srgbClr val="182D45"/>
+                </a:solidFill>
+                <a:latin typeface="Arial"/>
+                <a:ea typeface="Arial"/>
+                <a:cs typeface="Arial"/>
+              </a:defRPr>
+            </a:lvl4pPr>
+            <a:lvl5pPr>
+              <a:buNone/>
+              <a:defRPr sz="2550" b="1">
+                <a:solidFill>
+                  <a:srgbClr val="182D45"/>
+                </a:solidFill>
+                <a:latin typeface="Arial"/>
+                <a:ea typeface="Arial"/>
+                <a:cs typeface="Arial"/>
+              </a:defRPr>
+            </a:lvl5pPr>
+            <a:lvl6pPr>
+              <a:buNone/>
+              <a:defRPr sz="2550" b="1">
+                <a:solidFill>
+                  <a:srgbClr val="182D45"/>
+                </a:solidFill>
+                <a:latin typeface="Arial"/>
+                <a:ea typeface="Arial"/>
+                <a:cs typeface="Arial"/>
+              </a:defRPr>
+            </a:lvl6pPr>
+            <a:lvl7pPr>
+              <a:buNone/>
+              <a:defRPr sz="2550" b="1">
+                <a:solidFill>
+                  <a:srgbClr val="182D45"/>
+                </a:solidFill>
+                <a:latin typeface="Arial"/>
+                <a:ea typeface="Arial"/>
+                <a:cs typeface="Arial"/>
+              </a:defRPr>
+            </a:lvl7pPr>
+            <a:lvl8pPr>
+              <a:buNone/>
+              <a:defRPr sz="2550" b="1">
+                <a:solidFill>
+                  <a:srgbClr val="182D45"/>
+                </a:solidFill>
+                <a:latin typeface="Arial"/>
+                <a:ea typeface="Arial"/>
+                <a:cs typeface="Arial"/>
+              </a:defRPr>
+            </a:lvl8pPr>
+            <a:lvl9pPr>
+              <a:buNone/>
+              <a:defRPr sz="2550" b="1">
+                <a:solidFill>
+                  <a:srgbClr val="182D45"/>
+                </a:solidFill>
+                <a:latin typeface="Arial"/>
+                <a:ea typeface="Arial"/>
+                <a:cs typeface="Arial"/>
+              </a:defRPr>
+            </a:lvl9pPr>
+          </a:lstStyle>
+          <a:p xmlns:a="http://schemas.openxmlformats.org/drawingml/2006/main">
+            <a:pPr>
+              <a:buNone/>
+              <a:defRPr sz="2550" b="1">
+                <a:solidFill>
+                  <a:srgbClr val="182D45"/>
+                </a:solidFill>
+                <a:latin typeface="Arial"/>
+                <a:ea typeface="Arial"/>
+                <a:cs typeface="Arial"/>
+              </a:defRPr>
+            </a:pPr>
+            <a:r>
+              <a:rPr sz="2550" b="1">
+                <a:solidFill>
+                  <a:srgbClr val="182D45"/>
+                </a:solidFill>
+                <a:latin typeface="Arial"/>
+                <a:ea typeface="Arial"/>
+                <a:cs typeface="Arial"/>
+              </a:rPr>
+              <a:t>Недопустимий pulse 99 виконується</a:t>
+            </a:r>
+          </a:p>
+          <a:p xmlns:a="http://schemas.openxmlformats.org/drawingml/2006/main">
+            <a:pPr>
+              <a:buNone/>
+              <a:defRPr sz="2550" b="1">
+                <a:solidFill>
+                  <a:srgbClr val="182D45"/>
+                </a:solidFill>
+                <a:latin typeface="Arial"/>
+                <a:ea typeface="Arial"/>
+                <a:cs typeface="Arial"/>
+              </a:defRPr>
+            </a:pPr>
+            <a:r>
+              <a:rPr sz="2550" b="1">
+                <a:solidFill>
+                  <a:srgbClr val="182D45"/>
+                </a:solidFill>
+                <a:latin typeface="Arial"/>
+                <a:ea typeface="Arial"/>
+                <a:cs typeface="Arial"/>
+              </a:rPr>
+              <a:t>Підтвердження наявного alert за ID не працює</a:t>
+            </a:r>
+          </a:p>
+        </p:txBody>
+      </p:sp>
+      <p:sp>
+        <p:nvSpPr>
+          <p:cNvPr id="6" name="">
+            <a:extLst xmlns:a="http://schemas.openxmlformats.org/drawingml/2006/main">
+              <a:ext uri="{FF2B5EF4-FFF2-40B4-BE49-F238E27FC236}">
+                <a16:creationId xmlns:a16="http://schemas.microsoft.com/office/drawing/2014/main" id="{78841F51-0499-4005-BA9B-08C70FE1EB58}"/>
+              </a:ext>
+            </a:extLst>
+          </p:cNvPr>
+          <p:cNvSpPr>
+            <a:spLocks xmlns:a="http://schemas.openxmlformats.org/drawingml/2006/main" noGrp="1"/>
+          </p:cNvSpPr>
+          <p:nvPr/>
+        </p:nvSpPr>
+        <p:spPr>
+          <a:xfrm xmlns:a="http://schemas.openxmlformats.org/drawingml/2006/main">
+            <a:off x="609600" y="6315075"/>
+            <a:ext cx="10477500" cy="304800"/>
+          </a:xfrm>
+          <a:prstGeom xmlns:a="http://schemas.openxmlformats.org/drawingml/2006/main" prst="rect">
+            <a:avLst/>
+          </a:prstGeom>
+          <a:noFill xmlns:a="http://schemas.openxmlformats.org/drawingml/2006/main"/>
+          <a:ln xmlns:a="http://schemas.openxmlformats.org/drawingml/2006/main" w="0">
+            <a:noFill/>
+          </a:ln>
+        </p:spPr>
+        <p:txBody>
+          <a:bodyPr xmlns:a="http://schemas.openxmlformats.org/drawingml/2006/main"/>
+          <a:lstStyle xmlns:a="http://schemas.openxmlformats.org/drawingml/2006/main">
+            <a:defPPr>
+              <a:defRPr sz="1725" b="0">
+                <a:solidFill>
+                  <a:srgbClr val="087F8C"/>
+                </a:solidFill>
+                <a:latin typeface="Arial"/>
+                <a:ea typeface="Arial"/>
+                <a:cs typeface="Arial"/>
+              </a:defRPr>
+            </a:defPPr>
+            <a:lvl1pPr>
+              <a:buNone/>
+              <a:defRPr sz="1725" b="0">
+                <a:solidFill>
+                  <a:srgbClr val="087F8C"/>
+                </a:solidFill>
+                <a:latin typeface="Arial"/>
+                <a:ea typeface="Arial"/>
+                <a:cs typeface="Arial"/>
+              </a:defRPr>
+            </a:lvl1pPr>
+            <a:lvl2pPr>
+              <a:buNone/>
+              <a:defRPr sz="1725" b="0">
+                <a:solidFill>
+                  <a:srgbClr val="087F8C"/>
+                </a:solidFill>
+                <a:latin typeface="Arial"/>
+                <a:ea typeface="Arial"/>
+                <a:cs typeface="Arial"/>
+              </a:defRPr>
+            </a:lvl2pPr>
+            <a:lvl3pPr>
+              <a:buNone/>
+              <a:defRPr sz="1725" b="0">
+                <a:solidFill>
+                  <a:srgbClr val="087F8C"/>
+                </a:solidFill>
+                <a:latin typeface="Arial"/>
+                <a:ea typeface="Arial"/>
+                <a:cs typeface="Arial"/>
+              </a:defRPr>
+            </a:lvl3pPr>
+            <a:lvl4pPr>
+              <a:buNone/>
+              <a:defRPr sz="1725" b="0">
+                <a:solidFill>
+                  <a:srgbClr val="087F8C"/>
+                </a:solidFill>
+                <a:latin typeface="Arial"/>
+                <a:ea typeface="Arial"/>
+                <a:cs typeface="Arial"/>
+              </a:defRPr>
+            </a:lvl4pPr>
+            <a:lvl5pPr>
+              <a:buNone/>
+              <a:defRPr sz="1725" b="0">
+                <a:solidFill>
+                  <a:srgbClr val="087F8C"/>
+                </a:solidFill>
+                <a:latin typeface="Arial"/>
+                <a:ea typeface="Arial"/>
+                <a:cs typeface="Arial"/>
+              </a:defRPr>
+            </a:lvl5pPr>
+            <a:lvl6pPr>
+              <a:buNone/>
+              <a:defRPr sz="1725" b="0">
+                <a:solidFill>
+                  <a:srgbClr val="087F8C"/>
+                </a:solidFill>
+                <a:latin typeface="Arial"/>
+                <a:ea typeface="Arial"/>
+                <a:cs typeface="Arial"/>
+              </a:defRPr>
+            </a:lvl6pPr>
+            <a:lvl7pPr>
+              <a:buNone/>
+              <a:defRPr sz="1725" b="0">
+                <a:solidFill>
+                  <a:srgbClr val="087F8C"/>
+                </a:solidFill>
+                <a:latin typeface="Arial"/>
+                <a:ea typeface="Arial"/>
+                <a:cs typeface="Arial"/>
+              </a:defRPr>
+            </a:lvl7pPr>
+            <a:lvl8pPr>
+              <a:buNone/>
+              <a:defRPr sz="1725" b="0">
+                <a:solidFill>
+                  <a:srgbClr val="087F8C"/>
+                </a:solidFill>
+                <a:latin typeface="Arial"/>
+                <a:ea typeface="Arial"/>
+                <a:cs typeface="Arial"/>
+              </a:defRPr>
+            </a:lvl8pPr>
+            <a:lvl9pPr>
+              <a:buNone/>
+              <a:defRPr sz="1725" b="0">
+                <a:solidFill>
+                  <a:srgbClr val="087F8C"/>
+                </a:solidFill>
+                <a:latin typeface="Arial"/>
+                <a:ea typeface="Arial"/>
+                <a:cs typeface="Arial"/>
+              </a:defRPr>
+            </a:lvl9pPr>
+          </a:lstStyle>
+          <a:p xmlns:a="http://schemas.openxmlformats.org/drawingml/2006/main">
+            <a:pPr>
+              <a:buNone/>
+              <a:defRPr sz="1725" b="0">
+                <a:solidFill>
+                  <a:srgbClr val="087F8C"/>
+                </a:solidFill>
+                <a:latin typeface="Arial"/>
+                <a:ea typeface="Arial"/>
+                <a:cs typeface="Arial"/>
+              </a:defRPr>
+            </a:pPr>
+            <a:r>
+              <a:rPr sz="1725" b="0">
+                <a:solidFill>
+                  <a:srgbClr val="087F8C"/>
+                </a:solidFill>
+                <a:latin typeface="Arial"/>
+                <a:ea typeface="Arial"/>
+                <a:cs typeface="Arial"/>
+              </a:rPr>
+              <a:t>github.com/rpozniak/sentry-swm2-qa</a:t>
+            </a:r>
+          </a:p>
+        </p:txBody>
+      </p:sp>
+      <p:sp>
+        <p:nvSpPr>
+          <p:cNvPr id="7" name="">
+            <a:extLst xmlns:a="http://schemas.openxmlformats.org/drawingml/2006/main">
+              <a:ext uri="{FF2B5EF4-FFF2-40B4-BE49-F238E27FC236}">
+                <a16:creationId xmlns:a16="http://schemas.microsoft.com/office/drawing/2014/main" id="{0BB43CD1-3B85-4DFB-852F-F0657BCF70AA}"/>
+              </a:ext>
+            </a:extLst>
+          </p:cNvPr>
+          <p:cNvSpPr>
+            <a:spLocks xmlns:a="http://schemas.openxmlformats.org/drawingml/2006/main" noGrp="1"/>
+          </p:cNvSpPr>
+          <p:nvPr/>
+        </p:nvSpPr>
+        <p:spPr>
+          <a:xfrm xmlns:a="http://schemas.openxmlformats.org/drawingml/2006/main">
+            <a:off x="609600" y="4391025"/>
+            <a:ext cx="10972800" cy="561975"/>
+          </a:xfrm>
+          <a:prstGeom xmlns:a="http://schemas.openxmlformats.org/drawingml/2006/main" prst="rect">
+            <a:avLst/>
+          </a:prstGeom>
+          <a:noFill xmlns:a="http://schemas.openxmlformats.org/drawingml/2006/main"/>
+          <a:ln xmlns:a="http://schemas.openxmlformats.org/drawingml/2006/main" w="0">
+            <a:noFill/>
+          </a:ln>
+        </p:spPr>
+        <p:txBody>
+          <a:bodyPr xmlns:a="http://schemas.openxmlformats.org/drawingml/2006/main"/>
+          <a:lstStyle xmlns:a="http://schemas.openxmlformats.org/drawingml/2006/main">
+            <a:defPPr>
+              <a:defRPr sz="2250" b="1">
+                <a:solidFill>
+                  <a:srgbClr val="087F8C"/>
+                </a:solidFill>
+                <a:latin typeface="Arial"/>
+                <a:ea typeface="Arial"/>
+                <a:cs typeface="Arial"/>
+              </a:defRPr>
+            </a:defPPr>
+            <a:lvl1pPr>
+              <a:buNone/>
+              <a:defRPr sz="2250" b="1">
+                <a:solidFill>
+                  <a:srgbClr val="087F8C"/>
+                </a:solidFill>
+                <a:latin typeface="Arial"/>
+                <a:ea typeface="Arial"/>
+                <a:cs typeface="Arial"/>
+              </a:defRPr>
+            </a:lvl1pPr>
+            <a:lvl2pPr>
+              <a:buNone/>
+              <a:defRPr sz="2250" b="1">
+                <a:solidFill>
+                  <a:srgbClr val="087F8C"/>
+                </a:solidFill>
+                <a:latin typeface="Arial"/>
+                <a:ea typeface="Arial"/>
+                <a:cs typeface="Arial"/>
+              </a:defRPr>
+            </a:lvl2pPr>
+            <a:lvl3pPr>
+              <a:buNone/>
+              <a:defRPr sz="2250" b="1">
+                <a:solidFill>
+                  <a:srgbClr val="087F8C"/>
+                </a:solidFill>
+                <a:latin typeface="Arial"/>
+                <a:ea typeface="Arial"/>
+                <a:cs typeface="Arial"/>
+              </a:defRPr>
+            </a:lvl3pPr>
+            <a:lvl4pPr>
+              <a:buNone/>
+              <a:defRPr sz="2250" b="1">
+                <a:solidFill>
+                  <a:srgbClr val="087F8C"/>
+                </a:solidFill>
+                <a:latin typeface="Arial"/>
+                <a:ea typeface="Arial"/>
+                <a:cs typeface="Arial"/>
+              </a:defRPr>
+            </a:lvl4pPr>
+            <a:lvl5pPr>
+              <a:buNone/>
+              <a:defRPr sz="2250" b="1">
+                <a:solidFill>
+                  <a:srgbClr val="087F8C"/>
+                </a:solidFill>
+                <a:latin typeface="Arial"/>
+                <a:ea typeface="Arial"/>
+                <a:cs typeface="Arial"/>
+              </a:defRPr>
+            </a:lvl5pPr>
+            <a:lvl6pPr>
+              <a:buNone/>
+              <a:defRPr sz="2250" b="1">
+                <a:solidFill>
+                  <a:srgbClr val="087F8C"/>
+                </a:solidFill>
+                <a:latin typeface="Arial"/>
+                <a:ea typeface="Arial"/>
+                <a:cs typeface="Arial"/>
+              </a:defRPr>
+            </a:lvl6pPr>
+            <a:lvl7pPr>
+              <a:buNone/>
+              <a:defRPr sz="2250" b="1">
+                <a:solidFill>
+                  <a:srgbClr val="087F8C"/>
+                </a:solidFill>
+                <a:latin typeface="Arial"/>
+                <a:ea typeface="Arial"/>
+                <a:cs typeface="Arial"/>
+              </a:defRPr>
+            </a:lvl7pPr>
+            <a:lvl8pPr>
+              <a:buNone/>
+              <a:defRPr sz="2250" b="1">
+                <a:solidFill>
+                  <a:srgbClr val="087F8C"/>
+                </a:solidFill>
+                <a:latin typeface="Arial"/>
+                <a:ea typeface="Arial"/>
+                <a:cs typeface="Arial"/>
+              </a:defRPr>
+            </a:lvl8pPr>
+            <a:lvl9pPr>
+              <a:buNone/>
+              <a:defRPr sz="2250" b="1">
+                <a:solidFill>
+                  <a:srgbClr val="087F8C"/>
+                </a:solidFill>
+                <a:latin typeface="Arial"/>
+                <a:ea typeface="Arial"/>
+                <a:cs typeface="Arial"/>
+              </a:defRPr>
+            </a:lvl9pPr>
+          </a:lstStyle>
+          <a:p xmlns:a="http://schemas.openxmlformats.org/drawingml/2006/main">
+            <a:pPr>
+              <a:buNone/>
+              <a:defRPr sz="2250" b="1">
+                <a:solidFill>
+                  <a:srgbClr val="087F8C"/>
+                </a:solidFill>
+                <a:latin typeface="Arial"/>
+                <a:ea typeface="Arial"/>
+                <a:cs typeface="Arial"/>
+              </a:defRPr>
+            </a:pPr>
+            <a:r>
+              <a:rPr sz="2250" b="1">
+                <a:solidFill>
+                  <a:srgbClr val="087F8C"/>
+                </a:solidFill>
+                <a:latin typeface="Arial"/>
+                <a:ea typeface="Arial"/>
+                <a:cs typeface="Arial"/>
+              </a:rPr>
+              <a:t>Чотири дефекти 2.1.0 у beta не відтворились</a:t>
+            </a:r>
+          </a:p>
+        </p:txBody>
+      </p:sp>
+      <p:sp>
+        <p:nvSpPr>
+          <p:cNvPr id="8" name="">
+            <a:extLst xmlns:a="http://schemas.openxmlformats.org/drawingml/2006/main">
+              <a:ext uri="{FF2B5EF4-FFF2-40B4-BE49-F238E27FC236}">
+                <a16:creationId xmlns:a16="http://schemas.microsoft.com/office/drawing/2014/main" id="{4C85477C-DC3C-4C43-8502-8D56F6F208CB}"/>
+              </a:ext>
+            </a:extLst>
+          </p:cNvPr>
+          <p:cNvSpPr>
+            <a:spLocks xmlns:a="http://schemas.openxmlformats.org/drawingml/2006/main" noGrp="1"/>
+          </p:cNvSpPr>
+          <p:nvPr/>
+        </p:nvSpPr>
+        <p:spPr>
+          <a:xfrm xmlns:a="http://schemas.openxmlformats.org/drawingml/2006/main">
+            <a:off x="609600" y="5257800"/>
+            <a:ext cx="10972800" cy="895350"/>
+          </a:xfrm>
+          <a:prstGeom xmlns:a="http://schemas.openxmlformats.org/drawingml/2006/main" prst="rect">
+            <a:avLst/>
+          </a:prstGeom>
+          <a:noFill xmlns:a="http://schemas.openxmlformats.org/drawingml/2006/main"/>
+          <a:ln xmlns:a="http://schemas.openxmlformats.org/drawingml/2006/main" w="0">
+            <a:noFill/>
+          </a:ln>
+        </p:spPr>
+        <p:txBody>
+          <a:bodyPr xmlns:a="http://schemas.openxmlformats.org/drawingml/2006/main"/>
+          <a:lstStyle xmlns:a="http://schemas.openxmlformats.org/drawingml/2006/main">
+            <a:defPPr>
+              <a:defRPr sz="2100" b="0">
+                <a:solidFill>
+                  <a:srgbClr val="566A80"/>
+                </a:solidFill>
+                <a:latin typeface="Arial"/>
+                <a:ea typeface="Arial"/>
+                <a:cs typeface="Arial"/>
+              </a:defRPr>
+            </a:defPPr>
+            <a:lvl1pPr>
+              <a:buNone/>
+              <a:defRPr sz="2100" b="0">
+                <a:solidFill>
+                  <a:srgbClr val="566A80"/>
+                </a:solidFill>
+                <a:latin typeface="Arial"/>
+                <a:ea typeface="Arial"/>
+                <a:cs typeface="Arial"/>
+              </a:defRPr>
+            </a:lvl1pPr>
+            <a:lvl2pPr>
+              <a:buNone/>
+              <a:defRPr sz="2100" b="0">
+                <a:solidFill>
+                  <a:srgbClr val="566A80"/>
+                </a:solidFill>
+                <a:latin typeface="Arial"/>
+                <a:ea typeface="Arial"/>
+                <a:cs typeface="Arial"/>
+              </a:defRPr>
+            </a:lvl2pPr>
+            <a:lvl3pPr>
+              <a:buNone/>
+              <a:defRPr sz="2100" b="0">
+                <a:solidFill>
+                  <a:srgbClr val="566A80"/>
+                </a:solidFill>
+                <a:latin typeface="Arial"/>
+                <a:ea typeface="Arial"/>
+                <a:cs typeface="Arial"/>
+              </a:defRPr>
+            </a:lvl3pPr>
+            <a:lvl4pPr>
+              <a:buNone/>
+              <a:defRPr sz="2100" b="0">
+                <a:solidFill>
+                  <a:srgbClr val="566A80"/>
+                </a:solidFill>
+                <a:latin typeface="Arial"/>
+                <a:ea typeface="Arial"/>
+                <a:cs typeface="Arial"/>
+              </a:defRPr>
+            </a:lvl4pPr>
+            <a:lvl5pPr>
+              <a:buNone/>
+              <a:defRPr sz="2100" b="0">
+                <a:solidFill>
+                  <a:srgbClr val="566A80"/>
+                </a:solidFill>
+                <a:latin typeface="Arial"/>
+                <a:ea typeface="Arial"/>
+                <a:cs typeface="Arial"/>
+              </a:defRPr>
+            </a:lvl5pPr>
+            <a:lvl6pPr>
+              <a:buNone/>
+              <a:defRPr sz="2100" b="0">
+                <a:solidFill>
+                  <a:srgbClr val="566A80"/>
+                </a:solidFill>
+                <a:latin typeface="Arial"/>
+                <a:ea typeface="Arial"/>
+                <a:cs typeface="Arial"/>
+              </a:defRPr>
+            </a:lvl6pPr>
+            <a:lvl7pPr>
+              <a:buNone/>
+              <a:defRPr sz="2100" b="0">
+                <a:solidFill>
+                  <a:srgbClr val="566A80"/>
+                </a:solidFill>
+                <a:latin typeface="Arial"/>
+                <a:ea typeface="Arial"/>
+                <a:cs typeface="Arial"/>
+              </a:defRPr>
+            </a:lvl7pPr>
+            <a:lvl8pPr>
+              <a:buNone/>
+              <a:defRPr sz="2100" b="0">
+                <a:solidFill>
+                  <a:srgbClr val="566A80"/>
+                </a:solidFill>
+                <a:latin typeface="Arial"/>
+                <a:ea typeface="Arial"/>
+                <a:cs typeface="Arial"/>
+              </a:defRPr>
+            </a:lvl8pPr>
+            <a:lvl9pPr>
+              <a:buNone/>
+              <a:defRPr sz="2100" b="0">
+                <a:solidFill>
+                  <a:srgbClr val="566A80"/>
+                </a:solidFill>
+                <a:latin typeface="Arial"/>
+                <a:ea typeface="Arial"/>
+                <a:cs typeface="Arial"/>
+              </a:defRPr>
+            </a:lvl9pPr>
+          </a:lstStyle>
+          <a:p xmlns:a="http://schemas.openxmlformats.org/drawingml/2006/main">
+            <a:pPr>
+              <a:buNone/>
+              <a:defRPr sz="2100" b="0">
+                <a:solidFill>
+                  <a:srgbClr val="566A80"/>
+                </a:solidFill>
+                <a:latin typeface="Arial"/>
+                <a:ea typeface="Arial"/>
+                <a:cs typeface="Arial"/>
+              </a:defRPr>
+            </a:pPr>
+            <a:r>
+              <a:rPr sz="2100" b="0">
+                <a:solidFill>
+                  <a:srgbClr val="566A80"/>
+                </a:solidFill>
+                <a:latin typeface="Arial"/>
+                <a:ea typeface="Arial"/>
+                <a:cs typeface="Arial"/>
+              </a:rPr>
+              <a:t>Рекомендація: виправити pulse та ack за ID,</a:t>
+            </a:r>
+          </a:p>
+          <a:p xmlns:a="http://schemas.openxmlformats.org/drawingml/2006/main">
+            <a:pPr>
+              <a:buNone/>
+              <a:defRPr sz="2100" b="0">
+                <a:solidFill>
+                  <a:srgbClr val="566A80"/>
+                </a:solidFill>
+                <a:latin typeface="Arial"/>
+                <a:ea typeface="Arial"/>
+                <a:cs typeface="Arial"/>
+              </a:defRPr>
+            </a:pPr>
+            <a:r>
+              <a:rPr sz="2100" b="0">
+                <a:solidFill>
+                  <a:srgbClr val="566A80"/>
+                </a:solidFill>
+                <a:latin typeface="Arial"/>
+                <a:ea typeface="Arial"/>
+                <a:cs typeface="Arial"/>
+              </a:rPr>
+              <a:t>після цього повторити відповідні перевірки й регресію.</a:t>
+            </a:r>
+          </a:p>
+        </p:txBody>
+      </p:sp>
+    </p:spTree>
+    <p:extLst>
+      <p:ext uri="{BB962C8B-B14F-4D97-AF65-F5344CB8AC3E}">
+        <p14:creationId xmlns:p14="http://schemas.microsoft.com/office/powerpoint/2010/main" val="1965201007"/>
       </p:ext>
     </p:extLst>
   </p:cSld>
@@ -4627,6 +5967,7 @@
               </a:defRPr>
             </a:defPPr>
             <a:lvl1pPr>
+              <a:buNone/>
               <a:defRPr sz="3300" b="1">
                 <a:solidFill>
                   <a:srgbClr val="182D45"/>
@@ -4637,6 +5978,7 @@
               </a:defRPr>
             </a:lvl1pPr>
             <a:lvl2pPr>
+              <a:buNone/>
               <a:defRPr sz="3300" b="1">
                 <a:solidFill>
                   <a:srgbClr val="182D45"/>
@@ -4647,6 +5989,7 @@
               </a:defRPr>
             </a:lvl2pPr>
             <a:lvl3pPr>
+              <a:buNone/>
               <a:defRPr sz="3300" b="1">
                 <a:solidFill>
                   <a:srgbClr val="182D45"/>
@@ -4657,6 +6000,7 @@
               </a:defRPr>
             </a:lvl3pPr>
             <a:lvl4pPr>
+              <a:buNone/>
               <a:defRPr sz="3300" b="1">
                 <a:solidFill>
                   <a:srgbClr val="182D45"/>
@@ -4667,6 +6011,7 @@
               </a:defRPr>
             </a:lvl4pPr>
             <a:lvl5pPr>
+              <a:buNone/>
               <a:defRPr sz="3300" b="1">
                 <a:solidFill>
                   <a:srgbClr val="182D45"/>
@@ -4677,6 +6022,7 @@
               </a:defRPr>
             </a:lvl5pPr>
             <a:lvl6pPr>
+              <a:buNone/>
               <a:defRPr sz="3300" b="1">
                 <a:solidFill>
                   <a:srgbClr val="182D45"/>
@@ -4687,6 +6033,7 @@
               </a:defRPr>
             </a:lvl6pPr>
             <a:lvl7pPr>
+              <a:buNone/>
               <a:defRPr sz="3300" b="1">
                 <a:solidFill>
                   <a:srgbClr val="182D45"/>
@@ -4697,6 +6044,7 @@
               </a:defRPr>
             </a:lvl7pPr>
             <a:lvl8pPr>
+              <a:buNone/>
               <a:defRPr sz="3300" b="1">
                 <a:solidFill>
                   <a:srgbClr val="182D45"/>
@@ -4707,6 +6055,7 @@
               </a:defRPr>
             </a:lvl8pPr>
             <a:lvl9pPr>
+              <a:buNone/>
               <a:defRPr sz="3300" b="1">
                 <a:solidFill>
                   <a:srgbClr val="182D45"/>
@@ -4719,6 +6068,7 @@
           </a:lstStyle>
           <a:p xmlns:a="http://schemas.openxmlformats.org/drawingml/2006/main">
             <a:pPr>
+              <a:buNone/>
               <a:defRPr sz="3300" b="1">
                 <a:solidFill>
                   <a:srgbClr val="182D45"/>
@@ -4783,6 +6133,7 @@
               </a:defRPr>
             </a:defPPr>
             <a:lvl1pPr>
+              <a:buNone/>
               <a:defRPr sz="3000" b="1">
                 <a:solidFill>
                   <a:srgbClr val="087F8C"/>
@@ -4793,6 +6144,7 @@
               </a:defRPr>
             </a:lvl1pPr>
             <a:lvl2pPr>
+              <a:buNone/>
               <a:defRPr sz="3000" b="1">
                 <a:solidFill>
                   <a:srgbClr val="087F8C"/>
@@ -4803,6 +6155,7 @@
               </a:defRPr>
             </a:lvl2pPr>
             <a:lvl3pPr>
+              <a:buNone/>
               <a:defRPr sz="3000" b="1">
                 <a:solidFill>
                   <a:srgbClr val="087F8C"/>
@@ -4813,6 +6166,7 @@
               </a:defRPr>
             </a:lvl3pPr>
             <a:lvl4pPr>
+              <a:buNone/>
               <a:defRPr sz="3000" b="1">
                 <a:solidFill>
                   <a:srgbClr val="087F8C"/>
@@ -4823,6 +6177,7 @@
               </a:defRPr>
             </a:lvl4pPr>
             <a:lvl5pPr>
+              <a:buNone/>
               <a:defRPr sz="3000" b="1">
                 <a:solidFill>
                   <a:srgbClr val="087F8C"/>
@@ -4833,6 +6188,7 @@
               </a:defRPr>
             </a:lvl5pPr>
             <a:lvl6pPr>
+              <a:buNone/>
               <a:defRPr sz="3000" b="1">
                 <a:solidFill>
                   <a:srgbClr val="087F8C"/>
@@ -4843,6 +6199,7 @@
               </a:defRPr>
             </a:lvl6pPr>
             <a:lvl7pPr>
+              <a:buNone/>
               <a:defRPr sz="3000" b="1">
                 <a:solidFill>
                   <a:srgbClr val="087F8C"/>
@@ -4853,6 +6210,7 @@
               </a:defRPr>
             </a:lvl7pPr>
             <a:lvl8pPr>
+              <a:buNone/>
               <a:defRPr sz="3000" b="1">
                 <a:solidFill>
                   <a:srgbClr val="087F8C"/>
@@ -4863,6 +6221,7 @@
               </a:defRPr>
             </a:lvl8pPr>
             <a:lvl9pPr>
+              <a:buNone/>
               <a:defRPr sz="3000" b="1">
                 <a:solidFill>
                   <a:srgbClr val="087F8C"/>
@@ -4875,6 +6234,7 @@
           </a:lstStyle>
           <a:p xmlns:a="http://schemas.openxmlformats.org/drawingml/2006/main">
             <a:pPr>
+              <a:buNone/>
               <a:defRPr sz="3000" b="1">
                 <a:solidFill>
                   <a:srgbClr val="087F8C"/>
@@ -4939,6 +6299,7 @@
               </a:defRPr>
             </a:defPPr>
             <a:lvl1pPr>
+              <a:buNone/>
               <a:defRPr sz="2400" b="1">
                 <a:solidFill>
                   <a:srgbClr val="182D45"/>
@@ -4949,6 +6310,7 @@
               </a:defRPr>
             </a:lvl1pPr>
             <a:lvl2pPr>
+              <a:buNone/>
               <a:defRPr sz="2400" b="1">
                 <a:solidFill>
                   <a:srgbClr val="182D45"/>
@@ -4959,6 +6321,7 @@
               </a:defRPr>
             </a:lvl2pPr>
             <a:lvl3pPr>
+              <a:buNone/>
               <a:defRPr sz="2400" b="1">
                 <a:solidFill>
                   <a:srgbClr val="182D45"/>
@@ -4969,6 +6332,7 @@
               </a:defRPr>
             </a:lvl3pPr>
             <a:lvl4pPr>
+              <a:buNone/>
               <a:defRPr sz="2400" b="1">
                 <a:solidFill>
                   <a:srgbClr val="182D45"/>
@@ -4979,6 +6343,7 @@
               </a:defRPr>
             </a:lvl4pPr>
             <a:lvl5pPr>
+              <a:buNone/>
               <a:defRPr sz="2400" b="1">
                 <a:solidFill>
                   <a:srgbClr val="182D45"/>
@@ -4989,6 +6354,7 @@
               </a:defRPr>
             </a:lvl5pPr>
             <a:lvl6pPr>
+              <a:buNone/>
               <a:defRPr sz="2400" b="1">
                 <a:solidFill>
                   <a:srgbClr val="182D45"/>
@@ -4999,6 +6365,7 @@
               </a:defRPr>
             </a:lvl6pPr>
             <a:lvl7pPr>
+              <a:buNone/>
               <a:defRPr sz="2400" b="1">
                 <a:solidFill>
                   <a:srgbClr val="182D45"/>
@@ -5009,6 +6376,7 @@
               </a:defRPr>
             </a:lvl7pPr>
             <a:lvl8pPr>
+              <a:buNone/>
               <a:defRPr sz="2400" b="1">
                 <a:solidFill>
                   <a:srgbClr val="182D45"/>
@@ -5019,6 +6387,7 @@
               </a:defRPr>
             </a:lvl8pPr>
             <a:lvl9pPr>
+              <a:buNone/>
               <a:defRPr sz="2400" b="1">
                 <a:solidFill>
                   <a:srgbClr val="182D45"/>
@@ -5031,6 +6400,7 @@
           </a:lstStyle>
           <a:p xmlns:a="http://schemas.openxmlformats.org/drawingml/2006/main">
             <a:pPr>
+              <a:buNone/>
               <a:defRPr sz="2400" b="1">
                 <a:solidFill>
                   <a:srgbClr val="182D45"/>
@@ -5095,6 +6465,7 @@
               </a:defRPr>
             </a:defPPr>
             <a:lvl1pPr>
+              <a:buNone/>
               <a:defRPr sz="2100" b="0">
                 <a:solidFill>
                   <a:srgbClr val="182D45"/>
@@ -5105,6 +6476,7 @@
               </a:defRPr>
             </a:lvl1pPr>
             <a:lvl2pPr>
+              <a:buNone/>
               <a:defRPr sz="2100" b="0">
                 <a:solidFill>
                   <a:srgbClr val="182D45"/>
@@ -5115,6 +6487,7 @@
               </a:defRPr>
             </a:lvl2pPr>
             <a:lvl3pPr>
+              <a:buNone/>
               <a:defRPr sz="2100" b="0">
                 <a:solidFill>
                   <a:srgbClr val="182D45"/>
@@ -5125,6 +6498,7 @@
               </a:defRPr>
             </a:lvl3pPr>
             <a:lvl4pPr>
+              <a:buNone/>
               <a:defRPr sz="2100" b="0">
                 <a:solidFill>
                   <a:srgbClr val="182D45"/>
@@ -5135,6 +6509,7 @@
               </a:defRPr>
             </a:lvl4pPr>
             <a:lvl5pPr>
+              <a:buNone/>
               <a:defRPr sz="2100" b="0">
                 <a:solidFill>
                   <a:srgbClr val="182D45"/>
@@ -5145,6 +6520,7 @@
               </a:defRPr>
             </a:lvl5pPr>
             <a:lvl6pPr>
+              <a:buNone/>
               <a:defRPr sz="2100" b="0">
                 <a:solidFill>
                   <a:srgbClr val="182D45"/>
@@ -5155,6 +6531,7 @@
               </a:defRPr>
             </a:lvl6pPr>
             <a:lvl7pPr>
+              <a:buNone/>
               <a:defRPr sz="2100" b="0">
                 <a:solidFill>
                   <a:srgbClr val="182D45"/>
@@ -5165,6 +6542,7 @@
               </a:defRPr>
             </a:lvl7pPr>
             <a:lvl8pPr>
+              <a:buNone/>
               <a:defRPr sz="2100" b="0">
                 <a:solidFill>
                   <a:srgbClr val="182D45"/>
@@ -5175,6 +6553,7 @@
               </a:defRPr>
             </a:lvl8pPr>
             <a:lvl9pPr>
+              <a:buNone/>
               <a:defRPr sz="2100" b="0">
                 <a:solidFill>
                   <a:srgbClr val="182D45"/>
@@ -5187,6 +6566,7 @@
           </a:lstStyle>
           <a:p xmlns:a="http://schemas.openxmlformats.org/drawingml/2006/main">
             <a:pPr>
+              <a:buNone/>
               <a:defRPr sz="2100" b="0">
                 <a:solidFill>
                   <a:srgbClr val="182D45"/>
@@ -5210,6 +6590,7 @@
           </a:p>
           <a:p xmlns:a="http://schemas.openxmlformats.org/drawingml/2006/main">
             <a:pPr>
+              <a:buNone/>
               <a:defRPr sz="2100" b="0">
                 <a:solidFill>
                   <a:srgbClr val="182D45"/>
@@ -5233,6 +6614,7 @@
           </a:p>
           <a:p xmlns:a="http://schemas.openxmlformats.org/drawingml/2006/main">
             <a:pPr>
+              <a:buNone/>
               <a:defRPr sz="2100" b="0">
                 <a:solidFill>
                   <a:srgbClr val="182D45"/>
@@ -5297,6 +6679,7 @@
               </a:defRPr>
             </a:defPPr>
             <a:lvl1pPr>
+              <a:buNone/>
               <a:defRPr sz="2325" b="1">
                 <a:solidFill>
                   <a:srgbClr val="182D45"/>
@@ -5307,6 +6690,7 @@
               </a:defRPr>
             </a:lvl1pPr>
             <a:lvl2pPr>
+              <a:buNone/>
               <a:defRPr sz="2325" b="1">
                 <a:solidFill>
                   <a:srgbClr val="182D45"/>
@@ -5317,6 +6701,7 @@
               </a:defRPr>
             </a:lvl2pPr>
             <a:lvl3pPr>
+              <a:buNone/>
               <a:defRPr sz="2325" b="1">
                 <a:solidFill>
                   <a:srgbClr val="182D45"/>
@@ -5327,6 +6712,7 @@
               </a:defRPr>
             </a:lvl3pPr>
             <a:lvl4pPr>
+              <a:buNone/>
               <a:defRPr sz="2325" b="1">
                 <a:solidFill>
                   <a:srgbClr val="182D45"/>
@@ -5337,6 +6723,7 @@
               </a:defRPr>
             </a:lvl4pPr>
             <a:lvl5pPr>
+              <a:buNone/>
               <a:defRPr sz="2325" b="1">
                 <a:solidFill>
                   <a:srgbClr val="182D45"/>
@@ -5347,6 +6734,7 @@
               </a:defRPr>
             </a:lvl5pPr>
             <a:lvl6pPr>
+              <a:buNone/>
               <a:defRPr sz="2325" b="1">
                 <a:solidFill>
                   <a:srgbClr val="182D45"/>
@@ -5357,6 +6745,7 @@
               </a:defRPr>
             </a:lvl6pPr>
             <a:lvl7pPr>
+              <a:buNone/>
               <a:defRPr sz="2325" b="1">
                 <a:solidFill>
                   <a:srgbClr val="182D45"/>
@@ -5367,6 +6756,7 @@
               </a:defRPr>
             </a:lvl7pPr>
             <a:lvl8pPr>
+              <a:buNone/>
               <a:defRPr sz="2325" b="1">
                 <a:solidFill>
                   <a:srgbClr val="182D45"/>
@@ -5377,6 +6767,7 @@
               </a:defRPr>
             </a:lvl8pPr>
             <a:lvl9pPr>
+              <a:buNone/>
               <a:defRPr sz="2325" b="1">
                 <a:solidFill>
                   <a:srgbClr val="182D45"/>
@@ -5389,6 +6780,7 @@
           </a:lstStyle>
           <a:p xmlns:a="http://schemas.openxmlformats.org/drawingml/2006/main">
             <a:pPr>
+              <a:buNone/>
               <a:defRPr sz="2325" b="1">
                 <a:solidFill>
                   <a:srgbClr val="182D45"/>
@@ -5453,6 +6845,7 @@
               </a:defRPr>
             </a:defPPr>
             <a:lvl1pPr>
+              <a:buNone/>
               <a:defRPr sz="2025" b="0">
                 <a:solidFill>
                   <a:srgbClr val="566A80"/>
@@ -5463,6 +6856,7 @@
               </a:defRPr>
             </a:lvl1pPr>
             <a:lvl2pPr>
+              <a:buNone/>
               <a:defRPr sz="2025" b="0">
                 <a:solidFill>
                   <a:srgbClr val="566A80"/>
@@ -5473,6 +6867,7 @@
               </a:defRPr>
             </a:lvl2pPr>
             <a:lvl3pPr>
+              <a:buNone/>
               <a:defRPr sz="2025" b="0">
                 <a:solidFill>
                   <a:srgbClr val="566A80"/>
@@ -5483,6 +6878,7 @@
               </a:defRPr>
             </a:lvl3pPr>
             <a:lvl4pPr>
+              <a:buNone/>
               <a:defRPr sz="2025" b="0">
                 <a:solidFill>
                   <a:srgbClr val="566A80"/>
@@ -5493,6 +6889,7 @@
               </a:defRPr>
             </a:lvl4pPr>
             <a:lvl5pPr>
+              <a:buNone/>
               <a:defRPr sz="2025" b="0">
                 <a:solidFill>
                   <a:srgbClr val="566A80"/>
@@ -5503,6 +6900,7 @@
               </a:defRPr>
             </a:lvl5pPr>
             <a:lvl6pPr>
+              <a:buNone/>
               <a:defRPr sz="2025" b="0">
                 <a:solidFill>
                   <a:srgbClr val="566A80"/>
@@ -5513,6 +6911,7 @@
               </a:defRPr>
             </a:lvl6pPr>
             <a:lvl7pPr>
+              <a:buNone/>
               <a:defRPr sz="2025" b="0">
                 <a:solidFill>
                   <a:srgbClr val="566A80"/>
@@ -5523,6 +6922,7 @@
               </a:defRPr>
             </a:lvl7pPr>
             <a:lvl8pPr>
+              <a:buNone/>
               <a:defRPr sz="2025" b="0">
                 <a:solidFill>
                   <a:srgbClr val="566A80"/>
@@ -5533,6 +6933,7 @@
               </a:defRPr>
             </a:lvl8pPr>
             <a:lvl9pPr>
+              <a:buNone/>
               <a:defRPr sz="2025" b="0">
                 <a:solidFill>
                   <a:srgbClr val="566A80"/>
@@ -5545,6 +6946,7 @@
           </a:lstStyle>
           <a:p xmlns:a="http://schemas.openxmlformats.org/drawingml/2006/main">
             <a:pPr>
+              <a:buNone/>
               <a:defRPr sz="2025" b="0">
                 <a:solidFill>
                   <a:srgbClr val="566A80"/>
@@ -5568,6 +6970,7 @@
           </a:p>
           <a:p xmlns:a="http://schemas.openxmlformats.org/drawingml/2006/main">
             <a:pPr>
+              <a:buNone/>
               <a:defRPr sz="2025" b="0">
                 <a:solidFill>
                   <a:srgbClr val="566A80"/>
@@ -5596,7 +6999,7 @@
           <p:cNvPr id="8" name="">
             <a:extLst xmlns:a="http://schemas.openxmlformats.org/drawingml/2006/main">
               <a:ext uri="{FF2B5EF4-FFF2-40B4-BE49-F238E27FC236}">
-                <a16:creationId xmlns:a16="http://schemas.microsoft.com/office/drawing/2014/main" id="{435BC005-BBFC-4845-8E96-946E809BE84A}"/>
+                <a16:creationId xmlns:a16="http://schemas.microsoft.com/office/drawing/2014/main" id="{9661C429-7953-46D8-BA49-2E63FED7A5B8}"/>
               </a:ext>
             </a:extLst>
           </p:cNvPr>
@@ -5606,7 +7009,7 @@
           <p:nvPr/>
         </p:nvPicPr>
         <p:blipFill>
-          <a:blip xmlns:r="http://schemas.openxmlformats.org/officeDocument/2006/relationships" xmlns:a="http://schemas.openxmlformats.org/drawingml/2006/main" r:embed="Rd639d99c9e3841fc"/>
+          <a:blip xmlns:r="http://schemas.openxmlformats.org/officeDocument/2006/relationships" xmlns:a="http://schemas.openxmlformats.org/drawingml/2006/main" r:embed="R5025be20eff74ea1"/>
           <a:stretch xmlns:a="http://schemas.openxmlformats.org/drawingml/2006/main"/>
         </p:blipFill>
         <p:spPr>
@@ -5660,6 +7063,7 @@
               </a:defRPr>
             </a:defPPr>
             <a:lvl1pPr>
+              <a:buNone/>
               <a:defRPr sz="1350" b="0">
                 <a:solidFill>
                   <a:srgbClr val="566A80"/>
@@ -5670,6 +7074,7 @@
               </a:defRPr>
             </a:lvl1pPr>
             <a:lvl2pPr>
+              <a:buNone/>
               <a:defRPr sz="1350" b="0">
                 <a:solidFill>
                   <a:srgbClr val="566A80"/>
@@ -5680,6 +7085,7 @@
               </a:defRPr>
             </a:lvl2pPr>
             <a:lvl3pPr>
+              <a:buNone/>
               <a:defRPr sz="1350" b="0">
                 <a:solidFill>
                   <a:srgbClr val="566A80"/>
@@ -5690,6 +7096,7 @@
               </a:defRPr>
             </a:lvl3pPr>
             <a:lvl4pPr>
+              <a:buNone/>
               <a:defRPr sz="1350" b="0">
                 <a:solidFill>
                   <a:srgbClr val="566A80"/>
@@ -5700,6 +7107,7 @@
               </a:defRPr>
             </a:lvl4pPr>
             <a:lvl5pPr>
+              <a:buNone/>
               <a:defRPr sz="1350" b="0">
                 <a:solidFill>
                   <a:srgbClr val="566A80"/>
@@ -5710,6 +7118,7 @@
               </a:defRPr>
             </a:lvl5pPr>
             <a:lvl6pPr>
+              <a:buNone/>
               <a:defRPr sz="1350" b="0">
                 <a:solidFill>
                   <a:srgbClr val="566A80"/>
@@ -5720,6 +7129,7 @@
               </a:defRPr>
             </a:lvl6pPr>
             <a:lvl7pPr>
+              <a:buNone/>
               <a:defRPr sz="1350" b="0">
                 <a:solidFill>
                   <a:srgbClr val="566A80"/>
@@ -5730,6 +7140,7 @@
               </a:defRPr>
             </a:lvl7pPr>
             <a:lvl8pPr>
+              <a:buNone/>
               <a:defRPr sz="1350" b="0">
                 <a:solidFill>
                   <a:srgbClr val="566A80"/>
@@ -5740,6 +7151,7 @@
               </a:defRPr>
             </a:lvl8pPr>
             <a:lvl9pPr>
+              <a:buNone/>
               <a:defRPr sz="1350" b="0">
                 <a:solidFill>
                   <a:srgbClr val="566A80"/>
@@ -5752,6 +7164,7 @@
           </a:lstStyle>
           <a:p xmlns:a="http://schemas.openxmlformats.org/drawingml/2006/main">
             <a:pPr>
+              <a:buNone/>
               <a:defRPr sz="1350" b="0">
                 <a:solidFill>
                   <a:srgbClr val="566A80"/>
@@ -5845,6 +7258,7 @@
               </a:defRPr>
             </a:defPPr>
             <a:lvl1pPr>
+              <a:buNone/>
               <a:defRPr sz="3300" b="1">
                 <a:solidFill>
                   <a:srgbClr val="182D45"/>
@@ -5855,6 +7269,7 @@
               </a:defRPr>
             </a:lvl1pPr>
             <a:lvl2pPr>
+              <a:buNone/>
               <a:defRPr sz="3300" b="1">
                 <a:solidFill>
                   <a:srgbClr val="182D45"/>
@@ -5865,6 +7280,7 @@
               </a:defRPr>
             </a:lvl2pPr>
             <a:lvl3pPr>
+              <a:buNone/>
               <a:defRPr sz="3300" b="1">
                 <a:solidFill>
                   <a:srgbClr val="182D45"/>
@@ -5875,6 +7291,7 @@
               </a:defRPr>
             </a:lvl3pPr>
             <a:lvl4pPr>
+              <a:buNone/>
               <a:defRPr sz="3300" b="1">
                 <a:solidFill>
                   <a:srgbClr val="182D45"/>
@@ -5885,6 +7302,7 @@
               </a:defRPr>
             </a:lvl4pPr>
             <a:lvl5pPr>
+              <a:buNone/>
               <a:defRPr sz="3300" b="1">
                 <a:solidFill>
                   <a:srgbClr val="182D45"/>
@@ -5895,6 +7313,7 @@
               </a:defRPr>
             </a:lvl5pPr>
             <a:lvl6pPr>
+              <a:buNone/>
               <a:defRPr sz="3300" b="1">
                 <a:solidFill>
                   <a:srgbClr val="182D45"/>
@@ -5905,6 +7324,7 @@
               </a:defRPr>
             </a:lvl6pPr>
             <a:lvl7pPr>
+              <a:buNone/>
               <a:defRPr sz="3300" b="1">
                 <a:solidFill>
                   <a:srgbClr val="182D45"/>
@@ -5915,6 +7335,7 @@
               </a:defRPr>
             </a:lvl7pPr>
             <a:lvl8pPr>
+              <a:buNone/>
               <a:defRPr sz="3300" b="1">
                 <a:solidFill>
                   <a:srgbClr val="182D45"/>
@@ -5925,6 +7346,7 @@
               </a:defRPr>
             </a:lvl8pPr>
             <a:lvl9pPr>
+              <a:buNone/>
               <a:defRPr sz="3300" b="1">
                 <a:solidFill>
                   <a:srgbClr val="182D45"/>
@@ -5937,6 +7359,7 @@
           </a:lstStyle>
           <a:p xmlns:a="http://schemas.openxmlformats.org/drawingml/2006/main">
             <a:pPr>
+              <a:buNone/>
               <a:defRPr sz="3300" b="1">
                 <a:solidFill>
                   <a:srgbClr val="182D45"/>
@@ -6001,6 +7424,7 @@
               </a:defRPr>
             </a:defPPr>
             <a:lvl1pPr>
+              <a:buNone/>
               <a:defRPr sz="1350" b="0">
                 <a:solidFill>
                   <a:srgbClr val="566A80"/>
@@ -6011,6 +7435,7 @@
               </a:defRPr>
             </a:lvl1pPr>
             <a:lvl2pPr>
+              <a:buNone/>
               <a:defRPr sz="1350" b="0">
                 <a:solidFill>
                   <a:srgbClr val="566A80"/>
@@ -6021,6 +7446,7 @@
               </a:defRPr>
             </a:lvl2pPr>
             <a:lvl3pPr>
+              <a:buNone/>
               <a:defRPr sz="1350" b="0">
                 <a:solidFill>
                   <a:srgbClr val="566A80"/>
@@ -6031,6 +7457,7 @@
               </a:defRPr>
             </a:lvl3pPr>
             <a:lvl4pPr>
+              <a:buNone/>
               <a:defRPr sz="1350" b="0">
                 <a:solidFill>
                   <a:srgbClr val="566A80"/>
@@ -6041,6 +7468,7 @@
               </a:defRPr>
             </a:lvl4pPr>
             <a:lvl5pPr>
+              <a:buNone/>
               <a:defRPr sz="1350" b="0">
                 <a:solidFill>
                   <a:srgbClr val="566A80"/>
@@ -6051,6 +7479,7 @@
               </a:defRPr>
             </a:lvl5pPr>
             <a:lvl6pPr>
+              <a:buNone/>
               <a:defRPr sz="1350" b="0">
                 <a:solidFill>
                   <a:srgbClr val="566A80"/>
@@ -6061,6 +7490,7 @@
               </a:defRPr>
             </a:lvl6pPr>
             <a:lvl7pPr>
+              <a:buNone/>
               <a:defRPr sz="1350" b="0">
                 <a:solidFill>
                   <a:srgbClr val="566A80"/>
@@ -6071,6 +7501,7 @@
               </a:defRPr>
             </a:lvl7pPr>
             <a:lvl8pPr>
+              <a:buNone/>
               <a:defRPr sz="1350" b="0">
                 <a:solidFill>
                   <a:srgbClr val="566A80"/>
@@ -6081,6 +7512,7 @@
               </a:defRPr>
             </a:lvl8pPr>
             <a:lvl9pPr>
+              <a:buNone/>
               <a:defRPr sz="1350" b="0">
                 <a:solidFill>
                   <a:srgbClr val="566A80"/>
@@ -6093,6 +7525,7 @@
           </a:lstStyle>
           <a:p xmlns:a="http://schemas.openxmlformats.org/drawingml/2006/main">
             <a:pPr>
+              <a:buNone/>
               <a:defRPr sz="1350" b="0">
                 <a:solidFill>
                   <a:srgbClr val="566A80"/>
@@ -6121,7 +7554,7 @@
           <p:cNvPr id="4" name="">
             <a:extLst xmlns:a="http://schemas.openxmlformats.org/drawingml/2006/main">
               <a:ext uri="{FF2B5EF4-FFF2-40B4-BE49-F238E27FC236}">
-                <a16:creationId xmlns:a16="http://schemas.microsoft.com/office/drawing/2014/main" id="{C967A9D1-554F-4EAF-90A5-B17686434504}"/>
+                <a16:creationId xmlns:a16="http://schemas.microsoft.com/office/drawing/2014/main" id="{53689B30-9903-495F-B143-38D8BAE155D6}"/>
               </a:ext>
             </a:extLst>
           </p:cNvPr>
@@ -6900,6 +8333,7 @@
               </a:defRPr>
             </a:defPPr>
             <a:lvl1pPr>
+              <a:buNone/>
               <a:defRPr sz="2400" b="1">
                 <a:solidFill>
                   <a:srgbClr val="087F8C"/>
@@ -6910,6 +8344,7 @@
               </a:defRPr>
             </a:lvl1pPr>
             <a:lvl2pPr>
+              <a:buNone/>
               <a:defRPr sz="2400" b="1">
                 <a:solidFill>
                   <a:srgbClr val="087F8C"/>
@@ -6920,6 +8355,7 @@
               </a:defRPr>
             </a:lvl2pPr>
             <a:lvl3pPr>
+              <a:buNone/>
               <a:defRPr sz="2400" b="1">
                 <a:solidFill>
                   <a:srgbClr val="087F8C"/>
@@ -6930,6 +8366,7 @@
               </a:defRPr>
             </a:lvl3pPr>
             <a:lvl4pPr>
+              <a:buNone/>
               <a:defRPr sz="2400" b="1">
                 <a:solidFill>
                   <a:srgbClr val="087F8C"/>
@@ -6940,6 +8377,7 @@
               </a:defRPr>
             </a:lvl4pPr>
             <a:lvl5pPr>
+              <a:buNone/>
               <a:defRPr sz="2400" b="1">
                 <a:solidFill>
                   <a:srgbClr val="087F8C"/>
@@ -6950,6 +8388,7 @@
               </a:defRPr>
             </a:lvl5pPr>
             <a:lvl6pPr>
+              <a:buNone/>
               <a:defRPr sz="2400" b="1">
                 <a:solidFill>
                   <a:srgbClr val="087F8C"/>
@@ -6960,6 +8399,7 @@
               </a:defRPr>
             </a:lvl6pPr>
             <a:lvl7pPr>
+              <a:buNone/>
               <a:defRPr sz="2400" b="1">
                 <a:solidFill>
                   <a:srgbClr val="087F8C"/>
@@ -6970,6 +8410,7 @@
               </a:defRPr>
             </a:lvl7pPr>
             <a:lvl8pPr>
+              <a:buNone/>
               <a:defRPr sz="2400" b="1">
                 <a:solidFill>
                   <a:srgbClr val="087F8C"/>
@@ -6980,6 +8421,7 @@
               </a:defRPr>
             </a:lvl8pPr>
             <a:lvl9pPr>
+              <a:buNone/>
               <a:defRPr sz="2400" b="1">
                 <a:solidFill>
                   <a:srgbClr val="087F8C"/>
@@ -6992,6 +8434,7 @@
           </a:lstStyle>
           <a:p xmlns:a="http://schemas.openxmlformats.org/drawingml/2006/main">
             <a:pPr>
+              <a:buNone/>
               <a:defRPr sz="2400" b="1">
                 <a:solidFill>
                   <a:srgbClr val="087F8C"/>
@@ -7085,6 +8528,7 @@
               </a:defRPr>
             </a:defPPr>
             <a:lvl1pPr>
+              <a:buNone/>
               <a:defRPr sz="3300" b="1">
                 <a:solidFill>
                   <a:srgbClr val="182D45"/>
@@ -7095,6 +8539,7 @@
               </a:defRPr>
             </a:lvl1pPr>
             <a:lvl2pPr>
+              <a:buNone/>
               <a:defRPr sz="3300" b="1">
                 <a:solidFill>
                   <a:srgbClr val="182D45"/>
@@ -7105,6 +8550,7 @@
               </a:defRPr>
             </a:lvl2pPr>
             <a:lvl3pPr>
+              <a:buNone/>
               <a:defRPr sz="3300" b="1">
                 <a:solidFill>
                   <a:srgbClr val="182D45"/>
@@ -7115,6 +8561,7 @@
               </a:defRPr>
             </a:lvl3pPr>
             <a:lvl4pPr>
+              <a:buNone/>
               <a:defRPr sz="3300" b="1">
                 <a:solidFill>
                   <a:srgbClr val="182D45"/>
@@ -7125,6 +8572,7 @@
               </a:defRPr>
             </a:lvl4pPr>
             <a:lvl5pPr>
+              <a:buNone/>
               <a:defRPr sz="3300" b="1">
                 <a:solidFill>
                   <a:srgbClr val="182D45"/>
@@ -7135,6 +8583,7 @@
               </a:defRPr>
             </a:lvl5pPr>
             <a:lvl6pPr>
+              <a:buNone/>
               <a:defRPr sz="3300" b="1">
                 <a:solidFill>
                   <a:srgbClr val="182D45"/>
@@ -7145,6 +8594,7 @@
               </a:defRPr>
             </a:lvl6pPr>
             <a:lvl7pPr>
+              <a:buNone/>
               <a:defRPr sz="3300" b="1">
                 <a:solidFill>
                   <a:srgbClr val="182D45"/>
@@ -7155,6 +8605,7 @@
               </a:defRPr>
             </a:lvl7pPr>
             <a:lvl8pPr>
+              <a:buNone/>
               <a:defRPr sz="3300" b="1">
                 <a:solidFill>
                   <a:srgbClr val="182D45"/>
@@ -7165,6 +8616,7 @@
               </a:defRPr>
             </a:lvl8pPr>
             <a:lvl9pPr>
+              <a:buNone/>
               <a:defRPr sz="3300" b="1">
                 <a:solidFill>
                   <a:srgbClr val="182D45"/>
@@ -7177,6 +8629,7 @@
           </a:lstStyle>
           <a:p xmlns:a="http://schemas.openxmlformats.org/drawingml/2006/main">
             <a:pPr>
+              <a:buNone/>
               <a:defRPr sz="3300" b="1">
                 <a:solidFill>
                   <a:srgbClr val="182D45"/>
@@ -7241,6 +8694,7 @@
               </a:defRPr>
             </a:defPPr>
             <a:lvl1pPr>
+              <a:buNone/>
               <a:defRPr sz="1350" b="0">
                 <a:solidFill>
                   <a:srgbClr val="566A80"/>
@@ -7251,6 +8705,7 @@
               </a:defRPr>
             </a:lvl1pPr>
             <a:lvl2pPr>
+              <a:buNone/>
               <a:defRPr sz="1350" b="0">
                 <a:solidFill>
                   <a:srgbClr val="566A80"/>
@@ -7261,6 +8716,7 @@
               </a:defRPr>
             </a:lvl2pPr>
             <a:lvl3pPr>
+              <a:buNone/>
               <a:defRPr sz="1350" b="0">
                 <a:solidFill>
                   <a:srgbClr val="566A80"/>
@@ -7271,6 +8727,7 @@
               </a:defRPr>
             </a:lvl3pPr>
             <a:lvl4pPr>
+              <a:buNone/>
               <a:defRPr sz="1350" b="0">
                 <a:solidFill>
                   <a:srgbClr val="566A80"/>
@@ -7281,6 +8738,7 @@
               </a:defRPr>
             </a:lvl4pPr>
             <a:lvl5pPr>
+              <a:buNone/>
               <a:defRPr sz="1350" b="0">
                 <a:solidFill>
                   <a:srgbClr val="566A80"/>
@@ -7291,6 +8749,7 @@
               </a:defRPr>
             </a:lvl5pPr>
             <a:lvl6pPr>
+              <a:buNone/>
               <a:defRPr sz="1350" b="0">
                 <a:solidFill>
                   <a:srgbClr val="566A80"/>
@@ -7301,6 +8760,7 @@
               </a:defRPr>
             </a:lvl6pPr>
             <a:lvl7pPr>
+              <a:buNone/>
               <a:defRPr sz="1350" b="0">
                 <a:solidFill>
                   <a:srgbClr val="566A80"/>
@@ -7311,6 +8771,7 @@
               </a:defRPr>
             </a:lvl7pPr>
             <a:lvl8pPr>
+              <a:buNone/>
               <a:defRPr sz="1350" b="0">
                 <a:solidFill>
                   <a:srgbClr val="566A80"/>
@@ -7321,6 +8782,7 @@
               </a:defRPr>
             </a:lvl8pPr>
             <a:lvl9pPr>
+              <a:buNone/>
               <a:defRPr sz="1350" b="0">
                 <a:solidFill>
                   <a:srgbClr val="566A80"/>
@@ -7333,6 +8795,7 @@
           </a:lstStyle>
           <a:p xmlns:a="http://schemas.openxmlformats.org/drawingml/2006/main">
             <a:pPr>
+              <a:buNone/>
               <a:defRPr sz="1350" b="0">
                 <a:solidFill>
                   <a:srgbClr val="566A80"/>
@@ -7397,6 +8860,7 @@
               </a:defRPr>
             </a:defPPr>
             <a:lvl1pPr>
+              <a:buNone/>
               <a:defRPr sz="2550" b="1">
                 <a:solidFill>
                   <a:srgbClr val="087F8C"/>
@@ -7407,6 +8871,7 @@
               </a:defRPr>
             </a:lvl1pPr>
             <a:lvl2pPr>
+              <a:buNone/>
               <a:defRPr sz="2550" b="1">
                 <a:solidFill>
                   <a:srgbClr val="087F8C"/>
@@ -7417,6 +8882,7 @@
               </a:defRPr>
             </a:lvl2pPr>
             <a:lvl3pPr>
+              <a:buNone/>
               <a:defRPr sz="2550" b="1">
                 <a:solidFill>
                   <a:srgbClr val="087F8C"/>
@@ -7427,6 +8893,7 @@
               </a:defRPr>
             </a:lvl3pPr>
             <a:lvl4pPr>
+              <a:buNone/>
               <a:defRPr sz="2550" b="1">
                 <a:solidFill>
                   <a:srgbClr val="087F8C"/>
@@ -7437,6 +8904,7 @@
               </a:defRPr>
             </a:lvl4pPr>
             <a:lvl5pPr>
+              <a:buNone/>
               <a:defRPr sz="2550" b="1">
                 <a:solidFill>
                   <a:srgbClr val="087F8C"/>
@@ -7447,6 +8915,7 @@
               </a:defRPr>
             </a:lvl5pPr>
             <a:lvl6pPr>
+              <a:buNone/>
               <a:defRPr sz="2550" b="1">
                 <a:solidFill>
                   <a:srgbClr val="087F8C"/>
@@ -7457,6 +8926,7 @@
               </a:defRPr>
             </a:lvl6pPr>
             <a:lvl7pPr>
+              <a:buNone/>
               <a:defRPr sz="2550" b="1">
                 <a:solidFill>
                   <a:srgbClr val="087F8C"/>
@@ -7467,6 +8937,7 @@
               </a:defRPr>
             </a:lvl7pPr>
             <a:lvl8pPr>
+              <a:buNone/>
               <a:defRPr sz="2550" b="1">
                 <a:solidFill>
                   <a:srgbClr val="087F8C"/>
@@ -7477,6 +8948,7 @@
               </a:defRPr>
             </a:lvl8pPr>
             <a:lvl9pPr>
+              <a:buNone/>
               <a:defRPr sz="2550" b="1">
                 <a:solidFill>
                   <a:srgbClr val="087F8C"/>
@@ -7489,6 +8961,7 @@
           </a:lstStyle>
           <a:p xmlns:a="http://schemas.openxmlformats.org/drawingml/2006/main">
             <a:pPr>
+              <a:buNone/>
               <a:defRPr sz="2550" b="1">
                 <a:solidFill>
                   <a:srgbClr val="087F8C"/>
@@ -7553,6 +9026,7 @@
               </a:defRPr>
             </a:defPPr>
             <a:lvl1pPr>
+              <a:buNone/>
               <a:defRPr sz="2250" b="1">
                 <a:solidFill>
                   <a:srgbClr val="182D45"/>
@@ -7563,6 +9037,7 @@
               </a:defRPr>
             </a:lvl1pPr>
             <a:lvl2pPr>
+              <a:buNone/>
               <a:defRPr sz="2250" b="1">
                 <a:solidFill>
                   <a:srgbClr val="182D45"/>
@@ -7573,6 +9048,7 @@
               </a:defRPr>
             </a:lvl2pPr>
             <a:lvl3pPr>
+              <a:buNone/>
               <a:defRPr sz="2250" b="1">
                 <a:solidFill>
                   <a:srgbClr val="182D45"/>
@@ -7583,6 +9059,7 @@
               </a:defRPr>
             </a:lvl3pPr>
             <a:lvl4pPr>
+              <a:buNone/>
               <a:defRPr sz="2250" b="1">
                 <a:solidFill>
                   <a:srgbClr val="182D45"/>
@@ -7593,6 +9070,7 @@
               </a:defRPr>
             </a:lvl4pPr>
             <a:lvl5pPr>
+              <a:buNone/>
               <a:defRPr sz="2250" b="1">
                 <a:solidFill>
                   <a:srgbClr val="182D45"/>
@@ -7603,6 +9081,7 @@
               </a:defRPr>
             </a:lvl5pPr>
             <a:lvl6pPr>
+              <a:buNone/>
               <a:defRPr sz="2250" b="1">
                 <a:solidFill>
                   <a:srgbClr val="182D45"/>
@@ -7613,6 +9092,7 @@
               </a:defRPr>
             </a:lvl6pPr>
             <a:lvl7pPr>
+              <a:buNone/>
               <a:defRPr sz="2250" b="1">
                 <a:solidFill>
                   <a:srgbClr val="182D45"/>
@@ -7623,6 +9103,7 @@
               </a:defRPr>
             </a:lvl7pPr>
             <a:lvl8pPr>
+              <a:buNone/>
               <a:defRPr sz="2250" b="1">
                 <a:solidFill>
                   <a:srgbClr val="182D45"/>
@@ -7633,6 +9114,7 @@
               </a:defRPr>
             </a:lvl8pPr>
             <a:lvl9pPr>
+              <a:buNone/>
               <a:defRPr sz="2250" b="1">
                 <a:solidFill>
                   <a:srgbClr val="182D45"/>
@@ -7645,6 +9127,7 @@
           </a:lstStyle>
           <a:p xmlns:a="http://schemas.openxmlformats.org/drawingml/2006/main">
             <a:pPr>
+              <a:buNone/>
               <a:defRPr sz="2250" b="1">
                 <a:solidFill>
                   <a:srgbClr val="182D45"/>
@@ -7709,6 +9192,7 @@
               </a:defRPr>
             </a:defPPr>
             <a:lvl1pPr>
+              <a:buNone/>
               <a:defRPr sz="2100" b="0">
                 <a:solidFill>
                   <a:srgbClr val="182D45"/>
@@ -7719,6 +9203,7 @@
               </a:defRPr>
             </a:lvl1pPr>
             <a:lvl2pPr>
+              <a:buNone/>
               <a:defRPr sz="2100" b="0">
                 <a:solidFill>
                   <a:srgbClr val="182D45"/>
@@ -7729,6 +9214,7 @@
               </a:defRPr>
             </a:lvl2pPr>
             <a:lvl3pPr>
+              <a:buNone/>
               <a:defRPr sz="2100" b="0">
                 <a:solidFill>
                   <a:srgbClr val="182D45"/>
@@ -7739,6 +9225,7 @@
               </a:defRPr>
             </a:lvl3pPr>
             <a:lvl4pPr>
+              <a:buNone/>
               <a:defRPr sz="2100" b="0">
                 <a:solidFill>
                   <a:srgbClr val="182D45"/>
@@ -7749,6 +9236,7 @@
               </a:defRPr>
             </a:lvl4pPr>
             <a:lvl5pPr>
+              <a:buNone/>
               <a:defRPr sz="2100" b="0">
                 <a:solidFill>
                   <a:srgbClr val="182D45"/>
@@ -7759,6 +9247,7 @@
               </a:defRPr>
             </a:lvl5pPr>
             <a:lvl6pPr>
+              <a:buNone/>
               <a:defRPr sz="2100" b="0">
                 <a:solidFill>
                   <a:srgbClr val="182D45"/>
@@ -7769,6 +9258,7 @@
               </a:defRPr>
             </a:lvl6pPr>
             <a:lvl7pPr>
+              <a:buNone/>
               <a:defRPr sz="2100" b="0">
                 <a:solidFill>
                   <a:srgbClr val="182D45"/>
@@ -7779,6 +9269,7 @@
               </a:defRPr>
             </a:lvl7pPr>
             <a:lvl8pPr>
+              <a:buNone/>
               <a:defRPr sz="2100" b="0">
                 <a:solidFill>
                   <a:srgbClr val="182D45"/>
@@ -7789,6 +9280,7 @@
               </a:defRPr>
             </a:lvl8pPr>
             <a:lvl9pPr>
+              <a:buNone/>
               <a:defRPr sz="2100" b="0">
                 <a:solidFill>
                   <a:srgbClr val="182D45"/>
@@ -7801,6 +9293,7 @@
           </a:lstStyle>
           <a:p xmlns:a="http://schemas.openxmlformats.org/drawingml/2006/main">
             <a:pPr>
+              <a:buNone/>
               <a:defRPr sz="2100" b="0">
                 <a:solidFill>
                   <a:srgbClr val="182D45"/>
@@ -7824,6 +9317,7 @@
           </a:p>
           <a:p xmlns:a="http://schemas.openxmlformats.org/drawingml/2006/main">
             <a:pPr>
+              <a:buNone/>
               <a:defRPr sz="2100" b="0">
                 <a:solidFill>
                   <a:srgbClr val="182D45"/>
@@ -7888,6 +9382,7 @@
               </a:defRPr>
             </a:defPPr>
             <a:lvl1pPr>
+              <a:buNone/>
               <a:defRPr sz="2250" b="1">
                 <a:solidFill>
                   <a:srgbClr val="182D45"/>
@@ -7898,6 +9393,7 @@
               </a:defRPr>
             </a:lvl1pPr>
             <a:lvl2pPr>
+              <a:buNone/>
               <a:defRPr sz="2250" b="1">
                 <a:solidFill>
                   <a:srgbClr val="182D45"/>
@@ -7908,6 +9404,7 @@
               </a:defRPr>
             </a:lvl2pPr>
             <a:lvl3pPr>
+              <a:buNone/>
               <a:defRPr sz="2250" b="1">
                 <a:solidFill>
                   <a:srgbClr val="182D45"/>
@@ -7918,6 +9415,7 @@
               </a:defRPr>
             </a:lvl3pPr>
             <a:lvl4pPr>
+              <a:buNone/>
               <a:defRPr sz="2250" b="1">
                 <a:solidFill>
                   <a:srgbClr val="182D45"/>
@@ -7928,6 +9426,7 @@
               </a:defRPr>
             </a:lvl4pPr>
             <a:lvl5pPr>
+              <a:buNone/>
               <a:defRPr sz="2250" b="1">
                 <a:solidFill>
                   <a:srgbClr val="182D45"/>
@@ -7938,6 +9437,7 @@
               </a:defRPr>
             </a:lvl5pPr>
             <a:lvl6pPr>
+              <a:buNone/>
               <a:defRPr sz="2250" b="1">
                 <a:solidFill>
                   <a:srgbClr val="182D45"/>
@@ -7948,6 +9448,7 @@
               </a:defRPr>
             </a:lvl6pPr>
             <a:lvl7pPr>
+              <a:buNone/>
               <a:defRPr sz="2250" b="1">
                 <a:solidFill>
                   <a:srgbClr val="182D45"/>
@@ -7958,6 +9459,7 @@
               </a:defRPr>
             </a:lvl7pPr>
             <a:lvl8pPr>
+              <a:buNone/>
               <a:defRPr sz="2250" b="1">
                 <a:solidFill>
                   <a:srgbClr val="182D45"/>
@@ -7968,6 +9470,7 @@
               </a:defRPr>
             </a:lvl8pPr>
             <a:lvl9pPr>
+              <a:buNone/>
               <a:defRPr sz="2250" b="1">
                 <a:solidFill>
                   <a:srgbClr val="182D45"/>
@@ -7980,6 +9483,7 @@
           </a:lstStyle>
           <a:p xmlns:a="http://schemas.openxmlformats.org/drawingml/2006/main">
             <a:pPr>
+              <a:buNone/>
               <a:defRPr sz="2250" b="1">
                 <a:solidFill>
                   <a:srgbClr val="182D45"/>
@@ -8044,6 +9548,7 @@
               </a:defRPr>
             </a:defPPr>
             <a:lvl1pPr>
+              <a:buNone/>
               <a:defRPr sz="2025" b="0">
                 <a:solidFill>
                   <a:srgbClr val="182D45"/>
@@ -8054,6 +9559,7 @@
               </a:defRPr>
             </a:lvl1pPr>
             <a:lvl2pPr>
+              <a:buNone/>
               <a:defRPr sz="2025" b="0">
                 <a:solidFill>
                   <a:srgbClr val="182D45"/>
@@ -8064,6 +9570,7 @@
               </a:defRPr>
             </a:lvl2pPr>
             <a:lvl3pPr>
+              <a:buNone/>
               <a:defRPr sz="2025" b="0">
                 <a:solidFill>
                   <a:srgbClr val="182D45"/>
@@ -8074,6 +9581,7 @@
               </a:defRPr>
             </a:lvl3pPr>
             <a:lvl4pPr>
+              <a:buNone/>
               <a:defRPr sz="2025" b="0">
                 <a:solidFill>
                   <a:srgbClr val="182D45"/>
@@ -8084,6 +9592,7 @@
               </a:defRPr>
             </a:lvl4pPr>
             <a:lvl5pPr>
+              <a:buNone/>
               <a:defRPr sz="2025" b="0">
                 <a:solidFill>
                   <a:srgbClr val="182D45"/>
@@ -8094,6 +9603,7 @@
               </a:defRPr>
             </a:lvl5pPr>
             <a:lvl6pPr>
+              <a:buNone/>
               <a:defRPr sz="2025" b="0">
                 <a:solidFill>
                   <a:srgbClr val="182D45"/>
@@ -8104,6 +9614,7 @@
               </a:defRPr>
             </a:lvl6pPr>
             <a:lvl7pPr>
+              <a:buNone/>
               <a:defRPr sz="2025" b="0">
                 <a:solidFill>
                   <a:srgbClr val="182D45"/>
@@ -8114,6 +9625,7 @@
               </a:defRPr>
             </a:lvl7pPr>
             <a:lvl8pPr>
+              <a:buNone/>
               <a:defRPr sz="2025" b="0">
                 <a:solidFill>
                   <a:srgbClr val="182D45"/>
@@ -8124,6 +9636,7 @@
               </a:defRPr>
             </a:lvl8pPr>
             <a:lvl9pPr>
+              <a:buNone/>
               <a:defRPr sz="2025" b="0">
                 <a:solidFill>
                   <a:srgbClr val="182D45"/>
@@ -8136,6 +9649,7 @@
           </a:lstStyle>
           <a:p xmlns:a="http://schemas.openxmlformats.org/drawingml/2006/main">
             <a:pPr>
+              <a:buNone/>
               <a:defRPr sz="2025" b="0">
                 <a:solidFill>
                   <a:srgbClr val="182D45"/>
@@ -8159,6 +9673,7 @@
           </a:p>
           <a:p xmlns:a="http://schemas.openxmlformats.org/drawingml/2006/main">
             <a:pPr>
+              <a:buNone/>
               <a:defRPr sz="2025" b="0">
                 <a:solidFill>
                   <a:srgbClr val="182D45"/>
@@ -8223,6 +9738,7 @@
               </a:defRPr>
             </a:defPPr>
             <a:lvl1pPr>
+              <a:buNone/>
               <a:defRPr sz="2250" b="1">
                 <a:solidFill>
                   <a:srgbClr val="182D45"/>
@@ -8233,6 +9749,7 @@
               </a:defRPr>
             </a:lvl1pPr>
             <a:lvl2pPr>
+              <a:buNone/>
               <a:defRPr sz="2250" b="1">
                 <a:solidFill>
                   <a:srgbClr val="182D45"/>
@@ -8243,6 +9760,7 @@
               </a:defRPr>
             </a:lvl2pPr>
             <a:lvl3pPr>
+              <a:buNone/>
               <a:defRPr sz="2250" b="1">
                 <a:solidFill>
                   <a:srgbClr val="182D45"/>
@@ -8253,6 +9771,7 @@
               </a:defRPr>
             </a:lvl3pPr>
             <a:lvl4pPr>
+              <a:buNone/>
               <a:defRPr sz="2250" b="1">
                 <a:solidFill>
                   <a:srgbClr val="182D45"/>
@@ -8263,6 +9782,7 @@
               </a:defRPr>
             </a:lvl4pPr>
             <a:lvl5pPr>
+              <a:buNone/>
               <a:defRPr sz="2250" b="1">
                 <a:solidFill>
                   <a:srgbClr val="182D45"/>
@@ -8273,6 +9793,7 @@
               </a:defRPr>
             </a:lvl5pPr>
             <a:lvl6pPr>
+              <a:buNone/>
               <a:defRPr sz="2250" b="1">
                 <a:solidFill>
                   <a:srgbClr val="182D45"/>
@@ -8283,6 +9804,7 @@
               </a:defRPr>
             </a:lvl6pPr>
             <a:lvl7pPr>
+              <a:buNone/>
               <a:defRPr sz="2250" b="1">
                 <a:solidFill>
                   <a:srgbClr val="182D45"/>
@@ -8293,6 +9815,7 @@
               </a:defRPr>
             </a:lvl7pPr>
             <a:lvl8pPr>
+              <a:buNone/>
               <a:defRPr sz="2250" b="1">
                 <a:solidFill>
                   <a:srgbClr val="182D45"/>
@@ -8303,6 +9826,7 @@
               </a:defRPr>
             </a:lvl8pPr>
             <a:lvl9pPr>
+              <a:buNone/>
               <a:defRPr sz="2250" b="1">
                 <a:solidFill>
                   <a:srgbClr val="182D45"/>
@@ -8315,6 +9839,7 @@
           </a:lstStyle>
           <a:p xmlns:a="http://schemas.openxmlformats.org/drawingml/2006/main">
             <a:pPr>
+              <a:buNone/>
               <a:defRPr sz="2250" b="1">
                 <a:solidFill>
                   <a:srgbClr val="182D45"/>
@@ -8379,6 +9904,7 @@
               </a:defRPr>
             </a:defPPr>
             <a:lvl1pPr>
+              <a:buNone/>
               <a:defRPr sz="2025" b="0">
                 <a:solidFill>
                   <a:srgbClr val="182D45"/>
@@ -8389,6 +9915,7 @@
               </a:defRPr>
             </a:lvl1pPr>
             <a:lvl2pPr>
+              <a:buNone/>
               <a:defRPr sz="2025" b="0">
                 <a:solidFill>
                   <a:srgbClr val="182D45"/>
@@ -8399,6 +9926,7 @@
               </a:defRPr>
             </a:lvl2pPr>
             <a:lvl3pPr>
+              <a:buNone/>
               <a:defRPr sz="2025" b="0">
                 <a:solidFill>
                   <a:srgbClr val="182D45"/>
@@ -8409,6 +9937,7 @@
               </a:defRPr>
             </a:lvl3pPr>
             <a:lvl4pPr>
+              <a:buNone/>
               <a:defRPr sz="2025" b="0">
                 <a:solidFill>
                   <a:srgbClr val="182D45"/>
@@ -8419,6 +9948,7 @@
               </a:defRPr>
             </a:lvl4pPr>
             <a:lvl5pPr>
+              <a:buNone/>
               <a:defRPr sz="2025" b="0">
                 <a:solidFill>
                   <a:srgbClr val="182D45"/>
@@ -8429,6 +9959,7 @@
               </a:defRPr>
             </a:lvl5pPr>
             <a:lvl6pPr>
+              <a:buNone/>
               <a:defRPr sz="2025" b="0">
                 <a:solidFill>
                   <a:srgbClr val="182D45"/>
@@ -8439,6 +9970,7 @@
               </a:defRPr>
             </a:lvl6pPr>
             <a:lvl7pPr>
+              <a:buNone/>
               <a:defRPr sz="2025" b="0">
                 <a:solidFill>
                   <a:srgbClr val="182D45"/>
@@ -8449,6 +9981,7 @@
               </a:defRPr>
             </a:lvl7pPr>
             <a:lvl8pPr>
+              <a:buNone/>
               <a:defRPr sz="2025" b="0">
                 <a:solidFill>
                   <a:srgbClr val="182D45"/>
@@ -8459,6 +9992,7 @@
               </a:defRPr>
             </a:lvl8pPr>
             <a:lvl9pPr>
+              <a:buNone/>
               <a:defRPr sz="2025" b="0">
                 <a:solidFill>
                   <a:srgbClr val="182D45"/>
@@ -8471,6 +10005,7 @@
           </a:lstStyle>
           <a:p xmlns:a="http://schemas.openxmlformats.org/drawingml/2006/main">
             <a:pPr>
+              <a:buNone/>
               <a:defRPr sz="2025" b="0">
                 <a:solidFill>
                   <a:srgbClr val="182D45"/>
@@ -8494,6 +10029,7 @@
           </a:p>
           <a:p xmlns:a="http://schemas.openxmlformats.org/drawingml/2006/main">
             <a:pPr>
+              <a:buNone/>
               <a:defRPr sz="2025" b="0">
                 <a:solidFill>
                   <a:srgbClr val="182D45"/>
@@ -8528,6 +10064,1802 @@
 </file>
 
 <file path=ppt/slides/slide5.xml><?xml version="1.0" encoding="utf-8"?>
+<p:sld xmlns:p="http://schemas.openxmlformats.org/presentationml/2006/main">
+  <p:cSld>
+    <p:bg>
+      <p:bgPr>
+        <a:solidFill xmlns:a="http://schemas.openxmlformats.org/drawingml/2006/main">
+          <a:srgbClr val="FFFFFF"/>
+        </a:solidFill>
+      </p:bgPr>
+    </p:bg>
+    <p:spTree>
+      <p:nvGrpSpPr>
+        <p:cNvPr id="1" name=""/>
+        <p:cNvGrpSpPr/>
+        <p:nvPr/>
+      </p:nvGrpSpPr>
+      <p:grpSpPr>
+        <a:xfrm xmlns:a="http://schemas.openxmlformats.org/drawingml/2006/main"/>
+      </p:grpSpPr>
+      <p:sp>
+        <p:nvSpPr>
+          <p:cNvPr id="13" name="stand-title">
+            <a:extLst xmlns:a="http://schemas.openxmlformats.org/drawingml/2006/main">
+              <a:ext uri="{FF2B5EF4-FFF2-40B4-BE49-F238E27FC236}">
+                <a16:creationId xmlns:a16="http://schemas.microsoft.com/office/drawing/2014/main" id="{B29D2C40-6BDD-4317-8D3A-5464206F18F8}"/>
+              </a:ext>
+            </a:extLst>
+          </p:cNvPr>
+          <p:cNvSpPr>
+            <a:spLocks xmlns:a="http://schemas.openxmlformats.org/drawingml/2006/main" noGrp="1"/>
+          </p:cNvSpPr>
+          <p:nvPr/>
+        </p:nvSpPr>
+        <p:spPr>
+          <a:xfrm xmlns:a="http://schemas.openxmlformats.org/drawingml/2006/main">
+            <a:off x="609600" y="381000"/>
+            <a:ext cx="10972800" cy="895350"/>
+          </a:xfrm>
+          <a:prstGeom xmlns:a="http://schemas.openxmlformats.org/drawingml/2006/main" prst="rect">
+            <a:avLst/>
+          </a:prstGeom>
+          <a:noFill xmlns:a="http://schemas.openxmlformats.org/drawingml/2006/main"/>
+          <a:ln xmlns:a="http://schemas.openxmlformats.org/drawingml/2006/main" w="0">
+            <a:noFill/>
+          </a:ln>
+        </p:spPr>
+        <p:txBody>
+          <a:bodyPr xmlns:a="http://schemas.openxmlformats.org/drawingml/2006/main"/>
+          <a:lstStyle xmlns:a="http://schemas.openxmlformats.org/drawingml/2006/main">
+            <a:defPPr>
+              <a:defRPr sz="3300" b="1">
+                <a:solidFill>
+                  <a:srgbClr val="182D45"/>
+                </a:solidFill>
+                <a:latin typeface="Arial"/>
+                <a:ea typeface="Arial"/>
+                <a:cs typeface="Arial"/>
+              </a:defRPr>
+            </a:defPPr>
+            <a:lvl1pPr>
+              <a:defRPr sz="3300" b="1">
+                <a:solidFill>
+                  <a:srgbClr val="182D45"/>
+                </a:solidFill>
+                <a:latin typeface="Arial"/>
+                <a:ea typeface="Arial"/>
+                <a:cs typeface="Arial"/>
+              </a:defRPr>
+            </a:lvl1pPr>
+            <a:lvl2pPr>
+              <a:defRPr sz="3300" b="1">
+                <a:solidFill>
+                  <a:srgbClr val="182D45"/>
+                </a:solidFill>
+                <a:latin typeface="Arial"/>
+                <a:ea typeface="Arial"/>
+                <a:cs typeface="Arial"/>
+              </a:defRPr>
+            </a:lvl2pPr>
+            <a:lvl3pPr>
+              <a:defRPr sz="3300" b="1">
+                <a:solidFill>
+                  <a:srgbClr val="182D45"/>
+                </a:solidFill>
+                <a:latin typeface="Arial"/>
+                <a:ea typeface="Arial"/>
+                <a:cs typeface="Arial"/>
+              </a:defRPr>
+            </a:lvl3pPr>
+            <a:lvl4pPr>
+              <a:defRPr sz="3300" b="1">
+                <a:solidFill>
+                  <a:srgbClr val="182D45"/>
+                </a:solidFill>
+                <a:latin typeface="Arial"/>
+                <a:ea typeface="Arial"/>
+                <a:cs typeface="Arial"/>
+              </a:defRPr>
+            </a:lvl4pPr>
+            <a:lvl5pPr>
+              <a:defRPr sz="3300" b="1">
+                <a:solidFill>
+                  <a:srgbClr val="182D45"/>
+                </a:solidFill>
+                <a:latin typeface="Arial"/>
+                <a:ea typeface="Arial"/>
+                <a:cs typeface="Arial"/>
+              </a:defRPr>
+            </a:lvl5pPr>
+            <a:lvl6pPr>
+              <a:defRPr sz="3300" b="1">
+                <a:solidFill>
+                  <a:srgbClr val="182D45"/>
+                </a:solidFill>
+                <a:latin typeface="Arial"/>
+                <a:ea typeface="Arial"/>
+                <a:cs typeface="Arial"/>
+              </a:defRPr>
+            </a:lvl6pPr>
+            <a:lvl7pPr>
+              <a:defRPr sz="3300" b="1">
+                <a:solidFill>
+                  <a:srgbClr val="182D45"/>
+                </a:solidFill>
+                <a:latin typeface="Arial"/>
+                <a:ea typeface="Arial"/>
+                <a:cs typeface="Arial"/>
+              </a:defRPr>
+            </a:lvl7pPr>
+            <a:lvl8pPr>
+              <a:defRPr sz="3300" b="1">
+                <a:solidFill>
+                  <a:srgbClr val="182D45"/>
+                </a:solidFill>
+                <a:latin typeface="Arial"/>
+                <a:ea typeface="Arial"/>
+                <a:cs typeface="Arial"/>
+              </a:defRPr>
+            </a:lvl8pPr>
+            <a:lvl9pPr>
+              <a:defRPr sz="3300" b="1">
+                <a:solidFill>
+                  <a:srgbClr val="182D45"/>
+                </a:solidFill>
+                <a:latin typeface="Arial"/>
+                <a:ea typeface="Arial"/>
+                <a:cs typeface="Arial"/>
+              </a:defRPr>
+            </a:lvl9pPr>
+          </a:lstStyle>
+          <a:p xmlns:a="http://schemas.openxmlformats.org/drawingml/2006/main">
+            <a:pPr>
+              <a:defRPr sz="3300" b="1">
+                <a:solidFill>
+                  <a:srgbClr val="182D45"/>
+                </a:solidFill>
+                <a:latin typeface="Arial"/>
+                <a:ea typeface="Arial"/>
+                <a:cs typeface="Arial"/>
+              </a:defRPr>
+            </a:pPr>
+            <a:r>
+              <a:rPr sz="3300" b="1">
+                <a:solidFill>
+                  <a:srgbClr val="182D45"/>
+                </a:solidFill>
+                <a:latin typeface="Arial"/>
+                <a:ea typeface="Arial"/>
+                <a:cs typeface="Arial"/>
+              </a:rPr>
+              <a:t>Реальний стенд для ручних перевірок</a:t>
+            </a:r>
+          </a:p>
+        </p:txBody>
+      </p:sp>
+      <p:pic>
+        <p:nvPicPr>
+          <p:cNvPr id="2" name="">
+            <a:extLst xmlns:a="http://schemas.openxmlformats.org/drawingml/2006/main">
+              <a:ext uri="{FF2B5EF4-FFF2-40B4-BE49-F238E27FC236}">
+                <a16:creationId xmlns:a16="http://schemas.microsoft.com/office/drawing/2014/main" id="{DED0CDF1-601D-44E6-BE6B-6339124FA956}"/>
+              </a:ext>
+            </a:extLst>
+          </p:cNvPr>
+          <p:cNvPicPr>
+            <a:picLocks xmlns:a="http://schemas.openxmlformats.org/drawingml/2006/main" noChangeAspect="1"/>
+          </p:cNvPicPr>
+          <p:nvPr/>
+        </p:nvPicPr>
+        <p:blipFill>
+          <a:blip xmlns:r="http://schemas.openxmlformats.org/officeDocument/2006/relationships" xmlns:a="http://schemas.openxmlformats.org/drawingml/2006/main" r:embed="R20095fbb25524d53"/>
+          <a:stretch xmlns:a="http://schemas.openxmlformats.org/drawingml/2006/main"/>
+        </p:blipFill>
+        <p:spPr>
+          <a:xfrm xmlns:a="http://schemas.openxmlformats.org/drawingml/2006/main">
+            <a:off x="609600" y="1402420"/>
+            <a:ext cx="4133850" cy="4872309"/>
+          </a:xfrm>
+          <a:prstGeom xmlns:a="http://schemas.openxmlformats.org/drawingml/2006/main" prst="rect">
+            <a:avLst/>
+          </a:prstGeom>
+        </p:spPr>
+      </p:pic>
+      <p:sp>
+        <p:nvSpPr>
+          <p:cNvPr id="3" name="dut-heading">
+            <a:extLst xmlns:a="http://schemas.openxmlformats.org/drawingml/2006/main">
+              <a:ext uri="{FF2B5EF4-FFF2-40B4-BE49-F238E27FC236}">
+                <a16:creationId xmlns:a16="http://schemas.microsoft.com/office/drawing/2014/main" id="{1BC5121E-AFE5-4ED0-A8D5-C3BBBEA1C906}"/>
+              </a:ext>
+            </a:extLst>
+          </p:cNvPr>
+          <p:cNvSpPr>
+            <a:spLocks xmlns:a="http://schemas.openxmlformats.org/drawingml/2006/main" noGrp="1"/>
+          </p:cNvSpPr>
+          <p:nvPr/>
+        </p:nvSpPr>
+        <p:spPr>
+          <a:xfrm xmlns:a="http://schemas.openxmlformats.org/drawingml/2006/main">
+            <a:off x="5219700" y="1438275"/>
+            <a:ext cx="6362700" cy="447675"/>
+          </a:xfrm>
+          <a:prstGeom xmlns:a="http://schemas.openxmlformats.org/drawingml/2006/main" prst="rect">
+            <a:avLst/>
+          </a:prstGeom>
+          <a:noFill xmlns:a="http://schemas.openxmlformats.org/drawingml/2006/main"/>
+          <a:ln xmlns:a="http://schemas.openxmlformats.org/drawingml/2006/main" w="0">
+            <a:noFill/>
+          </a:ln>
+        </p:spPr>
+        <p:txBody>
+          <a:bodyPr xmlns:a="http://schemas.openxmlformats.org/drawingml/2006/main"/>
+          <a:lstStyle xmlns:a="http://schemas.openxmlformats.org/drawingml/2006/main">
+            <a:defPPr>
+              <a:defRPr sz="2400" b="1">
+                <a:solidFill>
+                  <a:srgbClr val="087F8C"/>
+                </a:solidFill>
+                <a:latin typeface="Arial"/>
+                <a:ea typeface="Arial"/>
+                <a:cs typeface="Arial"/>
+              </a:defRPr>
+            </a:defPPr>
+            <a:lvl1pPr>
+              <a:defRPr sz="2400" b="1">
+                <a:solidFill>
+                  <a:srgbClr val="087F8C"/>
+                </a:solidFill>
+                <a:latin typeface="Arial"/>
+                <a:ea typeface="Arial"/>
+                <a:cs typeface="Arial"/>
+              </a:defRPr>
+            </a:lvl1pPr>
+            <a:lvl2pPr>
+              <a:defRPr sz="2400" b="1">
+                <a:solidFill>
+                  <a:srgbClr val="087F8C"/>
+                </a:solidFill>
+                <a:latin typeface="Arial"/>
+                <a:ea typeface="Arial"/>
+                <a:cs typeface="Arial"/>
+              </a:defRPr>
+            </a:lvl2pPr>
+            <a:lvl3pPr>
+              <a:defRPr sz="2400" b="1">
+                <a:solidFill>
+                  <a:srgbClr val="087F8C"/>
+                </a:solidFill>
+                <a:latin typeface="Arial"/>
+                <a:ea typeface="Arial"/>
+                <a:cs typeface="Arial"/>
+              </a:defRPr>
+            </a:lvl3pPr>
+            <a:lvl4pPr>
+              <a:defRPr sz="2400" b="1">
+                <a:solidFill>
+                  <a:srgbClr val="087F8C"/>
+                </a:solidFill>
+                <a:latin typeface="Arial"/>
+                <a:ea typeface="Arial"/>
+                <a:cs typeface="Arial"/>
+              </a:defRPr>
+            </a:lvl4pPr>
+            <a:lvl5pPr>
+              <a:defRPr sz="2400" b="1">
+                <a:solidFill>
+                  <a:srgbClr val="087F8C"/>
+                </a:solidFill>
+                <a:latin typeface="Arial"/>
+                <a:ea typeface="Arial"/>
+                <a:cs typeface="Arial"/>
+              </a:defRPr>
+            </a:lvl5pPr>
+            <a:lvl6pPr>
+              <a:defRPr sz="2400" b="1">
+                <a:solidFill>
+                  <a:srgbClr val="087F8C"/>
+                </a:solidFill>
+                <a:latin typeface="Arial"/>
+                <a:ea typeface="Arial"/>
+                <a:cs typeface="Arial"/>
+              </a:defRPr>
+            </a:lvl6pPr>
+            <a:lvl7pPr>
+              <a:defRPr sz="2400" b="1">
+                <a:solidFill>
+                  <a:srgbClr val="087F8C"/>
+                </a:solidFill>
+                <a:latin typeface="Arial"/>
+                <a:ea typeface="Arial"/>
+                <a:cs typeface="Arial"/>
+              </a:defRPr>
+            </a:lvl7pPr>
+            <a:lvl8pPr>
+              <a:defRPr sz="2400" b="1">
+                <a:solidFill>
+                  <a:srgbClr val="087F8C"/>
+                </a:solidFill>
+                <a:latin typeface="Arial"/>
+                <a:ea typeface="Arial"/>
+                <a:cs typeface="Arial"/>
+              </a:defRPr>
+            </a:lvl8pPr>
+            <a:lvl9pPr>
+              <a:defRPr sz="2400" b="1">
+                <a:solidFill>
+                  <a:srgbClr val="087F8C"/>
+                </a:solidFill>
+                <a:latin typeface="Arial"/>
+                <a:ea typeface="Arial"/>
+                <a:cs typeface="Arial"/>
+              </a:defRPr>
+            </a:lvl9pPr>
+          </a:lstStyle>
+          <a:p xmlns:a="http://schemas.openxmlformats.org/drawingml/2006/main">
+            <a:pPr>
+              <a:defRPr sz="2400" b="1">
+                <a:solidFill>
+                  <a:srgbClr val="087F8C"/>
+                </a:solidFill>
+                <a:latin typeface="Arial"/>
+                <a:ea typeface="Arial"/>
+                <a:cs typeface="Arial"/>
+              </a:defRPr>
+            </a:pPr>
+            <a:r>
+              <a:rPr sz="2400" b="1">
+                <a:solidFill>
+                  <a:srgbClr val="087F8C"/>
+                </a:solidFill>
+                <a:latin typeface="Arial"/>
+                <a:ea typeface="Arial"/>
+                <a:cs typeface="Arial"/>
+              </a:rPr>
+              <a:t>ESP32-S3 N16R8</a:t>
+            </a:r>
+          </a:p>
+        </p:txBody>
+      </p:sp>
+      <p:sp>
+        <p:nvSpPr>
+          <p:cNvPr id="4" name="dut-description">
+            <a:extLst xmlns:a="http://schemas.openxmlformats.org/drawingml/2006/main">
+              <a:ext uri="{FF2B5EF4-FFF2-40B4-BE49-F238E27FC236}">
+                <a16:creationId xmlns:a16="http://schemas.microsoft.com/office/drawing/2014/main" id="{5AA0105D-94E9-417E-A8FD-F89FD18B62C3}"/>
+              </a:ext>
+            </a:extLst>
+          </p:cNvPr>
+          <p:cNvSpPr>
+            <a:spLocks xmlns:a="http://schemas.openxmlformats.org/drawingml/2006/main" noGrp="1"/>
+          </p:cNvSpPr>
+          <p:nvPr/>
+        </p:nvSpPr>
+        <p:spPr>
+          <a:xfrm xmlns:a="http://schemas.openxmlformats.org/drawingml/2006/main">
+            <a:off x="5219700" y="1895475"/>
+            <a:ext cx="6362700" cy="400050"/>
+          </a:xfrm>
+          <a:prstGeom xmlns:a="http://schemas.openxmlformats.org/drawingml/2006/main" prst="rect">
+            <a:avLst/>
+          </a:prstGeom>
+          <a:noFill xmlns:a="http://schemas.openxmlformats.org/drawingml/2006/main"/>
+          <a:ln xmlns:a="http://schemas.openxmlformats.org/drawingml/2006/main" w="0">
+            <a:noFill/>
+          </a:ln>
+        </p:spPr>
+        <p:txBody>
+          <a:bodyPr xmlns:a="http://schemas.openxmlformats.org/drawingml/2006/main"/>
+          <a:lstStyle xmlns:a="http://schemas.openxmlformats.org/drawingml/2006/main">
+            <a:defPPr>
+              <a:defRPr sz="2025" b="0">
+                <a:solidFill>
+                  <a:srgbClr val="182D45"/>
+                </a:solidFill>
+                <a:latin typeface="Arial"/>
+                <a:ea typeface="Arial"/>
+                <a:cs typeface="Arial"/>
+              </a:defRPr>
+            </a:defPPr>
+            <a:lvl1pPr>
+              <a:defRPr sz="2025" b="0">
+                <a:solidFill>
+                  <a:srgbClr val="182D45"/>
+                </a:solidFill>
+                <a:latin typeface="Arial"/>
+                <a:ea typeface="Arial"/>
+                <a:cs typeface="Arial"/>
+              </a:defRPr>
+            </a:lvl1pPr>
+            <a:lvl2pPr>
+              <a:defRPr sz="2025" b="0">
+                <a:solidFill>
+                  <a:srgbClr val="182D45"/>
+                </a:solidFill>
+                <a:latin typeface="Arial"/>
+                <a:ea typeface="Arial"/>
+                <a:cs typeface="Arial"/>
+              </a:defRPr>
+            </a:lvl2pPr>
+            <a:lvl3pPr>
+              <a:defRPr sz="2025" b="0">
+                <a:solidFill>
+                  <a:srgbClr val="182D45"/>
+                </a:solidFill>
+                <a:latin typeface="Arial"/>
+                <a:ea typeface="Arial"/>
+                <a:cs typeface="Arial"/>
+              </a:defRPr>
+            </a:lvl3pPr>
+            <a:lvl4pPr>
+              <a:defRPr sz="2025" b="0">
+                <a:solidFill>
+                  <a:srgbClr val="182D45"/>
+                </a:solidFill>
+                <a:latin typeface="Arial"/>
+                <a:ea typeface="Arial"/>
+                <a:cs typeface="Arial"/>
+              </a:defRPr>
+            </a:lvl4pPr>
+            <a:lvl5pPr>
+              <a:defRPr sz="2025" b="0">
+                <a:solidFill>
+                  <a:srgbClr val="182D45"/>
+                </a:solidFill>
+                <a:latin typeface="Arial"/>
+                <a:ea typeface="Arial"/>
+                <a:cs typeface="Arial"/>
+              </a:defRPr>
+            </a:lvl5pPr>
+            <a:lvl6pPr>
+              <a:defRPr sz="2025" b="0">
+                <a:solidFill>
+                  <a:srgbClr val="182D45"/>
+                </a:solidFill>
+                <a:latin typeface="Arial"/>
+                <a:ea typeface="Arial"/>
+                <a:cs typeface="Arial"/>
+              </a:defRPr>
+            </a:lvl6pPr>
+            <a:lvl7pPr>
+              <a:defRPr sz="2025" b="0">
+                <a:solidFill>
+                  <a:srgbClr val="182D45"/>
+                </a:solidFill>
+                <a:latin typeface="Arial"/>
+                <a:ea typeface="Arial"/>
+                <a:cs typeface="Arial"/>
+              </a:defRPr>
+            </a:lvl7pPr>
+            <a:lvl8pPr>
+              <a:defRPr sz="2025" b="0">
+                <a:solidFill>
+                  <a:srgbClr val="182D45"/>
+                </a:solidFill>
+                <a:latin typeface="Arial"/>
+                <a:ea typeface="Arial"/>
+                <a:cs typeface="Arial"/>
+              </a:defRPr>
+            </a:lvl8pPr>
+            <a:lvl9pPr>
+              <a:defRPr sz="2025" b="0">
+                <a:solidFill>
+                  <a:srgbClr val="182D45"/>
+                </a:solidFill>
+                <a:latin typeface="Arial"/>
+                <a:ea typeface="Arial"/>
+                <a:cs typeface="Arial"/>
+              </a:defRPr>
+            </a:lvl9pPr>
+          </a:lstStyle>
+          <a:p xmlns:a="http://schemas.openxmlformats.org/drawingml/2006/main">
+            <a:pPr>
+              <a:defRPr sz="2025" b="0">
+                <a:solidFill>
+                  <a:srgbClr val="182D45"/>
+                </a:solidFill>
+                <a:latin typeface="Arial"/>
+                <a:ea typeface="Arial"/>
+                <a:cs typeface="Arial"/>
+              </a:defRPr>
+            </a:pPr>
+            <a:r>
+              <a:rPr sz="2025" b="0">
+                <a:solidFill>
+                  <a:srgbClr val="182D45"/>
+                </a:solidFill>
+                <a:latin typeface="Arial"/>
+                <a:ea typeface="Arial"/>
+                <a:cs typeface="Arial"/>
+              </a:rPr>
+              <a:t>Прошивка SENTRY, USB/UART із Mac</a:t>
+            </a:r>
+          </a:p>
+        </p:txBody>
+      </p:sp>
+      <p:sp>
+        <p:nvSpPr>
+          <p:cNvPr id="5" name="relay-heading">
+            <a:extLst xmlns:a="http://schemas.openxmlformats.org/drawingml/2006/main">
+              <a:ext uri="{FF2B5EF4-FFF2-40B4-BE49-F238E27FC236}">
+                <a16:creationId xmlns:a16="http://schemas.microsoft.com/office/drawing/2014/main" id="{E162B4AF-47F6-479C-8509-82B8601F3B44}"/>
+              </a:ext>
+            </a:extLst>
+          </p:cNvPr>
+          <p:cNvSpPr>
+            <a:spLocks xmlns:a="http://schemas.openxmlformats.org/drawingml/2006/main" noGrp="1"/>
+          </p:cNvSpPr>
+          <p:nvPr/>
+        </p:nvSpPr>
+        <p:spPr>
+          <a:xfrm xmlns:a="http://schemas.openxmlformats.org/drawingml/2006/main">
+            <a:off x="5219700" y="2552700"/>
+            <a:ext cx="6362700" cy="447675"/>
+          </a:xfrm>
+          <a:prstGeom xmlns:a="http://schemas.openxmlformats.org/drawingml/2006/main" prst="rect">
+            <a:avLst/>
+          </a:prstGeom>
+          <a:noFill xmlns:a="http://schemas.openxmlformats.org/drawingml/2006/main"/>
+          <a:ln xmlns:a="http://schemas.openxmlformats.org/drawingml/2006/main" w="0">
+            <a:noFill/>
+          </a:ln>
+        </p:spPr>
+        <p:txBody>
+          <a:bodyPr xmlns:a="http://schemas.openxmlformats.org/drawingml/2006/main"/>
+          <a:lstStyle xmlns:a="http://schemas.openxmlformats.org/drawingml/2006/main">
+            <a:defPPr>
+              <a:defRPr sz="2250" b="1">
+                <a:solidFill>
+                  <a:srgbClr val="182D45"/>
+                </a:solidFill>
+                <a:latin typeface="Arial"/>
+                <a:ea typeface="Arial"/>
+                <a:cs typeface="Arial"/>
+              </a:defRPr>
+            </a:defPPr>
+            <a:lvl1pPr>
+              <a:defRPr sz="2250" b="1">
+                <a:solidFill>
+                  <a:srgbClr val="182D45"/>
+                </a:solidFill>
+                <a:latin typeface="Arial"/>
+                <a:ea typeface="Arial"/>
+                <a:cs typeface="Arial"/>
+              </a:defRPr>
+            </a:lvl1pPr>
+            <a:lvl2pPr>
+              <a:defRPr sz="2250" b="1">
+                <a:solidFill>
+                  <a:srgbClr val="182D45"/>
+                </a:solidFill>
+                <a:latin typeface="Arial"/>
+                <a:ea typeface="Arial"/>
+                <a:cs typeface="Arial"/>
+              </a:defRPr>
+            </a:lvl2pPr>
+            <a:lvl3pPr>
+              <a:defRPr sz="2250" b="1">
+                <a:solidFill>
+                  <a:srgbClr val="182D45"/>
+                </a:solidFill>
+                <a:latin typeface="Arial"/>
+                <a:ea typeface="Arial"/>
+                <a:cs typeface="Arial"/>
+              </a:defRPr>
+            </a:lvl3pPr>
+            <a:lvl4pPr>
+              <a:defRPr sz="2250" b="1">
+                <a:solidFill>
+                  <a:srgbClr val="182D45"/>
+                </a:solidFill>
+                <a:latin typeface="Arial"/>
+                <a:ea typeface="Arial"/>
+                <a:cs typeface="Arial"/>
+              </a:defRPr>
+            </a:lvl4pPr>
+            <a:lvl5pPr>
+              <a:defRPr sz="2250" b="1">
+                <a:solidFill>
+                  <a:srgbClr val="182D45"/>
+                </a:solidFill>
+                <a:latin typeface="Arial"/>
+                <a:ea typeface="Arial"/>
+                <a:cs typeface="Arial"/>
+              </a:defRPr>
+            </a:lvl5pPr>
+            <a:lvl6pPr>
+              <a:defRPr sz="2250" b="1">
+                <a:solidFill>
+                  <a:srgbClr val="182D45"/>
+                </a:solidFill>
+                <a:latin typeface="Arial"/>
+                <a:ea typeface="Arial"/>
+                <a:cs typeface="Arial"/>
+              </a:defRPr>
+            </a:lvl6pPr>
+            <a:lvl7pPr>
+              <a:defRPr sz="2250" b="1">
+                <a:solidFill>
+                  <a:srgbClr val="182D45"/>
+                </a:solidFill>
+                <a:latin typeface="Arial"/>
+                <a:ea typeface="Arial"/>
+                <a:cs typeface="Arial"/>
+              </a:defRPr>
+            </a:lvl7pPr>
+            <a:lvl8pPr>
+              <a:defRPr sz="2250" b="1">
+                <a:solidFill>
+                  <a:srgbClr val="182D45"/>
+                </a:solidFill>
+                <a:latin typeface="Arial"/>
+                <a:ea typeface="Arial"/>
+                <a:cs typeface="Arial"/>
+              </a:defRPr>
+            </a:lvl8pPr>
+            <a:lvl9pPr>
+              <a:defRPr sz="2250" b="1">
+                <a:solidFill>
+                  <a:srgbClr val="182D45"/>
+                </a:solidFill>
+                <a:latin typeface="Arial"/>
+                <a:ea typeface="Arial"/>
+                <a:cs typeface="Arial"/>
+              </a:defRPr>
+            </a:lvl9pPr>
+          </a:lstStyle>
+          <a:p xmlns:a="http://schemas.openxmlformats.org/drawingml/2006/main">
+            <a:pPr>
+              <a:defRPr sz="2250" b="1">
+                <a:solidFill>
+                  <a:srgbClr val="182D45"/>
+                </a:solidFill>
+                <a:latin typeface="Arial"/>
+                <a:ea typeface="Arial"/>
+                <a:cs typeface="Arial"/>
+              </a:defRPr>
+            </a:pPr>
+            <a:r>
+              <a:rPr sz="2250" b="1">
+                <a:solidFill>
+                  <a:srgbClr val="182D45"/>
+                </a:solidFill>
+                <a:latin typeface="Arial"/>
+                <a:ea typeface="Arial"/>
+                <a:cs typeface="Arial"/>
+              </a:rPr>
+              <a:t>Raspberry Pi 5 та реле 5 В</a:t>
+            </a:r>
+          </a:p>
+        </p:txBody>
+      </p:sp>
+      <p:sp>
+        <p:nvSpPr>
+          <p:cNvPr id="6" name="relay-description">
+            <a:extLst xmlns:a="http://schemas.openxmlformats.org/drawingml/2006/main">
+              <a:ext uri="{FF2B5EF4-FFF2-40B4-BE49-F238E27FC236}">
+                <a16:creationId xmlns:a16="http://schemas.microsoft.com/office/drawing/2014/main" id="{79660A30-1326-49C1-9DDD-1E254FEE5435}"/>
+              </a:ext>
+            </a:extLst>
+          </p:cNvPr>
+          <p:cNvSpPr>
+            <a:spLocks xmlns:a="http://schemas.openxmlformats.org/drawingml/2006/main" noGrp="1"/>
+          </p:cNvSpPr>
+          <p:nvPr/>
+        </p:nvSpPr>
+        <p:spPr>
+          <a:xfrm xmlns:a="http://schemas.openxmlformats.org/drawingml/2006/main">
+            <a:off x="5219700" y="2990850"/>
+            <a:ext cx="6362700" cy="400050"/>
+          </a:xfrm>
+          <a:prstGeom xmlns:a="http://schemas.openxmlformats.org/drawingml/2006/main" prst="rect">
+            <a:avLst/>
+          </a:prstGeom>
+          <a:noFill xmlns:a="http://schemas.openxmlformats.org/drawingml/2006/main"/>
+          <a:ln xmlns:a="http://schemas.openxmlformats.org/drawingml/2006/main" w="0">
+            <a:noFill/>
+          </a:ln>
+        </p:spPr>
+        <p:txBody>
+          <a:bodyPr xmlns:a="http://schemas.openxmlformats.org/drawingml/2006/main"/>
+          <a:lstStyle xmlns:a="http://schemas.openxmlformats.org/drawingml/2006/main">
+            <a:defPPr>
+              <a:defRPr sz="1950" b="0">
+                <a:solidFill>
+                  <a:srgbClr val="182D45"/>
+                </a:solidFill>
+                <a:latin typeface="Arial"/>
+                <a:ea typeface="Arial"/>
+                <a:cs typeface="Arial"/>
+              </a:defRPr>
+            </a:defPPr>
+            <a:lvl1pPr>
+              <a:defRPr sz="1950" b="0">
+                <a:solidFill>
+                  <a:srgbClr val="182D45"/>
+                </a:solidFill>
+                <a:latin typeface="Arial"/>
+                <a:ea typeface="Arial"/>
+                <a:cs typeface="Arial"/>
+              </a:defRPr>
+            </a:lvl1pPr>
+            <a:lvl2pPr>
+              <a:defRPr sz="1950" b="0">
+                <a:solidFill>
+                  <a:srgbClr val="182D45"/>
+                </a:solidFill>
+                <a:latin typeface="Arial"/>
+                <a:ea typeface="Arial"/>
+                <a:cs typeface="Arial"/>
+              </a:defRPr>
+            </a:lvl2pPr>
+            <a:lvl3pPr>
+              <a:defRPr sz="1950" b="0">
+                <a:solidFill>
+                  <a:srgbClr val="182D45"/>
+                </a:solidFill>
+                <a:latin typeface="Arial"/>
+                <a:ea typeface="Arial"/>
+                <a:cs typeface="Arial"/>
+              </a:defRPr>
+            </a:lvl3pPr>
+            <a:lvl4pPr>
+              <a:defRPr sz="1950" b="0">
+                <a:solidFill>
+                  <a:srgbClr val="182D45"/>
+                </a:solidFill>
+                <a:latin typeface="Arial"/>
+                <a:ea typeface="Arial"/>
+                <a:cs typeface="Arial"/>
+              </a:defRPr>
+            </a:lvl4pPr>
+            <a:lvl5pPr>
+              <a:defRPr sz="1950" b="0">
+                <a:solidFill>
+                  <a:srgbClr val="182D45"/>
+                </a:solidFill>
+                <a:latin typeface="Arial"/>
+                <a:ea typeface="Arial"/>
+                <a:cs typeface="Arial"/>
+              </a:defRPr>
+            </a:lvl5pPr>
+            <a:lvl6pPr>
+              <a:defRPr sz="1950" b="0">
+                <a:solidFill>
+                  <a:srgbClr val="182D45"/>
+                </a:solidFill>
+                <a:latin typeface="Arial"/>
+                <a:ea typeface="Arial"/>
+                <a:cs typeface="Arial"/>
+              </a:defRPr>
+            </a:lvl6pPr>
+            <a:lvl7pPr>
+              <a:defRPr sz="1950" b="0">
+                <a:solidFill>
+                  <a:srgbClr val="182D45"/>
+                </a:solidFill>
+                <a:latin typeface="Arial"/>
+                <a:ea typeface="Arial"/>
+                <a:cs typeface="Arial"/>
+              </a:defRPr>
+            </a:lvl7pPr>
+            <a:lvl8pPr>
+              <a:defRPr sz="1950" b="0">
+                <a:solidFill>
+                  <a:srgbClr val="182D45"/>
+                </a:solidFill>
+                <a:latin typeface="Arial"/>
+                <a:ea typeface="Arial"/>
+                <a:cs typeface="Arial"/>
+              </a:defRPr>
+            </a:lvl8pPr>
+            <a:lvl9pPr>
+              <a:defRPr sz="1950" b="0">
+                <a:solidFill>
+                  <a:srgbClr val="182D45"/>
+                </a:solidFill>
+                <a:latin typeface="Arial"/>
+                <a:ea typeface="Arial"/>
+                <a:cs typeface="Arial"/>
+              </a:defRPr>
+            </a:lvl9pPr>
+          </a:lstStyle>
+          <a:p xmlns:a="http://schemas.openxmlformats.org/drawingml/2006/main">
+            <a:pPr>
+              <a:defRPr sz="1950" b="0">
+                <a:solidFill>
+                  <a:srgbClr val="182D45"/>
+                </a:solidFill>
+                <a:latin typeface="Arial"/>
+                <a:ea typeface="Arial"/>
+                <a:cs typeface="Arial"/>
+              </a:defRPr>
+            </a:pPr>
+            <a:r>
+              <a:rPr sz="1950" b="0">
+                <a:solidFill>
+                  <a:srgbClr val="182D45"/>
+                </a:solidFill>
+                <a:latin typeface="Arial"/>
+                <a:ea typeface="Arial"/>
+                <a:cs typeface="Arial"/>
+              </a:rPr>
+              <a:t>Pi живить модуль, GPIO8 ESP32 керує IN</a:t>
+            </a:r>
+          </a:p>
+        </p:txBody>
+      </p:sp>
+      <p:sp>
+        <p:nvSpPr>
+          <p:cNvPr id="7" name="inputs-heading">
+            <a:extLst xmlns:a="http://schemas.openxmlformats.org/drawingml/2006/main">
+              <a:ext uri="{FF2B5EF4-FFF2-40B4-BE49-F238E27FC236}">
+                <a16:creationId xmlns:a16="http://schemas.microsoft.com/office/drawing/2014/main" id="{D4C1686A-ACEC-427E-827F-C46474810802}"/>
+              </a:ext>
+            </a:extLst>
+          </p:cNvPr>
+          <p:cNvSpPr>
+            <a:spLocks xmlns:a="http://schemas.openxmlformats.org/drawingml/2006/main" noGrp="1"/>
+          </p:cNvSpPr>
+          <p:nvPr/>
+        </p:nvSpPr>
+        <p:spPr>
+          <a:xfrm xmlns:a="http://schemas.openxmlformats.org/drawingml/2006/main">
+            <a:off x="5219700" y="3629025"/>
+            <a:ext cx="6362700" cy="447675"/>
+          </a:xfrm>
+          <a:prstGeom xmlns:a="http://schemas.openxmlformats.org/drawingml/2006/main" prst="rect">
+            <a:avLst/>
+          </a:prstGeom>
+          <a:noFill xmlns:a="http://schemas.openxmlformats.org/drawingml/2006/main"/>
+          <a:ln xmlns:a="http://schemas.openxmlformats.org/drawingml/2006/main" w="0">
+            <a:noFill/>
+          </a:ln>
+        </p:spPr>
+        <p:txBody>
+          <a:bodyPr xmlns:a="http://schemas.openxmlformats.org/drawingml/2006/main"/>
+          <a:lstStyle xmlns:a="http://schemas.openxmlformats.org/drawingml/2006/main">
+            <a:defPPr>
+              <a:defRPr sz="2250" b="1">
+                <a:solidFill>
+                  <a:srgbClr val="182D45"/>
+                </a:solidFill>
+                <a:latin typeface="Arial"/>
+                <a:ea typeface="Arial"/>
+                <a:cs typeface="Arial"/>
+              </a:defRPr>
+            </a:defPPr>
+            <a:lvl1pPr>
+              <a:defRPr sz="2250" b="1">
+                <a:solidFill>
+                  <a:srgbClr val="182D45"/>
+                </a:solidFill>
+                <a:latin typeface="Arial"/>
+                <a:ea typeface="Arial"/>
+                <a:cs typeface="Arial"/>
+              </a:defRPr>
+            </a:lvl1pPr>
+            <a:lvl2pPr>
+              <a:defRPr sz="2250" b="1">
+                <a:solidFill>
+                  <a:srgbClr val="182D45"/>
+                </a:solidFill>
+                <a:latin typeface="Arial"/>
+                <a:ea typeface="Arial"/>
+                <a:cs typeface="Arial"/>
+              </a:defRPr>
+            </a:lvl2pPr>
+            <a:lvl3pPr>
+              <a:defRPr sz="2250" b="1">
+                <a:solidFill>
+                  <a:srgbClr val="182D45"/>
+                </a:solidFill>
+                <a:latin typeface="Arial"/>
+                <a:ea typeface="Arial"/>
+                <a:cs typeface="Arial"/>
+              </a:defRPr>
+            </a:lvl3pPr>
+            <a:lvl4pPr>
+              <a:defRPr sz="2250" b="1">
+                <a:solidFill>
+                  <a:srgbClr val="182D45"/>
+                </a:solidFill>
+                <a:latin typeface="Arial"/>
+                <a:ea typeface="Arial"/>
+                <a:cs typeface="Arial"/>
+              </a:defRPr>
+            </a:lvl4pPr>
+            <a:lvl5pPr>
+              <a:defRPr sz="2250" b="1">
+                <a:solidFill>
+                  <a:srgbClr val="182D45"/>
+                </a:solidFill>
+                <a:latin typeface="Arial"/>
+                <a:ea typeface="Arial"/>
+                <a:cs typeface="Arial"/>
+              </a:defRPr>
+            </a:lvl5pPr>
+            <a:lvl6pPr>
+              <a:defRPr sz="2250" b="1">
+                <a:solidFill>
+                  <a:srgbClr val="182D45"/>
+                </a:solidFill>
+                <a:latin typeface="Arial"/>
+                <a:ea typeface="Arial"/>
+                <a:cs typeface="Arial"/>
+              </a:defRPr>
+            </a:lvl6pPr>
+            <a:lvl7pPr>
+              <a:defRPr sz="2250" b="1">
+                <a:solidFill>
+                  <a:srgbClr val="182D45"/>
+                </a:solidFill>
+                <a:latin typeface="Arial"/>
+                <a:ea typeface="Arial"/>
+                <a:cs typeface="Arial"/>
+              </a:defRPr>
+            </a:lvl7pPr>
+            <a:lvl8pPr>
+              <a:defRPr sz="2250" b="1">
+                <a:solidFill>
+                  <a:srgbClr val="182D45"/>
+                </a:solidFill>
+                <a:latin typeface="Arial"/>
+                <a:ea typeface="Arial"/>
+                <a:cs typeface="Arial"/>
+              </a:defRPr>
+            </a:lvl8pPr>
+            <a:lvl9pPr>
+              <a:defRPr sz="2250" b="1">
+                <a:solidFill>
+                  <a:srgbClr val="182D45"/>
+                </a:solidFill>
+                <a:latin typeface="Arial"/>
+                <a:ea typeface="Arial"/>
+                <a:cs typeface="Arial"/>
+              </a:defRPr>
+            </a:lvl9pPr>
+          </a:lstStyle>
+          <a:p xmlns:a="http://schemas.openxmlformats.org/drawingml/2006/main">
+            <a:pPr>
+              <a:defRPr sz="2250" b="1">
+                <a:solidFill>
+                  <a:srgbClr val="182D45"/>
+                </a:solidFill>
+                <a:latin typeface="Arial"/>
+                <a:ea typeface="Arial"/>
+                <a:cs typeface="Arial"/>
+              </a:defRPr>
+            </a:pPr>
+            <a:r>
+              <a:rPr sz="2250" b="1">
+                <a:solidFill>
+                  <a:srgbClr val="182D45"/>
+                </a:solidFill>
+                <a:latin typeface="Arial"/>
+                <a:ea typeface="Arial"/>
+                <a:cs typeface="Arial"/>
+              </a:rPr>
+              <a:t>Датчик відстані та кнопки</a:t>
+            </a:r>
+          </a:p>
+        </p:txBody>
+      </p:sp>
+      <p:sp>
+        <p:nvSpPr>
+          <p:cNvPr id="8" name="led-description">
+            <a:extLst xmlns:a="http://schemas.openxmlformats.org/drawingml/2006/main">
+              <a:ext uri="{FF2B5EF4-FFF2-40B4-BE49-F238E27FC236}">
+                <a16:creationId xmlns:a16="http://schemas.microsoft.com/office/drawing/2014/main" id="{2C087EBE-A7CA-4787-A5B9-A13F741E3347}"/>
+              </a:ext>
+            </a:extLst>
+          </p:cNvPr>
+          <p:cNvSpPr>
+            <a:spLocks xmlns:a="http://schemas.openxmlformats.org/drawingml/2006/main" noGrp="1"/>
+          </p:cNvSpPr>
+          <p:nvPr/>
+        </p:nvSpPr>
+        <p:spPr>
+          <a:xfrm xmlns:a="http://schemas.openxmlformats.org/drawingml/2006/main">
+            <a:off x="5219700" y="4076700"/>
+            <a:ext cx="6362700" cy="400050"/>
+          </a:xfrm>
+          <a:prstGeom xmlns:a="http://schemas.openxmlformats.org/drawingml/2006/main" prst="rect">
+            <a:avLst/>
+          </a:prstGeom>
+          <a:noFill xmlns:a="http://schemas.openxmlformats.org/drawingml/2006/main"/>
+          <a:ln xmlns:a="http://schemas.openxmlformats.org/drawingml/2006/main" w="0">
+            <a:noFill/>
+          </a:ln>
+        </p:spPr>
+        <p:txBody>
+          <a:bodyPr xmlns:a="http://schemas.openxmlformats.org/drawingml/2006/main"/>
+          <a:lstStyle xmlns:a="http://schemas.openxmlformats.org/drawingml/2006/main">
+            <a:defPPr>
+              <a:defRPr sz="2025" b="0">
+                <a:solidFill>
+                  <a:srgbClr val="182D45"/>
+                </a:solidFill>
+                <a:latin typeface="Arial"/>
+                <a:ea typeface="Arial"/>
+                <a:cs typeface="Arial"/>
+              </a:defRPr>
+            </a:defPPr>
+            <a:lvl1pPr>
+              <a:defRPr sz="2025" b="0">
+                <a:solidFill>
+                  <a:srgbClr val="182D45"/>
+                </a:solidFill>
+                <a:latin typeface="Arial"/>
+                <a:ea typeface="Arial"/>
+                <a:cs typeface="Arial"/>
+              </a:defRPr>
+            </a:lvl1pPr>
+            <a:lvl2pPr>
+              <a:defRPr sz="2025" b="0">
+                <a:solidFill>
+                  <a:srgbClr val="182D45"/>
+                </a:solidFill>
+                <a:latin typeface="Arial"/>
+                <a:ea typeface="Arial"/>
+                <a:cs typeface="Arial"/>
+              </a:defRPr>
+            </a:lvl2pPr>
+            <a:lvl3pPr>
+              <a:defRPr sz="2025" b="0">
+                <a:solidFill>
+                  <a:srgbClr val="182D45"/>
+                </a:solidFill>
+                <a:latin typeface="Arial"/>
+                <a:ea typeface="Arial"/>
+                <a:cs typeface="Arial"/>
+              </a:defRPr>
+            </a:lvl3pPr>
+            <a:lvl4pPr>
+              <a:defRPr sz="2025" b="0">
+                <a:solidFill>
+                  <a:srgbClr val="182D45"/>
+                </a:solidFill>
+                <a:latin typeface="Arial"/>
+                <a:ea typeface="Arial"/>
+                <a:cs typeface="Arial"/>
+              </a:defRPr>
+            </a:lvl4pPr>
+            <a:lvl5pPr>
+              <a:defRPr sz="2025" b="0">
+                <a:solidFill>
+                  <a:srgbClr val="182D45"/>
+                </a:solidFill>
+                <a:latin typeface="Arial"/>
+                <a:ea typeface="Arial"/>
+                <a:cs typeface="Arial"/>
+              </a:defRPr>
+            </a:lvl5pPr>
+            <a:lvl6pPr>
+              <a:defRPr sz="2025" b="0">
+                <a:solidFill>
+                  <a:srgbClr val="182D45"/>
+                </a:solidFill>
+                <a:latin typeface="Arial"/>
+                <a:ea typeface="Arial"/>
+                <a:cs typeface="Arial"/>
+              </a:defRPr>
+            </a:lvl6pPr>
+            <a:lvl7pPr>
+              <a:defRPr sz="2025" b="0">
+                <a:solidFill>
+                  <a:srgbClr val="182D45"/>
+                </a:solidFill>
+                <a:latin typeface="Arial"/>
+                <a:ea typeface="Arial"/>
+                <a:cs typeface="Arial"/>
+              </a:defRPr>
+            </a:lvl7pPr>
+            <a:lvl8pPr>
+              <a:defRPr sz="2025" b="0">
+                <a:solidFill>
+                  <a:srgbClr val="182D45"/>
+                </a:solidFill>
+                <a:latin typeface="Arial"/>
+                <a:ea typeface="Arial"/>
+                <a:cs typeface="Arial"/>
+              </a:defRPr>
+            </a:lvl8pPr>
+            <a:lvl9pPr>
+              <a:defRPr sz="2025" b="0">
+                <a:solidFill>
+                  <a:srgbClr val="182D45"/>
+                </a:solidFill>
+                <a:latin typeface="Arial"/>
+                <a:ea typeface="Arial"/>
+                <a:cs typeface="Arial"/>
+              </a:defRPr>
+            </a:lvl9pPr>
+          </a:lstStyle>
+          <a:p xmlns:a="http://schemas.openxmlformats.org/drawingml/2006/main">
+            <a:pPr>
+              <a:defRPr sz="2025" b="0">
+                <a:solidFill>
+                  <a:srgbClr val="182D45"/>
+                </a:solidFill>
+                <a:latin typeface="Arial"/>
+                <a:ea typeface="Arial"/>
+                <a:cs typeface="Arial"/>
+              </a:defRPr>
+            </a:pPr>
+            <a:r>
+              <a:rPr sz="2025" b="0">
+                <a:solidFill>
+                  <a:srgbClr val="182D45"/>
+                </a:solidFill>
+                <a:latin typeface="Arial"/>
+                <a:ea typeface="Arial"/>
+                <a:cs typeface="Arial"/>
+              </a:rPr>
+              <a:t>Зовнішній LED із резистором 220 Ом</a:t>
+            </a:r>
+          </a:p>
+        </p:txBody>
+      </p:sp>
+      <p:sp>
+        <p:nvSpPr>
+          <p:cNvPr id="9" name="meter-heading">
+            <a:extLst xmlns:a="http://schemas.openxmlformats.org/drawingml/2006/main">
+              <a:ext uri="{FF2B5EF4-FFF2-40B4-BE49-F238E27FC236}">
+                <a16:creationId xmlns:a16="http://schemas.microsoft.com/office/drawing/2014/main" id="{0F08424F-21F3-4255-8F5B-8D716204AED0}"/>
+              </a:ext>
+            </a:extLst>
+          </p:cNvPr>
+          <p:cNvSpPr>
+            <a:spLocks xmlns:a="http://schemas.openxmlformats.org/drawingml/2006/main" noGrp="1"/>
+          </p:cNvSpPr>
+          <p:nvPr/>
+        </p:nvSpPr>
+        <p:spPr>
+          <a:xfrm xmlns:a="http://schemas.openxmlformats.org/drawingml/2006/main">
+            <a:off x="5219700" y="4724400"/>
+            <a:ext cx="6362700" cy="447675"/>
+          </a:xfrm>
+          <a:prstGeom xmlns:a="http://schemas.openxmlformats.org/drawingml/2006/main" prst="rect">
+            <a:avLst/>
+          </a:prstGeom>
+          <a:noFill xmlns:a="http://schemas.openxmlformats.org/drawingml/2006/main"/>
+          <a:ln xmlns:a="http://schemas.openxmlformats.org/drawingml/2006/main" w="0">
+            <a:noFill/>
+          </a:ln>
+        </p:spPr>
+        <p:txBody>
+          <a:bodyPr xmlns:a="http://schemas.openxmlformats.org/drawingml/2006/main"/>
+          <a:lstStyle xmlns:a="http://schemas.openxmlformats.org/drawingml/2006/main">
+            <a:defPPr>
+              <a:defRPr sz="2250" b="1">
+                <a:solidFill>
+                  <a:srgbClr val="182D45"/>
+                </a:solidFill>
+                <a:latin typeface="Arial"/>
+                <a:ea typeface="Arial"/>
+                <a:cs typeface="Arial"/>
+              </a:defRPr>
+            </a:defPPr>
+            <a:lvl1pPr>
+              <a:defRPr sz="2250" b="1">
+                <a:solidFill>
+                  <a:srgbClr val="182D45"/>
+                </a:solidFill>
+                <a:latin typeface="Arial"/>
+                <a:ea typeface="Arial"/>
+                <a:cs typeface="Arial"/>
+              </a:defRPr>
+            </a:lvl1pPr>
+            <a:lvl2pPr>
+              <a:defRPr sz="2250" b="1">
+                <a:solidFill>
+                  <a:srgbClr val="182D45"/>
+                </a:solidFill>
+                <a:latin typeface="Arial"/>
+                <a:ea typeface="Arial"/>
+                <a:cs typeface="Arial"/>
+              </a:defRPr>
+            </a:lvl2pPr>
+            <a:lvl3pPr>
+              <a:defRPr sz="2250" b="1">
+                <a:solidFill>
+                  <a:srgbClr val="182D45"/>
+                </a:solidFill>
+                <a:latin typeface="Arial"/>
+                <a:ea typeface="Arial"/>
+                <a:cs typeface="Arial"/>
+              </a:defRPr>
+            </a:lvl3pPr>
+            <a:lvl4pPr>
+              <a:defRPr sz="2250" b="1">
+                <a:solidFill>
+                  <a:srgbClr val="182D45"/>
+                </a:solidFill>
+                <a:latin typeface="Arial"/>
+                <a:ea typeface="Arial"/>
+                <a:cs typeface="Arial"/>
+              </a:defRPr>
+            </a:lvl4pPr>
+            <a:lvl5pPr>
+              <a:defRPr sz="2250" b="1">
+                <a:solidFill>
+                  <a:srgbClr val="182D45"/>
+                </a:solidFill>
+                <a:latin typeface="Arial"/>
+                <a:ea typeface="Arial"/>
+                <a:cs typeface="Arial"/>
+              </a:defRPr>
+            </a:lvl5pPr>
+            <a:lvl6pPr>
+              <a:defRPr sz="2250" b="1">
+                <a:solidFill>
+                  <a:srgbClr val="182D45"/>
+                </a:solidFill>
+                <a:latin typeface="Arial"/>
+                <a:ea typeface="Arial"/>
+                <a:cs typeface="Arial"/>
+              </a:defRPr>
+            </a:lvl6pPr>
+            <a:lvl7pPr>
+              <a:defRPr sz="2250" b="1">
+                <a:solidFill>
+                  <a:srgbClr val="182D45"/>
+                </a:solidFill>
+                <a:latin typeface="Arial"/>
+                <a:ea typeface="Arial"/>
+                <a:cs typeface="Arial"/>
+              </a:defRPr>
+            </a:lvl7pPr>
+            <a:lvl8pPr>
+              <a:defRPr sz="2250" b="1">
+                <a:solidFill>
+                  <a:srgbClr val="182D45"/>
+                </a:solidFill>
+                <a:latin typeface="Arial"/>
+                <a:ea typeface="Arial"/>
+                <a:cs typeface="Arial"/>
+              </a:defRPr>
+            </a:lvl8pPr>
+            <a:lvl9pPr>
+              <a:defRPr sz="2250" b="1">
+                <a:solidFill>
+                  <a:srgbClr val="182D45"/>
+                </a:solidFill>
+                <a:latin typeface="Arial"/>
+                <a:ea typeface="Arial"/>
+                <a:cs typeface="Arial"/>
+              </a:defRPr>
+            </a:lvl9pPr>
+          </a:lstStyle>
+          <a:p xmlns:a="http://schemas.openxmlformats.org/drawingml/2006/main">
+            <a:pPr>
+              <a:defRPr sz="2250" b="1">
+                <a:solidFill>
+                  <a:srgbClr val="182D45"/>
+                </a:solidFill>
+                <a:latin typeface="Arial"/>
+                <a:ea typeface="Arial"/>
+                <a:cs typeface="Arial"/>
+              </a:defRPr>
+            </a:pPr>
+            <a:r>
+              <a:rPr sz="2250" b="1">
+                <a:solidFill>
+                  <a:srgbClr val="182D45"/>
+                </a:solidFill>
+                <a:latin typeface="Arial"/>
+                <a:ea typeface="Arial"/>
+                <a:cs typeface="Arial"/>
+              </a:rPr>
+              <a:t>Мультиметр: прозвонювання</a:t>
+            </a:r>
+          </a:p>
+        </p:txBody>
+      </p:sp>
+      <p:sp>
+        <p:nvSpPr>
+          <p:cNvPr id="10" name="meter-description">
+            <a:extLst xmlns:a="http://schemas.openxmlformats.org/drawingml/2006/main">
+              <a:ext uri="{FF2B5EF4-FFF2-40B4-BE49-F238E27FC236}">
+                <a16:creationId xmlns:a16="http://schemas.microsoft.com/office/drawing/2014/main" id="{37D72907-B7EC-413D-B86B-21E301264DAA}"/>
+              </a:ext>
+            </a:extLst>
+          </p:cNvPr>
+          <p:cNvSpPr>
+            <a:spLocks xmlns:a="http://schemas.openxmlformats.org/drawingml/2006/main" noGrp="1"/>
+          </p:cNvSpPr>
+          <p:nvPr/>
+        </p:nvSpPr>
+        <p:spPr>
+          <a:xfrm xmlns:a="http://schemas.openxmlformats.org/drawingml/2006/main">
+            <a:off x="5219700" y="5172075"/>
+            <a:ext cx="6362700" cy="400050"/>
+          </a:xfrm>
+          <a:prstGeom xmlns:a="http://schemas.openxmlformats.org/drawingml/2006/main" prst="rect">
+            <a:avLst/>
+          </a:prstGeom>
+          <a:noFill xmlns:a="http://schemas.openxmlformats.org/drawingml/2006/main"/>
+          <a:ln xmlns:a="http://schemas.openxmlformats.org/drawingml/2006/main" w="0">
+            <a:noFill/>
+          </a:ln>
+        </p:spPr>
+        <p:txBody>
+          <a:bodyPr xmlns:a="http://schemas.openxmlformats.org/drawingml/2006/main"/>
+          <a:lstStyle xmlns:a="http://schemas.openxmlformats.org/drawingml/2006/main">
+            <a:defPPr>
+              <a:defRPr sz="2025" b="0">
+                <a:solidFill>
+                  <a:srgbClr val="182D45"/>
+                </a:solidFill>
+                <a:latin typeface="Arial"/>
+                <a:ea typeface="Arial"/>
+                <a:cs typeface="Arial"/>
+              </a:defRPr>
+            </a:defPPr>
+            <a:lvl1pPr>
+              <a:defRPr sz="2025" b="0">
+                <a:solidFill>
+                  <a:srgbClr val="182D45"/>
+                </a:solidFill>
+                <a:latin typeface="Arial"/>
+                <a:ea typeface="Arial"/>
+                <a:cs typeface="Arial"/>
+              </a:defRPr>
+            </a:lvl1pPr>
+            <a:lvl2pPr>
+              <a:defRPr sz="2025" b="0">
+                <a:solidFill>
+                  <a:srgbClr val="182D45"/>
+                </a:solidFill>
+                <a:latin typeface="Arial"/>
+                <a:ea typeface="Arial"/>
+                <a:cs typeface="Arial"/>
+              </a:defRPr>
+            </a:lvl2pPr>
+            <a:lvl3pPr>
+              <a:defRPr sz="2025" b="0">
+                <a:solidFill>
+                  <a:srgbClr val="182D45"/>
+                </a:solidFill>
+                <a:latin typeface="Arial"/>
+                <a:ea typeface="Arial"/>
+                <a:cs typeface="Arial"/>
+              </a:defRPr>
+            </a:lvl3pPr>
+            <a:lvl4pPr>
+              <a:defRPr sz="2025" b="0">
+                <a:solidFill>
+                  <a:srgbClr val="182D45"/>
+                </a:solidFill>
+                <a:latin typeface="Arial"/>
+                <a:ea typeface="Arial"/>
+                <a:cs typeface="Arial"/>
+              </a:defRPr>
+            </a:lvl4pPr>
+            <a:lvl5pPr>
+              <a:defRPr sz="2025" b="0">
+                <a:solidFill>
+                  <a:srgbClr val="182D45"/>
+                </a:solidFill>
+                <a:latin typeface="Arial"/>
+                <a:ea typeface="Arial"/>
+                <a:cs typeface="Arial"/>
+              </a:defRPr>
+            </a:lvl5pPr>
+            <a:lvl6pPr>
+              <a:defRPr sz="2025" b="0">
+                <a:solidFill>
+                  <a:srgbClr val="182D45"/>
+                </a:solidFill>
+                <a:latin typeface="Arial"/>
+                <a:ea typeface="Arial"/>
+                <a:cs typeface="Arial"/>
+              </a:defRPr>
+            </a:lvl6pPr>
+            <a:lvl7pPr>
+              <a:defRPr sz="2025" b="0">
+                <a:solidFill>
+                  <a:srgbClr val="182D45"/>
+                </a:solidFill>
+                <a:latin typeface="Arial"/>
+                <a:ea typeface="Arial"/>
+                <a:cs typeface="Arial"/>
+              </a:defRPr>
+            </a:lvl7pPr>
+            <a:lvl8pPr>
+              <a:defRPr sz="2025" b="0">
+                <a:solidFill>
+                  <a:srgbClr val="182D45"/>
+                </a:solidFill>
+                <a:latin typeface="Arial"/>
+                <a:ea typeface="Arial"/>
+                <a:cs typeface="Arial"/>
+              </a:defRPr>
+            </a:lvl8pPr>
+            <a:lvl9pPr>
+              <a:defRPr sz="2025" b="0">
+                <a:solidFill>
+                  <a:srgbClr val="182D45"/>
+                </a:solidFill>
+                <a:latin typeface="Arial"/>
+                <a:ea typeface="Arial"/>
+                <a:cs typeface="Arial"/>
+              </a:defRPr>
+            </a:lvl9pPr>
+          </a:lstStyle>
+          <a:p xmlns:a="http://schemas.openxmlformats.org/drawingml/2006/main">
+            <a:pPr>
+              <a:defRPr sz="2025" b="0">
+                <a:solidFill>
+                  <a:srgbClr val="182D45"/>
+                </a:solidFill>
+                <a:latin typeface="Arial"/>
+                <a:ea typeface="Arial"/>
+                <a:cs typeface="Arial"/>
+              </a:defRPr>
+            </a:pPr>
+            <a:r>
+              <a:rPr sz="2025" b="0">
+                <a:solidFill>
+                  <a:srgbClr val="182D45"/>
+                </a:solidFill>
+                <a:latin typeface="Arial"/>
+                <a:ea typeface="Arial"/>
+                <a:cs typeface="Arial"/>
+              </a:rPr>
+              <a:t>Перевірка контактів COM–NO та COM–NC</a:t>
+            </a:r>
+          </a:p>
+        </p:txBody>
+      </p:sp>
+      <p:sp>
+        <p:nvSpPr>
+          <p:cNvPr id="11" name="photo-caption">
+            <a:extLst xmlns:a="http://schemas.openxmlformats.org/drawingml/2006/main">
+              <a:ext uri="{FF2B5EF4-FFF2-40B4-BE49-F238E27FC236}">
+                <a16:creationId xmlns:a16="http://schemas.microsoft.com/office/drawing/2014/main" id="{A5BA7A16-B6DD-4E6B-A1A2-FA2DEAE8C723}"/>
+              </a:ext>
+            </a:extLst>
+          </p:cNvPr>
+          <p:cNvSpPr>
+            <a:spLocks xmlns:a="http://schemas.openxmlformats.org/drawingml/2006/main" noGrp="1"/>
+          </p:cNvSpPr>
+          <p:nvPr/>
+        </p:nvSpPr>
+        <p:spPr>
+          <a:xfrm xmlns:a="http://schemas.openxmlformats.org/drawingml/2006/main">
+            <a:off x="5219700" y="5772150"/>
+            <a:ext cx="6362700" cy="552450"/>
+          </a:xfrm>
+          <a:prstGeom xmlns:a="http://schemas.openxmlformats.org/drawingml/2006/main" prst="rect">
+            <a:avLst/>
+          </a:prstGeom>
+          <a:noFill xmlns:a="http://schemas.openxmlformats.org/drawingml/2006/main"/>
+          <a:ln xmlns:a="http://schemas.openxmlformats.org/drawingml/2006/main" w="0">
+            <a:noFill/>
+          </a:ln>
+        </p:spPr>
+        <p:txBody>
+          <a:bodyPr xmlns:a="http://schemas.openxmlformats.org/drawingml/2006/main"/>
+          <a:lstStyle xmlns:a="http://schemas.openxmlformats.org/drawingml/2006/main">
+            <a:defPPr>
+              <a:defRPr sz="1650" b="0">
+                <a:solidFill>
+                  <a:srgbClr val="566A80"/>
+                </a:solidFill>
+                <a:latin typeface="Arial"/>
+                <a:ea typeface="Arial"/>
+                <a:cs typeface="Arial"/>
+              </a:defRPr>
+            </a:defPPr>
+            <a:lvl1pPr>
+              <a:defRPr sz="1650" b="0">
+                <a:solidFill>
+                  <a:srgbClr val="566A80"/>
+                </a:solidFill>
+                <a:latin typeface="Arial"/>
+                <a:ea typeface="Arial"/>
+                <a:cs typeface="Arial"/>
+              </a:defRPr>
+            </a:lvl1pPr>
+            <a:lvl2pPr>
+              <a:defRPr sz="1650" b="0">
+                <a:solidFill>
+                  <a:srgbClr val="566A80"/>
+                </a:solidFill>
+                <a:latin typeface="Arial"/>
+                <a:ea typeface="Arial"/>
+                <a:cs typeface="Arial"/>
+              </a:defRPr>
+            </a:lvl2pPr>
+            <a:lvl3pPr>
+              <a:defRPr sz="1650" b="0">
+                <a:solidFill>
+                  <a:srgbClr val="566A80"/>
+                </a:solidFill>
+                <a:latin typeface="Arial"/>
+                <a:ea typeface="Arial"/>
+                <a:cs typeface="Arial"/>
+              </a:defRPr>
+            </a:lvl3pPr>
+            <a:lvl4pPr>
+              <a:defRPr sz="1650" b="0">
+                <a:solidFill>
+                  <a:srgbClr val="566A80"/>
+                </a:solidFill>
+                <a:latin typeface="Arial"/>
+                <a:ea typeface="Arial"/>
+                <a:cs typeface="Arial"/>
+              </a:defRPr>
+            </a:lvl4pPr>
+            <a:lvl5pPr>
+              <a:defRPr sz="1650" b="0">
+                <a:solidFill>
+                  <a:srgbClr val="566A80"/>
+                </a:solidFill>
+                <a:latin typeface="Arial"/>
+                <a:ea typeface="Arial"/>
+                <a:cs typeface="Arial"/>
+              </a:defRPr>
+            </a:lvl5pPr>
+            <a:lvl6pPr>
+              <a:defRPr sz="1650" b="0">
+                <a:solidFill>
+                  <a:srgbClr val="566A80"/>
+                </a:solidFill>
+                <a:latin typeface="Arial"/>
+                <a:ea typeface="Arial"/>
+                <a:cs typeface="Arial"/>
+              </a:defRPr>
+            </a:lvl6pPr>
+            <a:lvl7pPr>
+              <a:defRPr sz="1650" b="0">
+                <a:solidFill>
+                  <a:srgbClr val="566A80"/>
+                </a:solidFill>
+                <a:latin typeface="Arial"/>
+                <a:ea typeface="Arial"/>
+                <a:cs typeface="Arial"/>
+              </a:defRPr>
+            </a:lvl7pPr>
+            <a:lvl8pPr>
+              <a:defRPr sz="1650" b="0">
+                <a:solidFill>
+                  <a:srgbClr val="566A80"/>
+                </a:solidFill>
+                <a:latin typeface="Arial"/>
+                <a:ea typeface="Arial"/>
+                <a:cs typeface="Arial"/>
+              </a:defRPr>
+            </a:lvl8pPr>
+            <a:lvl9pPr>
+              <a:defRPr sz="1650" b="0">
+                <a:solidFill>
+                  <a:srgbClr val="566A80"/>
+                </a:solidFill>
+                <a:latin typeface="Arial"/>
+                <a:ea typeface="Arial"/>
+                <a:cs typeface="Arial"/>
+              </a:defRPr>
+            </a:lvl9pPr>
+          </a:lstStyle>
+          <a:p xmlns:a="http://schemas.openxmlformats.org/drawingml/2006/main">
+            <a:pPr>
+              <a:defRPr sz="1650" b="0">
+                <a:solidFill>
+                  <a:srgbClr val="566A80"/>
+                </a:solidFill>
+                <a:latin typeface="Arial"/>
+                <a:ea typeface="Arial"/>
+                <a:cs typeface="Arial"/>
+              </a:defRPr>
+            </a:pPr>
+            <a:r>
+              <a:rPr sz="1650" b="0">
+                <a:solidFill>
+                  <a:srgbClr val="566A80"/>
+                </a:solidFill>
+                <a:latin typeface="Arial"/>
+                <a:ea typeface="Arial"/>
+                <a:cs typeface="Arial"/>
+              </a:rPr>
+              <a:t>Фото стенда від 24.10.2026. Результати</a:t>
+            </a:r>
+          </a:p>
+          <a:p xmlns:a="http://schemas.openxmlformats.org/drawingml/2006/main">
+            <a:pPr>
+              <a:defRPr sz="1650" b="0">
+                <a:solidFill>
+                  <a:srgbClr val="566A80"/>
+                </a:solidFill>
+                <a:latin typeface="Arial"/>
+                <a:ea typeface="Arial"/>
+                <a:cs typeface="Arial"/>
+              </a:defRPr>
+            </a:pPr>
+            <a:r>
+              <a:rPr sz="1650" b="0">
+                <a:solidFill>
+                  <a:srgbClr val="566A80"/>
+                </a:solidFill>
+                <a:latin typeface="Arial"/>
+                <a:ea typeface="Arial"/>
+                <a:cs typeface="Arial"/>
+              </a:rPr>
+              <a:t>фізичних перевірок фіксуються в журналі.</a:t>
+            </a:r>
+          </a:p>
+        </p:txBody>
+      </p:sp>
+      <p:sp>
+        <p:nvSpPr>
+          <p:cNvPr id="12" name="page-number">
+            <a:extLst xmlns:a="http://schemas.openxmlformats.org/drawingml/2006/main">
+              <a:ext uri="{FF2B5EF4-FFF2-40B4-BE49-F238E27FC236}">
+                <a16:creationId xmlns:a16="http://schemas.microsoft.com/office/drawing/2014/main" id="{2FFD87F2-D063-4EC0-916B-2D36E8CACA86}"/>
+              </a:ext>
+            </a:extLst>
+          </p:cNvPr>
+          <p:cNvSpPr>
+            <a:spLocks xmlns:a="http://schemas.openxmlformats.org/drawingml/2006/main" noGrp="1"/>
+          </p:cNvSpPr>
+          <p:nvPr/>
+        </p:nvSpPr>
+        <p:spPr>
+          <a:xfrm xmlns:a="http://schemas.openxmlformats.org/drawingml/2006/main">
+            <a:off x="11220450" y="6438900"/>
+            <a:ext cx="457200" cy="247650"/>
+          </a:xfrm>
+          <a:prstGeom xmlns:a="http://schemas.openxmlformats.org/drawingml/2006/main" prst="rect">
+            <a:avLst/>
+          </a:prstGeom>
+          <a:noFill xmlns:a="http://schemas.openxmlformats.org/drawingml/2006/main"/>
+          <a:ln xmlns:a="http://schemas.openxmlformats.org/drawingml/2006/main" w="0">
+            <a:noFill/>
+          </a:ln>
+        </p:spPr>
+        <p:txBody>
+          <a:bodyPr xmlns:a="http://schemas.openxmlformats.org/drawingml/2006/main"/>
+          <a:lstStyle xmlns:a="http://schemas.openxmlformats.org/drawingml/2006/main">
+            <a:defPPr>
+              <a:defRPr sz="1350" b="0">
+                <a:solidFill>
+                  <a:srgbClr val="566A80"/>
+                </a:solidFill>
+                <a:latin typeface="Arial"/>
+                <a:ea typeface="Arial"/>
+                <a:cs typeface="Arial"/>
+              </a:defRPr>
+            </a:defPPr>
+            <a:lvl1pPr>
+              <a:defRPr sz="1350" b="0">
+                <a:solidFill>
+                  <a:srgbClr val="566A80"/>
+                </a:solidFill>
+                <a:latin typeface="Arial"/>
+                <a:ea typeface="Arial"/>
+                <a:cs typeface="Arial"/>
+              </a:defRPr>
+            </a:lvl1pPr>
+            <a:lvl2pPr>
+              <a:defRPr sz="1350" b="0">
+                <a:solidFill>
+                  <a:srgbClr val="566A80"/>
+                </a:solidFill>
+                <a:latin typeface="Arial"/>
+                <a:ea typeface="Arial"/>
+                <a:cs typeface="Arial"/>
+              </a:defRPr>
+            </a:lvl2pPr>
+            <a:lvl3pPr>
+              <a:defRPr sz="1350" b="0">
+                <a:solidFill>
+                  <a:srgbClr val="566A80"/>
+                </a:solidFill>
+                <a:latin typeface="Arial"/>
+                <a:ea typeface="Arial"/>
+                <a:cs typeface="Arial"/>
+              </a:defRPr>
+            </a:lvl3pPr>
+            <a:lvl4pPr>
+              <a:defRPr sz="1350" b="0">
+                <a:solidFill>
+                  <a:srgbClr val="566A80"/>
+                </a:solidFill>
+                <a:latin typeface="Arial"/>
+                <a:ea typeface="Arial"/>
+                <a:cs typeface="Arial"/>
+              </a:defRPr>
+            </a:lvl4pPr>
+            <a:lvl5pPr>
+              <a:defRPr sz="1350" b="0">
+                <a:solidFill>
+                  <a:srgbClr val="566A80"/>
+                </a:solidFill>
+                <a:latin typeface="Arial"/>
+                <a:ea typeface="Arial"/>
+                <a:cs typeface="Arial"/>
+              </a:defRPr>
+            </a:lvl5pPr>
+            <a:lvl6pPr>
+              <a:defRPr sz="1350" b="0">
+                <a:solidFill>
+                  <a:srgbClr val="566A80"/>
+                </a:solidFill>
+                <a:latin typeface="Arial"/>
+                <a:ea typeface="Arial"/>
+                <a:cs typeface="Arial"/>
+              </a:defRPr>
+            </a:lvl6pPr>
+            <a:lvl7pPr>
+              <a:defRPr sz="1350" b="0">
+                <a:solidFill>
+                  <a:srgbClr val="566A80"/>
+                </a:solidFill>
+                <a:latin typeface="Arial"/>
+                <a:ea typeface="Arial"/>
+                <a:cs typeface="Arial"/>
+              </a:defRPr>
+            </a:lvl7pPr>
+            <a:lvl8pPr>
+              <a:defRPr sz="1350" b="0">
+                <a:solidFill>
+                  <a:srgbClr val="566A80"/>
+                </a:solidFill>
+                <a:latin typeface="Arial"/>
+                <a:ea typeface="Arial"/>
+                <a:cs typeface="Arial"/>
+              </a:defRPr>
+            </a:lvl8pPr>
+            <a:lvl9pPr>
+              <a:defRPr sz="1350" b="0">
+                <a:solidFill>
+                  <a:srgbClr val="566A80"/>
+                </a:solidFill>
+                <a:latin typeface="Arial"/>
+                <a:ea typeface="Arial"/>
+                <a:cs typeface="Arial"/>
+              </a:defRPr>
+            </a:lvl9pPr>
+          </a:lstStyle>
+          <a:p xmlns:a="http://schemas.openxmlformats.org/drawingml/2006/main">
+            <a:pPr>
+              <a:defRPr sz="1350" b="0">
+                <a:solidFill>
+                  <a:srgbClr val="566A80"/>
+                </a:solidFill>
+                <a:latin typeface="Arial"/>
+                <a:ea typeface="Arial"/>
+                <a:cs typeface="Arial"/>
+              </a:defRPr>
+            </a:pPr>
+            <a:r>
+              <a:rPr sz="1350" b="0">
+                <a:solidFill>
+                  <a:srgbClr val="566A80"/>
+                </a:solidFill>
+                <a:latin typeface="Arial"/>
+                <a:ea typeface="Arial"/>
+                <a:cs typeface="Arial"/>
+              </a:rPr>
+              <a:t>05</a:t>
+            </a:r>
+          </a:p>
+        </p:txBody>
+      </p:sp>
+    </p:spTree>
+    <p:extLst>
+      <p:ext uri="{BB962C8B-B14F-4D97-AF65-F5344CB8AC3E}">
+        <p14:creationId xmlns:p14="http://schemas.microsoft.com/office/powerpoint/2010/main" val="1946058966"/>
+      </p:ext>
+    </p:extLst>
+  </p:cSld>
+</p:sld>
+</file>
+
+<file path=ppt/slides/slide6.xml><?xml version="1.0" encoding="utf-8"?>
 <p:sld xmlns:p="http://schemas.openxmlformats.org/presentationml/2006/main">
   <p:cSld>
     <p:bg>
@@ -8587,6 +11919,7 @@
               </a:defRPr>
             </a:defPPr>
             <a:lvl1pPr>
+              <a:buNone/>
               <a:defRPr sz="3300" b="1">
                 <a:solidFill>
                   <a:srgbClr val="182D45"/>
@@ -8597,6 +11930,7 @@
               </a:defRPr>
             </a:lvl1pPr>
             <a:lvl2pPr>
+              <a:buNone/>
               <a:defRPr sz="3300" b="1">
                 <a:solidFill>
                   <a:srgbClr val="182D45"/>
@@ -8607,6 +11941,7 @@
               </a:defRPr>
             </a:lvl2pPr>
             <a:lvl3pPr>
+              <a:buNone/>
               <a:defRPr sz="3300" b="1">
                 <a:solidFill>
                   <a:srgbClr val="182D45"/>
@@ -8617,6 +11952,7 @@
               </a:defRPr>
             </a:lvl3pPr>
             <a:lvl4pPr>
+              <a:buNone/>
               <a:defRPr sz="3300" b="1">
                 <a:solidFill>
                   <a:srgbClr val="182D45"/>
@@ -8627,6 +11963,7 @@
               </a:defRPr>
             </a:lvl4pPr>
             <a:lvl5pPr>
+              <a:buNone/>
               <a:defRPr sz="3300" b="1">
                 <a:solidFill>
                   <a:srgbClr val="182D45"/>
@@ -8637,6 +11974,7 @@
               </a:defRPr>
             </a:lvl5pPr>
             <a:lvl6pPr>
+              <a:buNone/>
               <a:defRPr sz="3300" b="1">
                 <a:solidFill>
                   <a:srgbClr val="182D45"/>
@@ -8647,6 +11985,7 @@
               </a:defRPr>
             </a:lvl6pPr>
             <a:lvl7pPr>
+              <a:buNone/>
               <a:defRPr sz="3300" b="1">
                 <a:solidFill>
                   <a:srgbClr val="182D45"/>
@@ -8657,6 +11996,7 @@
               </a:defRPr>
             </a:lvl7pPr>
             <a:lvl8pPr>
+              <a:buNone/>
               <a:defRPr sz="3300" b="1">
                 <a:solidFill>
                   <a:srgbClr val="182D45"/>
@@ -8667,6 +12007,7 @@
               </a:defRPr>
             </a:lvl8pPr>
             <a:lvl9pPr>
+              <a:buNone/>
               <a:defRPr sz="3300" b="1">
                 <a:solidFill>
                   <a:srgbClr val="182D45"/>
@@ -8679,6 +12020,7 @@
           </a:lstStyle>
           <a:p xmlns:a="http://schemas.openxmlformats.org/drawingml/2006/main">
             <a:pPr>
+              <a:buNone/>
               <a:defRPr sz="3300" b="1">
                 <a:solidFill>
                   <a:srgbClr val="182D45"/>
@@ -8743,6 +12085,7 @@
               </a:defRPr>
             </a:defPPr>
             <a:lvl1pPr>
+              <a:buNone/>
               <a:defRPr sz="1350" b="0">
                 <a:solidFill>
                   <a:srgbClr val="566A80"/>
@@ -8753,6 +12096,7 @@
               </a:defRPr>
             </a:lvl1pPr>
             <a:lvl2pPr>
+              <a:buNone/>
               <a:defRPr sz="1350" b="0">
                 <a:solidFill>
                   <a:srgbClr val="566A80"/>
@@ -8763,6 +12107,7 @@
               </a:defRPr>
             </a:lvl2pPr>
             <a:lvl3pPr>
+              <a:buNone/>
               <a:defRPr sz="1350" b="0">
                 <a:solidFill>
                   <a:srgbClr val="566A80"/>
@@ -8773,6 +12118,7 @@
               </a:defRPr>
             </a:lvl3pPr>
             <a:lvl4pPr>
+              <a:buNone/>
               <a:defRPr sz="1350" b="0">
                 <a:solidFill>
                   <a:srgbClr val="566A80"/>
@@ -8783,6 +12129,7 @@
               </a:defRPr>
             </a:lvl4pPr>
             <a:lvl5pPr>
+              <a:buNone/>
               <a:defRPr sz="1350" b="0">
                 <a:solidFill>
                   <a:srgbClr val="566A80"/>
@@ -8793,6 +12140,7 @@
               </a:defRPr>
             </a:lvl5pPr>
             <a:lvl6pPr>
+              <a:buNone/>
               <a:defRPr sz="1350" b="0">
                 <a:solidFill>
                   <a:srgbClr val="566A80"/>
@@ -8803,6 +12151,7 @@
               </a:defRPr>
             </a:lvl6pPr>
             <a:lvl7pPr>
+              <a:buNone/>
               <a:defRPr sz="1350" b="0">
                 <a:solidFill>
                   <a:srgbClr val="566A80"/>
@@ -8813,6 +12162,7 @@
               </a:defRPr>
             </a:lvl7pPr>
             <a:lvl8pPr>
+              <a:buNone/>
               <a:defRPr sz="1350" b="0">
                 <a:solidFill>
                   <a:srgbClr val="566A80"/>
@@ -8823,6 +12173,7 @@
               </a:defRPr>
             </a:lvl8pPr>
             <a:lvl9pPr>
+              <a:buNone/>
               <a:defRPr sz="1350" b="0">
                 <a:solidFill>
                   <a:srgbClr val="566A80"/>
@@ -8835,6 +12186,7 @@
           </a:lstStyle>
           <a:p xmlns:a="http://schemas.openxmlformats.org/drawingml/2006/main">
             <a:pPr>
+              <a:buNone/>
               <a:defRPr sz="1350" b="0">
                 <a:solidFill>
                   <a:srgbClr val="566A80"/>
@@ -8853,7 +12205,7 @@
                 <a:ea typeface="Arial"/>
                 <a:cs typeface="Arial"/>
               </a:rPr>
-              <a:t>05</a:t>
+              <a:t>06</a:t>
             </a:r>
           </a:p>
         </p:txBody>
@@ -8863,7 +12215,7 @@
           <p:cNvPr id="4" name="">
             <a:extLst xmlns:a="http://schemas.openxmlformats.org/drawingml/2006/main">
               <a:ext uri="{FF2B5EF4-FFF2-40B4-BE49-F238E27FC236}">
-                <a16:creationId xmlns:a16="http://schemas.microsoft.com/office/drawing/2014/main" id="{5035CEBC-C431-41D3-BCD8-965EEE49B6CE}"/>
+                <a16:creationId xmlns:a16="http://schemas.microsoft.com/office/drawing/2014/main" id="{9AF2877B-250F-4D7D-8CE0-598DA2D7D333}"/>
               </a:ext>
             </a:extLst>
           </p:cNvPr>
@@ -9410,6 +12762,7 @@
               </a:defRPr>
             </a:defPPr>
             <a:lvl1pPr>
+              <a:buNone/>
               <a:defRPr sz="2175" b="1">
                 <a:solidFill>
                   <a:srgbClr val="182D45"/>
@@ -9420,6 +12773,7 @@
               </a:defRPr>
             </a:lvl1pPr>
             <a:lvl2pPr>
+              <a:buNone/>
               <a:defRPr sz="2175" b="1">
                 <a:solidFill>
                   <a:srgbClr val="182D45"/>
@@ -9430,6 +12784,7 @@
               </a:defRPr>
             </a:lvl2pPr>
             <a:lvl3pPr>
+              <a:buNone/>
               <a:defRPr sz="2175" b="1">
                 <a:solidFill>
                   <a:srgbClr val="182D45"/>
@@ -9440,6 +12795,7 @@
               </a:defRPr>
             </a:lvl3pPr>
             <a:lvl4pPr>
+              <a:buNone/>
               <a:defRPr sz="2175" b="1">
                 <a:solidFill>
                   <a:srgbClr val="182D45"/>
@@ -9450,6 +12806,7 @@
               </a:defRPr>
             </a:lvl4pPr>
             <a:lvl5pPr>
+              <a:buNone/>
               <a:defRPr sz="2175" b="1">
                 <a:solidFill>
                   <a:srgbClr val="182D45"/>
@@ -9460,6 +12817,7 @@
               </a:defRPr>
             </a:lvl5pPr>
             <a:lvl6pPr>
+              <a:buNone/>
               <a:defRPr sz="2175" b="1">
                 <a:solidFill>
                   <a:srgbClr val="182D45"/>
@@ -9470,6 +12828,7 @@
               </a:defRPr>
             </a:lvl6pPr>
             <a:lvl7pPr>
+              <a:buNone/>
               <a:defRPr sz="2175" b="1">
                 <a:solidFill>
                   <a:srgbClr val="182D45"/>
@@ -9480,6 +12839,7 @@
               </a:defRPr>
             </a:lvl7pPr>
             <a:lvl8pPr>
+              <a:buNone/>
               <a:defRPr sz="2175" b="1">
                 <a:solidFill>
                   <a:srgbClr val="182D45"/>
@@ -9490,6 +12850,7 @@
               </a:defRPr>
             </a:lvl8pPr>
             <a:lvl9pPr>
+              <a:buNone/>
               <a:defRPr sz="2175" b="1">
                 <a:solidFill>
                   <a:srgbClr val="182D45"/>
@@ -9502,6 +12863,7 @@
           </a:lstStyle>
           <a:p xmlns:a="http://schemas.openxmlformats.org/drawingml/2006/main">
             <a:pPr>
+              <a:buNone/>
               <a:defRPr sz="2175" b="1">
                 <a:solidFill>
                   <a:srgbClr val="182D45"/>
@@ -9566,6 +12928,7 @@
               </a:defRPr>
             </a:defPPr>
             <a:lvl1pPr>
+              <a:buNone/>
               <a:defRPr sz="1950" b="0">
                 <a:solidFill>
                   <a:srgbClr val="566A80"/>
@@ -9576,6 +12939,7 @@
               </a:defRPr>
             </a:lvl1pPr>
             <a:lvl2pPr>
+              <a:buNone/>
               <a:defRPr sz="1950" b="0">
                 <a:solidFill>
                   <a:srgbClr val="566A80"/>
@@ -9586,6 +12950,7 @@
               </a:defRPr>
             </a:lvl2pPr>
             <a:lvl3pPr>
+              <a:buNone/>
               <a:defRPr sz="1950" b="0">
                 <a:solidFill>
                   <a:srgbClr val="566A80"/>
@@ -9596,6 +12961,7 @@
               </a:defRPr>
             </a:lvl3pPr>
             <a:lvl4pPr>
+              <a:buNone/>
               <a:defRPr sz="1950" b="0">
                 <a:solidFill>
                   <a:srgbClr val="566A80"/>
@@ -9606,6 +12972,7 @@
               </a:defRPr>
             </a:lvl4pPr>
             <a:lvl5pPr>
+              <a:buNone/>
               <a:defRPr sz="1950" b="0">
                 <a:solidFill>
                   <a:srgbClr val="566A80"/>
@@ -9616,6 +12983,7 @@
               </a:defRPr>
             </a:lvl5pPr>
             <a:lvl6pPr>
+              <a:buNone/>
               <a:defRPr sz="1950" b="0">
                 <a:solidFill>
                   <a:srgbClr val="566A80"/>
@@ -9626,6 +12994,7 @@
               </a:defRPr>
             </a:lvl6pPr>
             <a:lvl7pPr>
+              <a:buNone/>
               <a:defRPr sz="1950" b="0">
                 <a:solidFill>
                   <a:srgbClr val="566A80"/>
@@ -9636,6 +13005,7 @@
               </a:defRPr>
             </a:lvl7pPr>
             <a:lvl8pPr>
+              <a:buNone/>
               <a:defRPr sz="1950" b="0">
                 <a:solidFill>
                   <a:srgbClr val="566A80"/>
@@ -9646,6 +13016,7 @@
               </a:defRPr>
             </a:lvl8pPr>
             <a:lvl9pPr>
+              <a:buNone/>
               <a:defRPr sz="1950" b="0">
                 <a:solidFill>
                   <a:srgbClr val="566A80"/>
@@ -9658,6 +13029,7 @@
           </a:lstStyle>
           <a:p xmlns:a="http://schemas.openxmlformats.org/drawingml/2006/main">
             <a:pPr>
+              <a:buNone/>
               <a:defRPr sz="1950" b="0">
                 <a:solidFill>
                   <a:srgbClr val="566A80"/>
@@ -9681,6 +13053,7 @@
           </a:p>
           <a:p xmlns:a="http://schemas.openxmlformats.org/drawingml/2006/main">
             <a:pPr>
+              <a:buNone/>
               <a:defRPr sz="1950" b="0">
                 <a:solidFill>
                   <a:srgbClr val="566A80"/>
@@ -9714,7 +13087,7 @@
 </p:sld>
 </file>
 
-<file path=ppt/slides/slide6.xml><?xml version="1.0" encoding="utf-8"?>
+<file path=ppt/slides/slide7.xml><?xml version="1.0" encoding="utf-8"?>
 <p:sld xmlns:p="http://schemas.openxmlformats.org/presentationml/2006/main">
   <p:cSld>
     <p:bg>
@@ -9774,6 +13147,7 @@
               </a:defRPr>
             </a:defPPr>
             <a:lvl1pPr>
+              <a:buNone/>
               <a:defRPr sz="3300" b="1">
                 <a:solidFill>
                   <a:srgbClr val="182D45"/>
@@ -9784,6 +13158,7 @@
               </a:defRPr>
             </a:lvl1pPr>
             <a:lvl2pPr>
+              <a:buNone/>
               <a:defRPr sz="3300" b="1">
                 <a:solidFill>
                   <a:srgbClr val="182D45"/>
@@ -9794,6 +13169,7 @@
               </a:defRPr>
             </a:lvl2pPr>
             <a:lvl3pPr>
+              <a:buNone/>
               <a:defRPr sz="3300" b="1">
                 <a:solidFill>
                   <a:srgbClr val="182D45"/>
@@ -9804,6 +13180,7 @@
               </a:defRPr>
             </a:lvl3pPr>
             <a:lvl4pPr>
+              <a:buNone/>
               <a:defRPr sz="3300" b="1">
                 <a:solidFill>
                   <a:srgbClr val="182D45"/>
@@ -9814,6 +13191,7 @@
               </a:defRPr>
             </a:lvl4pPr>
             <a:lvl5pPr>
+              <a:buNone/>
               <a:defRPr sz="3300" b="1">
                 <a:solidFill>
                   <a:srgbClr val="182D45"/>
@@ -9824,6 +13202,7 @@
               </a:defRPr>
             </a:lvl5pPr>
             <a:lvl6pPr>
+              <a:buNone/>
               <a:defRPr sz="3300" b="1">
                 <a:solidFill>
                   <a:srgbClr val="182D45"/>
@@ -9834,6 +13213,7 @@
               </a:defRPr>
             </a:lvl6pPr>
             <a:lvl7pPr>
+              <a:buNone/>
               <a:defRPr sz="3300" b="1">
                 <a:solidFill>
                   <a:srgbClr val="182D45"/>
@@ -9844,6 +13224,7 @@
               </a:defRPr>
             </a:lvl7pPr>
             <a:lvl8pPr>
+              <a:buNone/>
               <a:defRPr sz="3300" b="1">
                 <a:solidFill>
                   <a:srgbClr val="182D45"/>
@@ -9854,6 +13235,7 @@
               </a:defRPr>
             </a:lvl8pPr>
             <a:lvl9pPr>
+              <a:buNone/>
               <a:defRPr sz="3300" b="1">
                 <a:solidFill>
                   <a:srgbClr val="182D45"/>
@@ -9866,6 +13248,7 @@
           </a:lstStyle>
           <a:p xmlns:a="http://schemas.openxmlformats.org/drawingml/2006/main">
             <a:pPr>
+              <a:buNone/>
               <a:defRPr sz="3300" b="1">
                 <a:solidFill>
                   <a:srgbClr val="182D45"/>
@@ -9930,6 +13313,7 @@
               </a:defRPr>
             </a:defPPr>
             <a:lvl1pPr>
+              <a:buNone/>
               <a:defRPr sz="1350" b="0">
                 <a:solidFill>
                   <a:srgbClr val="566A80"/>
@@ -9940,6 +13324,7 @@
               </a:defRPr>
             </a:lvl1pPr>
             <a:lvl2pPr>
+              <a:buNone/>
               <a:defRPr sz="1350" b="0">
                 <a:solidFill>
                   <a:srgbClr val="566A80"/>
@@ -9950,6 +13335,7 @@
               </a:defRPr>
             </a:lvl2pPr>
             <a:lvl3pPr>
+              <a:buNone/>
               <a:defRPr sz="1350" b="0">
                 <a:solidFill>
                   <a:srgbClr val="566A80"/>
@@ -9960,6 +13346,7 @@
               </a:defRPr>
             </a:lvl3pPr>
             <a:lvl4pPr>
+              <a:buNone/>
               <a:defRPr sz="1350" b="0">
                 <a:solidFill>
                   <a:srgbClr val="566A80"/>
@@ -9970,6 +13357,7 @@
               </a:defRPr>
             </a:lvl4pPr>
             <a:lvl5pPr>
+              <a:buNone/>
               <a:defRPr sz="1350" b="0">
                 <a:solidFill>
                   <a:srgbClr val="566A80"/>
@@ -9980,6 +13368,7 @@
               </a:defRPr>
             </a:lvl5pPr>
             <a:lvl6pPr>
+              <a:buNone/>
               <a:defRPr sz="1350" b="0">
                 <a:solidFill>
                   <a:srgbClr val="566A80"/>
@@ -9990,6 +13379,7 @@
               </a:defRPr>
             </a:lvl6pPr>
             <a:lvl7pPr>
+              <a:buNone/>
               <a:defRPr sz="1350" b="0">
                 <a:solidFill>
                   <a:srgbClr val="566A80"/>
@@ -10000,6 +13390,7 @@
               </a:defRPr>
             </a:lvl7pPr>
             <a:lvl8pPr>
+              <a:buNone/>
               <a:defRPr sz="1350" b="0">
                 <a:solidFill>
                   <a:srgbClr val="566A80"/>
@@ -10010,6 +13401,7 @@
               </a:defRPr>
             </a:lvl8pPr>
             <a:lvl9pPr>
+              <a:buNone/>
               <a:defRPr sz="1350" b="0">
                 <a:solidFill>
                   <a:srgbClr val="566A80"/>
@@ -10022,6 +13414,7 @@
           </a:lstStyle>
           <a:p xmlns:a="http://schemas.openxmlformats.org/drawingml/2006/main">
             <a:pPr>
+              <a:buNone/>
               <a:defRPr sz="1350" b="0">
                 <a:solidFill>
                   <a:srgbClr val="566A80"/>
@@ -10040,7 +13433,7 @@
                 <a:ea typeface="Arial"/>
                 <a:cs typeface="Arial"/>
               </a:rPr>
-              <a:t>06</a:t>
+              <a:t>07</a:t>
             </a:r>
           </a:p>
         </p:txBody>
@@ -10050,7 +13443,7 @@
           <p:cNvPr id="4" name="">
             <a:extLst xmlns:a="http://schemas.openxmlformats.org/drawingml/2006/main">
               <a:ext uri="{FF2B5EF4-FFF2-40B4-BE49-F238E27FC236}">
-                <a16:creationId xmlns:a16="http://schemas.microsoft.com/office/drawing/2014/main" id="{3ABCD297-A369-45D4-B2DD-1A7BC2834A22}"/>
+                <a16:creationId xmlns:a16="http://schemas.microsoft.com/office/drawing/2014/main" id="{CAB24C05-287E-41AC-A2B1-C4AE15ED731D}"/>
               </a:ext>
             </a:extLst>
           </p:cNvPr>
@@ -10711,6 +14104,7 @@
               </a:defRPr>
             </a:defPPr>
             <a:lvl1pPr>
+              <a:buNone/>
               <a:defRPr sz="2550" b="1">
                 <a:solidFill>
                   <a:srgbClr val="087F8C"/>
@@ -10721,6 +14115,7 @@
               </a:defRPr>
             </a:lvl1pPr>
             <a:lvl2pPr>
+              <a:buNone/>
               <a:defRPr sz="2550" b="1">
                 <a:solidFill>
                   <a:srgbClr val="087F8C"/>
@@ -10731,6 +14126,7 @@
               </a:defRPr>
             </a:lvl2pPr>
             <a:lvl3pPr>
+              <a:buNone/>
               <a:defRPr sz="2550" b="1">
                 <a:solidFill>
                   <a:srgbClr val="087F8C"/>
@@ -10741,6 +14137,7 @@
               </a:defRPr>
             </a:lvl3pPr>
             <a:lvl4pPr>
+              <a:buNone/>
               <a:defRPr sz="2550" b="1">
                 <a:solidFill>
                   <a:srgbClr val="087F8C"/>
@@ -10751,6 +14148,7 @@
               </a:defRPr>
             </a:lvl4pPr>
             <a:lvl5pPr>
+              <a:buNone/>
               <a:defRPr sz="2550" b="1">
                 <a:solidFill>
                   <a:srgbClr val="087F8C"/>
@@ -10761,6 +14159,7 @@
               </a:defRPr>
             </a:lvl5pPr>
             <a:lvl6pPr>
+              <a:buNone/>
               <a:defRPr sz="2550" b="1">
                 <a:solidFill>
                   <a:srgbClr val="087F8C"/>
@@ -10771,6 +14170,7 @@
               </a:defRPr>
             </a:lvl6pPr>
             <a:lvl7pPr>
+              <a:buNone/>
               <a:defRPr sz="2550" b="1">
                 <a:solidFill>
                   <a:srgbClr val="087F8C"/>
@@ -10781,6 +14181,7 @@
               </a:defRPr>
             </a:lvl7pPr>
             <a:lvl8pPr>
+              <a:buNone/>
               <a:defRPr sz="2550" b="1">
                 <a:solidFill>
                   <a:srgbClr val="087F8C"/>
@@ -10791,6 +14192,7 @@
               </a:defRPr>
             </a:lvl8pPr>
             <a:lvl9pPr>
+              <a:buNone/>
               <a:defRPr sz="2550" b="1">
                 <a:solidFill>
                   <a:srgbClr val="087F8C"/>
@@ -10803,6 +14205,7 @@
           </a:lstStyle>
           <a:p xmlns:a="http://schemas.openxmlformats.org/drawingml/2006/main">
             <a:pPr>
+              <a:buNone/>
               <a:defRPr sz="2550" b="1">
                 <a:solidFill>
                   <a:srgbClr val="087F8C"/>
@@ -10867,6 +14270,7 @@
               </a:defRPr>
             </a:defPPr>
             <a:lvl1pPr>
+              <a:buNone/>
               <a:defRPr sz="1950" b="0">
                 <a:solidFill>
                   <a:srgbClr val="566A80"/>
@@ -10877,6 +14281,7 @@
               </a:defRPr>
             </a:lvl1pPr>
             <a:lvl2pPr>
+              <a:buNone/>
               <a:defRPr sz="1950" b="0">
                 <a:solidFill>
                   <a:srgbClr val="566A80"/>
@@ -10887,6 +14292,7 @@
               </a:defRPr>
             </a:lvl2pPr>
             <a:lvl3pPr>
+              <a:buNone/>
               <a:defRPr sz="1950" b="0">
                 <a:solidFill>
                   <a:srgbClr val="566A80"/>
@@ -10897,6 +14303,7 @@
               </a:defRPr>
             </a:lvl3pPr>
             <a:lvl4pPr>
+              <a:buNone/>
               <a:defRPr sz="1950" b="0">
                 <a:solidFill>
                   <a:srgbClr val="566A80"/>
@@ -10907,6 +14314,7 @@
               </a:defRPr>
             </a:lvl4pPr>
             <a:lvl5pPr>
+              <a:buNone/>
               <a:defRPr sz="1950" b="0">
                 <a:solidFill>
                   <a:srgbClr val="566A80"/>
@@ -10917,6 +14325,7 @@
               </a:defRPr>
             </a:lvl5pPr>
             <a:lvl6pPr>
+              <a:buNone/>
               <a:defRPr sz="1950" b="0">
                 <a:solidFill>
                   <a:srgbClr val="566A80"/>
@@ -10927,6 +14336,7 @@
               </a:defRPr>
             </a:lvl6pPr>
             <a:lvl7pPr>
+              <a:buNone/>
               <a:defRPr sz="1950" b="0">
                 <a:solidFill>
                   <a:srgbClr val="566A80"/>
@@ -10937,6 +14347,7 @@
               </a:defRPr>
             </a:lvl7pPr>
             <a:lvl8pPr>
+              <a:buNone/>
               <a:defRPr sz="1950" b="0">
                 <a:solidFill>
                   <a:srgbClr val="566A80"/>
@@ -10947,6 +14358,7 @@
               </a:defRPr>
             </a:lvl8pPr>
             <a:lvl9pPr>
+              <a:buNone/>
               <a:defRPr sz="1950" b="0">
                 <a:solidFill>
                   <a:srgbClr val="566A80"/>
@@ -10959,6 +14371,7 @@
           </a:lstStyle>
           <a:p xmlns:a="http://schemas.openxmlformats.org/drawingml/2006/main">
             <a:pPr>
+              <a:buNone/>
               <a:defRPr sz="1950" b="0">
                 <a:solidFill>
                   <a:srgbClr val="566A80"/>
@@ -10982,6 +14395,7 @@
           </a:p>
           <a:p xmlns:a="http://schemas.openxmlformats.org/drawingml/2006/main">
             <a:pPr>
+              <a:buNone/>
               <a:defRPr sz="1950" b="0">
                 <a:solidFill>
                   <a:srgbClr val="566A80"/>
@@ -11015,7 +14429,7 @@
 </p:sld>
 </file>
 
-<file path=ppt/slides/slide7.xml><?xml version="1.0" encoding="utf-8"?>
+<file path=ppt/slides/slide8.xml><?xml version="1.0" encoding="utf-8"?>
 <p:sld xmlns:p="http://schemas.openxmlformats.org/presentationml/2006/main">
   <p:cSld>
     <p:bg>
@@ -11075,6 +14489,7 @@
               </a:defRPr>
             </a:defPPr>
             <a:lvl1pPr>
+              <a:buNone/>
               <a:defRPr sz="3300" b="1">
                 <a:solidFill>
                   <a:srgbClr val="182D45"/>
@@ -11085,6 +14500,7 @@
               </a:defRPr>
             </a:lvl1pPr>
             <a:lvl2pPr>
+              <a:buNone/>
               <a:defRPr sz="3300" b="1">
                 <a:solidFill>
                   <a:srgbClr val="182D45"/>
@@ -11095,6 +14511,7 @@
               </a:defRPr>
             </a:lvl2pPr>
             <a:lvl3pPr>
+              <a:buNone/>
               <a:defRPr sz="3300" b="1">
                 <a:solidFill>
                   <a:srgbClr val="182D45"/>
@@ -11105,6 +14522,7 @@
               </a:defRPr>
             </a:lvl3pPr>
             <a:lvl4pPr>
+              <a:buNone/>
               <a:defRPr sz="3300" b="1">
                 <a:solidFill>
                   <a:srgbClr val="182D45"/>
@@ -11115,6 +14533,7 @@
               </a:defRPr>
             </a:lvl4pPr>
             <a:lvl5pPr>
+              <a:buNone/>
               <a:defRPr sz="3300" b="1">
                 <a:solidFill>
                   <a:srgbClr val="182D45"/>
@@ -11125,6 +14544,7 @@
               </a:defRPr>
             </a:lvl5pPr>
             <a:lvl6pPr>
+              <a:buNone/>
               <a:defRPr sz="3300" b="1">
                 <a:solidFill>
                   <a:srgbClr val="182D45"/>
@@ -11135,6 +14555,7 @@
               </a:defRPr>
             </a:lvl6pPr>
             <a:lvl7pPr>
+              <a:buNone/>
               <a:defRPr sz="3300" b="1">
                 <a:solidFill>
                   <a:srgbClr val="182D45"/>
@@ -11145,6 +14566,7 @@
               </a:defRPr>
             </a:lvl7pPr>
             <a:lvl8pPr>
+              <a:buNone/>
               <a:defRPr sz="3300" b="1">
                 <a:solidFill>
                   <a:srgbClr val="182D45"/>
@@ -11155,6 +14577,7 @@
               </a:defRPr>
             </a:lvl8pPr>
             <a:lvl9pPr>
+              <a:buNone/>
               <a:defRPr sz="3300" b="1">
                 <a:solidFill>
                   <a:srgbClr val="182D45"/>
@@ -11167,6 +14590,7 @@
           </a:lstStyle>
           <a:p xmlns:a="http://schemas.openxmlformats.org/drawingml/2006/main">
             <a:pPr>
+              <a:buNone/>
               <a:defRPr sz="3300" b="1">
                 <a:solidFill>
                   <a:srgbClr val="182D45"/>
@@ -11231,6 +14655,7 @@
               </a:defRPr>
             </a:defPPr>
             <a:lvl1pPr>
+              <a:buNone/>
               <a:defRPr sz="1350" b="0">
                 <a:solidFill>
                   <a:srgbClr val="566A80"/>
@@ -11241,6 +14666,7 @@
               </a:defRPr>
             </a:lvl1pPr>
             <a:lvl2pPr>
+              <a:buNone/>
               <a:defRPr sz="1350" b="0">
                 <a:solidFill>
                   <a:srgbClr val="566A80"/>
@@ -11251,6 +14677,7 @@
               </a:defRPr>
             </a:lvl2pPr>
             <a:lvl3pPr>
+              <a:buNone/>
               <a:defRPr sz="1350" b="0">
                 <a:solidFill>
                   <a:srgbClr val="566A80"/>
@@ -11261,6 +14688,7 @@
               </a:defRPr>
             </a:lvl3pPr>
             <a:lvl4pPr>
+              <a:buNone/>
               <a:defRPr sz="1350" b="0">
                 <a:solidFill>
                   <a:srgbClr val="566A80"/>
@@ -11271,6 +14699,7 @@
               </a:defRPr>
             </a:lvl4pPr>
             <a:lvl5pPr>
+              <a:buNone/>
               <a:defRPr sz="1350" b="0">
                 <a:solidFill>
                   <a:srgbClr val="566A80"/>
@@ -11281,6 +14710,7 @@
               </a:defRPr>
             </a:lvl5pPr>
             <a:lvl6pPr>
+              <a:buNone/>
               <a:defRPr sz="1350" b="0">
                 <a:solidFill>
                   <a:srgbClr val="566A80"/>
@@ -11291,6 +14721,7 @@
               </a:defRPr>
             </a:lvl6pPr>
             <a:lvl7pPr>
+              <a:buNone/>
               <a:defRPr sz="1350" b="0">
                 <a:solidFill>
                   <a:srgbClr val="566A80"/>
@@ -11301,6 +14732,7 @@
               </a:defRPr>
             </a:lvl7pPr>
             <a:lvl8pPr>
+              <a:buNone/>
               <a:defRPr sz="1350" b="0">
                 <a:solidFill>
                   <a:srgbClr val="566A80"/>
@@ -11311,6 +14743,7 @@
               </a:defRPr>
             </a:lvl8pPr>
             <a:lvl9pPr>
+              <a:buNone/>
               <a:defRPr sz="1350" b="0">
                 <a:solidFill>
                   <a:srgbClr val="566A80"/>
@@ -11323,6 +14756,7 @@
           </a:lstStyle>
           <a:p xmlns:a="http://schemas.openxmlformats.org/drawingml/2006/main">
             <a:pPr>
+              <a:buNone/>
               <a:defRPr sz="1350" b="0">
                 <a:solidFill>
                   <a:srgbClr val="566A80"/>
@@ -11341,7 +14775,7 @@
                 <a:ea typeface="Arial"/>
                 <a:cs typeface="Arial"/>
               </a:rPr>
-              <a:t>07</a:t>
+              <a:t>08</a:t>
             </a:r>
           </a:p>
         </p:txBody>
@@ -11351,7 +14785,7 @@
           <p:cNvPr id="4" name="">
             <a:extLst xmlns:a="http://schemas.openxmlformats.org/drawingml/2006/main">
               <a:ext uri="{FF2B5EF4-FFF2-40B4-BE49-F238E27FC236}">
-                <a16:creationId xmlns:a16="http://schemas.microsoft.com/office/drawing/2014/main" id="{67777EE0-77D9-47D7-9AFC-955CCEBEEB08}"/>
+                <a16:creationId xmlns:a16="http://schemas.microsoft.com/office/drawing/2014/main" id="{1C4E020B-F359-4082-827F-093CC4D2A076}"/>
               </a:ext>
             </a:extLst>
           </p:cNvPr>
@@ -12505,6 +15939,7 @@
               </a:defRPr>
             </a:defPPr>
             <a:lvl1pPr>
+              <a:buNone/>
               <a:defRPr sz="1875" b="0">
                 <a:solidFill>
                   <a:srgbClr val="566A80"/>
@@ -12515,6 +15950,7 @@
               </a:defRPr>
             </a:lvl1pPr>
             <a:lvl2pPr>
+              <a:buNone/>
               <a:defRPr sz="1875" b="0">
                 <a:solidFill>
                   <a:srgbClr val="566A80"/>
@@ -12525,6 +15961,7 @@
               </a:defRPr>
             </a:lvl2pPr>
             <a:lvl3pPr>
+              <a:buNone/>
               <a:defRPr sz="1875" b="0">
                 <a:solidFill>
                   <a:srgbClr val="566A80"/>
@@ -12535,6 +15972,7 @@
               </a:defRPr>
             </a:lvl3pPr>
             <a:lvl4pPr>
+              <a:buNone/>
               <a:defRPr sz="1875" b="0">
                 <a:solidFill>
                   <a:srgbClr val="566A80"/>
@@ -12545,6 +15983,7 @@
               </a:defRPr>
             </a:lvl4pPr>
             <a:lvl5pPr>
+              <a:buNone/>
               <a:defRPr sz="1875" b="0">
                 <a:solidFill>
                   <a:srgbClr val="566A80"/>
@@ -12555,6 +15994,7 @@
               </a:defRPr>
             </a:lvl5pPr>
             <a:lvl6pPr>
+              <a:buNone/>
               <a:defRPr sz="1875" b="0">
                 <a:solidFill>
                   <a:srgbClr val="566A80"/>
@@ -12565,6 +16005,7 @@
               </a:defRPr>
             </a:lvl6pPr>
             <a:lvl7pPr>
+              <a:buNone/>
               <a:defRPr sz="1875" b="0">
                 <a:solidFill>
                   <a:srgbClr val="566A80"/>
@@ -12575,6 +16016,7 @@
               </a:defRPr>
             </a:lvl7pPr>
             <a:lvl8pPr>
+              <a:buNone/>
               <a:defRPr sz="1875" b="0">
                 <a:solidFill>
                   <a:srgbClr val="566A80"/>
@@ -12585,6 +16027,7 @@
               </a:defRPr>
             </a:lvl8pPr>
             <a:lvl9pPr>
+              <a:buNone/>
               <a:defRPr sz="1875" b="0">
                 <a:solidFill>
                   <a:srgbClr val="566A80"/>
@@ -12597,6 +16040,7 @@
           </a:lstStyle>
           <a:p xmlns:a="http://schemas.openxmlformats.org/drawingml/2006/main">
             <a:pPr>
+              <a:buNone/>
               <a:defRPr sz="1875" b="0">
                 <a:solidFill>
                   <a:srgbClr val="566A80"/>
@@ -12630,7 +16074,7 @@
 </p:sld>
 </file>
 
-<file path=ppt/slides/slide8.xml><?xml version="1.0" encoding="utf-8"?>
+<file path=ppt/slides/slide9.xml><?xml version="1.0" encoding="utf-8"?>
 <p:sld xmlns:p="http://schemas.openxmlformats.org/presentationml/2006/main">
   <p:cSld>
     <p:bg>
@@ -12690,6 +16134,7 @@
               </a:defRPr>
             </a:defPPr>
             <a:lvl1pPr>
+              <a:buNone/>
               <a:defRPr sz="3300" b="1">
                 <a:solidFill>
                   <a:srgbClr val="182D45"/>
@@ -12700,6 +16145,7 @@
               </a:defRPr>
             </a:lvl1pPr>
             <a:lvl2pPr>
+              <a:buNone/>
               <a:defRPr sz="3300" b="1">
                 <a:solidFill>
                   <a:srgbClr val="182D45"/>
@@ -12710,6 +16156,7 @@
               </a:defRPr>
             </a:lvl2pPr>
             <a:lvl3pPr>
+              <a:buNone/>
               <a:defRPr sz="3300" b="1">
                 <a:solidFill>
                   <a:srgbClr val="182D45"/>
@@ -12720,6 +16167,7 @@
               </a:defRPr>
             </a:lvl3pPr>
             <a:lvl4pPr>
+              <a:buNone/>
               <a:defRPr sz="3300" b="1">
                 <a:solidFill>
                   <a:srgbClr val="182D45"/>
@@ -12730,6 +16178,7 @@
               </a:defRPr>
             </a:lvl4pPr>
             <a:lvl5pPr>
+              <a:buNone/>
               <a:defRPr sz="3300" b="1">
                 <a:solidFill>
                   <a:srgbClr val="182D45"/>
@@ -12740,6 +16189,7 @@
               </a:defRPr>
             </a:lvl5pPr>
             <a:lvl6pPr>
+              <a:buNone/>
               <a:defRPr sz="3300" b="1">
                 <a:solidFill>
                   <a:srgbClr val="182D45"/>
@@ -12750,6 +16200,7 @@
               </a:defRPr>
             </a:lvl6pPr>
             <a:lvl7pPr>
+              <a:buNone/>
               <a:defRPr sz="3300" b="1">
                 <a:solidFill>
                   <a:srgbClr val="182D45"/>
@@ -12760,6 +16211,7 @@
               </a:defRPr>
             </a:lvl7pPr>
             <a:lvl8pPr>
+              <a:buNone/>
               <a:defRPr sz="3300" b="1">
                 <a:solidFill>
                   <a:srgbClr val="182D45"/>
@@ -12770,6 +16222,7 @@
               </a:defRPr>
             </a:lvl8pPr>
             <a:lvl9pPr>
+              <a:buNone/>
               <a:defRPr sz="3300" b="1">
                 <a:solidFill>
                   <a:srgbClr val="182D45"/>
@@ -12782,6 +16235,7 @@
           </a:lstStyle>
           <a:p xmlns:a="http://schemas.openxmlformats.org/drawingml/2006/main">
             <a:pPr>
+              <a:buNone/>
               <a:defRPr sz="3300" b="1">
                 <a:solidFill>
                   <a:srgbClr val="182D45"/>
@@ -12846,6 +16300,7 @@
               </a:defRPr>
             </a:defPPr>
             <a:lvl1pPr>
+              <a:buNone/>
               <a:defRPr sz="1350" b="0">
                 <a:solidFill>
                   <a:srgbClr val="566A80"/>
@@ -12856,6 +16311,7 @@
               </a:defRPr>
             </a:lvl1pPr>
             <a:lvl2pPr>
+              <a:buNone/>
               <a:defRPr sz="1350" b="0">
                 <a:solidFill>
                   <a:srgbClr val="566A80"/>
@@ -12866,6 +16322,7 @@
               </a:defRPr>
             </a:lvl2pPr>
             <a:lvl3pPr>
+              <a:buNone/>
               <a:defRPr sz="1350" b="0">
                 <a:solidFill>
                   <a:srgbClr val="566A80"/>
@@ -12876,6 +16333,7 @@
               </a:defRPr>
             </a:lvl3pPr>
             <a:lvl4pPr>
+              <a:buNone/>
               <a:defRPr sz="1350" b="0">
                 <a:solidFill>
                   <a:srgbClr val="566A80"/>
@@ -12886,6 +16344,7 @@
               </a:defRPr>
             </a:lvl4pPr>
             <a:lvl5pPr>
+              <a:buNone/>
               <a:defRPr sz="1350" b="0">
                 <a:solidFill>
                   <a:srgbClr val="566A80"/>
@@ -12896,6 +16355,7 @@
               </a:defRPr>
             </a:lvl5pPr>
             <a:lvl6pPr>
+              <a:buNone/>
               <a:defRPr sz="1350" b="0">
                 <a:solidFill>
                   <a:srgbClr val="566A80"/>
@@ -12906,6 +16366,7 @@
               </a:defRPr>
             </a:lvl6pPr>
             <a:lvl7pPr>
+              <a:buNone/>
               <a:defRPr sz="1350" b="0">
                 <a:solidFill>
                   <a:srgbClr val="566A80"/>
@@ -12916,6 +16377,7 @@
               </a:defRPr>
             </a:lvl7pPr>
             <a:lvl8pPr>
+              <a:buNone/>
               <a:defRPr sz="1350" b="0">
                 <a:solidFill>
                   <a:srgbClr val="566A80"/>
@@ -12926,6 +16388,7 @@
               </a:defRPr>
             </a:lvl8pPr>
             <a:lvl9pPr>
+              <a:buNone/>
               <a:defRPr sz="1350" b="0">
                 <a:solidFill>
                   <a:srgbClr val="566A80"/>
@@ -12938,6 +16401,7 @@
           </a:lstStyle>
           <a:p xmlns:a="http://schemas.openxmlformats.org/drawingml/2006/main">
             <a:pPr>
+              <a:buNone/>
               <a:defRPr sz="1350" b="0">
                 <a:solidFill>
                   <a:srgbClr val="566A80"/>
@@ -12956,7 +16420,7 @@
                 <a:ea typeface="Arial"/>
                 <a:cs typeface="Arial"/>
               </a:rPr>
-              <a:t>08</a:t>
+              <a:t>09</a:t>
             </a:r>
           </a:p>
         </p:txBody>
@@ -12966,7 +16430,7 @@
           <p:cNvPr id="4" name="">
             <a:extLst xmlns:a="http://schemas.openxmlformats.org/drawingml/2006/main">
               <a:ext uri="{FF2B5EF4-FFF2-40B4-BE49-F238E27FC236}">
-                <a16:creationId xmlns:a16="http://schemas.microsoft.com/office/drawing/2014/main" id="{C324FDE0-20A5-4A86-9B64-AA2BBF13402B}"/>
+                <a16:creationId xmlns:a16="http://schemas.microsoft.com/office/drawing/2014/main" id="{521C8953-6CFF-4227-9D44-D19AABF712FA}"/>
               </a:ext>
             </a:extLst>
           </p:cNvPr>
@@ -12976,7 +16440,7 @@
           <p:nvPr/>
         </p:nvPicPr>
         <p:blipFill>
-          <a:blip xmlns:r="http://schemas.openxmlformats.org/officeDocument/2006/relationships" xmlns:a="http://schemas.openxmlformats.org/drawingml/2006/main" r:embed="R473c1dfaea1e42dc"/>
+          <a:blip xmlns:r="http://schemas.openxmlformats.org/officeDocument/2006/relationships" xmlns:a="http://schemas.openxmlformats.org/drawingml/2006/main" r:embed="Rfe8342c4756d47d6"/>
           <a:stretch xmlns:a="http://schemas.openxmlformats.org/drawingml/2006/main"/>
         </p:blipFill>
         <p:spPr>
@@ -13030,6 +16494,7 @@
               </a:defRPr>
             </a:defPPr>
             <a:lvl1pPr>
+              <a:buNone/>
               <a:defRPr sz="1800" b="1">
                 <a:solidFill>
                   <a:srgbClr val="182D45"/>
@@ -13040,6 +16505,7 @@
               </a:defRPr>
             </a:lvl1pPr>
             <a:lvl2pPr>
+              <a:buNone/>
               <a:defRPr sz="1800" b="1">
                 <a:solidFill>
                   <a:srgbClr val="182D45"/>
@@ -13050,6 +16516,7 @@
               </a:defRPr>
             </a:lvl2pPr>
             <a:lvl3pPr>
+              <a:buNone/>
               <a:defRPr sz="1800" b="1">
                 <a:solidFill>
                   <a:srgbClr val="182D45"/>
@@ -13060,6 +16527,7 @@
               </a:defRPr>
             </a:lvl3pPr>
             <a:lvl4pPr>
+              <a:buNone/>
               <a:defRPr sz="1800" b="1">
                 <a:solidFill>
                   <a:srgbClr val="182D45"/>
@@ -13070,6 +16538,7 @@
               </a:defRPr>
             </a:lvl4pPr>
             <a:lvl5pPr>
+              <a:buNone/>
               <a:defRPr sz="1800" b="1">
                 <a:solidFill>
                   <a:srgbClr val="182D45"/>
@@ -13080,6 +16549,7 @@
               </a:defRPr>
             </a:lvl5pPr>
             <a:lvl6pPr>
+              <a:buNone/>
               <a:defRPr sz="1800" b="1">
                 <a:solidFill>
                   <a:srgbClr val="182D45"/>
@@ -13090,6 +16560,7 @@
               </a:defRPr>
             </a:lvl6pPr>
             <a:lvl7pPr>
+              <a:buNone/>
               <a:defRPr sz="1800" b="1">
                 <a:solidFill>
                   <a:srgbClr val="182D45"/>
@@ -13100,6 +16571,7 @@
               </a:defRPr>
             </a:lvl7pPr>
             <a:lvl8pPr>
+              <a:buNone/>
               <a:defRPr sz="1800" b="1">
                 <a:solidFill>
                   <a:srgbClr val="182D45"/>
@@ -13110,6 +16582,7 @@
               </a:defRPr>
             </a:lvl8pPr>
             <a:lvl9pPr>
+              <a:buNone/>
               <a:defRPr sz="1800" b="1">
                 <a:solidFill>
                   <a:srgbClr val="182D45"/>
@@ -13122,6 +16595,7 @@
           </a:lstStyle>
           <a:p xmlns:a="http://schemas.openxmlformats.org/drawingml/2006/main">
             <a:pPr>
+              <a:buNone/>
               <a:defRPr sz="1800" b="1">
                 <a:solidFill>
                   <a:srgbClr val="182D45"/>
@@ -13186,6 +16660,7 @@
               </a:defRPr>
             </a:defPPr>
             <a:lvl1pPr>
+              <a:buNone/>
               <a:defRPr sz="1800" b="0">
                 <a:solidFill>
                   <a:srgbClr val="182D45"/>
@@ -13196,6 +16671,7 @@
               </a:defRPr>
             </a:lvl1pPr>
             <a:lvl2pPr>
+              <a:buNone/>
               <a:defRPr sz="1800" b="0">
                 <a:solidFill>
                   <a:srgbClr val="182D45"/>
@@ -13206,6 +16682,7 @@
               </a:defRPr>
             </a:lvl2pPr>
             <a:lvl3pPr>
+              <a:buNone/>
               <a:defRPr sz="1800" b="0">
                 <a:solidFill>
                   <a:srgbClr val="182D45"/>
@@ -13216,6 +16693,7 @@
               </a:defRPr>
             </a:lvl3pPr>
             <a:lvl4pPr>
+              <a:buNone/>
               <a:defRPr sz="1800" b="0">
                 <a:solidFill>
                   <a:srgbClr val="182D45"/>
@@ -13226,6 +16704,7 @@
               </a:defRPr>
             </a:lvl4pPr>
             <a:lvl5pPr>
+              <a:buNone/>
               <a:defRPr sz="1800" b="0">
                 <a:solidFill>
                   <a:srgbClr val="182D45"/>
@@ -13236,6 +16715,7 @@
               </a:defRPr>
             </a:lvl5pPr>
             <a:lvl6pPr>
+              <a:buNone/>
               <a:defRPr sz="1800" b="0">
                 <a:solidFill>
                   <a:srgbClr val="182D45"/>
@@ -13246,6 +16726,7 @@
               </a:defRPr>
             </a:lvl6pPr>
             <a:lvl7pPr>
+              <a:buNone/>
               <a:defRPr sz="1800" b="0">
                 <a:solidFill>
                   <a:srgbClr val="182D45"/>
@@ -13256,6 +16737,7 @@
               </a:defRPr>
             </a:lvl7pPr>
             <a:lvl8pPr>
+              <a:buNone/>
               <a:defRPr sz="1800" b="0">
                 <a:solidFill>
                   <a:srgbClr val="182D45"/>
@@ -13266,6 +16748,7 @@
               </a:defRPr>
             </a:lvl8pPr>
             <a:lvl9pPr>
+              <a:buNone/>
               <a:defRPr sz="1800" b="0">
                 <a:solidFill>
                   <a:srgbClr val="182D45"/>
@@ -13278,6 +16761,7 @@
           </a:lstStyle>
           <a:p xmlns:a="http://schemas.openxmlformats.org/drawingml/2006/main">
             <a:pPr>
+              <a:buNone/>
               <a:defRPr sz="1800" b="0">
                 <a:solidFill>
                   <a:srgbClr val="182D45"/>
@@ -13301,6 +16785,7 @@
           </a:p>
           <a:p xmlns:a="http://schemas.openxmlformats.org/drawingml/2006/main">
             <a:pPr>
+              <a:buNone/>
               <a:defRPr sz="1800" b="0">
                 <a:solidFill>
                   <a:srgbClr val="182D45"/>
@@ -13365,6 +16850,7 @@
               </a:defRPr>
             </a:defPPr>
             <a:lvl1pPr>
+              <a:buNone/>
               <a:defRPr sz="1800" b="0">
                 <a:solidFill>
                   <a:srgbClr val="182D45"/>
@@ -13375,6 +16861,7 @@
               </a:defRPr>
             </a:lvl1pPr>
             <a:lvl2pPr>
+              <a:buNone/>
               <a:defRPr sz="1800" b="0">
                 <a:solidFill>
                   <a:srgbClr val="182D45"/>
@@ -13385,6 +16872,7 @@
               </a:defRPr>
             </a:lvl2pPr>
             <a:lvl3pPr>
+              <a:buNone/>
               <a:defRPr sz="1800" b="0">
                 <a:solidFill>
                   <a:srgbClr val="182D45"/>
@@ -13395,6 +16883,7 @@
               </a:defRPr>
             </a:lvl3pPr>
             <a:lvl4pPr>
+              <a:buNone/>
               <a:defRPr sz="1800" b="0">
                 <a:solidFill>
                   <a:srgbClr val="182D45"/>
@@ -13405,6 +16894,7 @@
               </a:defRPr>
             </a:lvl4pPr>
             <a:lvl5pPr>
+              <a:buNone/>
               <a:defRPr sz="1800" b="0">
                 <a:solidFill>
                   <a:srgbClr val="182D45"/>
@@ -13415,6 +16905,7 @@
               </a:defRPr>
             </a:lvl5pPr>
             <a:lvl6pPr>
+              <a:buNone/>
               <a:defRPr sz="1800" b="0">
                 <a:solidFill>
                   <a:srgbClr val="182D45"/>
@@ -13425,6 +16916,7 @@
               </a:defRPr>
             </a:lvl6pPr>
             <a:lvl7pPr>
+              <a:buNone/>
               <a:defRPr sz="1800" b="0">
                 <a:solidFill>
                   <a:srgbClr val="182D45"/>
@@ -13435,6 +16927,7 @@
               </a:defRPr>
             </a:lvl7pPr>
             <a:lvl8pPr>
+              <a:buNone/>
               <a:defRPr sz="1800" b="0">
                 <a:solidFill>
                   <a:srgbClr val="182D45"/>
@@ -13445,6 +16938,7 @@
               </a:defRPr>
             </a:lvl8pPr>
             <a:lvl9pPr>
+              <a:buNone/>
               <a:defRPr sz="1800" b="0">
                 <a:solidFill>
                   <a:srgbClr val="182D45"/>
@@ -13457,6 +16951,7 @@
           </a:lstStyle>
           <a:p xmlns:a="http://schemas.openxmlformats.org/drawingml/2006/main">
             <a:pPr>
+              <a:buNone/>
               <a:defRPr sz="1800" b="0">
                 <a:solidFill>
                   <a:srgbClr val="182D45"/>
@@ -13480,6 +16975,7 @@
           </a:p>
           <a:p xmlns:a="http://schemas.openxmlformats.org/drawingml/2006/main">
             <a:pPr>
+              <a:buNone/>
               <a:defRPr sz="1800" b="0">
                 <a:solidFill>
                   <a:srgbClr val="182D45"/>
@@ -13544,6 +17040,7 @@
               </a:defRPr>
             </a:defPPr>
             <a:lvl1pPr>
+              <a:buNone/>
               <a:defRPr sz="1800" b="0">
                 <a:solidFill>
                   <a:srgbClr val="182D45"/>
@@ -13554,6 +17051,7 @@
               </a:defRPr>
             </a:lvl1pPr>
             <a:lvl2pPr>
+              <a:buNone/>
               <a:defRPr sz="1800" b="0">
                 <a:solidFill>
                   <a:srgbClr val="182D45"/>
@@ -13564,6 +17062,7 @@
               </a:defRPr>
             </a:lvl2pPr>
             <a:lvl3pPr>
+              <a:buNone/>
               <a:defRPr sz="1800" b="0">
                 <a:solidFill>
                   <a:srgbClr val="182D45"/>
@@ -13574,6 +17073,7 @@
               </a:defRPr>
             </a:lvl3pPr>
             <a:lvl4pPr>
+              <a:buNone/>
               <a:defRPr sz="1800" b="0">
                 <a:solidFill>
                   <a:srgbClr val="182D45"/>
@@ -13584,6 +17084,7 @@
               </a:defRPr>
             </a:lvl4pPr>
             <a:lvl5pPr>
+              <a:buNone/>
               <a:defRPr sz="1800" b="0">
                 <a:solidFill>
                   <a:srgbClr val="182D45"/>
@@ -13594,6 +17095,7 @@
               </a:defRPr>
             </a:lvl5pPr>
             <a:lvl6pPr>
+              <a:buNone/>
               <a:defRPr sz="1800" b="0">
                 <a:solidFill>
                   <a:srgbClr val="182D45"/>
@@ -13604,6 +17106,7 @@
               </a:defRPr>
             </a:lvl6pPr>
             <a:lvl7pPr>
+              <a:buNone/>
               <a:defRPr sz="1800" b="0">
                 <a:solidFill>
                   <a:srgbClr val="182D45"/>
@@ -13614,6 +17117,7 @@
               </a:defRPr>
             </a:lvl7pPr>
             <a:lvl8pPr>
+              <a:buNone/>
               <a:defRPr sz="1800" b="0">
                 <a:solidFill>
                   <a:srgbClr val="182D45"/>
@@ -13624,6 +17128,7 @@
               </a:defRPr>
             </a:lvl8pPr>
             <a:lvl9pPr>
+              <a:buNone/>
               <a:defRPr sz="1800" b="0">
                 <a:solidFill>
                   <a:srgbClr val="182D45"/>
@@ -13636,6 +17141,7 @@
           </a:lstStyle>
           <a:p xmlns:a="http://schemas.openxmlformats.org/drawingml/2006/main">
             <a:pPr>
+              <a:buNone/>
               <a:defRPr sz="1800" b="0">
                 <a:solidFill>
                   <a:srgbClr val="182D45"/>
@@ -13659,6 +17165,7 @@
           </a:p>
           <a:p xmlns:a="http://schemas.openxmlformats.org/drawingml/2006/main">
             <a:pPr>
+              <a:buNone/>
               <a:defRPr sz="1800" b="0">
                 <a:solidFill>
                   <a:srgbClr val="182D45"/>
@@ -13686,1173 +17193,6 @@
     <p:extLst>
       <p:ext uri="{BB962C8B-B14F-4D97-AF65-F5344CB8AC3E}">
         <p14:creationId xmlns:p14="http://schemas.microsoft.com/office/powerpoint/2010/main" val="1928677039"/>
-      </p:ext>
-    </p:extLst>
-  </p:cSld>
-</p:sld>
-</file>
-
-<file path=ppt/slides/slide9.xml><?xml version="1.0" encoding="utf-8"?>
-<p:sld xmlns:p="http://schemas.openxmlformats.org/presentationml/2006/main">
-  <p:cSld>
-    <p:bg>
-      <p:bgPr>
-        <a:solidFill xmlns:a="http://schemas.openxmlformats.org/drawingml/2006/main">
-          <a:srgbClr val="FFFFFF"/>
-        </a:solidFill>
-      </p:bgPr>
-    </p:bg>
-    <p:spTree>
-      <p:nvGrpSpPr>
-        <p:cNvPr id="1" name=""/>
-        <p:cNvGrpSpPr/>
-        <p:nvPr/>
-      </p:nvGrpSpPr>
-      <p:grpSpPr>
-        <a:xfrm xmlns:a="http://schemas.openxmlformats.org/drawingml/2006/main"/>
-      </p:grpSpPr>
-      <p:sp>
-        <p:nvSpPr>
-          <p:cNvPr id="2" name="">
-            <a:extLst xmlns:a="http://schemas.openxmlformats.org/drawingml/2006/main">
-              <a:ext uri="{FF2B5EF4-FFF2-40B4-BE49-F238E27FC236}">
-                <a16:creationId xmlns:a16="http://schemas.microsoft.com/office/drawing/2014/main" id="{6D821F03-8643-4692-89AE-A5E3A1CEDDEB}"/>
-              </a:ext>
-            </a:extLst>
-          </p:cNvPr>
-          <p:cNvSpPr>
-            <a:spLocks xmlns:a="http://schemas.openxmlformats.org/drawingml/2006/main" noGrp="1"/>
-          </p:cNvSpPr>
-          <p:nvPr/>
-        </p:nvSpPr>
-        <p:spPr>
-          <a:xfrm xmlns:a="http://schemas.openxmlformats.org/drawingml/2006/main">
-            <a:off x="609600" y="381000"/>
-            <a:ext cx="10972800" cy="895350"/>
-          </a:xfrm>
-          <a:prstGeom xmlns:a="http://schemas.openxmlformats.org/drawingml/2006/main" prst="rect">
-            <a:avLst/>
-          </a:prstGeom>
-          <a:noFill xmlns:a="http://schemas.openxmlformats.org/drawingml/2006/main"/>
-          <a:ln xmlns:a="http://schemas.openxmlformats.org/drawingml/2006/main" w="0">
-            <a:noFill/>
-          </a:ln>
-        </p:spPr>
-        <p:txBody>
-          <a:bodyPr xmlns:a="http://schemas.openxmlformats.org/drawingml/2006/main"/>
-          <a:lstStyle xmlns:a="http://schemas.openxmlformats.org/drawingml/2006/main">
-            <a:defPPr>
-              <a:defRPr sz="3300" b="1">
-                <a:solidFill>
-                  <a:srgbClr val="182D45"/>
-                </a:solidFill>
-                <a:latin typeface="Arial"/>
-                <a:ea typeface="Arial"/>
-                <a:cs typeface="Arial"/>
-              </a:defRPr>
-            </a:defPPr>
-            <a:lvl1pPr>
-              <a:defRPr sz="3300" b="1">
-                <a:solidFill>
-                  <a:srgbClr val="182D45"/>
-                </a:solidFill>
-                <a:latin typeface="Arial"/>
-                <a:ea typeface="Arial"/>
-                <a:cs typeface="Arial"/>
-              </a:defRPr>
-            </a:lvl1pPr>
-            <a:lvl2pPr>
-              <a:defRPr sz="3300" b="1">
-                <a:solidFill>
-                  <a:srgbClr val="182D45"/>
-                </a:solidFill>
-                <a:latin typeface="Arial"/>
-                <a:ea typeface="Arial"/>
-                <a:cs typeface="Arial"/>
-              </a:defRPr>
-            </a:lvl2pPr>
-            <a:lvl3pPr>
-              <a:defRPr sz="3300" b="1">
-                <a:solidFill>
-                  <a:srgbClr val="182D45"/>
-                </a:solidFill>
-                <a:latin typeface="Arial"/>
-                <a:ea typeface="Arial"/>
-                <a:cs typeface="Arial"/>
-              </a:defRPr>
-            </a:lvl3pPr>
-            <a:lvl4pPr>
-              <a:defRPr sz="3300" b="1">
-                <a:solidFill>
-                  <a:srgbClr val="182D45"/>
-                </a:solidFill>
-                <a:latin typeface="Arial"/>
-                <a:ea typeface="Arial"/>
-                <a:cs typeface="Arial"/>
-              </a:defRPr>
-            </a:lvl4pPr>
-            <a:lvl5pPr>
-              <a:defRPr sz="3300" b="1">
-                <a:solidFill>
-                  <a:srgbClr val="182D45"/>
-                </a:solidFill>
-                <a:latin typeface="Arial"/>
-                <a:ea typeface="Arial"/>
-                <a:cs typeface="Arial"/>
-              </a:defRPr>
-            </a:lvl5pPr>
-            <a:lvl6pPr>
-              <a:defRPr sz="3300" b="1">
-                <a:solidFill>
-                  <a:srgbClr val="182D45"/>
-                </a:solidFill>
-                <a:latin typeface="Arial"/>
-                <a:ea typeface="Arial"/>
-                <a:cs typeface="Arial"/>
-              </a:defRPr>
-            </a:lvl6pPr>
-            <a:lvl7pPr>
-              <a:defRPr sz="3300" b="1">
-                <a:solidFill>
-                  <a:srgbClr val="182D45"/>
-                </a:solidFill>
-                <a:latin typeface="Arial"/>
-                <a:ea typeface="Arial"/>
-                <a:cs typeface="Arial"/>
-              </a:defRPr>
-            </a:lvl7pPr>
-            <a:lvl8pPr>
-              <a:defRPr sz="3300" b="1">
-                <a:solidFill>
-                  <a:srgbClr val="182D45"/>
-                </a:solidFill>
-                <a:latin typeface="Arial"/>
-                <a:ea typeface="Arial"/>
-                <a:cs typeface="Arial"/>
-              </a:defRPr>
-            </a:lvl8pPr>
-            <a:lvl9pPr>
-              <a:defRPr sz="3300" b="1">
-                <a:solidFill>
-                  <a:srgbClr val="182D45"/>
-                </a:solidFill>
-                <a:latin typeface="Arial"/>
-                <a:ea typeface="Arial"/>
-                <a:cs typeface="Arial"/>
-              </a:defRPr>
-            </a:lvl9pPr>
-          </a:lstStyle>
-          <a:p xmlns:a="http://schemas.openxmlformats.org/drawingml/2006/main">
-            <a:pPr>
-              <a:defRPr sz="3300" b="1">
-                <a:solidFill>
-                  <a:srgbClr val="182D45"/>
-                </a:solidFill>
-                <a:latin typeface="Arial"/>
-                <a:ea typeface="Arial"/>
-                <a:cs typeface="Arial"/>
-              </a:defRPr>
-            </a:pPr>
-            <a:r>
-              <a:rPr sz="3300" b="1">
-                <a:solidFill>
-                  <a:srgbClr val="182D45"/>
-                </a:solidFill>
-                <a:latin typeface="Arial"/>
-                <a:ea typeface="Arial"/>
-                <a:cs typeface="Arial"/>
-              </a:rPr>
-              <a:t>Висновок щодо 2.3.0</a:t>
-            </a:r>
-          </a:p>
-        </p:txBody>
-      </p:sp>
-      <p:sp>
-        <p:nvSpPr>
-          <p:cNvPr id="3" name="">
-            <a:extLst xmlns:a="http://schemas.openxmlformats.org/drawingml/2006/main">
-              <a:ext uri="{FF2B5EF4-FFF2-40B4-BE49-F238E27FC236}">
-                <a16:creationId xmlns:a16="http://schemas.microsoft.com/office/drawing/2014/main" id="{4771CCDF-DAB4-409F-9ED5-13AF7C40C54A}"/>
-              </a:ext>
-            </a:extLst>
-          </p:cNvPr>
-          <p:cNvSpPr>
-            <a:spLocks xmlns:a="http://schemas.openxmlformats.org/drawingml/2006/main" noGrp="1"/>
-          </p:cNvSpPr>
-          <p:nvPr/>
-        </p:nvSpPr>
-        <p:spPr>
-          <a:xfrm xmlns:a="http://schemas.openxmlformats.org/drawingml/2006/main">
-            <a:off x="11220450" y="6438900"/>
-            <a:ext cx="457200" cy="247650"/>
-          </a:xfrm>
-          <a:prstGeom xmlns:a="http://schemas.openxmlformats.org/drawingml/2006/main" prst="rect">
-            <a:avLst/>
-          </a:prstGeom>
-          <a:noFill xmlns:a="http://schemas.openxmlformats.org/drawingml/2006/main"/>
-          <a:ln xmlns:a="http://schemas.openxmlformats.org/drawingml/2006/main" w="0">
-            <a:noFill/>
-          </a:ln>
-        </p:spPr>
-        <p:txBody>
-          <a:bodyPr xmlns:a="http://schemas.openxmlformats.org/drawingml/2006/main"/>
-          <a:lstStyle xmlns:a="http://schemas.openxmlformats.org/drawingml/2006/main">
-            <a:defPPr>
-              <a:defRPr sz="1350" b="0">
-                <a:solidFill>
-                  <a:srgbClr val="566A80"/>
-                </a:solidFill>
-                <a:latin typeface="Arial"/>
-                <a:ea typeface="Arial"/>
-                <a:cs typeface="Arial"/>
-              </a:defRPr>
-            </a:defPPr>
-            <a:lvl1pPr>
-              <a:defRPr sz="1350" b="0">
-                <a:solidFill>
-                  <a:srgbClr val="566A80"/>
-                </a:solidFill>
-                <a:latin typeface="Arial"/>
-                <a:ea typeface="Arial"/>
-                <a:cs typeface="Arial"/>
-              </a:defRPr>
-            </a:lvl1pPr>
-            <a:lvl2pPr>
-              <a:defRPr sz="1350" b="0">
-                <a:solidFill>
-                  <a:srgbClr val="566A80"/>
-                </a:solidFill>
-                <a:latin typeface="Arial"/>
-                <a:ea typeface="Arial"/>
-                <a:cs typeface="Arial"/>
-              </a:defRPr>
-            </a:lvl2pPr>
-            <a:lvl3pPr>
-              <a:defRPr sz="1350" b="0">
-                <a:solidFill>
-                  <a:srgbClr val="566A80"/>
-                </a:solidFill>
-                <a:latin typeface="Arial"/>
-                <a:ea typeface="Arial"/>
-                <a:cs typeface="Arial"/>
-              </a:defRPr>
-            </a:lvl3pPr>
-            <a:lvl4pPr>
-              <a:defRPr sz="1350" b="0">
-                <a:solidFill>
-                  <a:srgbClr val="566A80"/>
-                </a:solidFill>
-                <a:latin typeface="Arial"/>
-                <a:ea typeface="Arial"/>
-                <a:cs typeface="Arial"/>
-              </a:defRPr>
-            </a:lvl4pPr>
-            <a:lvl5pPr>
-              <a:defRPr sz="1350" b="0">
-                <a:solidFill>
-                  <a:srgbClr val="566A80"/>
-                </a:solidFill>
-                <a:latin typeface="Arial"/>
-                <a:ea typeface="Arial"/>
-                <a:cs typeface="Arial"/>
-              </a:defRPr>
-            </a:lvl5pPr>
-            <a:lvl6pPr>
-              <a:defRPr sz="1350" b="0">
-                <a:solidFill>
-                  <a:srgbClr val="566A80"/>
-                </a:solidFill>
-                <a:latin typeface="Arial"/>
-                <a:ea typeface="Arial"/>
-                <a:cs typeface="Arial"/>
-              </a:defRPr>
-            </a:lvl6pPr>
-            <a:lvl7pPr>
-              <a:defRPr sz="1350" b="0">
-                <a:solidFill>
-                  <a:srgbClr val="566A80"/>
-                </a:solidFill>
-                <a:latin typeface="Arial"/>
-                <a:ea typeface="Arial"/>
-                <a:cs typeface="Arial"/>
-              </a:defRPr>
-            </a:lvl7pPr>
-            <a:lvl8pPr>
-              <a:defRPr sz="1350" b="0">
-                <a:solidFill>
-                  <a:srgbClr val="566A80"/>
-                </a:solidFill>
-                <a:latin typeface="Arial"/>
-                <a:ea typeface="Arial"/>
-                <a:cs typeface="Arial"/>
-              </a:defRPr>
-            </a:lvl8pPr>
-            <a:lvl9pPr>
-              <a:defRPr sz="1350" b="0">
-                <a:solidFill>
-                  <a:srgbClr val="566A80"/>
-                </a:solidFill>
-                <a:latin typeface="Arial"/>
-                <a:ea typeface="Arial"/>
-                <a:cs typeface="Arial"/>
-              </a:defRPr>
-            </a:lvl9pPr>
-          </a:lstStyle>
-          <a:p xmlns:a="http://schemas.openxmlformats.org/drawingml/2006/main">
-            <a:pPr>
-              <a:defRPr sz="1350" b="0">
-                <a:solidFill>
-                  <a:srgbClr val="566A80"/>
-                </a:solidFill>
-                <a:latin typeface="Arial"/>
-                <a:ea typeface="Arial"/>
-                <a:cs typeface="Arial"/>
-              </a:defRPr>
-            </a:pPr>
-            <a:r>
-              <a:rPr sz="1350" b="0">
-                <a:solidFill>
-                  <a:srgbClr val="566A80"/>
-                </a:solidFill>
-                <a:latin typeface="Arial"/>
-                <a:ea typeface="Arial"/>
-                <a:cs typeface="Arial"/>
-              </a:rPr>
-              <a:t>09</a:t>
-            </a:r>
-          </a:p>
-        </p:txBody>
-      </p:sp>
-      <p:sp>
-        <p:nvSpPr>
-          <p:cNvPr id="4" name="">
-            <a:extLst xmlns:a="http://schemas.openxmlformats.org/drawingml/2006/main">
-              <a:ext uri="{FF2B5EF4-FFF2-40B4-BE49-F238E27FC236}">
-                <a16:creationId xmlns:a16="http://schemas.microsoft.com/office/drawing/2014/main" id="{14299937-A8B5-47EA-9E71-F2F3A9F6997F}"/>
-              </a:ext>
-            </a:extLst>
-          </p:cNvPr>
-          <p:cNvSpPr>
-            <a:spLocks xmlns:a="http://schemas.openxmlformats.org/drawingml/2006/main" noGrp="1"/>
-          </p:cNvSpPr>
-          <p:nvPr/>
-        </p:nvSpPr>
-        <p:spPr>
-          <a:xfrm xmlns:a="http://schemas.openxmlformats.org/drawingml/2006/main">
-            <a:off x="609600" y="1514475"/>
-            <a:ext cx="10972800" cy="933450"/>
-          </a:xfrm>
-          <a:prstGeom xmlns:a="http://schemas.openxmlformats.org/drawingml/2006/main" prst="rect">
-            <a:avLst/>
-          </a:prstGeom>
-          <a:noFill xmlns:a="http://schemas.openxmlformats.org/drawingml/2006/main"/>
-          <a:ln xmlns:a="http://schemas.openxmlformats.org/drawingml/2006/main" w="0">
-            <a:noFill/>
-          </a:ln>
-        </p:spPr>
-        <p:txBody>
-          <a:bodyPr xmlns:a="http://schemas.openxmlformats.org/drawingml/2006/main"/>
-          <a:lstStyle xmlns:a="http://schemas.openxmlformats.org/drawingml/2006/main">
-            <a:defPPr>
-              <a:defRPr sz="5700" b="1">
-                <a:solidFill>
-                  <a:srgbClr val="B42336"/>
-                </a:solidFill>
-                <a:latin typeface="Arial"/>
-                <a:ea typeface="Arial"/>
-                <a:cs typeface="Arial"/>
-              </a:defRPr>
-            </a:defPPr>
-            <a:lvl1pPr>
-              <a:defRPr sz="5700" b="1">
-                <a:solidFill>
-                  <a:srgbClr val="B42336"/>
-                </a:solidFill>
-                <a:latin typeface="Arial"/>
-                <a:ea typeface="Arial"/>
-                <a:cs typeface="Arial"/>
-              </a:defRPr>
-            </a:lvl1pPr>
-            <a:lvl2pPr>
-              <a:defRPr sz="5700" b="1">
-                <a:solidFill>
-                  <a:srgbClr val="B42336"/>
-                </a:solidFill>
-                <a:latin typeface="Arial"/>
-                <a:ea typeface="Arial"/>
-                <a:cs typeface="Arial"/>
-              </a:defRPr>
-            </a:lvl2pPr>
-            <a:lvl3pPr>
-              <a:defRPr sz="5700" b="1">
-                <a:solidFill>
-                  <a:srgbClr val="B42336"/>
-                </a:solidFill>
-                <a:latin typeface="Arial"/>
-                <a:ea typeface="Arial"/>
-                <a:cs typeface="Arial"/>
-              </a:defRPr>
-            </a:lvl3pPr>
-            <a:lvl4pPr>
-              <a:defRPr sz="5700" b="1">
-                <a:solidFill>
-                  <a:srgbClr val="B42336"/>
-                </a:solidFill>
-                <a:latin typeface="Arial"/>
-                <a:ea typeface="Arial"/>
-                <a:cs typeface="Arial"/>
-              </a:defRPr>
-            </a:lvl4pPr>
-            <a:lvl5pPr>
-              <a:defRPr sz="5700" b="1">
-                <a:solidFill>
-                  <a:srgbClr val="B42336"/>
-                </a:solidFill>
-                <a:latin typeface="Arial"/>
-                <a:ea typeface="Arial"/>
-                <a:cs typeface="Arial"/>
-              </a:defRPr>
-            </a:lvl5pPr>
-            <a:lvl6pPr>
-              <a:defRPr sz="5700" b="1">
-                <a:solidFill>
-                  <a:srgbClr val="B42336"/>
-                </a:solidFill>
-                <a:latin typeface="Arial"/>
-                <a:ea typeface="Arial"/>
-                <a:cs typeface="Arial"/>
-              </a:defRPr>
-            </a:lvl6pPr>
-            <a:lvl7pPr>
-              <a:defRPr sz="5700" b="1">
-                <a:solidFill>
-                  <a:srgbClr val="B42336"/>
-                </a:solidFill>
-                <a:latin typeface="Arial"/>
-                <a:ea typeface="Arial"/>
-                <a:cs typeface="Arial"/>
-              </a:defRPr>
-            </a:lvl7pPr>
-            <a:lvl8pPr>
-              <a:defRPr sz="5700" b="1">
-                <a:solidFill>
-                  <a:srgbClr val="B42336"/>
-                </a:solidFill>
-                <a:latin typeface="Arial"/>
-                <a:ea typeface="Arial"/>
-                <a:cs typeface="Arial"/>
-              </a:defRPr>
-            </a:lvl8pPr>
-            <a:lvl9pPr>
-              <a:defRPr sz="5700" b="1">
-                <a:solidFill>
-                  <a:srgbClr val="B42336"/>
-                </a:solidFill>
-                <a:latin typeface="Arial"/>
-                <a:ea typeface="Arial"/>
-                <a:cs typeface="Arial"/>
-              </a:defRPr>
-            </a:lvl9pPr>
-          </a:lstStyle>
-          <a:p xmlns:a="http://schemas.openxmlformats.org/drawingml/2006/main">
-            <a:pPr>
-              <a:defRPr sz="5700" b="1">
-                <a:solidFill>
-                  <a:srgbClr val="B42336"/>
-                </a:solidFill>
-                <a:latin typeface="Arial"/>
-                <a:ea typeface="Arial"/>
-                <a:cs typeface="Arial"/>
-              </a:defRPr>
-            </a:pPr>
-            <a:r>
-              <a:rPr sz="5700" b="1">
-                <a:solidFill>
-                  <a:srgbClr val="B42336"/>
-                </a:solidFill>
-                <a:latin typeface="Arial"/>
-                <a:ea typeface="Arial"/>
-                <a:cs typeface="Arial"/>
-              </a:rPr>
-              <a:t>NO-GO</a:t>
-            </a:r>
-          </a:p>
-        </p:txBody>
-      </p:sp>
-      <p:sp>
-        <p:nvSpPr>
-          <p:cNvPr id="5" name="">
-            <a:extLst xmlns:a="http://schemas.openxmlformats.org/drawingml/2006/main">
-              <a:ext uri="{FF2B5EF4-FFF2-40B4-BE49-F238E27FC236}">
-                <a16:creationId xmlns:a16="http://schemas.microsoft.com/office/drawing/2014/main" id="{D11F1C28-B87A-4CB8-9AD2-056E366641FA}"/>
-              </a:ext>
-            </a:extLst>
-          </p:cNvPr>
-          <p:cNvSpPr>
-            <a:spLocks xmlns:a="http://schemas.openxmlformats.org/drawingml/2006/main" noGrp="1"/>
-          </p:cNvSpPr>
-          <p:nvPr/>
-        </p:nvSpPr>
-        <p:spPr>
-          <a:xfrm xmlns:a="http://schemas.openxmlformats.org/drawingml/2006/main">
-            <a:off x="609600" y="2714625"/>
-            <a:ext cx="10972800" cy="1104900"/>
-          </a:xfrm>
-          <a:prstGeom xmlns:a="http://schemas.openxmlformats.org/drawingml/2006/main" prst="rect">
-            <a:avLst/>
-          </a:prstGeom>
-          <a:noFill xmlns:a="http://schemas.openxmlformats.org/drawingml/2006/main"/>
-          <a:ln xmlns:a="http://schemas.openxmlformats.org/drawingml/2006/main" w="0">
-            <a:noFill/>
-          </a:ln>
-        </p:spPr>
-        <p:txBody>
-          <a:bodyPr xmlns:a="http://schemas.openxmlformats.org/drawingml/2006/main"/>
-          <a:lstStyle xmlns:a="http://schemas.openxmlformats.org/drawingml/2006/main">
-            <a:defPPr>
-              <a:defRPr sz="2550" b="1">
-                <a:solidFill>
-                  <a:srgbClr val="182D45"/>
-                </a:solidFill>
-                <a:latin typeface="Arial"/>
-                <a:ea typeface="Arial"/>
-                <a:cs typeface="Arial"/>
-              </a:defRPr>
-            </a:defPPr>
-            <a:lvl1pPr>
-              <a:defRPr sz="2550" b="1">
-                <a:solidFill>
-                  <a:srgbClr val="182D45"/>
-                </a:solidFill>
-                <a:latin typeface="Arial"/>
-                <a:ea typeface="Arial"/>
-                <a:cs typeface="Arial"/>
-              </a:defRPr>
-            </a:lvl1pPr>
-            <a:lvl2pPr>
-              <a:defRPr sz="2550" b="1">
-                <a:solidFill>
-                  <a:srgbClr val="182D45"/>
-                </a:solidFill>
-                <a:latin typeface="Arial"/>
-                <a:ea typeface="Arial"/>
-                <a:cs typeface="Arial"/>
-              </a:defRPr>
-            </a:lvl2pPr>
-            <a:lvl3pPr>
-              <a:defRPr sz="2550" b="1">
-                <a:solidFill>
-                  <a:srgbClr val="182D45"/>
-                </a:solidFill>
-                <a:latin typeface="Arial"/>
-                <a:ea typeface="Arial"/>
-                <a:cs typeface="Arial"/>
-              </a:defRPr>
-            </a:lvl3pPr>
-            <a:lvl4pPr>
-              <a:defRPr sz="2550" b="1">
-                <a:solidFill>
-                  <a:srgbClr val="182D45"/>
-                </a:solidFill>
-                <a:latin typeface="Arial"/>
-                <a:ea typeface="Arial"/>
-                <a:cs typeface="Arial"/>
-              </a:defRPr>
-            </a:lvl4pPr>
-            <a:lvl5pPr>
-              <a:defRPr sz="2550" b="1">
-                <a:solidFill>
-                  <a:srgbClr val="182D45"/>
-                </a:solidFill>
-                <a:latin typeface="Arial"/>
-                <a:ea typeface="Arial"/>
-                <a:cs typeface="Arial"/>
-              </a:defRPr>
-            </a:lvl5pPr>
-            <a:lvl6pPr>
-              <a:defRPr sz="2550" b="1">
-                <a:solidFill>
-                  <a:srgbClr val="182D45"/>
-                </a:solidFill>
-                <a:latin typeface="Arial"/>
-                <a:ea typeface="Arial"/>
-                <a:cs typeface="Arial"/>
-              </a:defRPr>
-            </a:lvl6pPr>
-            <a:lvl7pPr>
-              <a:defRPr sz="2550" b="1">
-                <a:solidFill>
-                  <a:srgbClr val="182D45"/>
-                </a:solidFill>
-                <a:latin typeface="Arial"/>
-                <a:ea typeface="Arial"/>
-                <a:cs typeface="Arial"/>
-              </a:defRPr>
-            </a:lvl7pPr>
-            <a:lvl8pPr>
-              <a:defRPr sz="2550" b="1">
-                <a:solidFill>
-                  <a:srgbClr val="182D45"/>
-                </a:solidFill>
-                <a:latin typeface="Arial"/>
-                <a:ea typeface="Arial"/>
-                <a:cs typeface="Arial"/>
-              </a:defRPr>
-            </a:lvl8pPr>
-            <a:lvl9pPr>
-              <a:defRPr sz="2550" b="1">
-                <a:solidFill>
-                  <a:srgbClr val="182D45"/>
-                </a:solidFill>
-                <a:latin typeface="Arial"/>
-                <a:ea typeface="Arial"/>
-                <a:cs typeface="Arial"/>
-              </a:defRPr>
-            </a:lvl9pPr>
-          </a:lstStyle>
-          <a:p xmlns:a="http://schemas.openxmlformats.org/drawingml/2006/main">
-            <a:pPr>
-              <a:defRPr sz="2550" b="1">
-                <a:solidFill>
-                  <a:srgbClr val="182D45"/>
-                </a:solidFill>
-                <a:latin typeface="Arial"/>
-                <a:ea typeface="Arial"/>
-                <a:cs typeface="Arial"/>
-              </a:defRPr>
-            </a:pPr>
-            <a:r>
-              <a:rPr sz="2550" b="1">
-                <a:solidFill>
-                  <a:srgbClr val="182D45"/>
-                </a:solidFill>
-                <a:latin typeface="Arial"/>
-                <a:ea typeface="Arial"/>
-                <a:cs typeface="Arial"/>
-              </a:rPr>
-              <a:t>Недопустимий pulse 99 виконується</a:t>
-            </a:r>
-          </a:p>
-          <a:p xmlns:a="http://schemas.openxmlformats.org/drawingml/2006/main">
-            <a:pPr>
-              <a:defRPr sz="2550" b="1">
-                <a:solidFill>
-                  <a:srgbClr val="182D45"/>
-                </a:solidFill>
-                <a:latin typeface="Arial"/>
-                <a:ea typeface="Arial"/>
-                <a:cs typeface="Arial"/>
-              </a:defRPr>
-            </a:pPr>
-            <a:r>
-              <a:rPr sz="2550" b="1">
-                <a:solidFill>
-                  <a:srgbClr val="182D45"/>
-                </a:solidFill>
-                <a:latin typeface="Arial"/>
-                <a:ea typeface="Arial"/>
-                <a:cs typeface="Arial"/>
-              </a:rPr>
-              <a:t>Підтвердження наявного alert за ID не працює</a:t>
-            </a:r>
-          </a:p>
-        </p:txBody>
-      </p:sp>
-      <p:sp>
-        <p:nvSpPr>
-          <p:cNvPr id="6" name="">
-            <a:extLst xmlns:a="http://schemas.openxmlformats.org/drawingml/2006/main">
-              <a:ext uri="{FF2B5EF4-FFF2-40B4-BE49-F238E27FC236}">
-                <a16:creationId xmlns:a16="http://schemas.microsoft.com/office/drawing/2014/main" id="{78841F51-0499-4005-BA9B-08C70FE1EB58}"/>
-              </a:ext>
-            </a:extLst>
-          </p:cNvPr>
-          <p:cNvSpPr>
-            <a:spLocks xmlns:a="http://schemas.openxmlformats.org/drawingml/2006/main" noGrp="1"/>
-          </p:cNvSpPr>
-          <p:nvPr/>
-        </p:nvSpPr>
-        <p:spPr>
-          <a:xfrm xmlns:a="http://schemas.openxmlformats.org/drawingml/2006/main">
-            <a:off x="609600" y="6315075"/>
-            <a:ext cx="10477500" cy="304800"/>
-          </a:xfrm>
-          <a:prstGeom xmlns:a="http://schemas.openxmlformats.org/drawingml/2006/main" prst="rect">
-            <a:avLst/>
-          </a:prstGeom>
-          <a:noFill xmlns:a="http://schemas.openxmlformats.org/drawingml/2006/main"/>
-          <a:ln xmlns:a="http://schemas.openxmlformats.org/drawingml/2006/main" w="0">
-            <a:noFill/>
-          </a:ln>
-        </p:spPr>
-        <p:txBody>
-          <a:bodyPr xmlns:a="http://schemas.openxmlformats.org/drawingml/2006/main"/>
-          <a:lstStyle xmlns:a="http://schemas.openxmlformats.org/drawingml/2006/main">
-            <a:defPPr>
-              <a:defRPr sz="1725" b="0">
-                <a:solidFill>
-                  <a:srgbClr val="087F8C"/>
-                </a:solidFill>
-                <a:latin typeface="Arial"/>
-                <a:ea typeface="Arial"/>
-                <a:cs typeface="Arial"/>
-              </a:defRPr>
-            </a:defPPr>
-            <a:lvl1pPr>
-              <a:defRPr sz="1725" b="0">
-                <a:solidFill>
-                  <a:srgbClr val="087F8C"/>
-                </a:solidFill>
-                <a:latin typeface="Arial"/>
-                <a:ea typeface="Arial"/>
-                <a:cs typeface="Arial"/>
-              </a:defRPr>
-            </a:lvl1pPr>
-            <a:lvl2pPr>
-              <a:defRPr sz="1725" b="0">
-                <a:solidFill>
-                  <a:srgbClr val="087F8C"/>
-                </a:solidFill>
-                <a:latin typeface="Arial"/>
-                <a:ea typeface="Arial"/>
-                <a:cs typeface="Arial"/>
-              </a:defRPr>
-            </a:lvl2pPr>
-            <a:lvl3pPr>
-              <a:defRPr sz="1725" b="0">
-                <a:solidFill>
-                  <a:srgbClr val="087F8C"/>
-                </a:solidFill>
-                <a:latin typeface="Arial"/>
-                <a:ea typeface="Arial"/>
-                <a:cs typeface="Arial"/>
-              </a:defRPr>
-            </a:lvl3pPr>
-            <a:lvl4pPr>
-              <a:defRPr sz="1725" b="0">
-                <a:solidFill>
-                  <a:srgbClr val="087F8C"/>
-                </a:solidFill>
-                <a:latin typeface="Arial"/>
-                <a:ea typeface="Arial"/>
-                <a:cs typeface="Arial"/>
-              </a:defRPr>
-            </a:lvl4pPr>
-            <a:lvl5pPr>
-              <a:defRPr sz="1725" b="0">
-                <a:solidFill>
-                  <a:srgbClr val="087F8C"/>
-                </a:solidFill>
-                <a:latin typeface="Arial"/>
-                <a:ea typeface="Arial"/>
-                <a:cs typeface="Arial"/>
-              </a:defRPr>
-            </a:lvl5pPr>
-            <a:lvl6pPr>
-              <a:defRPr sz="1725" b="0">
-                <a:solidFill>
-                  <a:srgbClr val="087F8C"/>
-                </a:solidFill>
-                <a:latin typeface="Arial"/>
-                <a:ea typeface="Arial"/>
-                <a:cs typeface="Arial"/>
-              </a:defRPr>
-            </a:lvl6pPr>
-            <a:lvl7pPr>
-              <a:defRPr sz="1725" b="0">
-                <a:solidFill>
-                  <a:srgbClr val="087F8C"/>
-                </a:solidFill>
-                <a:latin typeface="Arial"/>
-                <a:ea typeface="Arial"/>
-                <a:cs typeface="Arial"/>
-              </a:defRPr>
-            </a:lvl7pPr>
-            <a:lvl8pPr>
-              <a:defRPr sz="1725" b="0">
-                <a:solidFill>
-                  <a:srgbClr val="087F8C"/>
-                </a:solidFill>
-                <a:latin typeface="Arial"/>
-                <a:ea typeface="Arial"/>
-                <a:cs typeface="Arial"/>
-              </a:defRPr>
-            </a:lvl8pPr>
-            <a:lvl9pPr>
-              <a:defRPr sz="1725" b="0">
-                <a:solidFill>
-                  <a:srgbClr val="087F8C"/>
-                </a:solidFill>
-                <a:latin typeface="Arial"/>
-                <a:ea typeface="Arial"/>
-                <a:cs typeface="Arial"/>
-              </a:defRPr>
-            </a:lvl9pPr>
-          </a:lstStyle>
-          <a:p xmlns:a="http://schemas.openxmlformats.org/drawingml/2006/main">
-            <a:pPr>
-              <a:defRPr sz="1725" b="0">
-                <a:solidFill>
-                  <a:srgbClr val="087F8C"/>
-                </a:solidFill>
-                <a:latin typeface="Arial"/>
-                <a:ea typeface="Arial"/>
-                <a:cs typeface="Arial"/>
-              </a:defRPr>
-            </a:pPr>
-            <a:r>
-              <a:rPr sz="1725" b="0">
-                <a:solidFill>
-                  <a:srgbClr val="087F8C"/>
-                </a:solidFill>
-                <a:latin typeface="Arial"/>
-                <a:ea typeface="Arial"/>
-                <a:cs typeface="Arial"/>
-              </a:rPr>
-              <a:t>github.com/rpozniak/sentry-swm2-qa</a:t>
-            </a:r>
-          </a:p>
-        </p:txBody>
-      </p:sp>
-      <p:sp>
-        <p:nvSpPr>
-          <p:cNvPr id="7" name="">
-            <a:extLst xmlns:a="http://schemas.openxmlformats.org/drawingml/2006/main">
-              <a:ext uri="{FF2B5EF4-FFF2-40B4-BE49-F238E27FC236}">
-                <a16:creationId xmlns:a16="http://schemas.microsoft.com/office/drawing/2014/main" id="{0BB43CD1-3B85-4DFB-852F-F0657BCF70AA}"/>
-              </a:ext>
-            </a:extLst>
-          </p:cNvPr>
-          <p:cNvSpPr>
-            <a:spLocks xmlns:a="http://schemas.openxmlformats.org/drawingml/2006/main" noGrp="1"/>
-          </p:cNvSpPr>
-          <p:nvPr/>
-        </p:nvSpPr>
-        <p:spPr>
-          <a:xfrm xmlns:a="http://schemas.openxmlformats.org/drawingml/2006/main">
-            <a:off x="609600" y="4391025"/>
-            <a:ext cx="10972800" cy="561975"/>
-          </a:xfrm>
-          <a:prstGeom xmlns:a="http://schemas.openxmlformats.org/drawingml/2006/main" prst="rect">
-            <a:avLst/>
-          </a:prstGeom>
-          <a:noFill xmlns:a="http://schemas.openxmlformats.org/drawingml/2006/main"/>
-          <a:ln xmlns:a="http://schemas.openxmlformats.org/drawingml/2006/main" w="0">
-            <a:noFill/>
-          </a:ln>
-        </p:spPr>
-        <p:txBody>
-          <a:bodyPr xmlns:a="http://schemas.openxmlformats.org/drawingml/2006/main"/>
-          <a:lstStyle xmlns:a="http://schemas.openxmlformats.org/drawingml/2006/main">
-            <a:defPPr>
-              <a:defRPr sz="2250" b="1">
-                <a:solidFill>
-                  <a:srgbClr val="087F8C"/>
-                </a:solidFill>
-                <a:latin typeface="Arial"/>
-                <a:ea typeface="Arial"/>
-                <a:cs typeface="Arial"/>
-              </a:defRPr>
-            </a:defPPr>
-            <a:lvl1pPr>
-              <a:defRPr sz="2250" b="1">
-                <a:solidFill>
-                  <a:srgbClr val="087F8C"/>
-                </a:solidFill>
-                <a:latin typeface="Arial"/>
-                <a:ea typeface="Arial"/>
-                <a:cs typeface="Arial"/>
-              </a:defRPr>
-            </a:lvl1pPr>
-            <a:lvl2pPr>
-              <a:defRPr sz="2250" b="1">
-                <a:solidFill>
-                  <a:srgbClr val="087F8C"/>
-                </a:solidFill>
-                <a:latin typeface="Arial"/>
-                <a:ea typeface="Arial"/>
-                <a:cs typeface="Arial"/>
-              </a:defRPr>
-            </a:lvl2pPr>
-            <a:lvl3pPr>
-              <a:defRPr sz="2250" b="1">
-                <a:solidFill>
-                  <a:srgbClr val="087F8C"/>
-                </a:solidFill>
-                <a:latin typeface="Arial"/>
-                <a:ea typeface="Arial"/>
-                <a:cs typeface="Arial"/>
-              </a:defRPr>
-            </a:lvl3pPr>
-            <a:lvl4pPr>
-              <a:defRPr sz="2250" b="1">
-                <a:solidFill>
-                  <a:srgbClr val="087F8C"/>
-                </a:solidFill>
-                <a:latin typeface="Arial"/>
-                <a:ea typeface="Arial"/>
-                <a:cs typeface="Arial"/>
-              </a:defRPr>
-            </a:lvl4pPr>
-            <a:lvl5pPr>
-              <a:defRPr sz="2250" b="1">
-                <a:solidFill>
-                  <a:srgbClr val="087F8C"/>
-                </a:solidFill>
-                <a:latin typeface="Arial"/>
-                <a:ea typeface="Arial"/>
-                <a:cs typeface="Arial"/>
-              </a:defRPr>
-            </a:lvl5pPr>
-            <a:lvl6pPr>
-              <a:defRPr sz="2250" b="1">
-                <a:solidFill>
-                  <a:srgbClr val="087F8C"/>
-                </a:solidFill>
-                <a:latin typeface="Arial"/>
-                <a:ea typeface="Arial"/>
-                <a:cs typeface="Arial"/>
-              </a:defRPr>
-            </a:lvl6pPr>
-            <a:lvl7pPr>
-              <a:defRPr sz="2250" b="1">
-                <a:solidFill>
-                  <a:srgbClr val="087F8C"/>
-                </a:solidFill>
-                <a:latin typeface="Arial"/>
-                <a:ea typeface="Arial"/>
-                <a:cs typeface="Arial"/>
-              </a:defRPr>
-            </a:lvl7pPr>
-            <a:lvl8pPr>
-              <a:defRPr sz="2250" b="1">
-                <a:solidFill>
-                  <a:srgbClr val="087F8C"/>
-                </a:solidFill>
-                <a:latin typeface="Arial"/>
-                <a:ea typeface="Arial"/>
-                <a:cs typeface="Arial"/>
-              </a:defRPr>
-            </a:lvl8pPr>
-            <a:lvl9pPr>
-              <a:defRPr sz="2250" b="1">
-                <a:solidFill>
-                  <a:srgbClr val="087F8C"/>
-                </a:solidFill>
-                <a:latin typeface="Arial"/>
-                <a:ea typeface="Arial"/>
-                <a:cs typeface="Arial"/>
-              </a:defRPr>
-            </a:lvl9pPr>
-          </a:lstStyle>
-          <a:p xmlns:a="http://schemas.openxmlformats.org/drawingml/2006/main">
-            <a:pPr>
-              <a:defRPr sz="2250" b="1">
-                <a:solidFill>
-                  <a:srgbClr val="087F8C"/>
-                </a:solidFill>
-                <a:latin typeface="Arial"/>
-                <a:ea typeface="Arial"/>
-                <a:cs typeface="Arial"/>
-              </a:defRPr>
-            </a:pPr>
-            <a:r>
-              <a:rPr sz="2250" b="1">
-                <a:solidFill>
-                  <a:srgbClr val="087F8C"/>
-                </a:solidFill>
-                <a:latin typeface="Arial"/>
-                <a:ea typeface="Arial"/>
-                <a:cs typeface="Arial"/>
-              </a:rPr>
-              <a:t>Чотири дефекти 2.1.0 у beta не відтворились</a:t>
-            </a:r>
-          </a:p>
-        </p:txBody>
-      </p:sp>
-      <p:sp>
-        <p:nvSpPr>
-          <p:cNvPr id="8" name="">
-            <a:extLst xmlns:a="http://schemas.openxmlformats.org/drawingml/2006/main">
-              <a:ext uri="{FF2B5EF4-FFF2-40B4-BE49-F238E27FC236}">
-                <a16:creationId xmlns:a16="http://schemas.microsoft.com/office/drawing/2014/main" id="{4C85477C-DC3C-4C43-8502-8D56F6F208CB}"/>
-              </a:ext>
-            </a:extLst>
-          </p:cNvPr>
-          <p:cNvSpPr>
-            <a:spLocks xmlns:a="http://schemas.openxmlformats.org/drawingml/2006/main" noGrp="1"/>
-          </p:cNvSpPr>
-          <p:nvPr/>
-        </p:nvSpPr>
-        <p:spPr>
-          <a:xfrm xmlns:a="http://schemas.openxmlformats.org/drawingml/2006/main">
-            <a:off x="609600" y="5257800"/>
-            <a:ext cx="10972800" cy="895350"/>
-          </a:xfrm>
-          <a:prstGeom xmlns:a="http://schemas.openxmlformats.org/drawingml/2006/main" prst="rect">
-            <a:avLst/>
-          </a:prstGeom>
-          <a:noFill xmlns:a="http://schemas.openxmlformats.org/drawingml/2006/main"/>
-          <a:ln xmlns:a="http://schemas.openxmlformats.org/drawingml/2006/main" w="0">
-            <a:noFill/>
-          </a:ln>
-        </p:spPr>
-        <p:txBody>
-          <a:bodyPr xmlns:a="http://schemas.openxmlformats.org/drawingml/2006/main"/>
-          <a:lstStyle xmlns:a="http://schemas.openxmlformats.org/drawingml/2006/main">
-            <a:defPPr>
-              <a:defRPr sz="2100" b="0">
-                <a:solidFill>
-                  <a:srgbClr val="566A80"/>
-                </a:solidFill>
-                <a:latin typeface="Arial"/>
-                <a:ea typeface="Arial"/>
-                <a:cs typeface="Arial"/>
-              </a:defRPr>
-            </a:defPPr>
-            <a:lvl1pPr>
-              <a:defRPr sz="2100" b="0">
-                <a:solidFill>
-                  <a:srgbClr val="566A80"/>
-                </a:solidFill>
-                <a:latin typeface="Arial"/>
-                <a:ea typeface="Arial"/>
-                <a:cs typeface="Arial"/>
-              </a:defRPr>
-            </a:lvl1pPr>
-            <a:lvl2pPr>
-              <a:defRPr sz="2100" b="0">
-                <a:solidFill>
-                  <a:srgbClr val="566A80"/>
-                </a:solidFill>
-                <a:latin typeface="Arial"/>
-                <a:ea typeface="Arial"/>
-                <a:cs typeface="Arial"/>
-              </a:defRPr>
-            </a:lvl2pPr>
-            <a:lvl3pPr>
-              <a:defRPr sz="2100" b="0">
-                <a:solidFill>
-                  <a:srgbClr val="566A80"/>
-                </a:solidFill>
-                <a:latin typeface="Arial"/>
-                <a:ea typeface="Arial"/>
-                <a:cs typeface="Arial"/>
-              </a:defRPr>
-            </a:lvl3pPr>
-            <a:lvl4pPr>
-              <a:defRPr sz="2100" b="0">
-                <a:solidFill>
-                  <a:srgbClr val="566A80"/>
-                </a:solidFill>
-                <a:latin typeface="Arial"/>
-                <a:ea typeface="Arial"/>
-                <a:cs typeface="Arial"/>
-              </a:defRPr>
-            </a:lvl4pPr>
-            <a:lvl5pPr>
-              <a:defRPr sz="2100" b="0">
-                <a:solidFill>
-                  <a:srgbClr val="566A80"/>
-                </a:solidFill>
-                <a:latin typeface="Arial"/>
-                <a:ea typeface="Arial"/>
-                <a:cs typeface="Arial"/>
-              </a:defRPr>
-            </a:lvl5pPr>
-            <a:lvl6pPr>
-              <a:defRPr sz="2100" b="0">
-                <a:solidFill>
-                  <a:srgbClr val="566A80"/>
-                </a:solidFill>
-                <a:latin typeface="Arial"/>
-                <a:ea typeface="Arial"/>
-                <a:cs typeface="Arial"/>
-              </a:defRPr>
-            </a:lvl6pPr>
-            <a:lvl7pPr>
-              <a:defRPr sz="2100" b="0">
-                <a:solidFill>
-                  <a:srgbClr val="566A80"/>
-                </a:solidFill>
-                <a:latin typeface="Arial"/>
-                <a:ea typeface="Arial"/>
-                <a:cs typeface="Arial"/>
-              </a:defRPr>
-            </a:lvl7pPr>
-            <a:lvl8pPr>
-              <a:defRPr sz="2100" b="0">
-                <a:solidFill>
-                  <a:srgbClr val="566A80"/>
-                </a:solidFill>
-                <a:latin typeface="Arial"/>
-                <a:ea typeface="Arial"/>
-                <a:cs typeface="Arial"/>
-              </a:defRPr>
-            </a:lvl8pPr>
-            <a:lvl9pPr>
-              <a:defRPr sz="2100" b="0">
-                <a:solidFill>
-                  <a:srgbClr val="566A80"/>
-                </a:solidFill>
-                <a:latin typeface="Arial"/>
-                <a:ea typeface="Arial"/>
-                <a:cs typeface="Arial"/>
-              </a:defRPr>
-            </a:lvl9pPr>
-          </a:lstStyle>
-          <a:p xmlns:a="http://schemas.openxmlformats.org/drawingml/2006/main">
-            <a:pPr>
-              <a:defRPr sz="2100" b="0">
-                <a:solidFill>
-                  <a:srgbClr val="566A80"/>
-                </a:solidFill>
-                <a:latin typeface="Arial"/>
-                <a:ea typeface="Arial"/>
-                <a:cs typeface="Arial"/>
-              </a:defRPr>
-            </a:pPr>
-            <a:r>
-              <a:rPr sz="2100" b="0">
-                <a:solidFill>
-                  <a:srgbClr val="566A80"/>
-                </a:solidFill>
-                <a:latin typeface="Arial"/>
-                <a:ea typeface="Arial"/>
-                <a:cs typeface="Arial"/>
-              </a:rPr>
-              <a:t>Рекомендація: виправити pulse та ack за ID,</a:t>
-            </a:r>
-          </a:p>
-          <a:p xmlns:a="http://schemas.openxmlformats.org/drawingml/2006/main">
-            <a:pPr>
-              <a:defRPr sz="2100" b="0">
-                <a:solidFill>
-                  <a:srgbClr val="566A80"/>
-                </a:solidFill>
-                <a:latin typeface="Arial"/>
-                <a:ea typeface="Arial"/>
-                <a:cs typeface="Arial"/>
-              </a:defRPr>
-            </a:pPr>
-            <a:r>
-              <a:rPr sz="2100" b="0">
-                <a:solidFill>
-                  <a:srgbClr val="566A80"/>
-                </a:solidFill>
-                <a:latin typeface="Arial"/>
-                <a:ea typeface="Arial"/>
-                <a:cs typeface="Arial"/>
-              </a:rPr>
-              <a:t>після цього повторити відповідні перевірки й регресію.</a:t>
-            </a:r>
-          </a:p>
-        </p:txBody>
-      </p:sp>
-    </p:spTree>
-    <p:extLst>
-      <p:ext uri="{BB962C8B-B14F-4D97-AF65-F5344CB8AC3E}">
-        <p14:creationId xmlns:p14="http://schemas.microsoft.com/office/powerpoint/2010/main" val="1965201007"/>
       </p:ext>
     </p:extLst>
   </p:cSld>

--- a/docs/presentation/SENTRY_SWM2_QA.pptx
+++ b/docs/presentation/SENTRY_SWM2_QA.pptx
@@ -2,22 +2,22 @@
 <file path=ppt/presentation.xml><?xml version="1.0" encoding="utf-8"?>
 <p:presentation xmlns:p="http://schemas.openxmlformats.org/presentationml/2006/main">
   <p:sldMasterIdLst>
-    <p:sldMasterId xmlns:r="http://schemas.openxmlformats.org/officeDocument/2006/relationships" id="2147483648" r:id="Raee74c157d194f94"/>
+    <p:sldMasterId xmlns:r="http://schemas.openxmlformats.org/officeDocument/2006/relationships" id="2147483648" r:id="R5bc24f22e95e47c5"/>
   </p:sldMasterIdLst>
   <p:notesMasterIdLst>
-    <p:notesMasterId xmlns:r="http://schemas.openxmlformats.org/officeDocument/2006/relationships" r:id="R922357230b7f4cd1"/>
+    <p:notesMasterId xmlns:r="http://schemas.openxmlformats.org/officeDocument/2006/relationships" r:id="R6fbcf4d7969e4ca0"/>
   </p:notesMasterIdLst>
   <p:sldIdLst>
-    <p:sldId xmlns:r="http://schemas.openxmlformats.org/officeDocument/2006/relationships" id="256" r:id="R3927c892008c4936"/>
-    <p:sldId xmlns:r="http://schemas.openxmlformats.org/officeDocument/2006/relationships" id="257" r:id="Rd34a9ed1f8b64665"/>
-    <p:sldId xmlns:r="http://schemas.openxmlformats.org/officeDocument/2006/relationships" id="258" r:id="R6742a008b18d4231"/>
-    <p:sldId xmlns:r="http://schemas.openxmlformats.org/officeDocument/2006/relationships" id="259" r:id="R9445e41b77584a44"/>
-    <p:sldId xmlns:r="http://schemas.openxmlformats.org/officeDocument/2006/relationships" id="260" r:id="R0b28db2cf43049e3"/>
-    <p:sldId xmlns:r="http://schemas.openxmlformats.org/officeDocument/2006/relationships" id="261" r:id="R8fdf6988f7114dc7"/>
-    <p:sldId xmlns:r="http://schemas.openxmlformats.org/officeDocument/2006/relationships" id="262" r:id="Rb0b28ff8608549b3"/>
-    <p:sldId xmlns:r="http://schemas.openxmlformats.org/officeDocument/2006/relationships" id="263" r:id="Rea4c79b1e47a4eab"/>
-    <p:sldId xmlns:r="http://schemas.openxmlformats.org/officeDocument/2006/relationships" id="264" r:id="R2da40d0dd88f4aa8"/>
-    <p:sldId xmlns:r="http://schemas.openxmlformats.org/officeDocument/2006/relationships" id="265" r:id="R2f7e6def86864698"/>
+    <p:sldId xmlns:r="http://schemas.openxmlformats.org/officeDocument/2006/relationships" id="256" r:id="R25fb744ae368473b"/>
+    <p:sldId xmlns:r="http://schemas.openxmlformats.org/officeDocument/2006/relationships" id="257" r:id="R11d7e20b9713486a"/>
+    <p:sldId xmlns:r="http://schemas.openxmlformats.org/officeDocument/2006/relationships" id="258" r:id="R4748f54bc3e648ab"/>
+    <p:sldId xmlns:r="http://schemas.openxmlformats.org/officeDocument/2006/relationships" id="259" r:id="R8552bcf705024313"/>
+    <p:sldId xmlns:r="http://schemas.openxmlformats.org/officeDocument/2006/relationships" id="260" r:id="Re55aa2d2ccd0463c"/>
+    <p:sldId xmlns:r="http://schemas.openxmlformats.org/officeDocument/2006/relationships" id="261" r:id="R9143af164862423f"/>
+    <p:sldId xmlns:r="http://schemas.openxmlformats.org/officeDocument/2006/relationships" id="262" r:id="R7e57bdb79eba4d8a"/>
+    <p:sldId xmlns:r="http://schemas.openxmlformats.org/officeDocument/2006/relationships" id="263" r:id="R2434542c7f8748ea"/>
+    <p:sldId xmlns:r="http://schemas.openxmlformats.org/officeDocument/2006/relationships" id="264" r:id="R3dd0c6fda5bd42c6"/>
+    <p:sldId xmlns:r="http://schemas.openxmlformats.org/officeDocument/2006/relationships" id="265" r:id="R442b7957f3284a9e"/>
   </p:sldIdLst>
   <p:sldSz cx="12192000" cy="6858000"/>
   <p:notesSz cx="6858000" cy="9144000"/>
@@ -534,6 +534,11 @@
               <a:t>https://github.com/rpozniak/sentry-swm2-qa/blob/main/docs/TRACEABILITY.md</a:t>
             </a:r>
           </a:p>
+          <a:p xmlns:a="http://schemas.openxmlformats.org/drawingml/2006/main">
+            <a:r>
+              <a:t>Ручний прогін 2.3.0, 24.10.2026: TC-RL-02 і TC-RL-03 — Pass за повідомленням виконавця про відповідність усім умовам. Результат включає ON/OFF для обох пар COM–NO/COM–NC і зовнішнього LED. Фото стенда показує обладнання та LED при ON. Окремого UART-логу або відео прозвонювання не надано. Джерело: logs/manual-2.3.0-01/OPERATOR_REPORT.md. TC-LM-09 і TC-LM-10 на 2.3.0 залишаються Not Run. На 2.1.0 усі чотири ручні кейси — Not Run. Підсумок за кейсами 2.3.0: 30 Pass, 3 Fail, 2 Not Run, 1 N/A. Автоматизовані результати та NO-GO не змінені.</a:t>
+            </a:r>
+          </a:p>
         </p:txBody>
       </p:sp>
       <p:sp>
@@ -836,7 +841,12 @@
           <a:lstStyle xmlns:a="http://schemas.openxmlformats.org/drawingml/2006/main"/>
           <a:p xmlns:a="http://schemas.openxmlformats.org/drawingml/2006/main">
             <a:r>
-              <a:t>Фото надав автор проєкту 24.10.2026. Оригінал: docs/assets/REAL_STAND_2026-10-24.jpg. Опис: docs/REAL_STAND.md. Автор підтвердив реле 5 В, Raspberry Pi 5, ESP32-S3, кнопки, датчик відстані, LED із резистором 220 Ом і мультиметр у режимі прозвонювання. Підключення за описом користувача: живлення модуля від Pi, IN з GPIO8 ESP32. Автор повідомив про спрацювання реле під час підготовки. Фото не змінює результатів фізичних кейсів. Журнал: docs/MANUAL_RUN.md. Поточний ручний стенд відрізняється від проєкту подальшої HIL-автоматизації на окремому слайді.</a:t>
+              <a:t>Фото надав автор проєкту 24.10.2026. Оригінал: docs/assets/REAL_STAND_2026-10-24.jpg. Опис: docs/REAL_STAND.md. Автор підтвердив реле 5 В, Raspberry Pi 5, ESP32-S3, кнопки, датчик відстані, LED із резистором 220 Ом і мультиметр у режимі прозвонювання. Підключення за описом користувача: живлення модуля від Pi, IN з GPIO8 ESP32. Автор підтвердив відповідність перевірок контактів і зовнішнього LED очікуванням. Журнал: docs/MANUAL_RUN.md. Поточний ручний стенд відрізняється від проєкту подальшої HIL-автоматизації на окремому слайді.</a:t>
+            </a:r>
+          </a:p>
+          <a:p xmlns:a="http://schemas.openxmlformats.org/drawingml/2006/main">
+            <a:r>
+              <a:t>Ручний прогін 2.3.0, 24.10.2026: TC-RL-02 і TC-RL-03 — Pass за повідомленням виконавця про відповідність усім умовам. Результат включає ON/OFF для обох пар COM–NO/COM–NC і зовнішнього LED. Фото стенда показує обладнання та LED при ON. Окремого UART-логу або відео прозвонювання не надано. Джерело: logs/manual-2.3.0-01/OPERATOR_REPORT.md. TC-LM-09 і TC-LM-10 на 2.3.0 залишаються Not Run. На 2.1.0 усі чотири ручні кейси — Not Run. Підсумок за кейсами 2.3.0: 30 Pass, 3 Fail, 2 Not Run, 1 N/A. Автоматизовані результати та NO-GO не змінені.</a:t>
             </a:r>
           </a:p>
         </p:txBody>
@@ -987,6 +997,11 @@
           <a:p xmlns:a="http://schemas.openxmlformats.org/drawingml/2006/main">
             <a:r>
               <a:t>https://github.com/rpozniak/sentry-swm2-qa/blob/main/docs/EXECUTION_RESULTS.md</a:t>
+            </a:r>
+          </a:p>
+          <a:p xmlns:a="http://schemas.openxmlformats.org/drawingml/2006/main">
+            <a:r>
+              <a:t>Ручний прогін 2.3.0, 24.10.2026: TC-RL-02 і TC-RL-03 — Pass за повідомленням виконавця про відповідність усім умовам. Результат включає ON/OFF для обох пар COM–NO/COM–NC і зовнішнього LED. Фото стенда показує обладнання та LED при ON. Окремого UART-логу або відео прозвонювання не надано. Джерело: logs/manual-2.3.0-01/OPERATOR_REPORT.md. TC-LM-09 і TC-LM-10 на 2.3.0 залишаються Not Run. На 2.1.0 усі чотири ручні кейси — Not Run. Підсумок за кейсами 2.3.0: 30 Pass, 3 Fail, 2 Not Run, 1 N/A. Автоматизовані результати та NO-GO не змінені.</a:t>
             </a:r>
           </a:p>
         </p:txBody>
@@ -3609,12 +3624,12 @@
   </p:cSld>
   <p:clrMap bg1="lt1" tx1="dk1" bg2="lt2" tx2="dk2" accent1="accent1" accent2="accent2" accent3="accent3" accent4="accent4" accent5="accent5" accent6="accent6" hlink="hlink" folHlink="folHlink"/>
   <p:sldLayoutIdLst>
-    <p:sldLayoutId xmlns:r="http://schemas.openxmlformats.org/officeDocument/2006/relationships" id="2147483649" r:id="Re89360c9c0d34a54"/>
-    <p:sldLayoutId xmlns:r="http://schemas.openxmlformats.org/officeDocument/2006/relationships" id="2147483650" r:id="R28abbaa3e83444dd"/>
-    <p:sldLayoutId xmlns:r="http://schemas.openxmlformats.org/officeDocument/2006/relationships" id="2147483651" r:id="Ra6e2a3a548f64d6d"/>
-    <p:sldLayoutId xmlns:r="http://schemas.openxmlformats.org/officeDocument/2006/relationships" id="2147483652" r:id="Rea3de692778648f8"/>
-    <p:sldLayoutId xmlns:r="http://schemas.openxmlformats.org/officeDocument/2006/relationships" id="2147483653" r:id="R2b8138ce5f944070"/>
-    <p:sldLayoutId xmlns:r="http://schemas.openxmlformats.org/officeDocument/2006/relationships" id="2147483654" r:id="R7aa6d1f762f34796"/>
+    <p:sldLayoutId xmlns:r="http://schemas.openxmlformats.org/officeDocument/2006/relationships" id="2147483649" r:id="Rc5f9c11d28784848"/>
+    <p:sldLayoutId xmlns:r="http://schemas.openxmlformats.org/officeDocument/2006/relationships" id="2147483650" r:id="R17b06670b6614e81"/>
+    <p:sldLayoutId xmlns:r="http://schemas.openxmlformats.org/officeDocument/2006/relationships" id="2147483651" r:id="R1881d436e7784b73"/>
+    <p:sldLayoutId xmlns:r="http://schemas.openxmlformats.org/officeDocument/2006/relationships" id="2147483652" r:id="R21f8e35de54c45ba"/>
+    <p:sldLayoutId xmlns:r="http://schemas.openxmlformats.org/officeDocument/2006/relationships" id="2147483653" r:id="Rc51e8588ff0e4692"/>
+    <p:sldLayoutId xmlns:r="http://schemas.openxmlformats.org/officeDocument/2006/relationships" id="2147483654" r:id="R4b9ccef4bf264e30"/>
   </p:sldLayoutIdLst>
   <p:txStyles>
     <p:titleStyle>
@@ -5738,7 +5753,7 @@
           <a:bodyPr xmlns:a="http://schemas.openxmlformats.org/drawingml/2006/main"/>
           <a:lstStyle xmlns:a="http://schemas.openxmlformats.org/drawingml/2006/main">
             <a:defPPr>
-              <a:defRPr sz="2100" b="0">
+              <a:defRPr sz="1950" b="0">
                 <a:solidFill>
                   <a:srgbClr val="566A80"/>
                 </a:solidFill>
@@ -5850,7 +5865,7 @@
           <a:p xmlns:a="http://schemas.openxmlformats.org/drawingml/2006/main">
             <a:pPr>
               <a:buNone/>
-              <a:defRPr sz="2100" b="0">
+              <a:defRPr sz="1950" b="0">
                 <a:solidFill>
                   <a:srgbClr val="566A80"/>
                 </a:solidFill>
@@ -5860,7 +5875,7 @@
               </a:defRPr>
             </a:pPr>
             <a:r>
-              <a:rPr sz="2100" b="0">
+              <a:rPr sz="1950" b="0">
                 <a:solidFill>
                   <a:srgbClr val="566A80"/>
                 </a:solidFill>
@@ -5868,13 +5883,13 @@
                 <a:ea typeface="Arial"/>
                 <a:cs typeface="Arial"/>
               </a:rPr>
-              <a:t>Рекомендація: виправити pulse та ack за ID,</a:t>
+              <a:t>Виправити pulse та ack за ID, повторити регресію.</a:t>
             </a:r>
           </a:p>
           <a:p xmlns:a="http://schemas.openxmlformats.org/drawingml/2006/main">
             <a:pPr>
               <a:buNone/>
-              <a:defRPr sz="2100" b="0">
+              <a:defRPr sz="1950" b="0">
                 <a:solidFill>
                   <a:srgbClr val="566A80"/>
                 </a:solidFill>
@@ -5884,7 +5899,7 @@
               </a:defRPr>
             </a:pPr>
             <a:r>
-              <a:rPr sz="2100" b="0">
+              <a:rPr sz="1950" b="0">
                 <a:solidFill>
                   <a:srgbClr val="566A80"/>
                 </a:solidFill>
@@ -5892,7 +5907,31 @@
                 <a:ea typeface="Arial"/>
                 <a:cs typeface="Arial"/>
               </a:rPr>
-              <a:t>після цього повторити відповідні перевірки й регресію.</a:t>
+              <a:t>Реле й зовнішній LED: Pass на 2.3.0.</a:t>
+            </a:r>
+          </a:p>
+          <a:p xmlns:a="http://schemas.openxmlformats.org/drawingml/2006/main">
+            <a:pPr>
+              <a:buNone/>
+              <a:defRPr sz="1950" b="0">
+                <a:solidFill>
+                  <a:srgbClr val="566A80"/>
+                </a:solidFill>
+                <a:latin typeface="Arial"/>
+                <a:ea typeface="Arial"/>
+                <a:cs typeface="Arial"/>
+              </a:defRPr>
+            </a:pPr>
+            <a:r>
+              <a:rPr sz="1950" b="0">
+                <a:solidFill>
+                  <a:srgbClr val="566A80"/>
+                </a:solidFill>
+                <a:latin typeface="Arial"/>
+                <a:ea typeface="Arial"/>
+                <a:cs typeface="Arial"/>
+              </a:rPr>
+              <a:t>Кольори RGB та яскравість: Not Run.</a:t>
             </a:r>
           </a:p>
         </p:txBody>
@@ -6999,7 +7038,7 @@
           <p:cNvPr id="8" name="">
             <a:extLst xmlns:a="http://schemas.openxmlformats.org/drawingml/2006/main">
               <a:ext uri="{FF2B5EF4-FFF2-40B4-BE49-F238E27FC236}">
-                <a16:creationId xmlns:a16="http://schemas.microsoft.com/office/drawing/2014/main" id="{9661C429-7953-46D8-BA49-2E63FED7A5B8}"/>
+                <a16:creationId xmlns:a16="http://schemas.microsoft.com/office/drawing/2014/main" id="{7F3DC05D-8E73-4023-8E38-13BF7B897BFB}"/>
               </a:ext>
             </a:extLst>
           </p:cNvPr>
@@ -7009,7 +7048,7 @@
           <p:nvPr/>
         </p:nvPicPr>
         <p:blipFill>
-          <a:blip xmlns:r="http://schemas.openxmlformats.org/officeDocument/2006/relationships" xmlns:a="http://schemas.openxmlformats.org/drawingml/2006/main" r:embed="R5025be20eff74ea1"/>
+          <a:blip xmlns:r="http://schemas.openxmlformats.org/officeDocument/2006/relationships" xmlns:a="http://schemas.openxmlformats.org/drawingml/2006/main" r:embed="R68b108181edf44ca"/>
           <a:stretch xmlns:a="http://schemas.openxmlformats.org/drawingml/2006/main"/>
         </p:blipFill>
         <p:spPr>
@@ -7554,7 +7593,7 @@
           <p:cNvPr id="4" name="">
             <a:extLst xmlns:a="http://schemas.openxmlformats.org/drawingml/2006/main">
               <a:ext uri="{FF2B5EF4-FFF2-40B4-BE49-F238E27FC236}">
-                <a16:creationId xmlns:a16="http://schemas.microsoft.com/office/drawing/2014/main" id="{53689B30-9903-495F-B143-38D8BAE155D6}"/>
+                <a16:creationId xmlns:a16="http://schemas.microsoft.com/office/drawing/2014/main" id="{F139A91F-8E28-41E6-ABA1-0295AFFC8787}"/>
               </a:ext>
             </a:extLst>
           </p:cNvPr>
@@ -10123,6 +10162,7 @@
               </a:defRPr>
             </a:defPPr>
             <a:lvl1pPr>
+              <a:buNone/>
               <a:defRPr sz="3300" b="1">
                 <a:solidFill>
                   <a:srgbClr val="182D45"/>
@@ -10133,6 +10173,7 @@
               </a:defRPr>
             </a:lvl1pPr>
             <a:lvl2pPr>
+              <a:buNone/>
               <a:defRPr sz="3300" b="1">
                 <a:solidFill>
                   <a:srgbClr val="182D45"/>
@@ -10143,6 +10184,7 @@
               </a:defRPr>
             </a:lvl2pPr>
             <a:lvl3pPr>
+              <a:buNone/>
               <a:defRPr sz="3300" b="1">
                 <a:solidFill>
                   <a:srgbClr val="182D45"/>
@@ -10153,6 +10195,7 @@
               </a:defRPr>
             </a:lvl3pPr>
             <a:lvl4pPr>
+              <a:buNone/>
               <a:defRPr sz="3300" b="1">
                 <a:solidFill>
                   <a:srgbClr val="182D45"/>
@@ -10163,6 +10206,7 @@
               </a:defRPr>
             </a:lvl4pPr>
             <a:lvl5pPr>
+              <a:buNone/>
               <a:defRPr sz="3300" b="1">
                 <a:solidFill>
                   <a:srgbClr val="182D45"/>
@@ -10173,6 +10217,7 @@
               </a:defRPr>
             </a:lvl5pPr>
             <a:lvl6pPr>
+              <a:buNone/>
               <a:defRPr sz="3300" b="1">
                 <a:solidFill>
                   <a:srgbClr val="182D45"/>
@@ -10183,6 +10228,7 @@
               </a:defRPr>
             </a:lvl6pPr>
             <a:lvl7pPr>
+              <a:buNone/>
               <a:defRPr sz="3300" b="1">
                 <a:solidFill>
                   <a:srgbClr val="182D45"/>
@@ -10193,6 +10239,7 @@
               </a:defRPr>
             </a:lvl7pPr>
             <a:lvl8pPr>
+              <a:buNone/>
               <a:defRPr sz="3300" b="1">
                 <a:solidFill>
                   <a:srgbClr val="182D45"/>
@@ -10203,6 +10250,7 @@
               </a:defRPr>
             </a:lvl8pPr>
             <a:lvl9pPr>
+              <a:buNone/>
               <a:defRPr sz="3300" b="1">
                 <a:solidFill>
                   <a:srgbClr val="182D45"/>
@@ -10215,6 +10263,7 @@
           </a:lstStyle>
           <a:p xmlns:a="http://schemas.openxmlformats.org/drawingml/2006/main">
             <a:pPr>
+              <a:buNone/>
               <a:defRPr sz="3300" b="1">
                 <a:solidFill>
                   <a:srgbClr val="182D45"/>
@@ -10243,7 +10292,7 @@
           <p:cNvPr id="2" name="">
             <a:extLst xmlns:a="http://schemas.openxmlformats.org/drawingml/2006/main">
               <a:ext uri="{FF2B5EF4-FFF2-40B4-BE49-F238E27FC236}">
-                <a16:creationId xmlns:a16="http://schemas.microsoft.com/office/drawing/2014/main" id="{DED0CDF1-601D-44E6-BE6B-6339124FA956}"/>
+                <a16:creationId xmlns:a16="http://schemas.microsoft.com/office/drawing/2014/main" id="{ADE7CB45-3180-4B77-A2FF-3947EAA4ABD4}"/>
               </a:ext>
             </a:extLst>
           </p:cNvPr>
@@ -10253,7 +10302,7 @@
           <p:nvPr/>
         </p:nvPicPr>
         <p:blipFill>
-          <a:blip xmlns:r="http://schemas.openxmlformats.org/officeDocument/2006/relationships" xmlns:a="http://schemas.openxmlformats.org/drawingml/2006/main" r:embed="R20095fbb25524d53"/>
+          <a:blip xmlns:r="http://schemas.openxmlformats.org/officeDocument/2006/relationships" xmlns:a="http://schemas.openxmlformats.org/drawingml/2006/main" r:embed="R470e512c81d84189"/>
           <a:stretch xmlns:a="http://schemas.openxmlformats.org/drawingml/2006/main"/>
         </p:blipFill>
         <p:spPr>
@@ -10307,6 +10356,7 @@
               </a:defRPr>
             </a:defPPr>
             <a:lvl1pPr>
+              <a:buNone/>
               <a:defRPr sz="2400" b="1">
                 <a:solidFill>
                   <a:srgbClr val="087F8C"/>
@@ -10317,6 +10367,7 @@
               </a:defRPr>
             </a:lvl1pPr>
             <a:lvl2pPr>
+              <a:buNone/>
               <a:defRPr sz="2400" b="1">
                 <a:solidFill>
                   <a:srgbClr val="087F8C"/>
@@ -10327,6 +10378,7 @@
               </a:defRPr>
             </a:lvl2pPr>
             <a:lvl3pPr>
+              <a:buNone/>
               <a:defRPr sz="2400" b="1">
                 <a:solidFill>
                   <a:srgbClr val="087F8C"/>
@@ -10337,6 +10389,7 @@
               </a:defRPr>
             </a:lvl3pPr>
             <a:lvl4pPr>
+              <a:buNone/>
               <a:defRPr sz="2400" b="1">
                 <a:solidFill>
                   <a:srgbClr val="087F8C"/>
@@ -10347,6 +10400,7 @@
               </a:defRPr>
             </a:lvl4pPr>
             <a:lvl5pPr>
+              <a:buNone/>
               <a:defRPr sz="2400" b="1">
                 <a:solidFill>
                   <a:srgbClr val="087F8C"/>
@@ -10357,6 +10411,7 @@
               </a:defRPr>
             </a:lvl5pPr>
             <a:lvl6pPr>
+              <a:buNone/>
               <a:defRPr sz="2400" b="1">
                 <a:solidFill>
                   <a:srgbClr val="087F8C"/>
@@ -10367,6 +10422,7 @@
               </a:defRPr>
             </a:lvl6pPr>
             <a:lvl7pPr>
+              <a:buNone/>
               <a:defRPr sz="2400" b="1">
                 <a:solidFill>
                   <a:srgbClr val="087F8C"/>
@@ -10377,6 +10433,7 @@
               </a:defRPr>
             </a:lvl7pPr>
             <a:lvl8pPr>
+              <a:buNone/>
               <a:defRPr sz="2400" b="1">
                 <a:solidFill>
                   <a:srgbClr val="087F8C"/>
@@ -10387,6 +10444,7 @@
               </a:defRPr>
             </a:lvl8pPr>
             <a:lvl9pPr>
+              <a:buNone/>
               <a:defRPr sz="2400" b="1">
                 <a:solidFill>
                   <a:srgbClr val="087F8C"/>
@@ -10399,6 +10457,7 @@
           </a:lstStyle>
           <a:p xmlns:a="http://schemas.openxmlformats.org/drawingml/2006/main">
             <a:pPr>
+              <a:buNone/>
               <a:defRPr sz="2400" b="1">
                 <a:solidFill>
                   <a:srgbClr val="087F8C"/>
@@ -10463,6 +10522,7 @@
               </a:defRPr>
             </a:defPPr>
             <a:lvl1pPr>
+              <a:buNone/>
               <a:defRPr sz="2025" b="0">
                 <a:solidFill>
                   <a:srgbClr val="182D45"/>
@@ -10473,6 +10533,7 @@
               </a:defRPr>
             </a:lvl1pPr>
             <a:lvl2pPr>
+              <a:buNone/>
               <a:defRPr sz="2025" b="0">
                 <a:solidFill>
                   <a:srgbClr val="182D45"/>
@@ -10483,6 +10544,7 @@
               </a:defRPr>
             </a:lvl2pPr>
             <a:lvl3pPr>
+              <a:buNone/>
               <a:defRPr sz="2025" b="0">
                 <a:solidFill>
                   <a:srgbClr val="182D45"/>
@@ -10493,6 +10555,7 @@
               </a:defRPr>
             </a:lvl3pPr>
             <a:lvl4pPr>
+              <a:buNone/>
               <a:defRPr sz="2025" b="0">
                 <a:solidFill>
                   <a:srgbClr val="182D45"/>
@@ -10503,6 +10566,7 @@
               </a:defRPr>
             </a:lvl4pPr>
             <a:lvl5pPr>
+              <a:buNone/>
               <a:defRPr sz="2025" b="0">
                 <a:solidFill>
                   <a:srgbClr val="182D45"/>
@@ -10513,6 +10577,7 @@
               </a:defRPr>
             </a:lvl5pPr>
             <a:lvl6pPr>
+              <a:buNone/>
               <a:defRPr sz="2025" b="0">
                 <a:solidFill>
                   <a:srgbClr val="182D45"/>
@@ -10523,6 +10588,7 @@
               </a:defRPr>
             </a:lvl6pPr>
             <a:lvl7pPr>
+              <a:buNone/>
               <a:defRPr sz="2025" b="0">
                 <a:solidFill>
                   <a:srgbClr val="182D45"/>
@@ -10533,6 +10599,7 @@
               </a:defRPr>
             </a:lvl7pPr>
             <a:lvl8pPr>
+              <a:buNone/>
               <a:defRPr sz="2025" b="0">
                 <a:solidFill>
                   <a:srgbClr val="182D45"/>
@@ -10543,6 +10610,7 @@
               </a:defRPr>
             </a:lvl8pPr>
             <a:lvl9pPr>
+              <a:buNone/>
               <a:defRPr sz="2025" b="0">
                 <a:solidFill>
                   <a:srgbClr val="182D45"/>
@@ -10555,6 +10623,7 @@
           </a:lstStyle>
           <a:p xmlns:a="http://schemas.openxmlformats.org/drawingml/2006/main">
             <a:pPr>
+              <a:buNone/>
               <a:defRPr sz="2025" b="0">
                 <a:solidFill>
                   <a:srgbClr val="182D45"/>
@@ -10619,6 +10688,7 @@
               </a:defRPr>
             </a:defPPr>
             <a:lvl1pPr>
+              <a:buNone/>
               <a:defRPr sz="2250" b="1">
                 <a:solidFill>
                   <a:srgbClr val="182D45"/>
@@ -10629,6 +10699,7 @@
               </a:defRPr>
             </a:lvl1pPr>
             <a:lvl2pPr>
+              <a:buNone/>
               <a:defRPr sz="2250" b="1">
                 <a:solidFill>
                   <a:srgbClr val="182D45"/>
@@ -10639,6 +10710,7 @@
               </a:defRPr>
             </a:lvl2pPr>
             <a:lvl3pPr>
+              <a:buNone/>
               <a:defRPr sz="2250" b="1">
                 <a:solidFill>
                   <a:srgbClr val="182D45"/>
@@ -10649,6 +10721,7 @@
               </a:defRPr>
             </a:lvl3pPr>
             <a:lvl4pPr>
+              <a:buNone/>
               <a:defRPr sz="2250" b="1">
                 <a:solidFill>
                   <a:srgbClr val="182D45"/>
@@ -10659,6 +10732,7 @@
               </a:defRPr>
             </a:lvl4pPr>
             <a:lvl5pPr>
+              <a:buNone/>
               <a:defRPr sz="2250" b="1">
                 <a:solidFill>
                   <a:srgbClr val="182D45"/>
@@ -10669,6 +10743,7 @@
               </a:defRPr>
             </a:lvl5pPr>
             <a:lvl6pPr>
+              <a:buNone/>
               <a:defRPr sz="2250" b="1">
                 <a:solidFill>
                   <a:srgbClr val="182D45"/>
@@ -10679,6 +10754,7 @@
               </a:defRPr>
             </a:lvl6pPr>
             <a:lvl7pPr>
+              <a:buNone/>
               <a:defRPr sz="2250" b="1">
                 <a:solidFill>
                   <a:srgbClr val="182D45"/>
@@ -10689,6 +10765,7 @@
               </a:defRPr>
             </a:lvl7pPr>
             <a:lvl8pPr>
+              <a:buNone/>
               <a:defRPr sz="2250" b="1">
                 <a:solidFill>
                   <a:srgbClr val="182D45"/>
@@ -10699,6 +10776,7 @@
               </a:defRPr>
             </a:lvl8pPr>
             <a:lvl9pPr>
+              <a:buNone/>
               <a:defRPr sz="2250" b="1">
                 <a:solidFill>
                   <a:srgbClr val="182D45"/>
@@ -10711,6 +10789,7 @@
           </a:lstStyle>
           <a:p xmlns:a="http://schemas.openxmlformats.org/drawingml/2006/main">
             <a:pPr>
+              <a:buNone/>
               <a:defRPr sz="2250" b="1">
                 <a:solidFill>
                   <a:srgbClr val="182D45"/>
@@ -10775,6 +10854,7 @@
               </a:defRPr>
             </a:defPPr>
             <a:lvl1pPr>
+              <a:buNone/>
               <a:defRPr sz="1950" b="0">
                 <a:solidFill>
                   <a:srgbClr val="182D45"/>
@@ -10785,6 +10865,7 @@
               </a:defRPr>
             </a:lvl1pPr>
             <a:lvl2pPr>
+              <a:buNone/>
               <a:defRPr sz="1950" b="0">
                 <a:solidFill>
                   <a:srgbClr val="182D45"/>
@@ -10795,6 +10876,7 @@
               </a:defRPr>
             </a:lvl2pPr>
             <a:lvl3pPr>
+              <a:buNone/>
               <a:defRPr sz="1950" b="0">
                 <a:solidFill>
                   <a:srgbClr val="182D45"/>
@@ -10805,6 +10887,7 @@
               </a:defRPr>
             </a:lvl3pPr>
             <a:lvl4pPr>
+              <a:buNone/>
               <a:defRPr sz="1950" b="0">
                 <a:solidFill>
                   <a:srgbClr val="182D45"/>
@@ -10815,6 +10898,7 @@
               </a:defRPr>
             </a:lvl4pPr>
             <a:lvl5pPr>
+              <a:buNone/>
               <a:defRPr sz="1950" b="0">
                 <a:solidFill>
                   <a:srgbClr val="182D45"/>
@@ -10825,6 +10909,7 @@
               </a:defRPr>
             </a:lvl5pPr>
             <a:lvl6pPr>
+              <a:buNone/>
               <a:defRPr sz="1950" b="0">
                 <a:solidFill>
                   <a:srgbClr val="182D45"/>
@@ -10835,6 +10920,7 @@
               </a:defRPr>
             </a:lvl6pPr>
             <a:lvl7pPr>
+              <a:buNone/>
               <a:defRPr sz="1950" b="0">
                 <a:solidFill>
                   <a:srgbClr val="182D45"/>
@@ -10845,6 +10931,7 @@
               </a:defRPr>
             </a:lvl7pPr>
             <a:lvl8pPr>
+              <a:buNone/>
               <a:defRPr sz="1950" b="0">
                 <a:solidFill>
                   <a:srgbClr val="182D45"/>
@@ -10855,6 +10942,7 @@
               </a:defRPr>
             </a:lvl8pPr>
             <a:lvl9pPr>
+              <a:buNone/>
               <a:defRPr sz="1950" b="0">
                 <a:solidFill>
                   <a:srgbClr val="182D45"/>
@@ -10867,6 +10955,7 @@
           </a:lstStyle>
           <a:p xmlns:a="http://schemas.openxmlformats.org/drawingml/2006/main">
             <a:pPr>
+              <a:buNone/>
               <a:defRPr sz="1950" b="0">
                 <a:solidFill>
                   <a:srgbClr val="182D45"/>
@@ -10931,6 +11020,7 @@
               </a:defRPr>
             </a:defPPr>
             <a:lvl1pPr>
+              <a:buNone/>
               <a:defRPr sz="2250" b="1">
                 <a:solidFill>
                   <a:srgbClr val="182D45"/>
@@ -10941,6 +11031,7 @@
               </a:defRPr>
             </a:lvl1pPr>
             <a:lvl2pPr>
+              <a:buNone/>
               <a:defRPr sz="2250" b="1">
                 <a:solidFill>
                   <a:srgbClr val="182D45"/>
@@ -10951,6 +11042,7 @@
               </a:defRPr>
             </a:lvl2pPr>
             <a:lvl3pPr>
+              <a:buNone/>
               <a:defRPr sz="2250" b="1">
                 <a:solidFill>
                   <a:srgbClr val="182D45"/>
@@ -10961,6 +11053,7 @@
               </a:defRPr>
             </a:lvl3pPr>
             <a:lvl4pPr>
+              <a:buNone/>
               <a:defRPr sz="2250" b="1">
                 <a:solidFill>
                   <a:srgbClr val="182D45"/>
@@ -10971,6 +11064,7 @@
               </a:defRPr>
             </a:lvl4pPr>
             <a:lvl5pPr>
+              <a:buNone/>
               <a:defRPr sz="2250" b="1">
                 <a:solidFill>
                   <a:srgbClr val="182D45"/>
@@ -10981,6 +11075,7 @@
               </a:defRPr>
             </a:lvl5pPr>
             <a:lvl6pPr>
+              <a:buNone/>
               <a:defRPr sz="2250" b="1">
                 <a:solidFill>
                   <a:srgbClr val="182D45"/>
@@ -10991,6 +11086,7 @@
               </a:defRPr>
             </a:lvl6pPr>
             <a:lvl7pPr>
+              <a:buNone/>
               <a:defRPr sz="2250" b="1">
                 <a:solidFill>
                   <a:srgbClr val="182D45"/>
@@ -11001,6 +11097,7 @@
               </a:defRPr>
             </a:lvl7pPr>
             <a:lvl8pPr>
+              <a:buNone/>
               <a:defRPr sz="2250" b="1">
                 <a:solidFill>
                   <a:srgbClr val="182D45"/>
@@ -11011,6 +11108,7 @@
               </a:defRPr>
             </a:lvl8pPr>
             <a:lvl9pPr>
+              <a:buNone/>
               <a:defRPr sz="2250" b="1">
                 <a:solidFill>
                   <a:srgbClr val="182D45"/>
@@ -11023,6 +11121,7 @@
           </a:lstStyle>
           <a:p xmlns:a="http://schemas.openxmlformats.org/drawingml/2006/main">
             <a:pPr>
+              <a:buNone/>
               <a:defRPr sz="2250" b="1">
                 <a:solidFill>
                   <a:srgbClr val="182D45"/>
@@ -11087,6 +11186,7 @@
               </a:defRPr>
             </a:defPPr>
             <a:lvl1pPr>
+              <a:buNone/>
               <a:defRPr sz="2025" b="0">
                 <a:solidFill>
                   <a:srgbClr val="182D45"/>
@@ -11097,6 +11197,7 @@
               </a:defRPr>
             </a:lvl1pPr>
             <a:lvl2pPr>
+              <a:buNone/>
               <a:defRPr sz="2025" b="0">
                 <a:solidFill>
                   <a:srgbClr val="182D45"/>
@@ -11107,6 +11208,7 @@
               </a:defRPr>
             </a:lvl2pPr>
             <a:lvl3pPr>
+              <a:buNone/>
               <a:defRPr sz="2025" b="0">
                 <a:solidFill>
                   <a:srgbClr val="182D45"/>
@@ -11117,6 +11219,7 @@
               </a:defRPr>
             </a:lvl3pPr>
             <a:lvl4pPr>
+              <a:buNone/>
               <a:defRPr sz="2025" b="0">
                 <a:solidFill>
                   <a:srgbClr val="182D45"/>
@@ -11127,6 +11230,7 @@
               </a:defRPr>
             </a:lvl4pPr>
             <a:lvl5pPr>
+              <a:buNone/>
               <a:defRPr sz="2025" b="0">
                 <a:solidFill>
                   <a:srgbClr val="182D45"/>
@@ -11137,6 +11241,7 @@
               </a:defRPr>
             </a:lvl5pPr>
             <a:lvl6pPr>
+              <a:buNone/>
               <a:defRPr sz="2025" b="0">
                 <a:solidFill>
                   <a:srgbClr val="182D45"/>
@@ -11147,6 +11252,7 @@
               </a:defRPr>
             </a:lvl6pPr>
             <a:lvl7pPr>
+              <a:buNone/>
               <a:defRPr sz="2025" b="0">
                 <a:solidFill>
                   <a:srgbClr val="182D45"/>
@@ -11157,6 +11263,7 @@
               </a:defRPr>
             </a:lvl7pPr>
             <a:lvl8pPr>
+              <a:buNone/>
               <a:defRPr sz="2025" b="0">
                 <a:solidFill>
                   <a:srgbClr val="182D45"/>
@@ -11167,6 +11274,7 @@
               </a:defRPr>
             </a:lvl8pPr>
             <a:lvl9pPr>
+              <a:buNone/>
               <a:defRPr sz="2025" b="0">
                 <a:solidFill>
                   <a:srgbClr val="182D45"/>
@@ -11179,6 +11287,7 @@
           </a:lstStyle>
           <a:p xmlns:a="http://schemas.openxmlformats.org/drawingml/2006/main">
             <a:pPr>
+              <a:buNone/>
               <a:defRPr sz="2025" b="0">
                 <a:solidFill>
                   <a:srgbClr val="182D45"/>
@@ -11243,6 +11352,7 @@
               </a:defRPr>
             </a:defPPr>
             <a:lvl1pPr>
+              <a:buNone/>
               <a:defRPr sz="2250" b="1">
                 <a:solidFill>
                   <a:srgbClr val="182D45"/>
@@ -11253,6 +11363,7 @@
               </a:defRPr>
             </a:lvl1pPr>
             <a:lvl2pPr>
+              <a:buNone/>
               <a:defRPr sz="2250" b="1">
                 <a:solidFill>
                   <a:srgbClr val="182D45"/>
@@ -11263,6 +11374,7 @@
               </a:defRPr>
             </a:lvl2pPr>
             <a:lvl3pPr>
+              <a:buNone/>
               <a:defRPr sz="2250" b="1">
                 <a:solidFill>
                   <a:srgbClr val="182D45"/>
@@ -11273,6 +11385,7 @@
               </a:defRPr>
             </a:lvl3pPr>
             <a:lvl4pPr>
+              <a:buNone/>
               <a:defRPr sz="2250" b="1">
                 <a:solidFill>
                   <a:srgbClr val="182D45"/>
@@ -11283,6 +11396,7 @@
               </a:defRPr>
             </a:lvl4pPr>
             <a:lvl5pPr>
+              <a:buNone/>
               <a:defRPr sz="2250" b="1">
                 <a:solidFill>
                   <a:srgbClr val="182D45"/>
@@ -11293,6 +11407,7 @@
               </a:defRPr>
             </a:lvl5pPr>
             <a:lvl6pPr>
+              <a:buNone/>
               <a:defRPr sz="2250" b="1">
                 <a:solidFill>
                   <a:srgbClr val="182D45"/>
@@ -11303,6 +11418,7 @@
               </a:defRPr>
             </a:lvl6pPr>
             <a:lvl7pPr>
+              <a:buNone/>
               <a:defRPr sz="2250" b="1">
                 <a:solidFill>
                   <a:srgbClr val="182D45"/>
@@ -11313,6 +11429,7 @@
               </a:defRPr>
             </a:lvl7pPr>
             <a:lvl8pPr>
+              <a:buNone/>
               <a:defRPr sz="2250" b="1">
                 <a:solidFill>
                   <a:srgbClr val="182D45"/>
@@ -11323,6 +11440,7 @@
               </a:defRPr>
             </a:lvl8pPr>
             <a:lvl9pPr>
+              <a:buNone/>
               <a:defRPr sz="2250" b="1">
                 <a:solidFill>
                   <a:srgbClr val="182D45"/>
@@ -11335,6 +11453,7 @@
           </a:lstStyle>
           <a:p xmlns:a="http://schemas.openxmlformats.org/drawingml/2006/main">
             <a:pPr>
+              <a:buNone/>
               <a:defRPr sz="2250" b="1">
                 <a:solidFill>
                   <a:srgbClr val="182D45"/>
@@ -11399,6 +11518,7 @@
               </a:defRPr>
             </a:defPPr>
             <a:lvl1pPr>
+              <a:buNone/>
               <a:defRPr sz="2025" b="0">
                 <a:solidFill>
                   <a:srgbClr val="182D45"/>
@@ -11409,6 +11529,7 @@
               </a:defRPr>
             </a:lvl1pPr>
             <a:lvl2pPr>
+              <a:buNone/>
               <a:defRPr sz="2025" b="0">
                 <a:solidFill>
                   <a:srgbClr val="182D45"/>
@@ -11419,6 +11540,7 @@
               </a:defRPr>
             </a:lvl2pPr>
             <a:lvl3pPr>
+              <a:buNone/>
               <a:defRPr sz="2025" b="0">
                 <a:solidFill>
                   <a:srgbClr val="182D45"/>
@@ -11429,6 +11551,7 @@
               </a:defRPr>
             </a:lvl3pPr>
             <a:lvl4pPr>
+              <a:buNone/>
               <a:defRPr sz="2025" b="0">
                 <a:solidFill>
                   <a:srgbClr val="182D45"/>
@@ -11439,6 +11562,7 @@
               </a:defRPr>
             </a:lvl4pPr>
             <a:lvl5pPr>
+              <a:buNone/>
               <a:defRPr sz="2025" b="0">
                 <a:solidFill>
                   <a:srgbClr val="182D45"/>
@@ -11449,6 +11573,7 @@
               </a:defRPr>
             </a:lvl5pPr>
             <a:lvl6pPr>
+              <a:buNone/>
               <a:defRPr sz="2025" b="0">
                 <a:solidFill>
                   <a:srgbClr val="182D45"/>
@@ -11459,6 +11584,7 @@
               </a:defRPr>
             </a:lvl6pPr>
             <a:lvl7pPr>
+              <a:buNone/>
               <a:defRPr sz="2025" b="0">
                 <a:solidFill>
                   <a:srgbClr val="182D45"/>
@@ -11469,6 +11595,7 @@
               </a:defRPr>
             </a:lvl7pPr>
             <a:lvl8pPr>
+              <a:buNone/>
               <a:defRPr sz="2025" b="0">
                 <a:solidFill>
                   <a:srgbClr val="182D45"/>
@@ -11479,6 +11606,7 @@
               </a:defRPr>
             </a:lvl8pPr>
             <a:lvl9pPr>
+              <a:buNone/>
               <a:defRPr sz="2025" b="0">
                 <a:solidFill>
                   <a:srgbClr val="182D45"/>
@@ -11491,6 +11619,7 @@
           </a:lstStyle>
           <a:p xmlns:a="http://schemas.openxmlformats.org/drawingml/2006/main">
             <a:pPr>
+              <a:buNone/>
               <a:defRPr sz="2025" b="0">
                 <a:solidFill>
                   <a:srgbClr val="182D45"/>
@@ -11555,6 +11684,7 @@
               </a:defRPr>
             </a:defPPr>
             <a:lvl1pPr>
+              <a:buNone/>
               <a:defRPr sz="1650" b="0">
                 <a:solidFill>
                   <a:srgbClr val="566A80"/>
@@ -11565,6 +11695,7 @@
               </a:defRPr>
             </a:lvl1pPr>
             <a:lvl2pPr>
+              <a:buNone/>
               <a:defRPr sz="1650" b="0">
                 <a:solidFill>
                   <a:srgbClr val="566A80"/>
@@ -11575,6 +11706,7 @@
               </a:defRPr>
             </a:lvl2pPr>
             <a:lvl3pPr>
+              <a:buNone/>
               <a:defRPr sz="1650" b="0">
                 <a:solidFill>
                   <a:srgbClr val="566A80"/>
@@ -11585,6 +11717,7 @@
               </a:defRPr>
             </a:lvl3pPr>
             <a:lvl4pPr>
+              <a:buNone/>
               <a:defRPr sz="1650" b="0">
                 <a:solidFill>
                   <a:srgbClr val="566A80"/>
@@ -11595,6 +11728,7 @@
               </a:defRPr>
             </a:lvl4pPr>
             <a:lvl5pPr>
+              <a:buNone/>
               <a:defRPr sz="1650" b="0">
                 <a:solidFill>
                   <a:srgbClr val="566A80"/>
@@ -11605,6 +11739,7 @@
               </a:defRPr>
             </a:lvl5pPr>
             <a:lvl6pPr>
+              <a:buNone/>
               <a:defRPr sz="1650" b="0">
                 <a:solidFill>
                   <a:srgbClr val="566A80"/>
@@ -11615,6 +11750,7 @@
               </a:defRPr>
             </a:lvl6pPr>
             <a:lvl7pPr>
+              <a:buNone/>
               <a:defRPr sz="1650" b="0">
                 <a:solidFill>
                   <a:srgbClr val="566A80"/>
@@ -11625,6 +11761,7 @@
               </a:defRPr>
             </a:lvl7pPr>
             <a:lvl8pPr>
+              <a:buNone/>
               <a:defRPr sz="1650" b="0">
                 <a:solidFill>
                   <a:srgbClr val="566A80"/>
@@ -11635,6 +11772,7 @@
               </a:defRPr>
             </a:lvl8pPr>
             <a:lvl9pPr>
+              <a:buNone/>
               <a:defRPr sz="1650" b="0">
                 <a:solidFill>
                   <a:srgbClr val="566A80"/>
@@ -11647,6 +11785,7 @@
           </a:lstStyle>
           <a:p xmlns:a="http://schemas.openxmlformats.org/drawingml/2006/main">
             <a:pPr>
+              <a:buNone/>
               <a:defRPr sz="1650" b="0">
                 <a:solidFill>
                   <a:srgbClr val="566A80"/>
@@ -11665,11 +11804,12 @@
                 <a:ea typeface="Arial"/>
                 <a:cs typeface="Arial"/>
               </a:rPr>
-              <a:t>Фото стенда від 24.10.2026. Результати</a:t>
+              <a:t>2.3.0: реле та зовнішній LED — Pass.</a:t>
             </a:r>
           </a:p>
           <a:p xmlns:a="http://schemas.openxmlformats.org/drawingml/2006/main">
             <a:pPr>
+              <a:buNone/>
               <a:defRPr sz="1650" b="0">
                 <a:solidFill>
                   <a:srgbClr val="566A80"/>
@@ -11688,7 +11828,7 @@
                 <a:ea typeface="Arial"/>
                 <a:cs typeface="Arial"/>
               </a:rPr>
-              <a:t>фізичних перевірок фіксуються в журналі.</a:t>
+              <a:t>Підтверджено виконавцем 24.10.2026.</a:t>
             </a:r>
           </a:p>
         </p:txBody>
@@ -11734,6 +11874,7 @@
               </a:defRPr>
             </a:defPPr>
             <a:lvl1pPr>
+              <a:buNone/>
               <a:defRPr sz="1350" b="0">
                 <a:solidFill>
                   <a:srgbClr val="566A80"/>
@@ -11744,6 +11885,7 @@
               </a:defRPr>
             </a:lvl1pPr>
             <a:lvl2pPr>
+              <a:buNone/>
               <a:defRPr sz="1350" b="0">
                 <a:solidFill>
                   <a:srgbClr val="566A80"/>
@@ -11754,6 +11896,7 @@
               </a:defRPr>
             </a:lvl2pPr>
             <a:lvl3pPr>
+              <a:buNone/>
               <a:defRPr sz="1350" b="0">
                 <a:solidFill>
                   <a:srgbClr val="566A80"/>
@@ -11764,6 +11907,7 @@
               </a:defRPr>
             </a:lvl3pPr>
             <a:lvl4pPr>
+              <a:buNone/>
               <a:defRPr sz="1350" b="0">
                 <a:solidFill>
                   <a:srgbClr val="566A80"/>
@@ -11774,6 +11918,7 @@
               </a:defRPr>
             </a:lvl4pPr>
             <a:lvl5pPr>
+              <a:buNone/>
               <a:defRPr sz="1350" b="0">
                 <a:solidFill>
                   <a:srgbClr val="566A80"/>
@@ -11784,6 +11929,7 @@
               </a:defRPr>
             </a:lvl5pPr>
             <a:lvl6pPr>
+              <a:buNone/>
               <a:defRPr sz="1350" b="0">
                 <a:solidFill>
                   <a:srgbClr val="566A80"/>
@@ -11794,6 +11940,7 @@
               </a:defRPr>
             </a:lvl6pPr>
             <a:lvl7pPr>
+              <a:buNone/>
               <a:defRPr sz="1350" b="0">
                 <a:solidFill>
                   <a:srgbClr val="566A80"/>
@@ -11804,6 +11951,7 @@
               </a:defRPr>
             </a:lvl7pPr>
             <a:lvl8pPr>
+              <a:buNone/>
               <a:defRPr sz="1350" b="0">
                 <a:solidFill>
                   <a:srgbClr val="566A80"/>
@@ -11814,6 +11962,7 @@
               </a:defRPr>
             </a:lvl8pPr>
             <a:lvl9pPr>
+              <a:buNone/>
               <a:defRPr sz="1350" b="0">
                 <a:solidFill>
                   <a:srgbClr val="566A80"/>
@@ -11826,6 +11975,7 @@
           </a:lstStyle>
           <a:p xmlns:a="http://schemas.openxmlformats.org/drawingml/2006/main">
             <a:pPr>
+              <a:buNone/>
               <a:defRPr sz="1350" b="0">
                 <a:solidFill>
                   <a:srgbClr val="566A80"/>
@@ -12215,7 +12365,7 @@
           <p:cNvPr id="4" name="">
             <a:extLst xmlns:a="http://schemas.openxmlformats.org/drawingml/2006/main">
               <a:ext uri="{FF2B5EF4-FFF2-40B4-BE49-F238E27FC236}">
-                <a16:creationId xmlns:a16="http://schemas.microsoft.com/office/drawing/2014/main" id="{9AF2877B-250F-4D7D-8CE0-598DA2D7D333}"/>
+                <a16:creationId xmlns:a16="http://schemas.microsoft.com/office/drawing/2014/main" id="{F2E2F041-8D30-4C5A-874E-F0AC3F21F978}"/>
               </a:ext>
             </a:extLst>
           </p:cNvPr>
@@ -13443,7 +13593,7 @@
           <p:cNvPr id="4" name="">
             <a:extLst xmlns:a="http://schemas.openxmlformats.org/drawingml/2006/main">
               <a:ext uri="{FF2B5EF4-FFF2-40B4-BE49-F238E27FC236}">
-                <a16:creationId xmlns:a16="http://schemas.microsoft.com/office/drawing/2014/main" id="{CAB24C05-287E-41AC-A2B1-C4AE15ED731D}"/>
+                <a16:creationId xmlns:a16="http://schemas.microsoft.com/office/drawing/2014/main" id="{F199FFCD-5E78-45A4-A50E-ED7155A0A86D}"/>
               </a:ext>
             </a:extLst>
           </p:cNvPr>
@@ -14415,6 +14565,162 @@
                 <a:cs typeface="Arial"/>
               </a:rPr>
               <a:t>Повторні відтворення не збільшують підсумок основних прогонів.</a:t>
+            </a:r>
+          </a:p>
+        </p:txBody>
+      </p:sp>
+      <p:sp>
+        <p:nvSpPr>
+          <p:cNvPr id="7" name="manual-results">
+            <a:extLst xmlns:a="http://schemas.openxmlformats.org/drawingml/2006/main">
+              <a:ext uri="{FF2B5EF4-FFF2-40B4-BE49-F238E27FC236}">
+                <a16:creationId xmlns:a16="http://schemas.microsoft.com/office/drawing/2014/main" id="{5DFB1954-8272-4CD3-A305-129B02B5AA45}"/>
+              </a:ext>
+            </a:extLst>
+          </p:cNvPr>
+          <p:cNvSpPr>
+            <a:spLocks xmlns:a="http://schemas.openxmlformats.org/drawingml/2006/main" noGrp="1"/>
+          </p:cNvSpPr>
+          <p:nvPr/>
+        </p:nvSpPr>
+        <p:spPr>
+          <a:xfrm xmlns:a="http://schemas.openxmlformats.org/drawingml/2006/main">
+            <a:off x="609600" y="5953125"/>
+            <a:ext cx="10972800" cy="361950"/>
+          </a:xfrm>
+          <a:prstGeom xmlns:a="http://schemas.openxmlformats.org/drawingml/2006/main" prst="rect">
+            <a:avLst/>
+          </a:prstGeom>
+          <a:noFill xmlns:a="http://schemas.openxmlformats.org/drawingml/2006/main"/>
+          <a:ln xmlns:a="http://schemas.openxmlformats.org/drawingml/2006/main" w="0">
+            <a:noFill/>
+          </a:ln>
+        </p:spPr>
+        <p:txBody>
+          <a:bodyPr xmlns:a="http://schemas.openxmlformats.org/drawingml/2006/main"/>
+          <a:lstStyle xmlns:a="http://schemas.openxmlformats.org/drawingml/2006/main">
+            <a:defPPr>
+              <a:defRPr sz="1950" b="1">
+                <a:solidFill>
+                  <a:srgbClr val="087F8C"/>
+                </a:solidFill>
+                <a:latin typeface="Arial"/>
+                <a:ea typeface="Arial"/>
+                <a:cs typeface="Arial"/>
+              </a:defRPr>
+            </a:defPPr>
+            <a:lvl1pPr>
+              <a:defRPr sz="1950" b="1">
+                <a:solidFill>
+                  <a:srgbClr val="087F8C"/>
+                </a:solidFill>
+                <a:latin typeface="Arial"/>
+                <a:ea typeface="Arial"/>
+                <a:cs typeface="Arial"/>
+              </a:defRPr>
+            </a:lvl1pPr>
+            <a:lvl2pPr>
+              <a:defRPr sz="1950" b="1">
+                <a:solidFill>
+                  <a:srgbClr val="087F8C"/>
+                </a:solidFill>
+                <a:latin typeface="Arial"/>
+                <a:ea typeface="Arial"/>
+                <a:cs typeface="Arial"/>
+              </a:defRPr>
+            </a:lvl2pPr>
+            <a:lvl3pPr>
+              <a:defRPr sz="1950" b="1">
+                <a:solidFill>
+                  <a:srgbClr val="087F8C"/>
+                </a:solidFill>
+                <a:latin typeface="Arial"/>
+                <a:ea typeface="Arial"/>
+                <a:cs typeface="Arial"/>
+              </a:defRPr>
+            </a:lvl3pPr>
+            <a:lvl4pPr>
+              <a:defRPr sz="1950" b="1">
+                <a:solidFill>
+                  <a:srgbClr val="087F8C"/>
+                </a:solidFill>
+                <a:latin typeface="Arial"/>
+                <a:ea typeface="Arial"/>
+                <a:cs typeface="Arial"/>
+              </a:defRPr>
+            </a:lvl4pPr>
+            <a:lvl5pPr>
+              <a:defRPr sz="1950" b="1">
+                <a:solidFill>
+                  <a:srgbClr val="087F8C"/>
+                </a:solidFill>
+                <a:latin typeface="Arial"/>
+                <a:ea typeface="Arial"/>
+                <a:cs typeface="Arial"/>
+              </a:defRPr>
+            </a:lvl5pPr>
+            <a:lvl6pPr>
+              <a:defRPr sz="1950" b="1">
+                <a:solidFill>
+                  <a:srgbClr val="087F8C"/>
+                </a:solidFill>
+                <a:latin typeface="Arial"/>
+                <a:ea typeface="Arial"/>
+                <a:cs typeface="Arial"/>
+              </a:defRPr>
+            </a:lvl6pPr>
+            <a:lvl7pPr>
+              <a:defRPr sz="1950" b="1">
+                <a:solidFill>
+                  <a:srgbClr val="087F8C"/>
+                </a:solidFill>
+                <a:latin typeface="Arial"/>
+                <a:ea typeface="Arial"/>
+                <a:cs typeface="Arial"/>
+              </a:defRPr>
+            </a:lvl7pPr>
+            <a:lvl8pPr>
+              <a:defRPr sz="1950" b="1">
+                <a:solidFill>
+                  <a:srgbClr val="087F8C"/>
+                </a:solidFill>
+                <a:latin typeface="Arial"/>
+                <a:ea typeface="Arial"/>
+                <a:cs typeface="Arial"/>
+              </a:defRPr>
+            </a:lvl8pPr>
+            <a:lvl9pPr>
+              <a:defRPr sz="1950" b="1">
+                <a:solidFill>
+                  <a:srgbClr val="087F8C"/>
+                </a:solidFill>
+                <a:latin typeface="Arial"/>
+                <a:ea typeface="Arial"/>
+                <a:cs typeface="Arial"/>
+              </a:defRPr>
+            </a:lvl9pPr>
+          </a:lstStyle>
+          <a:p xmlns:a="http://schemas.openxmlformats.org/drawingml/2006/main">
+            <a:pPr>
+              <a:defRPr sz="1950" b="1">
+                <a:solidFill>
+                  <a:srgbClr val="087F8C"/>
+                </a:solidFill>
+                <a:latin typeface="Arial"/>
+                <a:ea typeface="Arial"/>
+                <a:cs typeface="Arial"/>
+              </a:defRPr>
+            </a:pPr>
+            <a:r>
+              <a:rPr sz="1950" b="1">
+                <a:solidFill>
+                  <a:srgbClr val="087F8C"/>
+                </a:solidFill>
+                <a:latin typeface="Arial"/>
+                <a:ea typeface="Arial"/>
+                <a:cs typeface="Arial"/>
+              </a:rPr>
+              <a:t>Ручні кейси 2.3.0: 2 Pass, 2 Not Run (RGB)</a:t>
             </a:r>
           </a:p>
         </p:txBody>
@@ -14785,7 +15091,7 @@
           <p:cNvPr id="4" name="">
             <a:extLst xmlns:a="http://schemas.openxmlformats.org/drawingml/2006/main">
               <a:ext uri="{FF2B5EF4-FFF2-40B4-BE49-F238E27FC236}">
-                <a16:creationId xmlns:a16="http://schemas.microsoft.com/office/drawing/2014/main" id="{1C4E020B-F359-4082-827F-093CC4D2A076}"/>
+                <a16:creationId xmlns:a16="http://schemas.microsoft.com/office/drawing/2014/main" id="{2600C033-843B-47C4-A558-CBA89D16D3D8}"/>
               </a:ext>
             </a:extLst>
           </p:cNvPr>
@@ -16430,7 +16736,7 @@
           <p:cNvPr id="4" name="">
             <a:extLst xmlns:a="http://schemas.openxmlformats.org/drawingml/2006/main">
               <a:ext uri="{FF2B5EF4-FFF2-40B4-BE49-F238E27FC236}">
-                <a16:creationId xmlns:a16="http://schemas.microsoft.com/office/drawing/2014/main" id="{521C8953-6CFF-4227-9D44-D19AABF712FA}"/>
+                <a16:creationId xmlns:a16="http://schemas.microsoft.com/office/drawing/2014/main" id="{F32F41C4-8505-4E7F-AAD5-5FCEE8B4C8A8}"/>
               </a:ext>
             </a:extLst>
           </p:cNvPr>
@@ -16440,7 +16746,7 @@
           <p:nvPr/>
         </p:nvPicPr>
         <p:blipFill>
-          <a:blip xmlns:r="http://schemas.openxmlformats.org/officeDocument/2006/relationships" xmlns:a="http://schemas.openxmlformats.org/drawingml/2006/main" r:embed="Rfe8342c4756d47d6"/>
+          <a:blip xmlns:r="http://schemas.openxmlformats.org/officeDocument/2006/relationships" xmlns:a="http://schemas.openxmlformats.org/drawingml/2006/main" r:embed="R308b5bea5e664b43"/>
           <a:stretch xmlns:a="http://schemas.openxmlformats.org/drawingml/2006/main"/>
         </p:blipFill>
         <p:spPr>

--- a/docs/presentation/SENTRY_SWM2_QA.pptx
+++ b/docs/presentation/SENTRY_SWM2_QA.pptx
@@ -2,22 +2,22 @@
 <file path=ppt/presentation.xml><?xml version="1.0" encoding="utf-8"?>
 <p:presentation xmlns:p="http://schemas.openxmlformats.org/presentationml/2006/main">
   <p:sldMasterIdLst>
-    <p:sldMasterId xmlns:r="http://schemas.openxmlformats.org/officeDocument/2006/relationships" id="2147483648" r:id="R5bc24f22e95e47c5"/>
+    <p:sldMasterId xmlns:r="http://schemas.openxmlformats.org/officeDocument/2006/relationships" id="2147483648" r:id="Ra9f9fa88be9242f7"/>
   </p:sldMasterIdLst>
   <p:notesMasterIdLst>
-    <p:notesMasterId xmlns:r="http://schemas.openxmlformats.org/officeDocument/2006/relationships" r:id="R6fbcf4d7969e4ca0"/>
+    <p:notesMasterId xmlns:r="http://schemas.openxmlformats.org/officeDocument/2006/relationships" r:id="R660f3797b90b4fa1"/>
   </p:notesMasterIdLst>
   <p:sldIdLst>
-    <p:sldId xmlns:r="http://schemas.openxmlformats.org/officeDocument/2006/relationships" id="256" r:id="R25fb744ae368473b"/>
-    <p:sldId xmlns:r="http://schemas.openxmlformats.org/officeDocument/2006/relationships" id="257" r:id="R11d7e20b9713486a"/>
-    <p:sldId xmlns:r="http://schemas.openxmlformats.org/officeDocument/2006/relationships" id="258" r:id="R4748f54bc3e648ab"/>
-    <p:sldId xmlns:r="http://schemas.openxmlformats.org/officeDocument/2006/relationships" id="259" r:id="R8552bcf705024313"/>
-    <p:sldId xmlns:r="http://schemas.openxmlformats.org/officeDocument/2006/relationships" id="260" r:id="Re55aa2d2ccd0463c"/>
-    <p:sldId xmlns:r="http://schemas.openxmlformats.org/officeDocument/2006/relationships" id="261" r:id="R9143af164862423f"/>
-    <p:sldId xmlns:r="http://schemas.openxmlformats.org/officeDocument/2006/relationships" id="262" r:id="R7e57bdb79eba4d8a"/>
-    <p:sldId xmlns:r="http://schemas.openxmlformats.org/officeDocument/2006/relationships" id="263" r:id="R2434542c7f8748ea"/>
-    <p:sldId xmlns:r="http://schemas.openxmlformats.org/officeDocument/2006/relationships" id="264" r:id="R3dd0c6fda5bd42c6"/>
-    <p:sldId xmlns:r="http://schemas.openxmlformats.org/officeDocument/2006/relationships" id="265" r:id="R442b7957f3284a9e"/>
+    <p:sldId xmlns:r="http://schemas.openxmlformats.org/officeDocument/2006/relationships" id="256" r:id="Ra89fc4790af644e4"/>
+    <p:sldId xmlns:r="http://schemas.openxmlformats.org/officeDocument/2006/relationships" id="257" r:id="Rdedaef74a06e44cf"/>
+    <p:sldId xmlns:r="http://schemas.openxmlformats.org/officeDocument/2006/relationships" id="258" r:id="R5b7d6e6196064055"/>
+    <p:sldId xmlns:r="http://schemas.openxmlformats.org/officeDocument/2006/relationships" id="259" r:id="Rdb705af8864a4bc8"/>
+    <p:sldId xmlns:r="http://schemas.openxmlformats.org/officeDocument/2006/relationships" id="260" r:id="Rc5c493d582fd410e"/>
+    <p:sldId xmlns:r="http://schemas.openxmlformats.org/officeDocument/2006/relationships" id="261" r:id="R85c7114952f340ea"/>
+    <p:sldId xmlns:r="http://schemas.openxmlformats.org/officeDocument/2006/relationships" id="262" r:id="R9e6dbc3f16bd4cae"/>
+    <p:sldId xmlns:r="http://schemas.openxmlformats.org/officeDocument/2006/relationships" id="263" r:id="R929f180b738b4dcc"/>
+    <p:sldId xmlns:r="http://schemas.openxmlformats.org/officeDocument/2006/relationships" id="264" r:id="Ra91fd3ec26ef481e"/>
+    <p:sldId xmlns:r="http://schemas.openxmlformats.org/officeDocument/2006/relationships" id="265" r:id="Rabf8ea1321604fdc"/>
   </p:sldIdLst>
   <p:sldSz cx="12192000" cy="6858000"/>
   <p:notesSz cx="6858000" cy="9144000"/>
@@ -536,7 +536,12 @@
           </a:p>
           <a:p xmlns:a="http://schemas.openxmlformats.org/drawingml/2006/main">
             <a:r>
-              <a:t>Ручний прогін 2.3.0, 24.10.2026: TC-RL-02 і TC-RL-03 — Pass за повідомленням виконавця про відповідність усім умовам. Результат включає ON/OFF для обох пар COM–NO/COM–NC і зовнішнього LED. Фото стенда показує обладнання та LED при ON. Окремого UART-логу або відео прозвонювання не надано. Джерело: logs/manual-2.3.0-01/OPERATOR_REPORT.md. TC-LM-09 і TC-LM-10 на 2.3.0 залишаються Not Run. На 2.1.0 усі чотири ручні кейси — Not Run. Підсумок за кейсами 2.3.0: 30 Pass, 3 Fail, 2 Not Run, 1 N/A. Автоматизовані результати та NO-GO не змінені.</a:t>
+              <a:t>Ручний прогін 2.3.0, 24.10.2026: TC-RL-02 і TC-RL-03 — Pass за повідомленням виконавця про відповідність усім умовам. Результат включає ON/OFF для обох пар COM–NO/COM–NC і зовнішнього LED. Фото стенда показує обладнання та LED при ON. Окремого UART-логу або відео прозвонювання не надано. Джерело: logs/manual-2.3.0-01/OPERATOR_REPORT.md. TC-LM-09 на 2.3.0 — Pass для восьми кольорів; TC-LM-10 — Not Run. На 2.1.0 усі чотири ручні кейси — Not Run. Підсумок за кейсами 2.3.0: 31 Pass, 3 Fail, 1 Not Run, 1 N/A. Автоматизовані результати та NO-GO не змінені.</a:t>
+            </a:r>
+          </a:p>
+          <a:p xmlns:a="http://schemas.openxmlformats.org/drawingml/2006/main">
+            <a:r>
+              <a:t>Доповнення 24.10.2026: після інструкції пройти white, red, green, blue, yellow, purple, cyan та orange виконавець повідомив: «перевірив кольори, все ок. Зроби зміни». TC-LM-09 на поточній 2.3.0 — Pass для всіх восьми кольорів. Джерело: logs/manual-2.3.0-01/OPERATOR_REPORT.md, розділ TC-LM-09. Окремі фото або відео кольорів не надано. Залишився TC-LM-10 — яскравість у solid, blink, breathe та rainbow. На 2.1.0 ручні кейси залишаються Not Run.</a:t>
             </a:r>
           </a:p>
         </p:txBody>
@@ -846,7 +851,12 @@
           </a:p>
           <a:p xmlns:a="http://schemas.openxmlformats.org/drawingml/2006/main">
             <a:r>
-              <a:t>Ручний прогін 2.3.0, 24.10.2026: TC-RL-02 і TC-RL-03 — Pass за повідомленням виконавця про відповідність усім умовам. Результат включає ON/OFF для обох пар COM–NO/COM–NC і зовнішнього LED. Фото стенда показує обладнання та LED при ON. Окремого UART-логу або відео прозвонювання не надано. Джерело: logs/manual-2.3.0-01/OPERATOR_REPORT.md. TC-LM-09 і TC-LM-10 на 2.3.0 залишаються Not Run. На 2.1.0 усі чотири ручні кейси — Not Run. Підсумок за кейсами 2.3.0: 30 Pass, 3 Fail, 2 Not Run, 1 N/A. Автоматизовані результати та NO-GO не змінені.</a:t>
+              <a:t>Ручний прогін 2.3.0, 24.10.2026: TC-RL-02 і TC-RL-03 — Pass за повідомленням виконавця про відповідність усім умовам. Результат включає ON/OFF для обох пар COM–NO/COM–NC і зовнішнього LED. Фото стенда показує обладнання та LED при ON. Окремого UART-логу або відео прозвонювання не надано. Джерело: logs/manual-2.3.0-01/OPERATOR_REPORT.md. TC-LM-09 на 2.3.0 — Pass для восьми кольорів; TC-LM-10 — Not Run. На 2.1.0 усі чотири ручні кейси — Not Run. Підсумок за кейсами 2.3.0: 31 Pass, 3 Fail, 1 Not Run, 1 N/A. Автоматизовані результати та NO-GO не змінені.</a:t>
+            </a:r>
+          </a:p>
+          <a:p xmlns:a="http://schemas.openxmlformats.org/drawingml/2006/main">
+            <a:r>
+              <a:t>Доповнення 24.10.2026: після інструкції пройти white, red, green, blue, yellow, purple, cyan та orange виконавець повідомив: «перевірив кольори, все ок. Зроби зміни». TC-LM-09 на поточній 2.3.0 — Pass для всіх восьми кольорів. Джерело: logs/manual-2.3.0-01/OPERATOR_REPORT.md, розділ TC-LM-09. Окремі фото або відео кольорів не надано. Залишився TC-LM-10 — яскравість у solid, blink, breathe та rainbow. На 2.1.0 ручні кейси залишаються Not Run.</a:t>
             </a:r>
           </a:p>
         </p:txBody>
@@ -1001,7 +1011,12 @@
           </a:p>
           <a:p xmlns:a="http://schemas.openxmlformats.org/drawingml/2006/main">
             <a:r>
-              <a:t>Ручний прогін 2.3.0, 24.10.2026: TC-RL-02 і TC-RL-03 — Pass за повідомленням виконавця про відповідність усім умовам. Результат включає ON/OFF для обох пар COM–NO/COM–NC і зовнішнього LED. Фото стенда показує обладнання та LED при ON. Окремого UART-логу або відео прозвонювання не надано. Джерело: logs/manual-2.3.0-01/OPERATOR_REPORT.md. TC-LM-09 і TC-LM-10 на 2.3.0 залишаються Not Run. На 2.1.0 усі чотири ручні кейси — Not Run. Підсумок за кейсами 2.3.0: 30 Pass, 3 Fail, 2 Not Run, 1 N/A. Автоматизовані результати та NO-GO не змінені.</a:t>
+              <a:t>Ручний прогін 2.3.0, 24.10.2026: TC-RL-02 і TC-RL-03 — Pass за повідомленням виконавця про відповідність усім умовам. Результат включає ON/OFF для обох пар COM–NO/COM–NC і зовнішнього LED. Фото стенда показує обладнання та LED при ON. Окремого UART-логу або відео прозвонювання не надано. Джерело: logs/manual-2.3.0-01/OPERATOR_REPORT.md. TC-LM-09 на 2.3.0 — Pass для восьми кольорів; TC-LM-10 — Not Run. На 2.1.0 усі чотири ручні кейси — Not Run. Підсумок за кейсами 2.3.0: 31 Pass, 3 Fail, 1 Not Run, 1 N/A. Автоматизовані результати та NO-GO не змінені.</a:t>
+            </a:r>
+          </a:p>
+          <a:p xmlns:a="http://schemas.openxmlformats.org/drawingml/2006/main">
+            <a:r>
+              <a:t>Доповнення 24.10.2026: після інструкції пройти white, red, green, blue, yellow, purple, cyan та orange виконавець повідомив: «перевірив кольори, все ок. Зроби зміни». TC-LM-09 на поточній 2.3.0 — Pass для всіх восьми кольорів. Джерело: logs/manual-2.3.0-01/OPERATOR_REPORT.md, розділ TC-LM-09. Окремі фото або відео кольорів не надано. Залишився TC-LM-10 — яскравість у solid, blink, breathe та rainbow. На 2.1.0 ручні кейси залишаються Not Run.</a:t>
             </a:r>
           </a:p>
         </p:txBody>
@@ -3624,12 +3639,12 @@
   </p:cSld>
   <p:clrMap bg1="lt1" tx1="dk1" bg2="lt2" tx2="dk2" accent1="accent1" accent2="accent2" accent3="accent3" accent4="accent4" accent5="accent5" accent6="accent6" hlink="hlink" folHlink="folHlink"/>
   <p:sldLayoutIdLst>
-    <p:sldLayoutId xmlns:r="http://schemas.openxmlformats.org/officeDocument/2006/relationships" id="2147483649" r:id="Rc5f9c11d28784848"/>
-    <p:sldLayoutId xmlns:r="http://schemas.openxmlformats.org/officeDocument/2006/relationships" id="2147483650" r:id="R17b06670b6614e81"/>
-    <p:sldLayoutId xmlns:r="http://schemas.openxmlformats.org/officeDocument/2006/relationships" id="2147483651" r:id="R1881d436e7784b73"/>
-    <p:sldLayoutId xmlns:r="http://schemas.openxmlformats.org/officeDocument/2006/relationships" id="2147483652" r:id="R21f8e35de54c45ba"/>
-    <p:sldLayoutId xmlns:r="http://schemas.openxmlformats.org/officeDocument/2006/relationships" id="2147483653" r:id="Rc51e8588ff0e4692"/>
-    <p:sldLayoutId xmlns:r="http://schemas.openxmlformats.org/officeDocument/2006/relationships" id="2147483654" r:id="R4b9ccef4bf264e30"/>
+    <p:sldLayoutId xmlns:r="http://schemas.openxmlformats.org/officeDocument/2006/relationships" id="2147483649" r:id="R6295f3aa632e4b6e"/>
+    <p:sldLayoutId xmlns:r="http://schemas.openxmlformats.org/officeDocument/2006/relationships" id="2147483650" r:id="R6ced7e40b92448fb"/>
+    <p:sldLayoutId xmlns:r="http://schemas.openxmlformats.org/officeDocument/2006/relationships" id="2147483651" r:id="Rfca98e8b03a547fb"/>
+    <p:sldLayoutId xmlns:r="http://schemas.openxmlformats.org/officeDocument/2006/relationships" id="2147483652" r:id="Ra8e14d8a24564df9"/>
+    <p:sldLayoutId xmlns:r="http://schemas.openxmlformats.org/officeDocument/2006/relationships" id="2147483653" r:id="R655cecf0931b4dc8"/>
+    <p:sldLayoutId xmlns:r="http://schemas.openxmlformats.org/officeDocument/2006/relationships" id="2147483654" r:id="R6ad261a8431b4664"/>
   </p:sldLayoutIdLst>
   <p:txStyles>
     <p:titleStyle>
@@ -5907,7 +5922,7 @@
                 <a:ea typeface="Arial"/>
                 <a:cs typeface="Arial"/>
               </a:rPr>
-              <a:t>Реле й зовнішній LED: Pass на 2.3.0.</a:t>
+              <a:t>Реле, зовнішній LED і кольори RGB: Pass на 2.3.0.</a:t>
             </a:r>
           </a:p>
           <a:p xmlns:a="http://schemas.openxmlformats.org/drawingml/2006/main">
@@ -5931,7 +5946,7 @@
                 <a:ea typeface="Arial"/>
                 <a:cs typeface="Arial"/>
               </a:rPr>
-              <a:t>Кольори RGB та яскравість: Not Run.</a:t>
+              <a:t>Яскравість у чотирьох режимах: Not Run.</a:t>
             </a:r>
           </a:p>
         </p:txBody>
@@ -7038,7 +7053,7 @@
           <p:cNvPr id="8" name="">
             <a:extLst xmlns:a="http://schemas.openxmlformats.org/drawingml/2006/main">
               <a:ext uri="{FF2B5EF4-FFF2-40B4-BE49-F238E27FC236}">
-                <a16:creationId xmlns:a16="http://schemas.microsoft.com/office/drawing/2014/main" id="{7F3DC05D-8E73-4023-8E38-13BF7B897BFB}"/>
+                <a16:creationId xmlns:a16="http://schemas.microsoft.com/office/drawing/2014/main" id="{3C775D36-6C8C-47A7-82F2-D3267436F3E4}"/>
               </a:ext>
             </a:extLst>
           </p:cNvPr>
@@ -7048,7 +7063,7 @@
           <p:nvPr/>
         </p:nvPicPr>
         <p:blipFill>
-          <a:blip xmlns:r="http://schemas.openxmlformats.org/officeDocument/2006/relationships" xmlns:a="http://schemas.openxmlformats.org/drawingml/2006/main" r:embed="R68b108181edf44ca"/>
+          <a:blip xmlns:r="http://schemas.openxmlformats.org/officeDocument/2006/relationships" xmlns:a="http://schemas.openxmlformats.org/drawingml/2006/main" r:embed="R04a7ea5e76904f00"/>
           <a:stretch xmlns:a="http://schemas.openxmlformats.org/drawingml/2006/main"/>
         </p:blipFill>
         <p:spPr>
@@ -7593,7 +7608,7 @@
           <p:cNvPr id="4" name="">
             <a:extLst xmlns:a="http://schemas.openxmlformats.org/drawingml/2006/main">
               <a:ext uri="{FF2B5EF4-FFF2-40B4-BE49-F238E27FC236}">
-                <a16:creationId xmlns:a16="http://schemas.microsoft.com/office/drawing/2014/main" id="{F139A91F-8E28-41E6-ABA1-0295AFFC8787}"/>
+                <a16:creationId xmlns:a16="http://schemas.microsoft.com/office/drawing/2014/main" id="{F072F97F-69E2-4737-A060-ECD51F31A832}"/>
               </a:ext>
             </a:extLst>
           </p:cNvPr>
@@ -10292,7 +10307,7 @@
           <p:cNvPr id="2" name="">
             <a:extLst xmlns:a="http://schemas.openxmlformats.org/drawingml/2006/main">
               <a:ext uri="{FF2B5EF4-FFF2-40B4-BE49-F238E27FC236}">
-                <a16:creationId xmlns:a16="http://schemas.microsoft.com/office/drawing/2014/main" id="{ADE7CB45-3180-4B77-A2FF-3947EAA4ABD4}"/>
+                <a16:creationId xmlns:a16="http://schemas.microsoft.com/office/drawing/2014/main" id="{7432A7A9-0354-4292-9AD5-849B47ADAC9E}"/>
               </a:ext>
             </a:extLst>
           </p:cNvPr>
@@ -10302,7 +10317,7 @@
           <p:nvPr/>
         </p:nvPicPr>
         <p:blipFill>
-          <a:blip xmlns:r="http://schemas.openxmlformats.org/officeDocument/2006/relationships" xmlns:a="http://schemas.openxmlformats.org/drawingml/2006/main" r:embed="R470e512c81d84189"/>
+          <a:blip xmlns:r="http://schemas.openxmlformats.org/officeDocument/2006/relationships" xmlns:a="http://schemas.openxmlformats.org/drawingml/2006/main" r:embed="Rf179e6ed52c04930"/>
           <a:stretch xmlns:a="http://schemas.openxmlformats.org/drawingml/2006/main"/>
         </p:blipFill>
         <p:spPr>
@@ -11804,7 +11819,7 @@
                 <a:ea typeface="Arial"/>
                 <a:cs typeface="Arial"/>
               </a:rPr>
-              <a:t>2.3.0: реле та зовнішній LED — Pass.</a:t>
+              <a:t>2.3.0: реле, LED та кольори RGB — Pass.</a:t>
             </a:r>
           </a:p>
           <a:p xmlns:a="http://schemas.openxmlformats.org/drawingml/2006/main">
@@ -12365,7 +12380,7 @@
           <p:cNvPr id="4" name="">
             <a:extLst xmlns:a="http://schemas.openxmlformats.org/drawingml/2006/main">
               <a:ext uri="{FF2B5EF4-FFF2-40B4-BE49-F238E27FC236}">
-                <a16:creationId xmlns:a16="http://schemas.microsoft.com/office/drawing/2014/main" id="{F2E2F041-8D30-4C5A-874E-F0AC3F21F978}"/>
+                <a16:creationId xmlns:a16="http://schemas.microsoft.com/office/drawing/2014/main" id="{E4E30461-FA01-4AF7-8CD6-F62B537501A0}"/>
               </a:ext>
             </a:extLst>
           </p:cNvPr>
@@ -13593,7 +13608,7 @@
           <p:cNvPr id="4" name="">
             <a:extLst xmlns:a="http://schemas.openxmlformats.org/drawingml/2006/main">
               <a:ext uri="{FF2B5EF4-FFF2-40B4-BE49-F238E27FC236}">
-                <a16:creationId xmlns:a16="http://schemas.microsoft.com/office/drawing/2014/main" id="{F199FFCD-5E78-45A4-A50E-ED7155A0A86D}"/>
+                <a16:creationId xmlns:a16="http://schemas.microsoft.com/office/drawing/2014/main" id="{475D0AC4-B855-4E2C-93D9-740E0FB45DE9}"/>
               </a:ext>
             </a:extLst>
           </p:cNvPr>
@@ -14610,6 +14625,7 @@
               </a:defRPr>
             </a:defPPr>
             <a:lvl1pPr>
+              <a:buNone/>
               <a:defRPr sz="1950" b="1">
                 <a:solidFill>
                   <a:srgbClr val="087F8C"/>
@@ -14620,6 +14636,7 @@
               </a:defRPr>
             </a:lvl1pPr>
             <a:lvl2pPr>
+              <a:buNone/>
               <a:defRPr sz="1950" b="1">
                 <a:solidFill>
                   <a:srgbClr val="087F8C"/>
@@ -14630,6 +14647,7 @@
               </a:defRPr>
             </a:lvl2pPr>
             <a:lvl3pPr>
+              <a:buNone/>
               <a:defRPr sz="1950" b="1">
                 <a:solidFill>
                   <a:srgbClr val="087F8C"/>
@@ -14640,6 +14658,7 @@
               </a:defRPr>
             </a:lvl3pPr>
             <a:lvl4pPr>
+              <a:buNone/>
               <a:defRPr sz="1950" b="1">
                 <a:solidFill>
                   <a:srgbClr val="087F8C"/>
@@ -14650,6 +14669,7 @@
               </a:defRPr>
             </a:lvl4pPr>
             <a:lvl5pPr>
+              <a:buNone/>
               <a:defRPr sz="1950" b="1">
                 <a:solidFill>
                   <a:srgbClr val="087F8C"/>
@@ -14660,6 +14680,7 @@
               </a:defRPr>
             </a:lvl5pPr>
             <a:lvl6pPr>
+              <a:buNone/>
               <a:defRPr sz="1950" b="1">
                 <a:solidFill>
                   <a:srgbClr val="087F8C"/>
@@ -14670,6 +14691,7 @@
               </a:defRPr>
             </a:lvl6pPr>
             <a:lvl7pPr>
+              <a:buNone/>
               <a:defRPr sz="1950" b="1">
                 <a:solidFill>
                   <a:srgbClr val="087F8C"/>
@@ -14680,6 +14702,7 @@
               </a:defRPr>
             </a:lvl7pPr>
             <a:lvl8pPr>
+              <a:buNone/>
               <a:defRPr sz="1950" b="1">
                 <a:solidFill>
                   <a:srgbClr val="087F8C"/>
@@ -14690,6 +14713,7 @@
               </a:defRPr>
             </a:lvl8pPr>
             <a:lvl9pPr>
+              <a:buNone/>
               <a:defRPr sz="1950" b="1">
                 <a:solidFill>
                   <a:srgbClr val="087F8C"/>
@@ -14702,6 +14726,7 @@
           </a:lstStyle>
           <a:p xmlns:a="http://schemas.openxmlformats.org/drawingml/2006/main">
             <a:pPr>
+              <a:buNone/>
               <a:defRPr sz="1950" b="1">
                 <a:solidFill>
                   <a:srgbClr val="087F8C"/>
@@ -14720,7 +14745,7 @@
                 <a:ea typeface="Arial"/>
                 <a:cs typeface="Arial"/>
               </a:rPr>
-              <a:t>Ручні кейси 2.3.0: 2 Pass, 2 Not Run (RGB)</a:t>
+              <a:t>Ручні кейси 2.3.0: 3 Pass, 1 Not Run (яскравість)</a:t>
             </a:r>
           </a:p>
         </p:txBody>
@@ -15091,7 +15116,7 @@
           <p:cNvPr id="4" name="">
             <a:extLst xmlns:a="http://schemas.openxmlformats.org/drawingml/2006/main">
               <a:ext uri="{FF2B5EF4-FFF2-40B4-BE49-F238E27FC236}">
-                <a16:creationId xmlns:a16="http://schemas.microsoft.com/office/drawing/2014/main" id="{2600C033-843B-47C4-A558-CBA89D16D3D8}"/>
+                <a16:creationId xmlns:a16="http://schemas.microsoft.com/office/drawing/2014/main" id="{D992BAB9-397B-41AE-ABFC-71EA359D4063}"/>
               </a:ext>
             </a:extLst>
           </p:cNvPr>
@@ -16736,7 +16761,7 @@
           <p:cNvPr id="4" name="">
             <a:extLst xmlns:a="http://schemas.openxmlformats.org/drawingml/2006/main">
               <a:ext uri="{FF2B5EF4-FFF2-40B4-BE49-F238E27FC236}">
-                <a16:creationId xmlns:a16="http://schemas.microsoft.com/office/drawing/2014/main" id="{F32F41C4-8505-4E7F-AAD5-5FCEE8B4C8A8}"/>
+                <a16:creationId xmlns:a16="http://schemas.microsoft.com/office/drawing/2014/main" id="{2FBC3BDC-EC50-47C2-AAE5-EE2EAFD15A09}"/>
               </a:ext>
             </a:extLst>
           </p:cNvPr>
@@ -16746,7 +16771,7 @@
           <p:nvPr/>
         </p:nvPicPr>
         <p:blipFill>
-          <a:blip xmlns:r="http://schemas.openxmlformats.org/officeDocument/2006/relationships" xmlns:a="http://schemas.openxmlformats.org/drawingml/2006/main" r:embed="R308b5bea5e664b43"/>
+          <a:blip xmlns:r="http://schemas.openxmlformats.org/officeDocument/2006/relationships" xmlns:a="http://schemas.openxmlformats.org/drawingml/2006/main" r:embed="Rae0e6a056ab44e0f"/>
           <a:stretch xmlns:a="http://schemas.openxmlformats.org/drawingml/2006/main"/>
         </p:blipFill>
         <p:spPr>
